--- a/docs/plots/carbo/jx_carbo_linsubhr_dosedisc_death.pptx
+++ b/docs/plots/carbo/jx_carbo_linsubhr_dosedisc_death.pptx
@@ -3132,500 +3132,512 @@
           <p:spPr>
             <a:xfrm>
               <a:off x="1172049" y="1896563"/>
-              <a:ext cx="7090630" cy="3626063"/>
+              <a:ext cx="7090630" cy="3599883"/>
             </a:xfrm>
             <a:custGeom>
               <a:avLst/>
               <a:pathLst>
-                <a:path w="7090630" h="3626063">
+                <a:path w="7090630" h="3599883">
                   <a:moveTo>
-                    <a:pt x="0" y="3197719"/>
+                    <a:pt x="0" y="2924358"/>
                   </a:moveTo>
                   <a:lnTo>
-                    <a:pt x="71622" y="3190744"/>
-                  </a:lnTo>
-                  <a:lnTo>
-                    <a:pt x="143245" y="3183662"/>
-                  </a:lnTo>
-                  <a:lnTo>
-                    <a:pt x="214867" y="3176471"/>
-                  </a:lnTo>
-                  <a:lnTo>
-                    <a:pt x="286490" y="3169170"/>
-                  </a:lnTo>
-                  <a:lnTo>
-                    <a:pt x="358112" y="3161757"/>
-                  </a:lnTo>
-                  <a:lnTo>
-                    <a:pt x="429735" y="3154231"/>
-                  </a:lnTo>
-                  <a:lnTo>
-                    <a:pt x="501357" y="3146589"/>
-                  </a:lnTo>
-                  <a:lnTo>
-                    <a:pt x="572980" y="3138830"/>
-                  </a:lnTo>
-                  <a:lnTo>
-                    <a:pt x="644602" y="3130952"/>
-                  </a:lnTo>
-                  <a:lnTo>
-                    <a:pt x="716225" y="3122953"/>
-                  </a:lnTo>
-                  <a:lnTo>
-                    <a:pt x="787847" y="3114832"/>
-                  </a:lnTo>
-                  <a:lnTo>
-                    <a:pt x="859470" y="3106586"/>
-                  </a:lnTo>
-                  <a:lnTo>
-                    <a:pt x="931092" y="3098214"/>
-                  </a:lnTo>
-                  <a:lnTo>
-                    <a:pt x="1002715" y="3089713"/>
-                  </a:lnTo>
-                  <a:lnTo>
-                    <a:pt x="1074337" y="3081082"/>
-                  </a:lnTo>
-                  <a:lnTo>
-                    <a:pt x="1145960" y="3072318"/>
-                  </a:lnTo>
-                  <a:lnTo>
-                    <a:pt x="1217582" y="3063421"/>
-                  </a:lnTo>
-                  <a:lnTo>
-                    <a:pt x="1289205" y="3054386"/>
-                  </a:lnTo>
-                  <a:lnTo>
-                    <a:pt x="1360827" y="3045214"/>
-                  </a:lnTo>
-                  <a:lnTo>
-                    <a:pt x="1432450" y="3035900"/>
-                  </a:lnTo>
-                  <a:lnTo>
-                    <a:pt x="1504073" y="3026444"/>
-                  </a:lnTo>
-                  <a:lnTo>
-                    <a:pt x="1575695" y="3016843"/>
-                  </a:lnTo>
-                  <a:lnTo>
-                    <a:pt x="1647318" y="3007095"/>
-                  </a:lnTo>
-                  <a:lnTo>
-                    <a:pt x="1718940" y="2997197"/>
-                  </a:lnTo>
-                  <a:lnTo>
-                    <a:pt x="1790563" y="2987147"/>
-                  </a:lnTo>
-                  <a:lnTo>
-                    <a:pt x="1862185" y="2976943"/>
-                  </a:lnTo>
-                  <a:lnTo>
-                    <a:pt x="1933808" y="2966583"/>
-                  </a:lnTo>
-                  <a:lnTo>
-                    <a:pt x="2005430" y="2956064"/>
-                  </a:lnTo>
-                  <a:lnTo>
-                    <a:pt x="2077053" y="2945384"/>
-                  </a:lnTo>
-                  <a:lnTo>
-                    <a:pt x="2148675" y="2934540"/>
-                  </a:lnTo>
-                  <a:lnTo>
-                    <a:pt x="2220298" y="2923530"/>
-                  </a:lnTo>
-                  <a:lnTo>
-                    <a:pt x="2291920" y="2912351"/>
-                  </a:lnTo>
-                  <a:lnTo>
-                    <a:pt x="2363543" y="2901000"/>
-                  </a:lnTo>
-                  <a:lnTo>
-                    <a:pt x="2435165" y="2889476"/>
-                  </a:lnTo>
-                  <a:lnTo>
-                    <a:pt x="2506788" y="2877775"/>
-                  </a:lnTo>
-                  <a:lnTo>
-                    <a:pt x="2578410" y="2865894"/>
-                  </a:lnTo>
-                  <a:lnTo>
-                    <a:pt x="2650033" y="2853831"/>
-                  </a:lnTo>
-                  <a:lnTo>
-                    <a:pt x="2721655" y="2841584"/>
-                  </a:lnTo>
-                  <a:lnTo>
-                    <a:pt x="2793278" y="2829148"/>
-                  </a:lnTo>
-                  <a:lnTo>
-                    <a:pt x="2864901" y="2816522"/>
-                  </a:lnTo>
-                  <a:lnTo>
-                    <a:pt x="2936523" y="2803702"/>
-                  </a:lnTo>
-                  <a:lnTo>
-                    <a:pt x="3008146" y="2790686"/>
-                  </a:lnTo>
-                  <a:lnTo>
-                    <a:pt x="3079768" y="2752969"/>
-                  </a:lnTo>
-                  <a:lnTo>
-                    <a:pt x="3151391" y="2676180"/>
-                  </a:lnTo>
-                  <a:lnTo>
-                    <a:pt x="3223013" y="2592837"/>
-                  </a:lnTo>
-                  <a:lnTo>
-                    <a:pt x="3294636" y="2502381"/>
-                  </a:lnTo>
-                  <a:lnTo>
-                    <a:pt x="3366258" y="2404205"/>
-                  </a:lnTo>
-                  <a:lnTo>
-                    <a:pt x="3437881" y="2297648"/>
-                  </a:lnTo>
-                  <a:lnTo>
-                    <a:pt x="3509503" y="2181997"/>
-                  </a:lnTo>
-                  <a:lnTo>
-                    <a:pt x="3581126" y="2056476"/>
-                  </a:lnTo>
-                  <a:lnTo>
-                    <a:pt x="3652748" y="1920240"/>
-                  </a:lnTo>
-                  <a:lnTo>
-                    <a:pt x="3724371" y="1772377"/>
-                  </a:lnTo>
-                  <a:lnTo>
-                    <a:pt x="3795993" y="1611893"/>
-                  </a:lnTo>
-                  <a:lnTo>
-                    <a:pt x="3867616" y="1437712"/>
-                  </a:lnTo>
-                  <a:lnTo>
-                    <a:pt x="3939238" y="1248664"/>
-                  </a:lnTo>
-                  <a:lnTo>
-                    <a:pt x="4010861" y="1043480"/>
-                  </a:lnTo>
-                  <a:lnTo>
-                    <a:pt x="4082483" y="820784"/>
-                  </a:lnTo>
-                  <a:lnTo>
-                    <a:pt x="4154106" y="579081"/>
-                  </a:lnTo>
-                  <a:lnTo>
-                    <a:pt x="4225729" y="316747"/>
-                  </a:lnTo>
-                  <a:lnTo>
-                    <a:pt x="4297351" y="32023"/>
-                  </a:lnTo>
-                  <a:lnTo>
-                    <a:pt x="4304773" y="0"/>
+                    <a:pt x="71622" y="2921317"/>
+                  </a:lnTo>
+                  <a:lnTo>
+                    <a:pt x="143245" y="2918264"/>
+                  </a:lnTo>
+                  <a:lnTo>
+                    <a:pt x="214867" y="2915198"/>
+                  </a:lnTo>
+                  <a:lnTo>
+                    <a:pt x="286490" y="2912119"/>
+                  </a:lnTo>
+                  <a:lnTo>
+                    <a:pt x="358112" y="2909027"/>
+                  </a:lnTo>
+                  <a:lnTo>
+                    <a:pt x="429735" y="2905923"/>
+                  </a:lnTo>
+                  <a:lnTo>
+                    <a:pt x="501357" y="2902805"/>
+                  </a:lnTo>
+                  <a:lnTo>
+                    <a:pt x="572980" y="2899674"/>
+                  </a:lnTo>
+                  <a:lnTo>
+                    <a:pt x="644602" y="2896531"/>
+                  </a:lnTo>
+                  <a:lnTo>
+                    <a:pt x="716225" y="2893374"/>
+                  </a:lnTo>
+                  <a:lnTo>
+                    <a:pt x="787847" y="2890204"/>
+                  </a:lnTo>
+                  <a:lnTo>
+                    <a:pt x="859470" y="2887021"/>
+                  </a:lnTo>
+                  <a:lnTo>
+                    <a:pt x="931092" y="2883824"/>
+                  </a:lnTo>
+                  <a:lnTo>
+                    <a:pt x="1002715" y="2880614"/>
+                  </a:lnTo>
+                  <a:lnTo>
+                    <a:pt x="1074337" y="2877391"/>
+                  </a:lnTo>
+                  <a:lnTo>
+                    <a:pt x="1145960" y="2874154"/>
+                  </a:lnTo>
+                  <a:lnTo>
+                    <a:pt x="1217582" y="2870904"/>
+                  </a:lnTo>
+                  <a:lnTo>
+                    <a:pt x="1289205" y="2867640"/>
+                  </a:lnTo>
+                  <a:lnTo>
+                    <a:pt x="1360827" y="2864363"/>
+                  </a:lnTo>
+                  <a:lnTo>
+                    <a:pt x="1432450" y="2861072"/>
+                  </a:lnTo>
+                  <a:lnTo>
+                    <a:pt x="1504073" y="2857767"/>
+                  </a:lnTo>
+                  <a:lnTo>
+                    <a:pt x="1575695" y="2854448"/>
+                  </a:lnTo>
+                  <a:lnTo>
+                    <a:pt x="1647318" y="2851116"/>
+                  </a:lnTo>
+                  <a:lnTo>
+                    <a:pt x="1718940" y="2847769"/>
+                  </a:lnTo>
+                  <a:lnTo>
+                    <a:pt x="1790563" y="2844409"/>
+                  </a:lnTo>
+                  <a:lnTo>
+                    <a:pt x="1862185" y="2841034"/>
+                  </a:lnTo>
+                  <a:lnTo>
+                    <a:pt x="1933808" y="2837646"/>
+                  </a:lnTo>
+                  <a:lnTo>
+                    <a:pt x="2005430" y="2834243"/>
+                  </a:lnTo>
+                  <a:lnTo>
+                    <a:pt x="2077053" y="2830826"/>
+                  </a:lnTo>
+                  <a:lnTo>
+                    <a:pt x="2148675" y="2827395"/>
+                  </a:lnTo>
+                  <a:lnTo>
+                    <a:pt x="2220298" y="2823950"/>
+                  </a:lnTo>
+                  <a:lnTo>
+                    <a:pt x="2291920" y="2820490"/>
+                  </a:lnTo>
+                  <a:lnTo>
+                    <a:pt x="2363543" y="2817016"/>
+                  </a:lnTo>
+                  <a:lnTo>
+                    <a:pt x="2435165" y="2813527"/>
+                  </a:lnTo>
+                  <a:lnTo>
+                    <a:pt x="2506788" y="2810023"/>
+                  </a:lnTo>
+                  <a:lnTo>
+                    <a:pt x="2578410" y="2806505"/>
+                  </a:lnTo>
+                  <a:lnTo>
+                    <a:pt x="2650033" y="2802973"/>
+                  </a:lnTo>
+                  <a:lnTo>
+                    <a:pt x="2721655" y="2799425"/>
+                  </a:lnTo>
+                  <a:lnTo>
+                    <a:pt x="2793278" y="2795863"/>
+                  </a:lnTo>
+                  <a:lnTo>
+                    <a:pt x="2864901" y="2792286"/>
+                  </a:lnTo>
+                  <a:lnTo>
+                    <a:pt x="2936523" y="2788694"/>
+                  </a:lnTo>
+                  <a:lnTo>
+                    <a:pt x="3008146" y="2785087"/>
+                  </a:lnTo>
+                  <a:lnTo>
+                    <a:pt x="3079768" y="2758946"/>
+                  </a:lnTo>
+                  <a:lnTo>
+                    <a:pt x="3151391" y="2698158"/>
+                  </a:lnTo>
+                  <a:lnTo>
+                    <a:pt x="3223013" y="2633235"/>
+                  </a:lnTo>
+                  <a:lnTo>
+                    <a:pt x="3294636" y="2563897"/>
+                  </a:lnTo>
+                  <a:lnTo>
+                    <a:pt x="3366258" y="2489842"/>
+                  </a:lnTo>
+                  <a:lnTo>
+                    <a:pt x="3437881" y="2410751"/>
+                  </a:lnTo>
+                  <a:lnTo>
+                    <a:pt x="3509503" y="2326279"/>
+                  </a:lnTo>
+                  <a:lnTo>
+                    <a:pt x="3581126" y="2236062"/>
+                  </a:lnTo>
+                  <a:lnTo>
+                    <a:pt x="3652748" y="2139709"/>
+                  </a:lnTo>
+                  <a:lnTo>
+                    <a:pt x="3724371" y="2036801"/>
+                  </a:lnTo>
+                  <a:lnTo>
+                    <a:pt x="3795993" y="1926895"/>
+                  </a:lnTo>
+                  <a:lnTo>
+                    <a:pt x="3867616" y="1809512"/>
+                  </a:lnTo>
+                  <a:lnTo>
+                    <a:pt x="3939238" y="1684145"/>
+                  </a:lnTo>
+                  <a:lnTo>
+                    <a:pt x="4010861" y="1550252"/>
+                  </a:lnTo>
+                  <a:lnTo>
+                    <a:pt x="4082483" y="1407250"/>
+                  </a:lnTo>
+                  <a:lnTo>
+                    <a:pt x="4154106" y="1254523"/>
+                  </a:lnTo>
+                  <a:lnTo>
+                    <a:pt x="4225729" y="1091407"/>
+                  </a:lnTo>
+                  <a:lnTo>
+                    <a:pt x="4297351" y="917196"/>
+                  </a:lnTo>
+                  <a:lnTo>
+                    <a:pt x="4368974" y="731135"/>
+                  </a:lnTo>
+                  <a:lnTo>
+                    <a:pt x="4440596" y="532419"/>
+                  </a:lnTo>
+                  <a:lnTo>
+                    <a:pt x="4512219" y="320187"/>
+                  </a:lnTo>
+                  <a:lnTo>
+                    <a:pt x="4583841" y="93519"/>
+                  </a:lnTo>
+                  <a:lnTo>
+                    <a:pt x="4611509" y="0"/>
                   </a:lnTo>
                   <a:lnTo>
                     <a:pt x="7090630" y="0"/>
                   </a:lnTo>
                   <a:lnTo>
-                    <a:pt x="7090630" y="1600743"/>
-                  </a:lnTo>
-                  <a:lnTo>
-                    <a:pt x="7019007" y="1631729"/>
-                  </a:lnTo>
-                  <a:lnTo>
-                    <a:pt x="6947385" y="1662246"/>
-                  </a:lnTo>
-                  <a:lnTo>
-                    <a:pt x="6875762" y="1692303"/>
-                  </a:lnTo>
-                  <a:lnTo>
-                    <a:pt x="6804139" y="1721906"/>
-                  </a:lnTo>
-                  <a:lnTo>
-                    <a:pt x="6732517" y="1751062"/>
-                  </a:lnTo>
-                  <a:lnTo>
-                    <a:pt x="6660894" y="1779777"/>
-                  </a:lnTo>
-                  <a:lnTo>
-                    <a:pt x="6589272" y="1808059"/>
-                  </a:lnTo>
-                  <a:lnTo>
-                    <a:pt x="6517649" y="1835914"/>
-                  </a:lnTo>
-                  <a:lnTo>
-                    <a:pt x="6446027" y="1863348"/>
-                  </a:lnTo>
-                  <a:lnTo>
-                    <a:pt x="6374404" y="1890368"/>
-                  </a:lnTo>
-                  <a:lnTo>
-                    <a:pt x="6302782" y="1916980"/>
-                  </a:lnTo>
-                  <a:lnTo>
-                    <a:pt x="6231159" y="1943190"/>
-                  </a:lnTo>
-                  <a:lnTo>
-                    <a:pt x="6159537" y="1969005"/>
-                  </a:lnTo>
-                  <a:lnTo>
-                    <a:pt x="6087914" y="1994429"/>
-                  </a:lnTo>
-                  <a:lnTo>
-                    <a:pt x="6016292" y="2019470"/>
-                  </a:lnTo>
-                  <a:lnTo>
-                    <a:pt x="5944669" y="2044132"/>
-                  </a:lnTo>
-                  <a:lnTo>
-                    <a:pt x="5873047" y="2068422"/>
-                  </a:lnTo>
-                  <a:lnTo>
-                    <a:pt x="5801424" y="2092345"/>
-                  </a:lnTo>
-                  <a:lnTo>
-                    <a:pt x="5729802" y="2115907"/>
-                  </a:lnTo>
-                  <a:lnTo>
-                    <a:pt x="5658179" y="2139113"/>
-                  </a:lnTo>
-                  <a:lnTo>
-                    <a:pt x="5586557" y="2161969"/>
-                  </a:lnTo>
-                  <a:lnTo>
-                    <a:pt x="5514934" y="2184479"/>
-                  </a:lnTo>
-                  <a:lnTo>
-                    <a:pt x="5443311" y="2206650"/>
-                  </a:lnTo>
-                  <a:lnTo>
-                    <a:pt x="5371689" y="2228485"/>
-                  </a:lnTo>
-                  <a:lnTo>
-                    <a:pt x="5300066" y="2249991"/>
-                  </a:lnTo>
-                  <a:lnTo>
-                    <a:pt x="5228444" y="2271173"/>
-                  </a:lnTo>
-                  <a:lnTo>
-                    <a:pt x="5156821" y="2292034"/>
-                  </a:lnTo>
-                  <a:lnTo>
-                    <a:pt x="5085199" y="2312581"/>
-                  </a:lnTo>
-                  <a:lnTo>
-                    <a:pt x="5013576" y="2332817"/>
-                  </a:lnTo>
-                  <a:lnTo>
-                    <a:pt x="4941954" y="2352747"/>
-                  </a:lnTo>
-                  <a:lnTo>
-                    <a:pt x="4870331" y="2372377"/>
-                  </a:lnTo>
-                  <a:lnTo>
-                    <a:pt x="4798709" y="2391710"/>
-                  </a:lnTo>
-                  <a:lnTo>
-                    <a:pt x="4727086" y="2410751"/>
-                  </a:lnTo>
-                  <a:lnTo>
-                    <a:pt x="4655464" y="2429505"/>
-                  </a:lnTo>
-                  <a:lnTo>
-                    <a:pt x="4583841" y="2447975"/>
-                  </a:lnTo>
-                  <a:lnTo>
-                    <a:pt x="4512219" y="2466167"/>
-                  </a:lnTo>
-                  <a:lnTo>
-                    <a:pt x="4440596" y="2484084"/>
-                  </a:lnTo>
-                  <a:lnTo>
-                    <a:pt x="4368974" y="2501730"/>
-                  </a:lnTo>
-                  <a:lnTo>
-                    <a:pt x="4297351" y="2519110"/>
-                  </a:lnTo>
-                  <a:lnTo>
-                    <a:pt x="4225729" y="2536227"/>
-                  </a:lnTo>
-                  <a:lnTo>
-                    <a:pt x="4154106" y="2553086"/>
-                  </a:lnTo>
-                  <a:lnTo>
-                    <a:pt x="4082483" y="2569690"/>
-                  </a:lnTo>
-                  <a:lnTo>
-                    <a:pt x="4010861" y="2586044"/>
-                  </a:lnTo>
-                  <a:lnTo>
-                    <a:pt x="3939238" y="2602150"/>
-                  </a:lnTo>
-                  <a:lnTo>
-                    <a:pt x="3867616" y="2618014"/>
-                  </a:lnTo>
-                  <a:lnTo>
-                    <a:pt x="3795993" y="2633638"/>
-                  </a:lnTo>
-                  <a:lnTo>
-                    <a:pt x="3724371" y="2649026"/>
-                  </a:lnTo>
-                  <a:lnTo>
-                    <a:pt x="3652748" y="2664181"/>
-                  </a:lnTo>
-                  <a:lnTo>
-                    <a:pt x="3581126" y="2679108"/>
-                  </a:lnTo>
-                  <a:lnTo>
-                    <a:pt x="3509503" y="2693809"/>
-                  </a:lnTo>
-                  <a:lnTo>
-                    <a:pt x="3437881" y="2708288"/>
-                  </a:lnTo>
-                  <a:lnTo>
-                    <a:pt x="3366258" y="2722549"/>
-                  </a:lnTo>
-                  <a:lnTo>
-                    <a:pt x="3294636" y="2736594"/>
-                  </a:lnTo>
-                  <a:lnTo>
-                    <a:pt x="3223013" y="2750427"/>
-                  </a:lnTo>
-                  <a:lnTo>
-                    <a:pt x="3151391" y="2764051"/>
-                  </a:lnTo>
-                  <a:lnTo>
-                    <a:pt x="3079768" y="2777470"/>
-                  </a:lnTo>
-                  <a:lnTo>
-                    <a:pt x="3008146" y="2823719"/>
-                  </a:lnTo>
-                  <a:lnTo>
-                    <a:pt x="2936523" y="2888905"/>
-                  </a:lnTo>
-                  <a:lnTo>
-                    <a:pt x="2864901" y="2948965"/>
-                  </a:lnTo>
-                  <a:lnTo>
-                    <a:pt x="2793278" y="3004302"/>
-                  </a:lnTo>
-                  <a:lnTo>
-                    <a:pt x="2721655" y="3055287"/>
-                  </a:lnTo>
-                  <a:lnTo>
-                    <a:pt x="2650033" y="3102263"/>
-                  </a:lnTo>
-                  <a:lnTo>
-                    <a:pt x="2578410" y="3145545"/>
-                  </a:lnTo>
-                  <a:lnTo>
-                    <a:pt x="2506788" y="3185423"/>
-                  </a:lnTo>
-                  <a:lnTo>
-                    <a:pt x="2435165" y="3222165"/>
-                  </a:lnTo>
-                  <a:lnTo>
-                    <a:pt x="2363543" y="3256017"/>
-                  </a:lnTo>
-                  <a:lnTo>
-                    <a:pt x="2291920" y="3287208"/>
-                  </a:lnTo>
-                  <a:lnTo>
-                    <a:pt x="2220298" y="3315946"/>
-                  </a:lnTo>
-                  <a:lnTo>
-                    <a:pt x="2148675" y="3342423"/>
-                  </a:lnTo>
-                  <a:lnTo>
-                    <a:pt x="2077053" y="3366819"/>
-                  </a:lnTo>
-                  <a:lnTo>
-                    <a:pt x="2005430" y="3389296"/>
-                  </a:lnTo>
-                  <a:lnTo>
-                    <a:pt x="1933808" y="3410006"/>
-                  </a:lnTo>
-                  <a:lnTo>
-                    <a:pt x="1862185" y="3429086"/>
-                  </a:lnTo>
-                  <a:lnTo>
-                    <a:pt x="1790563" y="3446667"/>
-                  </a:lnTo>
-                  <a:lnTo>
-                    <a:pt x="1718940" y="3462865"/>
-                  </a:lnTo>
-                  <a:lnTo>
-                    <a:pt x="1647318" y="3477789"/>
-                  </a:lnTo>
-                  <a:lnTo>
-                    <a:pt x="1575695" y="3491539"/>
-                  </a:lnTo>
-                  <a:lnTo>
-                    <a:pt x="1504073" y="3504209"/>
-                  </a:lnTo>
-                  <a:lnTo>
-                    <a:pt x="1432450" y="3515881"/>
-                  </a:lnTo>
-                  <a:lnTo>
-                    <a:pt x="1360827" y="3526636"/>
-                  </a:lnTo>
-                  <a:lnTo>
-                    <a:pt x="1289205" y="3536545"/>
-                  </a:lnTo>
-                  <a:lnTo>
-                    <a:pt x="1217582" y="3545675"/>
-                  </a:lnTo>
-                  <a:lnTo>
-                    <a:pt x="1145960" y="3554087"/>
-                  </a:lnTo>
-                  <a:lnTo>
-                    <a:pt x="1074337" y="3561838"/>
-                  </a:lnTo>
-                  <a:lnTo>
-                    <a:pt x="1002715" y="3568979"/>
-                  </a:lnTo>
-                  <a:lnTo>
-                    <a:pt x="931092" y="3575558"/>
-                  </a:lnTo>
-                  <a:lnTo>
-                    <a:pt x="859470" y="3581620"/>
-                  </a:lnTo>
-                  <a:lnTo>
-                    <a:pt x="787847" y="3587205"/>
-                  </a:lnTo>
-                  <a:lnTo>
-                    <a:pt x="716225" y="3592351"/>
-                  </a:lnTo>
-                  <a:lnTo>
-                    <a:pt x="644602" y="3597092"/>
-                  </a:lnTo>
-                  <a:lnTo>
-                    <a:pt x="572980" y="3601461"/>
-                  </a:lnTo>
-                  <a:lnTo>
-                    <a:pt x="501357" y="3605486"/>
-                  </a:lnTo>
-                  <a:lnTo>
-                    <a:pt x="429735" y="3609194"/>
-                  </a:lnTo>
-                  <a:lnTo>
-                    <a:pt x="358112" y="3612611"/>
-                  </a:lnTo>
-                  <a:lnTo>
-                    <a:pt x="286490" y="3615759"/>
-                  </a:lnTo>
-                  <a:lnTo>
-                    <a:pt x="214867" y="3618660"/>
-                  </a:lnTo>
-                  <a:lnTo>
-                    <a:pt x="143245" y="3621332"/>
-                  </a:lnTo>
-                  <a:lnTo>
-                    <a:pt x="71622" y="3623795"/>
-                  </a:lnTo>
-                  <a:lnTo>
-                    <a:pt x="0" y="3626063"/>
+                    <a:pt x="7090630" y="2552535"/>
+                  </a:lnTo>
+                  <a:lnTo>
+                    <a:pt x="7019007" y="2557109"/>
+                  </a:lnTo>
+                  <a:lnTo>
+                    <a:pt x="6947385" y="2561664"/>
+                  </a:lnTo>
+                  <a:lnTo>
+                    <a:pt x="6875762" y="2566200"/>
+                  </a:lnTo>
+                  <a:lnTo>
+                    <a:pt x="6804139" y="2570717"/>
+                  </a:lnTo>
+                  <a:lnTo>
+                    <a:pt x="6732517" y="2575215"/>
+                  </a:lnTo>
+                  <a:lnTo>
+                    <a:pt x="6660894" y="2579695"/>
+                  </a:lnTo>
+                  <a:lnTo>
+                    <a:pt x="6589272" y="2584156"/>
+                  </a:lnTo>
+                  <a:lnTo>
+                    <a:pt x="6517649" y="2588598"/>
+                  </a:lnTo>
+                  <a:lnTo>
+                    <a:pt x="6446027" y="2593022"/>
+                  </a:lnTo>
+                  <a:lnTo>
+                    <a:pt x="6374404" y="2597428"/>
+                  </a:lnTo>
+                  <a:lnTo>
+                    <a:pt x="6302782" y="2601815"/>
+                  </a:lnTo>
+                  <a:lnTo>
+                    <a:pt x="6231159" y="2606184"/>
+                  </a:lnTo>
+                  <a:lnTo>
+                    <a:pt x="6159537" y="2610535"/>
+                  </a:lnTo>
+                  <a:lnTo>
+                    <a:pt x="6087914" y="2614868"/>
+                  </a:lnTo>
+                  <a:lnTo>
+                    <a:pt x="6016292" y="2619183"/>
+                  </a:lnTo>
+                  <a:lnTo>
+                    <a:pt x="5944669" y="2623480"/>
+                  </a:lnTo>
+                  <a:lnTo>
+                    <a:pt x="5873047" y="2627758"/>
+                  </a:lnTo>
+                  <a:lnTo>
+                    <a:pt x="5801424" y="2632020"/>
+                  </a:lnTo>
+                  <a:lnTo>
+                    <a:pt x="5729802" y="2636263"/>
+                  </a:lnTo>
+                  <a:lnTo>
+                    <a:pt x="5658179" y="2640489"/>
+                  </a:lnTo>
+                  <a:lnTo>
+                    <a:pt x="5586557" y="2644697"/>
+                  </a:lnTo>
+                  <a:lnTo>
+                    <a:pt x="5514934" y="2648888"/>
+                  </a:lnTo>
+                  <a:lnTo>
+                    <a:pt x="5443311" y="2653061"/>
+                  </a:lnTo>
+                  <a:lnTo>
+                    <a:pt x="5371689" y="2657217"/>
+                  </a:lnTo>
+                  <a:lnTo>
+                    <a:pt x="5300066" y="2661356"/>
+                  </a:lnTo>
+                  <a:lnTo>
+                    <a:pt x="5228444" y="2665477"/>
+                  </a:lnTo>
+                  <a:lnTo>
+                    <a:pt x="5156821" y="2669582"/>
+                  </a:lnTo>
+                  <a:lnTo>
+                    <a:pt x="5085199" y="2673669"/>
+                  </a:lnTo>
+                  <a:lnTo>
+                    <a:pt x="5013576" y="2677739"/>
+                  </a:lnTo>
+                  <a:lnTo>
+                    <a:pt x="4941954" y="2681793"/>
+                  </a:lnTo>
+                  <a:lnTo>
+                    <a:pt x="4870331" y="2685829"/>
+                  </a:lnTo>
+                  <a:lnTo>
+                    <a:pt x="4798709" y="2689849"/>
+                  </a:lnTo>
+                  <a:lnTo>
+                    <a:pt x="4727086" y="2693852"/>
+                  </a:lnTo>
+                  <a:lnTo>
+                    <a:pt x="4655464" y="2697838"/>
+                  </a:lnTo>
+                  <a:lnTo>
+                    <a:pt x="4583841" y="2701808"/>
+                  </a:lnTo>
+                  <a:lnTo>
+                    <a:pt x="4512219" y="2705761"/>
+                  </a:lnTo>
+                  <a:lnTo>
+                    <a:pt x="4440596" y="2709698"/>
+                  </a:lnTo>
+                  <a:lnTo>
+                    <a:pt x="4368974" y="2713619"/>
+                  </a:lnTo>
+                  <a:lnTo>
+                    <a:pt x="4297351" y="2717523"/>
+                  </a:lnTo>
+                  <a:lnTo>
+                    <a:pt x="4225729" y="2721411"/>
+                  </a:lnTo>
+                  <a:lnTo>
+                    <a:pt x="4154106" y="2725283"/>
+                  </a:lnTo>
+                  <a:lnTo>
+                    <a:pt x="4082483" y="2729138"/>
+                  </a:lnTo>
+                  <a:lnTo>
+                    <a:pt x="4010861" y="2732978"/>
+                  </a:lnTo>
+                  <a:lnTo>
+                    <a:pt x="3939238" y="2736802"/>
+                  </a:lnTo>
+                  <a:lnTo>
+                    <a:pt x="3867616" y="2740609"/>
+                  </a:lnTo>
+                  <a:lnTo>
+                    <a:pt x="3795993" y="2744401"/>
+                  </a:lnTo>
+                  <a:lnTo>
+                    <a:pt x="3724371" y="2748178"/>
+                  </a:lnTo>
+                  <a:lnTo>
+                    <a:pt x="3652748" y="2751938"/>
+                  </a:lnTo>
+                  <a:lnTo>
+                    <a:pt x="3581126" y="2755683"/>
+                  </a:lnTo>
+                  <a:lnTo>
+                    <a:pt x="3509503" y="2759412"/>
+                  </a:lnTo>
+                  <a:lnTo>
+                    <a:pt x="3437881" y="2763126"/>
+                  </a:lnTo>
+                  <a:lnTo>
+                    <a:pt x="3366258" y="2766824"/>
+                  </a:lnTo>
+                  <a:lnTo>
+                    <a:pt x="3294636" y="2770507"/>
+                  </a:lnTo>
+                  <a:lnTo>
+                    <a:pt x="3223013" y="2774175"/>
+                  </a:lnTo>
+                  <a:lnTo>
+                    <a:pt x="3151391" y="2777827"/>
+                  </a:lnTo>
+                  <a:lnTo>
+                    <a:pt x="3079768" y="2781465"/>
+                  </a:lnTo>
+                  <a:lnTo>
+                    <a:pt x="3008146" y="2815862"/>
+                  </a:lnTo>
+                  <a:lnTo>
+                    <a:pt x="2936523" y="2869154"/>
+                  </a:lnTo>
+                  <a:lnTo>
+                    <a:pt x="2864901" y="2919051"/>
+                  </a:lnTo>
+                  <a:lnTo>
+                    <a:pt x="2793278" y="2965771"/>
+                  </a:lnTo>
+                  <a:lnTo>
+                    <a:pt x="2721655" y="3009516"/>
+                  </a:lnTo>
+                  <a:lnTo>
+                    <a:pt x="2650033" y="3050474"/>
+                  </a:lnTo>
+                  <a:lnTo>
+                    <a:pt x="2578410" y="3088824"/>
+                  </a:lnTo>
+                  <a:lnTo>
+                    <a:pt x="2506788" y="3124732"/>
+                  </a:lnTo>
+                  <a:lnTo>
+                    <a:pt x="2435165" y="3158353"/>
+                  </a:lnTo>
+                  <a:lnTo>
+                    <a:pt x="2363543" y="3189832"/>
+                  </a:lnTo>
+                  <a:lnTo>
+                    <a:pt x="2291920" y="3219307"/>
+                  </a:lnTo>
+                  <a:lnTo>
+                    <a:pt x="2220298" y="3246905"/>
+                  </a:lnTo>
+                  <a:lnTo>
+                    <a:pt x="2148675" y="3272745"/>
+                  </a:lnTo>
+                  <a:lnTo>
+                    <a:pt x="2077053" y="3296939"/>
+                  </a:lnTo>
+                  <a:lnTo>
+                    <a:pt x="2005430" y="3319593"/>
+                  </a:lnTo>
+                  <a:lnTo>
+                    <a:pt x="1933808" y="3340804"/>
+                  </a:lnTo>
+                  <a:lnTo>
+                    <a:pt x="1862185" y="3360664"/>
+                  </a:lnTo>
+                  <a:lnTo>
+                    <a:pt x="1790563" y="3379259"/>
+                  </a:lnTo>
+                  <a:lnTo>
+                    <a:pt x="1718940" y="3396670"/>
+                  </a:lnTo>
+                  <a:lnTo>
+                    <a:pt x="1647318" y="3412972"/>
+                  </a:lnTo>
+                  <a:lnTo>
+                    <a:pt x="1575695" y="3428235"/>
+                  </a:lnTo>
+                  <a:lnTo>
+                    <a:pt x="1504073" y="3442527"/>
+                  </a:lnTo>
+                  <a:lnTo>
+                    <a:pt x="1432450" y="3455909"/>
+                  </a:lnTo>
+                  <a:lnTo>
+                    <a:pt x="1360827" y="3468438"/>
+                  </a:lnTo>
+                  <a:lnTo>
+                    <a:pt x="1289205" y="3480169"/>
+                  </a:lnTo>
+                  <a:lnTo>
+                    <a:pt x="1217582" y="3491154"/>
+                  </a:lnTo>
+                  <a:lnTo>
+                    <a:pt x="1145960" y="3501438"/>
+                  </a:lnTo>
+                  <a:lnTo>
+                    <a:pt x="1074337" y="3511068"/>
+                  </a:lnTo>
+                  <a:lnTo>
+                    <a:pt x="1002715" y="3520085"/>
+                  </a:lnTo>
+                  <a:lnTo>
+                    <a:pt x="931092" y="3528527"/>
+                  </a:lnTo>
+                  <a:lnTo>
+                    <a:pt x="859470" y="3536431"/>
+                  </a:lnTo>
+                  <a:lnTo>
+                    <a:pt x="787847" y="3543832"/>
+                  </a:lnTo>
+                  <a:lnTo>
+                    <a:pt x="716225" y="3550762"/>
+                  </a:lnTo>
+                  <a:lnTo>
+                    <a:pt x="644602" y="3557251"/>
+                  </a:lnTo>
+                  <a:lnTo>
+                    <a:pt x="572980" y="3563326"/>
+                  </a:lnTo>
+                  <a:lnTo>
+                    <a:pt x="501357" y="3569014"/>
+                  </a:lnTo>
+                  <a:lnTo>
+                    <a:pt x="429735" y="3574340"/>
+                  </a:lnTo>
+                  <a:lnTo>
+                    <a:pt x="358112" y="3579327"/>
+                  </a:lnTo>
+                  <a:lnTo>
+                    <a:pt x="286490" y="3583996"/>
+                  </a:lnTo>
+                  <a:lnTo>
+                    <a:pt x="214867" y="3588368"/>
+                  </a:lnTo>
+                  <a:lnTo>
+                    <a:pt x="143245" y="3592462"/>
+                  </a:lnTo>
+                  <a:lnTo>
+                    <a:pt x="71622" y="3596294"/>
+                  </a:lnTo>
+                  <a:lnTo>
+                    <a:pt x="0" y="3599883"/>
                   </a:lnTo>
                   <a:close/>
                 </a:path>
@@ -3652,197 +3664,209 @@
           <p:spPr>
             <a:xfrm>
               <a:off x="1172049" y="1896563"/>
-              <a:ext cx="4304773" cy="3197719"/>
+              <a:ext cx="4611509" cy="2924358"/>
             </a:xfrm>
             <a:custGeom>
               <a:avLst/>
               <a:pathLst>
-                <a:path w="4304773" h="3197719">
+                <a:path w="4611509" h="2924358">
                   <a:moveTo>
-                    <a:pt x="0" y="3197719"/>
+                    <a:pt x="0" y="2924358"/>
                   </a:moveTo>
                   <a:lnTo>
-                    <a:pt x="71622" y="3190744"/>
-                  </a:lnTo>
-                  <a:lnTo>
-                    <a:pt x="143245" y="3183662"/>
-                  </a:lnTo>
-                  <a:lnTo>
-                    <a:pt x="214867" y="3176471"/>
-                  </a:lnTo>
-                  <a:lnTo>
-                    <a:pt x="286490" y="3169170"/>
-                  </a:lnTo>
-                  <a:lnTo>
-                    <a:pt x="358112" y="3161757"/>
-                  </a:lnTo>
-                  <a:lnTo>
-                    <a:pt x="429735" y="3154231"/>
-                  </a:lnTo>
-                  <a:lnTo>
-                    <a:pt x="501357" y="3146589"/>
-                  </a:lnTo>
-                  <a:lnTo>
-                    <a:pt x="572980" y="3138830"/>
-                  </a:lnTo>
-                  <a:lnTo>
-                    <a:pt x="644602" y="3130952"/>
-                  </a:lnTo>
-                  <a:lnTo>
-                    <a:pt x="716225" y="3122953"/>
-                  </a:lnTo>
-                  <a:lnTo>
-                    <a:pt x="787847" y="3114832"/>
-                  </a:lnTo>
-                  <a:lnTo>
-                    <a:pt x="859470" y="3106586"/>
-                  </a:lnTo>
-                  <a:lnTo>
-                    <a:pt x="931092" y="3098214"/>
-                  </a:lnTo>
-                  <a:lnTo>
-                    <a:pt x="1002715" y="3089713"/>
-                  </a:lnTo>
-                  <a:lnTo>
-                    <a:pt x="1074337" y="3081082"/>
-                  </a:lnTo>
-                  <a:lnTo>
-                    <a:pt x="1145960" y="3072318"/>
-                  </a:lnTo>
-                  <a:lnTo>
-                    <a:pt x="1217582" y="3063421"/>
-                  </a:lnTo>
-                  <a:lnTo>
-                    <a:pt x="1289205" y="3054386"/>
-                  </a:lnTo>
-                  <a:lnTo>
-                    <a:pt x="1360827" y="3045214"/>
-                  </a:lnTo>
-                  <a:lnTo>
-                    <a:pt x="1432450" y="3035900"/>
-                  </a:lnTo>
-                  <a:lnTo>
-                    <a:pt x="1504073" y="3026444"/>
-                  </a:lnTo>
-                  <a:lnTo>
-                    <a:pt x="1575695" y="3016843"/>
-                  </a:lnTo>
-                  <a:lnTo>
-                    <a:pt x="1647318" y="3007095"/>
-                  </a:lnTo>
-                  <a:lnTo>
-                    <a:pt x="1718940" y="2997197"/>
-                  </a:lnTo>
-                  <a:lnTo>
-                    <a:pt x="1790563" y="2987147"/>
-                  </a:lnTo>
-                  <a:lnTo>
-                    <a:pt x="1862185" y="2976943"/>
-                  </a:lnTo>
-                  <a:lnTo>
-                    <a:pt x="1933808" y="2966583"/>
-                  </a:lnTo>
-                  <a:lnTo>
-                    <a:pt x="2005430" y="2956064"/>
-                  </a:lnTo>
-                  <a:lnTo>
-                    <a:pt x="2077053" y="2945384"/>
-                  </a:lnTo>
-                  <a:lnTo>
-                    <a:pt x="2148675" y="2934540"/>
-                  </a:lnTo>
-                  <a:lnTo>
-                    <a:pt x="2220298" y="2923530"/>
-                  </a:lnTo>
-                  <a:lnTo>
-                    <a:pt x="2291920" y="2912351"/>
-                  </a:lnTo>
-                  <a:lnTo>
-                    <a:pt x="2363543" y="2901000"/>
-                  </a:lnTo>
-                  <a:lnTo>
-                    <a:pt x="2435165" y="2889476"/>
-                  </a:lnTo>
-                  <a:lnTo>
-                    <a:pt x="2506788" y="2877775"/>
-                  </a:lnTo>
-                  <a:lnTo>
-                    <a:pt x="2578410" y="2865894"/>
-                  </a:lnTo>
-                  <a:lnTo>
-                    <a:pt x="2650033" y="2853831"/>
-                  </a:lnTo>
-                  <a:lnTo>
-                    <a:pt x="2721655" y="2841584"/>
-                  </a:lnTo>
-                  <a:lnTo>
-                    <a:pt x="2793278" y="2829148"/>
-                  </a:lnTo>
-                  <a:lnTo>
-                    <a:pt x="2864901" y="2816522"/>
-                  </a:lnTo>
-                  <a:lnTo>
-                    <a:pt x="2936523" y="2803702"/>
-                  </a:lnTo>
-                  <a:lnTo>
-                    <a:pt x="3008146" y="2790686"/>
-                  </a:lnTo>
-                  <a:lnTo>
-                    <a:pt x="3079768" y="2752969"/>
-                  </a:lnTo>
-                  <a:lnTo>
-                    <a:pt x="3151391" y="2676180"/>
-                  </a:lnTo>
-                  <a:lnTo>
-                    <a:pt x="3223013" y="2592837"/>
-                  </a:lnTo>
-                  <a:lnTo>
-                    <a:pt x="3294636" y="2502381"/>
-                  </a:lnTo>
-                  <a:lnTo>
-                    <a:pt x="3366258" y="2404205"/>
-                  </a:lnTo>
-                  <a:lnTo>
-                    <a:pt x="3437881" y="2297648"/>
-                  </a:lnTo>
-                  <a:lnTo>
-                    <a:pt x="3509503" y="2181997"/>
-                  </a:lnTo>
-                  <a:lnTo>
-                    <a:pt x="3581126" y="2056476"/>
-                  </a:lnTo>
-                  <a:lnTo>
-                    <a:pt x="3652748" y="1920240"/>
-                  </a:lnTo>
-                  <a:lnTo>
-                    <a:pt x="3724371" y="1772377"/>
-                  </a:lnTo>
-                  <a:lnTo>
-                    <a:pt x="3795993" y="1611893"/>
-                  </a:lnTo>
-                  <a:lnTo>
-                    <a:pt x="3867616" y="1437712"/>
-                  </a:lnTo>
-                  <a:lnTo>
-                    <a:pt x="3939238" y="1248664"/>
-                  </a:lnTo>
-                  <a:lnTo>
-                    <a:pt x="4010861" y="1043480"/>
-                  </a:lnTo>
-                  <a:lnTo>
-                    <a:pt x="4082483" y="820784"/>
-                  </a:lnTo>
-                  <a:lnTo>
-                    <a:pt x="4154106" y="579081"/>
-                  </a:lnTo>
-                  <a:lnTo>
-                    <a:pt x="4225729" y="316747"/>
-                  </a:lnTo>
-                  <a:lnTo>
-                    <a:pt x="4297351" y="32023"/>
-                  </a:lnTo>
-                  <a:lnTo>
-                    <a:pt x="4304773" y="0"/>
+                    <a:pt x="71622" y="2921317"/>
+                  </a:lnTo>
+                  <a:lnTo>
+                    <a:pt x="143245" y="2918264"/>
+                  </a:lnTo>
+                  <a:lnTo>
+                    <a:pt x="214867" y="2915198"/>
+                  </a:lnTo>
+                  <a:lnTo>
+                    <a:pt x="286490" y="2912119"/>
+                  </a:lnTo>
+                  <a:lnTo>
+                    <a:pt x="358112" y="2909027"/>
+                  </a:lnTo>
+                  <a:lnTo>
+                    <a:pt x="429735" y="2905923"/>
+                  </a:lnTo>
+                  <a:lnTo>
+                    <a:pt x="501357" y="2902805"/>
+                  </a:lnTo>
+                  <a:lnTo>
+                    <a:pt x="572980" y="2899674"/>
+                  </a:lnTo>
+                  <a:lnTo>
+                    <a:pt x="644602" y="2896531"/>
+                  </a:lnTo>
+                  <a:lnTo>
+                    <a:pt x="716225" y="2893374"/>
+                  </a:lnTo>
+                  <a:lnTo>
+                    <a:pt x="787847" y="2890204"/>
+                  </a:lnTo>
+                  <a:lnTo>
+                    <a:pt x="859470" y="2887021"/>
+                  </a:lnTo>
+                  <a:lnTo>
+                    <a:pt x="931092" y="2883824"/>
+                  </a:lnTo>
+                  <a:lnTo>
+                    <a:pt x="1002715" y="2880614"/>
+                  </a:lnTo>
+                  <a:lnTo>
+                    <a:pt x="1074337" y="2877391"/>
+                  </a:lnTo>
+                  <a:lnTo>
+                    <a:pt x="1145960" y="2874154"/>
+                  </a:lnTo>
+                  <a:lnTo>
+                    <a:pt x="1217582" y="2870904"/>
+                  </a:lnTo>
+                  <a:lnTo>
+                    <a:pt x="1289205" y="2867640"/>
+                  </a:lnTo>
+                  <a:lnTo>
+                    <a:pt x="1360827" y="2864363"/>
+                  </a:lnTo>
+                  <a:lnTo>
+                    <a:pt x="1432450" y="2861072"/>
+                  </a:lnTo>
+                  <a:lnTo>
+                    <a:pt x="1504073" y="2857767"/>
+                  </a:lnTo>
+                  <a:lnTo>
+                    <a:pt x="1575695" y="2854448"/>
+                  </a:lnTo>
+                  <a:lnTo>
+                    <a:pt x="1647318" y="2851116"/>
+                  </a:lnTo>
+                  <a:lnTo>
+                    <a:pt x="1718940" y="2847769"/>
+                  </a:lnTo>
+                  <a:lnTo>
+                    <a:pt x="1790563" y="2844409"/>
+                  </a:lnTo>
+                  <a:lnTo>
+                    <a:pt x="1862185" y="2841034"/>
+                  </a:lnTo>
+                  <a:lnTo>
+                    <a:pt x="1933808" y="2837646"/>
+                  </a:lnTo>
+                  <a:lnTo>
+                    <a:pt x="2005430" y="2834243"/>
+                  </a:lnTo>
+                  <a:lnTo>
+                    <a:pt x="2077053" y="2830826"/>
+                  </a:lnTo>
+                  <a:lnTo>
+                    <a:pt x="2148675" y="2827395"/>
+                  </a:lnTo>
+                  <a:lnTo>
+                    <a:pt x="2220298" y="2823950"/>
+                  </a:lnTo>
+                  <a:lnTo>
+                    <a:pt x="2291920" y="2820490"/>
+                  </a:lnTo>
+                  <a:lnTo>
+                    <a:pt x="2363543" y="2817016"/>
+                  </a:lnTo>
+                  <a:lnTo>
+                    <a:pt x="2435165" y="2813527"/>
+                  </a:lnTo>
+                  <a:lnTo>
+                    <a:pt x="2506788" y="2810023"/>
+                  </a:lnTo>
+                  <a:lnTo>
+                    <a:pt x="2578410" y="2806505"/>
+                  </a:lnTo>
+                  <a:lnTo>
+                    <a:pt x="2650033" y="2802973"/>
+                  </a:lnTo>
+                  <a:lnTo>
+                    <a:pt x="2721655" y="2799425"/>
+                  </a:lnTo>
+                  <a:lnTo>
+                    <a:pt x="2793278" y="2795863"/>
+                  </a:lnTo>
+                  <a:lnTo>
+                    <a:pt x="2864901" y="2792286"/>
+                  </a:lnTo>
+                  <a:lnTo>
+                    <a:pt x="2936523" y="2788694"/>
+                  </a:lnTo>
+                  <a:lnTo>
+                    <a:pt x="3008146" y="2785087"/>
+                  </a:lnTo>
+                  <a:lnTo>
+                    <a:pt x="3079768" y="2758946"/>
+                  </a:lnTo>
+                  <a:lnTo>
+                    <a:pt x="3151391" y="2698158"/>
+                  </a:lnTo>
+                  <a:lnTo>
+                    <a:pt x="3223013" y="2633235"/>
+                  </a:lnTo>
+                  <a:lnTo>
+                    <a:pt x="3294636" y="2563897"/>
+                  </a:lnTo>
+                  <a:lnTo>
+                    <a:pt x="3366258" y="2489842"/>
+                  </a:lnTo>
+                  <a:lnTo>
+                    <a:pt x="3437881" y="2410751"/>
+                  </a:lnTo>
+                  <a:lnTo>
+                    <a:pt x="3509503" y="2326279"/>
+                  </a:lnTo>
+                  <a:lnTo>
+                    <a:pt x="3581126" y="2236062"/>
+                  </a:lnTo>
+                  <a:lnTo>
+                    <a:pt x="3652748" y="2139709"/>
+                  </a:lnTo>
+                  <a:lnTo>
+                    <a:pt x="3724371" y="2036801"/>
+                  </a:lnTo>
+                  <a:lnTo>
+                    <a:pt x="3795993" y="1926895"/>
+                  </a:lnTo>
+                  <a:lnTo>
+                    <a:pt x="3867616" y="1809512"/>
+                  </a:lnTo>
+                  <a:lnTo>
+                    <a:pt x="3939238" y="1684145"/>
+                  </a:lnTo>
+                  <a:lnTo>
+                    <a:pt x="4010861" y="1550252"/>
+                  </a:lnTo>
+                  <a:lnTo>
+                    <a:pt x="4082483" y="1407250"/>
+                  </a:lnTo>
+                  <a:lnTo>
+                    <a:pt x="4154106" y="1254523"/>
+                  </a:lnTo>
+                  <a:lnTo>
+                    <a:pt x="4225729" y="1091407"/>
+                  </a:lnTo>
+                  <a:lnTo>
+                    <a:pt x="4297351" y="917196"/>
+                  </a:lnTo>
+                  <a:lnTo>
+                    <a:pt x="4368974" y="731135"/>
+                  </a:lnTo>
+                  <a:lnTo>
+                    <a:pt x="4440596" y="532419"/>
+                  </a:lnTo>
+                  <a:lnTo>
+                    <a:pt x="4512219" y="320187"/>
+                  </a:lnTo>
+                  <a:lnTo>
+                    <a:pt x="4583841" y="93519"/>
+                  </a:lnTo>
+                  <a:lnTo>
+                    <a:pt x="4611509" y="0"/>
                   </a:lnTo>
                 </a:path>
               </a:pathLst>
@@ -3862,312 +3886,312 @@
           </p:nvSpPr>
           <p:spPr>
             <a:xfrm>
-              <a:off x="1172049" y="3497307"/>
-              <a:ext cx="7090630" cy="2025319"/>
+              <a:off x="1172049" y="4449099"/>
+              <a:ext cx="7090630" cy="1047347"/>
             </a:xfrm>
             <a:custGeom>
               <a:avLst/>
               <a:pathLst>
-                <a:path w="7090630" h="2025319">
+                <a:path w="7090630" h="1047347">
                   <a:moveTo>
                     <a:pt x="7090630" y="0"/>
                   </a:moveTo>
                   <a:lnTo>
-                    <a:pt x="7019007" y="30985"/>
-                  </a:lnTo>
-                  <a:lnTo>
-                    <a:pt x="6947385" y="61503"/>
-                  </a:lnTo>
-                  <a:lnTo>
-                    <a:pt x="6875762" y="91559"/>
-                  </a:lnTo>
-                  <a:lnTo>
-                    <a:pt x="6804139" y="121162"/>
-                  </a:lnTo>
-                  <a:lnTo>
-                    <a:pt x="6732517" y="150318"/>
-                  </a:lnTo>
-                  <a:lnTo>
-                    <a:pt x="6660894" y="179034"/>
-                  </a:lnTo>
-                  <a:lnTo>
-                    <a:pt x="6589272" y="207316"/>
-                  </a:lnTo>
-                  <a:lnTo>
-                    <a:pt x="6517649" y="235170"/>
-                  </a:lnTo>
-                  <a:lnTo>
-                    <a:pt x="6446027" y="262605"/>
-                  </a:lnTo>
-                  <a:lnTo>
-                    <a:pt x="6374404" y="289625"/>
-                  </a:lnTo>
-                  <a:lnTo>
-                    <a:pt x="6302782" y="316236"/>
-                  </a:lnTo>
-                  <a:lnTo>
-                    <a:pt x="6231159" y="342446"/>
-                  </a:lnTo>
-                  <a:lnTo>
-                    <a:pt x="6159537" y="368261"/>
-                  </a:lnTo>
-                  <a:lnTo>
-                    <a:pt x="6087914" y="393685"/>
-                  </a:lnTo>
-                  <a:lnTo>
-                    <a:pt x="6016292" y="418726"/>
-                  </a:lnTo>
-                  <a:lnTo>
-                    <a:pt x="5944669" y="443388"/>
-                  </a:lnTo>
-                  <a:lnTo>
-                    <a:pt x="5873047" y="467678"/>
-                  </a:lnTo>
-                  <a:lnTo>
-                    <a:pt x="5801424" y="491601"/>
-                  </a:lnTo>
-                  <a:lnTo>
-                    <a:pt x="5729802" y="515163"/>
-                  </a:lnTo>
-                  <a:lnTo>
-                    <a:pt x="5658179" y="538369"/>
-                  </a:lnTo>
-                  <a:lnTo>
-                    <a:pt x="5586557" y="561225"/>
-                  </a:lnTo>
-                  <a:lnTo>
-                    <a:pt x="5514934" y="583735"/>
-                  </a:lnTo>
-                  <a:lnTo>
-                    <a:pt x="5443311" y="605906"/>
-                  </a:lnTo>
-                  <a:lnTo>
-                    <a:pt x="5371689" y="627742"/>
-                  </a:lnTo>
-                  <a:lnTo>
-                    <a:pt x="5300066" y="649248"/>
-                  </a:lnTo>
-                  <a:lnTo>
-                    <a:pt x="5228444" y="670429"/>
-                  </a:lnTo>
-                  <a:lnTo>
-                    <a:pt x="5156821" y="691290"/>
-                  </a:lnTo>
-                  <a:lnTo>
-                    <a:pt x="5085199" y="711837"/>
-                  </a:lnTo>
-                  <a:lnTo>
-                    <a:pt x="5013576" y="732073"/>
-                  </a:lnTo>
-                  <a:lnTo>
-                    <a:pt x="4941954" y="752003"/>
-                  </a:lnTo>
-                  <a:lnTo>
-                    <a:pt x="4870331" y="771633"/>
-                  </a:lnTo>
-                  <a:lnTo>
-                    <a:pt x="4798709" y="790966"/>
-                  </a:lnTo>
-                  <a:lnTo>
-                    <a:pt x="4727086" y="810007"/>
-                  </a:lnTo>
-                  <a:lnTo>
-                    <a:pt x="4655464" y="828761"/>
-                  </a:lnTo>
-                  <a:lnTo>
-                    <a:pt x="4583841" y="847231"/>
-                  </a:lnTo>
-                  <a:lnTo>
-                    <a:pt x="4512219" y="865423"/>
-                  </a:lnTo>
-                  <a:lnTo>
-                    <a:pt x="4440596" y="883340"/>
-                  </a:lnTo>
-                  <a:lnTo>
-                    <a:pt x="4368974" y="900986"/>
-                  </a:lnTo>
-                  <a:lnTo>
-                    <a:pt x="4297351" y="918366"/>
-                  </a:lnTo>
-                  <a:lnTo>
-                    <a:pt x="4225729" y="935483"/>
-                  </a:lnTo>
-                  <a:lnTo>
-                    <a:pt x="4154106" y="952342"/>
-                  </a:lnTo>
-                  <a:lnTo>
-                    <a:pt x="4082483" y="968946"/>
-                  </a:lnTo>
-                  <a:lnTo>
-                    <a:pt x="4010861" y="985300"/>
-                  </a:lnTo>
-                  <a:lnTo>
-                    <a:pt x="3939238" y="1001407"/>
-                  </a:lnTo>
-                  <a:lnTo>
-                    <a:pt x="3867616" y="1017270"/>
-                  </a:lnTo>
-                  <a:lnTo>
-                    <a:pt x="3795993" y="1032894"/>
-                  </a:lnTo>
-                  <a:lnTo>
-                    <a:pt x="3724371" y="1048282"/>
-                  </a:lnTo>
-                  <a:lnTo>
-                    <a:pt x="3652748" y="1063437"/>
-                  </a:lnTo>
-                  <a:lnTo>
-                    <a:pt x="3581126" y="1078364"/>
-                  </a:lnTo>
-                  <a:lnTo>
-                    <a:pt x="3509503" y="1093065"/>
-                  </a:lnTo>
-                  <a:lnTo>
-                    <a:pt x="3437881" y="1107544"/>
-                  </a:lnTo>
-                  <a:lnTo>
-                    <a:pt x="3366258" y="1121805"/>
-                  </a:lnTo>
-                  <a:lnTo>
-                    <a:pt x="3294636" y="1135850"/>
-                  </a:lnTo>
-                  <a:lnTo>
-                    <a:pt x="3223013" y="1149683"/>
-                  </a:lnTo>
-                  <a:lnTo>
-                    <a:pt x="3151391" y="1163308"/>
-                  </a:lnTo>
-                  <a:lnTo>
-                    <a:pt x="3079768" y="1176726"/>
-                  </a:lnTo>
-                  <a:lnTo>
-                    <a:pt x="3008146" y="1222975"/>
-                  </a:lnTo>
-                  <a:lnTo>
-                    <a:pt x="2936523" y="1288161"/>
-                  </a:lnTo>
-                  <a:lnTo>
-                    <a:pt x="2864901" y="1348221"/>
-                  </a:lnTo>
-                  <a:lnTo>
-                    <a:pt x="2793278" y="1403558"/>
-                  </a:lnTo>
-                  <a:lnTo>
-                    <a:pt x="2721655" y="1454543"/>
-                  </a:lnTo>
-                  <a:lnTo>
-                    <a:pt x="2650033" y="1501519"/>
-                  </a:lnTo>
-                  <a:lnTo>
-                    <a:pt x="2578410" y="1544801"/>
-                  </a:lnTo>
-                  <a:lnTo>
-                    <a:pt x="2506788" y="1584679"/>
-                  </a:lnTo>
-                  <a:lnTo>
-                    <a:pt x="2435165" y="1621421"/>
-                  </a:lnTo>
-                  <a:lnTo>
-                    <a:pt x="2363543" y="1655274"/>
-                  </a:lnTo>
-                  <a:lnTo>
-                    <a:pt x="2291920" y="1686464"/>
-                  </a:lnTo>
-                  <a:lnTo>
-                    <a:pt x="2220298" y="1715202"/>
-                  </a:lnTo>
-                  <a:lnTo>
-                    <a:pt x="2148675" y="1741680"/>
-                  </a:lnTo>
-                  <a:lnTo>
-                    <a:pt x="2077053" y="1766075"/>
-                  </a:lnTo>
-                  <a:lnTo>
-                    <a:pt x="2005430" y="1788552"/>
-                  </a:lnTo>
-                  <a:lnTo>
-                    <a:pt x="1933808" y="1809262"/>
-                  </a:lnTo>
-                  <a:lnTo>
-                    <a:pt x="1862185" y="1828343"/>
-                  </a:lnTo>
-                  <a:lnTo>
-                    <a:pt x="1790563" y="1845923"/>
-                  </a:lnTo>
-                  <a:lnTo>
-                    <a:pt x="1718940" y="1862121"/>
-                  </a:lnTo>
-                  <a:lnTo>
-                    <a:pt x="1647318" y="1877045"/>
-                  </a:lnTo>
-                  <a:lnTo>
-                    <a:pt x="1575695" y="1890795"/>
-                  </a:lnTo>
-                  <a:lnTo>
-                    <a:pt x="1504073" y="1903465"/>
-                  </a:lnTo>
-                  <a:lnTo>
-                    <a:pt x="1432450" y="1915137"/>
-                  </a:lnTo>
-                  <a:lnTo>
-                    <a:pt x="1360827" y="1925892"/>
-                  </a:lnTo>
-                  <a:lnTo>
-                    <a:pt x="1289205" y="1935802"/>
-                  </a:lnTo>
-                  <a:lnTo>
-                    <a:pt x="1217582" y="1944931"/>
-                  </a:lnTo>
-                  <a:lnTo>
-                    <a:pt x="1145960" y="1953343"/>
-                  </a:lnTo>
-                  <a:lnTo>
-                    <a:pt x="1074337" y="1961094"/>
-                  </a:lnTo>
-                  <a:lnTo>
-                    <a:pt x="1002715" y="1968235"/>
-                  </a:lnTo>
-                  <a:lnTo>
-                    <a:pt x="931092" y="1974814"/>
-                  </a:lnTo>
-                  <a:lnTo>
-                    <a:pt x="859470" y="1980876"/>
-                  </a:lnTo>
-                  <a:lnTo>
-                    <a:pt x="787847" y="1986461"/>
-                  </a:lnTo>
-                  <a:lnTo>
-                    <a:pt x="716225" y="1991607"/>
-                  </a:lnTo>
-                  <a:lnTo>
-                    <a:pt x="644602" y="1996349"/>
-                  </a:lnTo>
-                  <a:lnTo>
-                    <a:pt x="572980" y="2000717"/>
-                  </a:lnTo>
-                  <a:lnTo>
-                    <a:pt x="501357" y="2004742"/>
-                  </a:lnTo>
-                  <a:lnTo>
-                    <a:pt x="429735" y="2008451"/>
-                  </a:lnTo>
-                  <a:lnTo>
-                    <a:pt x="358112" y="2011867"/>
-                  </a:lnTo>
-                  <a:lnTo>
-                    <a:pt x="286490" y="2015015"/>
-                  </a:lnTo>
-                  <a:lnTo>
-                    <a:pt x="214867" y="2017916"/>
-                  </a:lnTo>
-                  <a:lnTo>
-                    <a:pt x="143245" y="2020588"/>
-                  </a:lnTo>
-                  <a:lnTo>
-                    <a:pt x="71622" y="2023051"/>
-                  </a:lnTo>
-                  <a:lnTo>
-                    <a:pt x="0" y="2025319"/>
+                    <a:pt x="7019007" y="4573"/>
+                  </a:lnTo>
+                  <a:lnTo>
+                    <a:pt x="6947385" y="9128"/>
+                  </a:lnTo>
+                  <a:lnTo>
+                    <a:pt x="6875762" y="13664"/>
+                  </a:lnTo>
+                  <a:lnTo>
+                    <a:pt x="6804139" y="18181"/>
+                  </a:lnTo>
+                  <a:lnTo>
+                    <a:pt x="6732517" y="22680"/>
+                  </a:lnTo>
+                  <a:lnTo>
+                    <a:pt x="6660894" y="27159"/>
+                  </a:lnTo>
+                  <a:lnTo>
+                    <a:pt x="6589272" y="31620"/>
+                  </a:lnTo>
+                  <a:lnTo>
+                    <a:pt x="6517649" y="36063"/>
+                  </a:lnTo>
+                  <a:lnTo>
+                    <a:pt x="6446027" y="40487"/>
+                  </a:lnTo>
+                  <a:lnTo>
+                    <a:pt x="6374404" y="44892"/>
+                  </a:lnTo>
+                  <a:lnTo>
+                    <a:pt x="6302782" y="49280"/>
+                  </a:lnTo>
+                  <a:lnTo>
+                    <a:pt x="6231159" y="53649"/>
+                  </a:lnTo>
+                  <a:lnTo>
+                    <a:pt x="6159537" y="58000"/>
+                  </a:lnTo>
+                  <a:lnTo>
+                    <a:pt x="6087914" y="62332"/>
+                  </a:lnTo>
+                  <a:lnTo>
+                    <a:pt x="6016292" y="66647"/>
+                  </a:lnTo>
+                  <a:lnTo>
+                    <a:pt x="5944669" y="70944"/>
+                  </a:lnTo>
+                  <a:lnTo>
+                    <a:pt x="5873047" y="75223"/>
+                  </a:lnTo>
+                  <a:lnTo>
+                    <a:pt x="5801424" y="79484"/>
+                  </a:lnTo>
+                  <a:lnTo>
+                    <a:pt x="5729802" y="83728"/>
+                  </a:lnTo>
+                  <a:lnTo>
+                    <a:pt x="5658179" y="87953"/>
+                  </a:lnTo>
+                  <a:lnTo>
+                    <a:pt x="5586557" y="92162"/>
+                  </a:lnTo>
+                  <a:lnTo>
+                    <a:pt x="5514934" y="96352"/>
+                  </a:lnTo>
+                  <a:lnTo>
+                    <a:pt x="5443311" y="100526"/>
+                  </a:lnTo>
+                  <a:lnTo>
+                    <a:pt x="5371689" y="104682"/>
+                  </a:lnTo>
+                  <a:lnTo>
+                    <a:pt x="5300066" y="108820"/>
+                  </a:lnTo>
+                  <a:lnTo>
+                    <a:pt x="5228444" y="112942"/>
+                  </a:lnTo>
+                  <a:lnTo>
+                    <a:pt x="5156821" y="117046"/>
+                  </a:lnTo>
+                  <a:lnTo>
+                    <a:pt x="5085199" y="121133"/>
+                  </a:lnTo>
+                  <a:lnTo>
+                    <a:pt x="5013576" y="125204"/>
+                  </a:lnTo>
+                  <a:lnTo>
+                    <a:pt x="4941954" y="129257"/>
+                  </a:lnTo>
+                  <a:lnTo>
+                    <a:pt x="4870331" y="133294"/>
+                  </a:lnTo>
+                  <a:lnTo>
+                    <a:pt x="4798709" y="137313"/>
+                  </a:lnTo>
+                  <a:lnTo>
+                    <a:pt x="4727086" y="141316"/>
+                  </a:lnTo>
+                  <a:lnTo>
+                    <a:pt x="4655464" y="145303"/>
+                  </a:lnTo>
+                  <a:lnTo>
+                    <a:pt x="4583841" y="149272"/>
+                  </a:lnTo>
+                  <a:lnTo>
+                    <a:pt x="4512219" y="153226"/>
+                  </a:lnTo>
+                  <a:lnTo>
+                    <a:pt x="4440596" y="157163"/>
+                  </a:lnTo>
+                  <a:lnTo>
+                    <a:pt x="4368974" y="161083"/>
+                  </a:lnTo>
+                  <a:lnTo>
+                    <a:pt x="4297351" y="164987"/>
+                  </a:lnTo>
+                  <a:lnTo>
+                    <a:pt x="4225729" y="168875"/>
+                  </a:lnTo>
+                  <a:lnTo>
+                    <a:pt x="4154106" y="172747"/>
+                  </a:lnTo>
+                  <a:lnTo>
+                    <a:pt x="4082483" y="176603"/>
+                  </a:lnTo>
+                  <a:lnTo>
+                    <a:pt x="4010861" y="180442"/>
+                  </a:lnTo>
+                  <a:lnTo>
+                    <a:pt x="3939238" y="184266"/>
+                  </a:lnTo>
+                  <a:lnTo>
+                    <a:pt x="3867616" y="188074"/>
+                  </a:lnTo>
+                  <a:lnTo>
+                    <a:pt x="3795993" y="191866"/>
+                  </a:lnTo>
+                  <a:lnTo>
+                    <a:pt x="3724371" y="195642"/>
+                  </a:lnTo>
+                  <a:lnTo>
+                    <a:pt x="3652748" y="199403"/>
+                  </a:lnTo>
+                  <a:lnTo>
+                    <a:pt x="3581126" y="203147"/>
+                  </a:lnTo>
+                  <a:lnTo>
+                    <a:pt x="3509503" y="206877"/>
+                  </a:lnTo>
+                  <a:lnTo>
+                    <a:pt x="3437881" y="210590"/>
+                  </a:lnTo>
+                  <a:lnTo>
+                    <a:pt x="3366258" y="214289"/>
+                  </a:lnTo>
+                  <a:lnTo>
+                    <a:pt x="3294636" y="217972"/>
+                  </a:lnTo>
+                  <a:lnTo>
+                    <a:pt x="3223013" y="221639"/>
+                  </a:lnTo>
+                  <a:lnTo>
+                    <a:pt x="3151391" y="225292"/>
+                  </a:lnTo>
+                  <a:lnTo>
+                    <a:pt x="3079768" y="228929"/>
+                  </a:lnTo>
+                  <a:lnTo>
+                    <a:pt x="3008146" y="263327"/>
+                  </a:lnTo>
+                  <a:lnTo>
+                    <a:pt x="2936523" y="316618"/>
+                  </a:lnTo>
+                  <a:lnTo>
+                    <a:pt x="2864901" y="366516"/>
+                  </a:lnTo>
+                  <a:lnTo>
+                    <a:pt x="2793278" y="413236"/>
+                  </a:lnTo>
+                  <a:lnTo>
+                    <a:pt x="2721655" y="456980"/>
+                  </a:lnTo>
+                  <a:lnTo>
+                    <a:pt x="2650033" y="497939"/>
+                  </a:lnTo>
+                  <a:lnTo>
+                    <a:pt x="2578410" y="536289"/>
+                  </a:lnTo>
+                  <a:lnTo>
+                    <a:pt x="2506788" y="572196"/>
+                  </a:lnTo>
+                  <a:lnTo>
+                    <a:pt x="2435165" y="605817"/>
+                  </a:lnTo>
+                  <a:lnTo>
+                    <a:pt x="2363543" y="637297"/>
+                  </a:lnTo>
+                  <a:lnTo>
+                    <a:pt x="2291920" y="666772"/>
+                  </a:lnTo>
+                  <a:lnTo>
+                    <a:pt x="2220298" y="694369"/>
+                  </a:lnTo>
+                  <a:lnTo>
+                    <a:pt x="2148675" y="720209"/>
+                  </a:lnTo>
+                  <a:lnTo>
+                    <a:pt x="2077053" y="744404"/>
+                  </a:lnTo>
+                  <a:lnTo>
+                    <a:pt x="2005430" y="767057"/>
+                  </a:lnTo>
+                  <a:lnTo>
+                    <a:pt x="1933808" y="788268"/>
+                  </a:lnTo>
+                  <a:lnTo>
+                    <a:pt x="1862185" y="808128"/>
+                  </a:lnTo>
+                  <a:lnTo>
+                    <a:pt x="1790563" y="826723"/>
+                  </a:lnTo>
+                  <a:lnTo>
+                    <a:pt x="1718940" y="844134"/>
+                  </a:lnTo>
+                  <a:lnTo>
+                    <a:pt x="1647318" y="860436"/>
+                  </a:lnTo>
+                  <a:lnTo>
+                    <a:pt x="1575695" y="875700"/>
+                  </a:lnTo>
+                  <a:lnTo>
+                    <a:pt x="1504073" y="889992"/>
+                  </a:lnTo>
+                  <a:lnTo>
+                    <a:pt x="1432450" y="903373"/>
+                  </a:lnTo>
+                  <a:lnTo>
+                    <a:pt x="1360827" y="915902"/>
+                  </a:lnTo>
+                  <a:lnTo>
+                    <a:pt x="1289205" y="927634"/>
+                  </a:lnTo>
+                  <a:lnTo>
+                    <a:pt x="1217582" y="938618"/>
+                  </a:lnTo>
+                  <a:lnTo>
+                    <a:pt x="1145960" y="948903"/>
+                  </a:lnTo>
+                  <a:lnTo>
+                    <a:pt x="1074337" y="958533"/>
+                  </a:lnTo>
+                  <a:lnTo>
+                    <a:pt x="1002715" y="967549"/>
+                  </a:lnTo>
+                  <a:lnTo>
+                    <a:pt x="931092" y="975991"/>
+                  </a:lnTo>
+                  <a:lnTo>
+                    <a:pt x="859470" y="983896"/>
+                  </a:lnTo>
+                  <a:lnTo>
+                    <a:pt x="787847" y="991297"/>
+                  </a:lnTo>
+                  <a:lnTo>
+                    <a:pt x="716225" y="998227"/>
+                  </a:lnTo>
+                  <a:lnTo>
+                    <a:pt x="644602" y="1004715"/>
+                  </a:lnTo>
+                  <a:lnTo>
+                    <a:pt x="572980" y="1010790"/>
+                  </a:lnTo>
+                  <a:lnTo>
+                    <a:pt x="501357" y="1016479"/>
+                  </a:lnTo>
+                  <a:lnTo>
+                    <a:pt x="429735" y="1021805"/>
+                  </a:lnTo>
+                  <a:lnTo>
+                    <a:pt x="358112" y="1026791"/>
+                  </a:lnTo>
+                  <a:lnTo>
+                    <a:pt x="286490" y="1031461"/>
+                  </a:lnTo>
+                  <a:lnTo>
+                    <a:pt x="214867" y="1035833"/>
+                  </a:lnTo>
+                  <a:lnTo>
+                    <a:pt x="143245" y="1039926"/>
+                  </a:lnTo>
+                  <a:lnTo>
+                    <a:pt x="71622" y="1043759"/>
+                  </a:lnTo>
+                  <a:lnTo>
+                    <a:pt x="0" y="1047347"/>
                   </a:lnTo>
                 </a:path>
               </a:pathLst>
@@ -4188,233 +4212,266 @@
           <p:spPr>
             <a:xfrm>
               <a:off x="1172049" y="1896563"/>
-              <a:ext cx="5166554" cy="3542680"/>
+              <a:ext cx="5987717" cy="3456622"/>
             </a:xfrm>
             <a:custGeom>
               <a:avLst/>
               <a:pathLst>
-                <a:path w="5166554" h="3542680">
+                <a:path w="5987717" h="3456622">
                   <a:moveTo>
-                    <a:pt x="0" y="3542680"/>
+                    <a:pt x="0" y="3456622"/>
                   </a:moveTo>
                   <a:lnTo>
-                    <a:pt x="71622" y="3537208"/>
-                  </a:lnTo>
-                  <a:lnTo>
-                    <a:pt x="143245" y="3531465"/>
-                  </a:lnTo>
-                  <a:lnTo>
-                    <a:pt x="214867" y="3525435"/>
-                  </a:lnTo>
-                  <a:lnTo>
-                    <a:pt x="286490" y="3519105"/>
-                  </a:lnTo>
-                  <a:lnTo>
-                    <a:pt x="358112" y="3512461"/>
-                  </a:lnTo>
-                  <a:lnTo>
-                    <a:pt x="429735" y="3505485"/>
-                  </a:lnTo>
-                  <a:lnTo>
-                    <a:pt x="501357" y="3498163"/>
-                  </a:lnTo>
-                  <a:lnTo>
-                    <a:pt x="572980" y="3490476"/>
-                  </a:lnTo>
-                  <a:lnTo>
-                    <a:pt x="644602" y="3482407"/>
-                  </a:lnTo>
-                  <a:lnTo>
-                    <a:pt x="716225" y="3473936"/>
-                  </a:lnTo>
-                  <a:lnTo>
-                    <a:pt x="787847" y="3465044"/>
-                  </a:lnTo>
-                  <a:lnTo>
-                    <a:pt x="859470" y="3455710"/>
-                  </a:lnTo>
-                  <a:lnTo>
-                    <a:pt x="931092" y="3445911"/>
-                  </a:lnTo>
-                  <a:lnTo>
-                    <a:pt x="1002715" y="3435624"/>
-                  </a:lnTo>
-                  <a:lnTo>
-                    <a:pt x="1074337" y="3424825"/>
-                  </a:lnTo>
-                  <a:lnTo>
-                    <a:pt x="1145960" y="3413489"/>
-                  </a:lnTo>
-                  <a:lnTo>
-                    <a:pt x="1217582" y="3401590"/>
-                  </a:lnTo>
-                  <a:lnTo>
-                    <a:pt x="1289205" y="3389098"/>
-                  </a:lnTo>
-                  <a:lnTo>
-                    <a:pt x="1360827" y="3375984"/>
-                  </a:lnTo>
-                  <a:lnTo>
-                    <a:pt x="1432450" y="3362218"/>
-                  </a:lnTo>
-                  <a:lnTo>
-                    <a:pt x="1504073" y="3347767"/>
-                  </a:lnTo>
-                  <a:lnTo>
-                    <a:pt x="1575695" y="3332597"/>
-                  </a:lnTo>
-                  <a:lnTo>
-                    <a:pt x="1647318" y="3316672"/>
-                  </a:lnTo>
-                  <a:lnTo>
-                    <a:pt x="1718940" y="3299954"/>
-                  </a:lnTo>
-                  <a:lnTo>
-                    <a:pt x="1790563" y="3282405"/>
-                  </a:lnTo>
-                  <a:lnTo>
-                    <a:pt x="1862185" y="3263982"/>
-                  </a:lnTo>
-                  <a:lnTo>
-                    <a:pt x="1933808" y="3244643"/>
-                  </a:lnTo>
-                  <a:lnTo>
-                    <a:pt x="2005430" y="3224342"/>
-                  </a:lnTo>
-                  <a:lnTo>
-                    <a:pt x="2077053" y="3203030"/>
-                  </a:lnTo>
-                  <a:lnTo>
-                    <a:pt x="2148675" y="3180658"/>
-                  </a:lnTo>
-                  <a:lnTo>
-                    <a:pt x="2220298" y="3157173"/>
-                  </a:lnTo>
-                  <a:lnTo>
-                    <a:pt x="2291920" y="3132519"/>
-                  </a:lnTo>
-                  <a:lnTo>
-                    <a:pt x="2363543" y="3106639"/>
-                  </a:lnTo>
-                  <a:lnTo>
-                    <a:pt x="2435165" y="3079470"/>
-                  </a:lnTo>
-                  <a:lnTo>
-                    <a:pt x="2506788" y="3050950"/>
-                  </a:lnTo>
-                  <a:lnTo>
-                    <a:pt x="2578410" y="3021011"/>
-                  </a:lnTo>
-                  <a:lnTo>
-                    <a:pt x="2650033" y="2989582"/>
-                  </a:lnTo>
-                  <a:lnTo>
-                    <a:pt x="2721655" y="2956589"/>
-                  </a:lnTo>
-                  <a:lnTo>
-                    <a:pt x="2793278" y="2921955"/>
-                  </a:lnTo>
-                  <a:lnTo>
-                    <a:pt x="2864901" y="2885597"/>
-                  </a:lnTo>
-                  <a:lnTo>
-                    <a:pt x="2936523" y="2847430"/>
-                  </a:lnTo>
-                  <a:lnTo>
-                    <a:pt x="3008146" y="2807364"/>
-                  </a:lnTo>
-                  <a:lnTo>
-                    <a:pt x="3079768" y="2765304"/>
-                  </a:lnTo>
-                  <a:lnTo>
-                    <a:pt x="3151391" y="2721151"/>
-                  </a:lnTo>
-                  <a:lnTo>
-                    <a:pt x="3223013" y="2674802"/>
-                  </a:lnTo>
-                  <a:lnTo>
-                    <a:pt x="3294636" y="2626146"/>
-                  </a:lnTo>
-                  <a:lnTo>
-                    <a:pt x="3366258" y="2575069"/>
-                  </a:lnTo>
-                  <a:lnTo>
-                    <a:pt x="3437881" y="2521451"/>
-                  </a:lnTo>
-                  <a:lnTo>
-                    <a:pt x="3509503" y="2465165"/>
-                  </a:lnTo>
-                  <a:lnTo>
-                    <a:pt x="3581126" y="2406078"/>
-                  </a:lnTo>
-                  <a:lnTo>
-                    <a:pt x="3652748" y="2344050"/>
-                  </a:lnTo>
-                  <a:lnTo>
-                    <a:pt x="3724371" y="2278937"/>
-                  </a:lnTo>
-                  <a:lnTo>
-                    <a:pt x="3795993" y="2210584"/>
-                  </a:lnTo>
-                  <a:lnTo>
-                    <a:pt x="3867616" y="2138829"/>
-                  </a:lnTo>
-                  <a:lnTo>
-                    <a:pt x="3939238" y="2063504"/>
-                  </a:lnTo>
-                  <a:lnTo>
-                    <a:pt x="4010861" y="1984431"/>
-                  </a:lnTo>
-                  <a:lnTo>
-                    <a:pt x="4082483" y="1901424"/>
-                  </a:lnTo>
-                  <a:lnTo>
-                    <a:pt x="4154106" y="1814286"/>
-                  </a:lnTo>
-                  <a:lnTo>
-                    <a:pt x="4225729" y="1722812"/>
-                  </a:lnTo>
-                  <a:lnTo>
-                    <a:pt x="4297351" y="1626787"/>
-                  </a:lnTo>
-                  <a:lnTo>
-                    <a:pt x="4368974" y="1525984"/>
-                  </a:lnTo>
-                  <a:lnTo>
-                    <a:pt x="4440596" y="1420164"/>
-                  </a:lnTo>
-                  <a:lnTo>
-                    <a:pt x="4512219" y="1309080"/>
-                  </a:lnTo>
-                  <a:lnTo>
-                    <a:pt x="4583841" y="1192468"/>
-                  </a:lnTo>
-                  <a:lnTo>
-                    <a:pt x="4655464" y="1070054"/>
-                  </a:lnTo>
-                  <a:lnTo>
-                    <a:pt x="4727086" y="941548"/>
-                  </a:lnTo>
-                  <a:lnTo>
-                    <a:pt x="4798709" y="806649"/>
-                  </a:lnTo>
-                  <a:lnTo>
-                    <a:pt x="4870331" y="665037"/>
-                  </a:lnTo>
-                  <a:lnTo>
-                    <a:pt x="4941954" y="516378"/>
-                  </a:lnTo>
-                  <a:lnTo>
-                    <a:pt x="5013576" y="360323"/>
-                  </a:lnTo>
-                  <a:lnTo>
-                    <a:pt x="5085199" y="196502"/>
-                  </a:lnTo>
-                  <a:lnTo>
-                    <a:pt x="5156821" y="24530"/>
-                  </a:lnTo>
-                  <a:lnTo>
-                    <a:pt x="5166554" y="0"/>
+                    <a:pt x="71622" y="3449642"/>
+                  </a:lnTo>
+                  <a:lnTo>
+                    <a:pt x="143245" y="3442414"/>
+                  </a:lnTo>
+                  <a:lnTo>
+                    <a:pt x="214867" y="3434929"/>
+                  </a:lnTo>
+                  <a:lnTo>
+                    <a:pt x="286490" y="3427178"/>
+                  </a:lnTo>
+                  <a:lnTo>
+                    <a:pt x="358112" y="3419150"/>
+                  </a:lnTo>
+                  <a:lnTo>
+                    <a:pt x="429735" y="3410836"/>
+                  </a:lnTo>
+                  <a:lnTo>
+                    <a:pt x="501357" y="3402227"/>
+                  </a:lnTo>
+                  <a:lnTo>
+                    <a:pt x="572980" y="3393311"/>
+                  </a:lnTo>
+                  <a:lnTo>
+                    <a:pt x="644602" y="3384077"/>
+                  </a:lnTo>
+                  <a:lnTo>
+                    <a:pt x="716225" y="3374515"/>
+                  </a:lnTo>
+                  <a:lnTo>
+                    <a:pt x="787847" y="3364613"/>
+                  </a:lnTo>
+                  <a:lnTo>
+                    <a:pt x="859470" y="3354357"/>
+                  </a:lnTo>
+                  <a:lnTo>
+                    <a:pt x="931092" y="3343737"/>
+                  </a:lnTo>
+                  <a:lnTo>
+                    <a:pt x="1002715" y="3332738"/>
+                  </a:lnTo>
+                  <a:lnTo>
+                    <a:pt x="1074337" y="3321348"/>
+                  </a:lnTo>
+                  <a:lnTo>
+                    <a:pt x="1145960" y="3309552"/>
+                  </a:lnTo>
+                  <a:lnTo>
+                    <a:pt x="1217582" y="3297337"/>
+                  </a:lnTo>
+                  <a:lnTo>
+                    <a:pt x="1289205" y="3284686"/>
+                  </a:lnTo>
+                  <a:lnTo>
+                    <a:pt x="1360827" y="3271585"/>
+                  </a:lnTo>
+                  <a:lnTo>
+                    <a:pt x="1432450" y="3258018"/>
+                  </a:lnTo>
+                  <a:lnTo>
+                    <a:pt x="1504073" y="3243967"/>
+                  </a:lnTo>
+                  <a:lnTo>
+                    <a:pt x="1575695" y="3229416"/>
+                  </a:lnTo>
+                  <a:lnTo>
+                    <a:pt x="1647318" y="3214347"/>
+                  </a:lnTo>
+                  <a:lnTo>
+                    <a:pt x="1718940" y="3198742"/>
+                  </a:lnTo>
+                  <a:lnTo>
+                    <a:pt x="1790563" y="3182581"/>
+                  </a:lnTo>
+                  <a:lnTo>
+                    <a:pt x="1862185" y="3165844"/>
+                  </a:lnTo>
+                  <a:lnTo>
+                    <a:pt x="1933808" y="3148512"/>
+                  </a:lnTo>
+                  <a:lnTo>
+                    <a:pt x="2005430" y="3130562"/>
+                  </a:lnTo>
+                  <a:lnTo>
+                    <a:pt x="2077053" y="3111974"/>
+                  </a:lnTo>
+                  <a:lnTo>
+                    <a:pt x="2148675" y="3092723"/>
+                  </a:lnTo>
+                  <a:lnTo>
+                    <a:pt x="2220298" y="3072787"/>
+                  </a:lnTo>
+                  <a:lnTo>
+                    <a:pt x="2291920" y="3052142"/>
+                  </a:lnTo>
+                  <a:lnTo>
+                    <a:pt x="2363543" y="3030761"/>
+                  </a:lnTo>
+                  <a:lnTo>
+                    <a:pt x="2435165" y="3008619"/>
+                  </a:lnTo>
+                  <a:lnTo>
+                    <a:pt x="2506788" y="2985689"/>
+                  </a:lnTo>
+                  <a:lnTo>
+                    <a:pt x="2578410" y="2961942"/>
+                  </a:lnTo>
+                  <a:lnTo>
+                    <a:pt x="2650033" y="2937349"/>
+                  </a:lnTo>
+                  <a:lnTo>
+                    <a:pt x="2721655" y="2911881"/>
+                  </a:lnTo>
+                  <a:lnTo>
+                    <a:pt x="2793278" y="2885507"/>
+                  </a:lnTo>
+                  <a:lnTo>
+                    <a:pt x="2864901" y="2858193"/>
+                  </a:lnTo>
+                  <a:lnTo>
+                    <a:pt x="2936523" y="2829907"/>
+                  </a:lnTo>
+                  <a:lnTo>
+                    <a:pt x="3008146" y="2800613"/>
+                  </a:lnTo>
+                  <a:lnTo>
+                    <a:pt x="3079768" y="2770277"/>
+                  </a:lnTo>
+                  <a:lnTo>
+                    <a:pt x="3151391" y="2738861"/>
+                  </a:lnTo>
+                  <a:lnTo>
+                    <a:pt x="3223013" y="2706325"/>
+                  </a:lnTo>
+                  <a:lnTo>
+                    <a:pt x="3294636" y="2672632"/>
+                  </a:lnTo>
+                  <a:lnTo>
+                    <a:pt x="3366258" y="2637739"/>
+                  </a:lnTo>
+                  <a:lnTo>
+                    <a:pt x="3437881" y="2601603"/>
+                  </a:lnTo>
+                  <a:lnTo>
+                    <a:pt x="3509503" y="2564181"/>
+                  </a:lnTo>
+                  <a:lnTo>
+                    <a:pt x="3581126" y="2525427"/>
+                  </a:lnTo>
+                  <a:lnTo>
+                    <a:pt x="3652748" y="2485292"/>
+                  </a:lnTo>
+                  <a:lnTo>
+                    <a:pt x="3724371" y="2443729"/>
+                  </a:lnTo>
+                  <a:lnTo>
+                    <a:pt x="3795993" y="2400686"/>
+                  </a:lnTo>
+                  <a:lnTo>
+                    <a:pt x="3867616" y="2356110"/>
+                  </a:lnTo>
+                  <a:lnTo>
+                    <a:pt x="3939238" y="2309947"/>
+                  </a:lnTo>
+                  <a:lnTo>
+                    <a:pt x="4010861" y="2262141"/>
+                  </a:lnTo>
+                  <a:lnTo>
+                    <a:pt x="4082483" y="2212632"/>
+                  </a:lnTo>
+                  <a:lnTo>
+                    <a:pt x="4154106" y="2161361"/>
+                  </a:lnTo>
+                  <a:lnTo>
+                    <a:pt x="4225729" y="2108264"/>
+                  </a:lnTo>
+                  <a:lnTo>
+                    <a:pt x="4297351" y="2053277"/>
+                  </a:lnTo>
+                  <a:lnTo>
+                    <a:pt x="4368974" y="1996332"/>
+                  </a:lnTo>
+                  <a:lnTo>
+                    <a:pt x="4440596" y="1937359"/>
+                  </a:lnTo>
+                  <a:lnTo>
+                    <a:pt x="4512219" y="1876287"/>
+                  </a:lnTo>
+                  <a:lnTo>
+                    <a:pt x="4583841" y="1813040"/>
+                  </a:lnTo>
+                  <a:lnTo>
+                    <a:pt x="4655464" y="1747541"/>
+                  </a:lnTo>
+                  <a:lnTo>
+                    <a:pt x="4727086" y="1679710"/>
+                  </a:lnTo>
+                  <a:lnTo>
+                    <a:pt x="4798709" y="1609464"/>
+                  </a:lnTo>
+                  <a:lnTo>
+                    <a:pt x="4870331" y="1536717"/>
+                  </a:lnTo>
+                  <a:lnTo>
+                    <a:pt x="4941954" y="1461380"/>
+                  </a:lnTo>
+                  <a:lnTo>
+                    <a:pt x="5013576" y="1383361"/>
+                  </a:lnTo>
+                  <a:lnTo>
+                    <a:pt x="5085199" y="1302563"/>
+                  </a:lnTo>
+                  <a:lnTo>
+                    <a:pt x="5156821" y="1218889"/>
+                  </a:lnTo>
+                  <a:lnTo>
+                    <a:pt x="5228444" y="1132236"/>
+                  </a:lnTo>
+                  <a:lnTo>
+                    <a:pt x="5300066" y="1042497"/>
+                  </a:lnTo>
+                  <a:lnTo>
+                    <a:pt x="5371689" y="949563"/>
+                  </a:lnTo>
+                  <a:lnTo>
+                    <a:pt x="5443311" y="853320"/>
+                  </a:lnTo>
+                  <a:lnTo>
+                    <a:pt x="5514934" y="753651"/>
+                  </a:lnTo>
+                  <a:lnTo>
+                    <a:pt x="5586557" y="650433"/>
+                  </a:lnTo>
+                  <a:lnTo>
+                    <a:pt x="5658179" y="543540"/>
+                  </a:lnTo>
+                  <a:lnTo>
+                    <a:pt x="5729802" y="432841"/>
+                  </a:lnTo>
+                  <a:lnTo>
+                    <a:pt x="5801424" y="318200"/>
+                  </a:lnTo>
+                  <a:lnTo>
+                    <a:pt x="5873047" y="199478"/>
+                  </a:lnTo>
+                  <a:lnTo>
+                    <a:pt x="5944669" y="76529"/>
+                  </a:lnTo>
+                  <a:lnTo>
+                    <a:pt x="5987717" y="0"/>
                   </a:lnTo>
                 </a:path>
               </a:pathLst>

--- a/docs/plots/carbo/jx_carbo_linsubhr_dosedisc_death.pptx
+++ b/docs/plots/carbo/jx_carbo_linsubhr_dosedisc_death.pptx
@@ -3132,512 +3132,503 @@
           <p:spPr>
             <a:xfrm>
               <a:off x="1172049" y="1896563"/>
-              <a:ext cx="7090630" cy="3599883"/>
+              <a:ext cx="7090630" cy="3617208"/>
             </a:xfrm>
             <a:custGeom>
               <a:avLst/>
               <a:pathLst>
-                <a:path w="7090630" h="3599883">
+                <a:path w="7090630" h="3617208">
                   <a:moveTo>
-                    <a:pt x="0" y="2924358"/>
+                    <a:pt x="0" y="3096595"/>
                   </a:moveTo>
                   <a:lnTo>
-                    <a:pt x="71622" y="2921317"/>
-                  </a:lnTo>
-                  <a:lnTo>
-                    <a:pt x="143245" y="2918264"/>
-                  </a:lnTo>
-                  <a:lnTo>
-                    <a:pt x="214867" y="2915198"/>
-                  </a:lnTo>
-                  <a:lnTo>
-                    <a:pt x="286490" y="2912119"/>
-                  </a:lnTo>
-                  <a:lnTo>
-                    <a:pt x="358112" y="2909027"/>
-                  </a:lnTo>
-                  <a:lnTo>
-                    <a:pt x="429735" y="2905923"/>
-                  </a:lnTo>
-                  <a:lnTo>
-                    <a:pt x="501357" y="2902805"/>
-                  </a:lnTo>
-                  <a:lnTo>
-                    <a:pt x="572980" y="2899674"/>
-                  </a:lnTo>
-                  <a:lnTo>
-                    <a:pt x="644602" y="2896531"/>
-                  </a:lnTo>
-                  <a:lnTo>
-                    <a:pt x="716225" y="2893374"/>
-                  </a:lnTo>
-                  <a:lnTo>
-                    <a:pt x="787847" y="2890204"/>
-                  </a:lnTo>
-                  <a:lnTo>
-                    <a:pt x="859470" y="2887021"/>
-                  </a:lnTo>
-                  <a:lnTo>
-                    <a:pt x="931092" y="2883824"/>
-                  </a:lnTo>
-                  <a:lnTo>
-                    <a:pt x="1002715" y="2880614"/>
-                  </a:lnTo>
-                  <a:lnTo>
-                    <a:pt x="1074337" y="2877391"/>
-                  </a:lnTo>
-                  <a:lnTo>
-                    <a:pt x="1145960" y="2874154"/>
-                  </a:lnTo>
-                  <a:lnTo>
-                    <a:pt x="1217582" y="2870904"/>
-                  </a:lnTo>
-                  <a:lnTo>
-                    <a:pt x="1289205" y="2867640"/>
-                  </a:lnTo>
-                  <a:lnTo>
-                    <a:pt x="1360827" y="2864363"/>
-                  </a:lnTo>
-                  <a:lnTo>
-                    <a:pt x="1432450" y="2861072"/>
-                  </a:lnTo>
-                  <a:lnTo>
-                    <a:pt x="1504073" y="2857767"/>
-                  </a:lnTo>
-                  <a:lnTo>
-                    <a:pt x="1575695" y="2854448"/>
-                  </a:lnTo>
-                  <a:lnTo>
-                    <a:pt x="1647318" y="2851116"/>
-                  </a:lnTo>
-                  <a:lnTo>
-                    <a:pt x="1718940" y="2847769"/>
-                  </a:lnTo>
-                  <a:lnTo>
-                    <a:pt x="1790563" y="2844409"/>
-                  </a:lnTo>
-                  <a:lnTo>
-                    <a:pt x="1862185" y="2841034"/>
-                  </a:lnTo>
-                  <a:lnTo>
-                    <a:pt x="1933808" y="2837646"/>
-                  </a:lnTo>
-                  <a:lnTo>
-                    <a:pt x="2005430" y="2834243"/>
-                  </a:lnTo>
-                  <a:lnTo>
-                    <a:pt x="2077053" y="2830826"/>
-                  </a:lnTo>
-                  <a:lnTo>
-                    <a:pt x="2148675" y="2827395"/>
-                  </a:lnTo>
-                  <a:lnTo>
-                    <a:pt x="2220298" y="2823950"/>
-                  </a:lnTo>
-                  <a:lnTo>
-                    <a:pt x="2291920" y="2820490"/>
-                  </a:lnTo>
-                  <a:lnTo>
-                    <a:pt x="2363543" y="2817016"/>
-                  </a:lnTo>
-                  <a:lnTo>
-                    <a:pt x="2435165" y="2813527"/>
-                  </a:lnTo>
-                  <a:lnTo>
-                    <a:pt x="2506788" y="2810023"/>
-                  </a:lnTo>
-                  <a:lnTo>
-                    <a:pt x="2578410" y="2806505"/>
-                  </a:lnTo>
-                  <a:lnTo>
-                    <a:pt x="2650033" y="2802973"/>
-                  </a:lnTo>
-                  <a:lnTo>
-                    <a:pt x="2721655" y="2799425"/>
-                  </a:lnTo>
-                  <a:lnTo>
-                    <a:pt x="2793278" y="2795863"/>
-                  </a:lnTo>
-                  <a:lnTo>
-                    <a:pt x="2864901" y="2792286"/>
-                  </a:lnTo>
-                  <a:lnTo>
-                    <a:pt x="2936523" y="2788694"/>
-                  </a:lnTo>
-                  <a:lnTo>
-                    <a:pt x="3008146" y="2785087"/>
-                  </a:lnTo>
-                  <a:lnTo>
-                    <a:pt x="3079768" y="2758946"/>
-                  </a:lnTo>
-                  <a:lnTo>
-                    <a:pt x="3151391" y="2698158"/>
-                  </a:lnTo>
-                  <a:lnTo>
-                    <a:pt x="3223013" y="2633235"/>
-                  </a:lnTo>
-                  <a:lnTo>
-                    <a:pt x="3294636" y="2563897"/>
-                  </a:lnTo>
-                  <a:lnTo>
-                    <a:pt x="3366258" y="2489842"/>
-                  </a:lnTo>
-                  <a:lnTo>
-                    <a:pt x="3437881" y="2410751"/>
-                  </a:lnTo>
-                  <a:lnTo>
-                    <a:pt x="3509503" y="2326279"/>
-                  </a:lnTo>
-                  <a:lnTo>
-                    <a:pt x="3581126" y="2236062"/>
-                  </a:lnTo>
-                  <a:lnTo>
-                    <a:pt x="3652748" y="2139709"/>
-                  </a:lnTo>
-                  <a:lnTo>
-                    <a:pt x="3724371" y="2036801"/>
-                  </a:lnTo>
-                  <a:lnTo>
-                    <a:pt x="3795993" y="1926895"/>
-                  </a:lnTo>
-                  <a:lnTo>
-                    <a:pt x="3867616" y="1809512"/>
-                  </a:lnTo>
-                  <a:lnTo>
-                    <a:pt x="3939238" y="1684145"/>
-                  </a:lnTo>
-                  <a:lnTo>
-                    <a:pt x="4010861" y="1550252"/>
-                  </a:lnTo>
-                  <a:lnTo>
-                    <a:pt x="4082483" y="1407250"/>
-                  </a:lnTo>
-                  <a:lnTo>
-                    <a:pt x="4154106" y="1254523"/>
-                  </a:lnTo>
-                  <a:lnTo>
-                    <a:pt x="4225729" y="1091407"/>
-                  </a:lnTo>
-                  <a:lnTo>
-                    <a:pt x="4297351" y="917196"/>
-                  </a:lnTo>
-                  <a:lnTo>
-                    <a:pt x="4368974" y="731135"/>
-                  </a:lnTo>
-                  <a:lnTo>
-                    <a:pt x="4440596" y="532419"/>
-                  </a:lnTo>
-                  <a:lnTo>
-                    <a:pt x="4512219" y="320187"/>
-                  </a:lnTo>
-                  <a:lnTo>
-                    <a:pt x="4583841" y="93519"/>
-                  </a:lnTo>
-                  <a:lnTo>
-                    <a:pt x="4611509" y="0"/>
+                    <a:pt x="71622" y="3090724"/>
+                  </a:lnTo>
+                  <a:lnTo>
+                    <a:pt x="143245" y="3084791"/>
+                  </a:lnTo>
+                  <a:lnTo>
+                    <a:pt x="214867" y="3078796"/>
+                  </a:lnTo>
+                  <a:lnTo>
+                    <a:pt x="286490" y="3072737"/>
+                  </a:lnTo>
+                  <a:lnTo>
+                    <a:pt x="358112" y="3066614"/>
+                  </a:lnTo>
+                  <a:lnTo>
+                    <a:pt x="429735" y="3060427"/>
+                  </a:lnTo>
+                  <a:lnTo>
+                    <a:pt x="501357" y="3054174"/>
+                  </a:lnTo>
+                  <a:lnTo>
+                    <a:pt x="572980" y="3047856"/>
+                  </a:lnTo>
+                  <a:lnTo>
+                    <a:pt x="644602" y="3041470"/>
+                  </a:lnTo>
+                  <a:lnTo>
+                    <a:pt x="716225" y="3035018"/>
+                  </a:lnTo>
+                  <a:lnTo>
+                    <a:pt x="787847" y="3028497"/>
+                  </a:lnTo>
+                  <a:lnTo>
+                    <a:pt x="859470" y="3021907"/>
+                  </a:lnTo>
+                  <a:lnTo>
+                    <a:pt x="931092" y="3015248"/>
+                  </a:lnTo>
+                  <a:lnTo>
+                    <a:pt x="1002715" y="3008518"/>
+                  </a:lnTo>
+                  <a:lnTo>
+                    <a:pt x="1074337" y="3001717"/>
+                  </a:lnTo>
+                  <a:lnTo>
+                    <a:pt x="1145960" y="2994845"/>
+                  </a:lnTo>
+                  <a:lnTo>
+                    <a:pt x="1217582" y="2987900"/>
+                  </a:lnTo>
+                  <a:lnTo>
+                    <a:pt x="1289205" y="2980881"/>
+                  </a:lnTo>
+                  <a:lnTo>
+                    <a:pt x="1360827" y="2973789"/>
+                  </a:lnTo>
+                  <a:lnTo>
+                    <a:pt x="1432450" y="2966622"/>
+                  </a:lnTo>
+                  <a:lnTo>
+                    <a:pt x="1504073" y="2959379"/>
+                  </a:lnTo>
+                  <a:lnTo>
+                    <a:pt x="1575695" y="2952059"/>
+                  </a:lnTo>
+                  <a:lnTo>
+                    <a:pt x="1647318" y="2944662"/>
+                  </a:lnTo>
+                  <a:lnTo>
+                    <a:pt x="1718940" y="2937187"/>
+                  </a:lnTo>
+                  <a:lnTo>
+                    <a:pt x="1790563" y="2929634"/>
+                  </a:lnTo>
+                  <a:lnTo>
+                    <a:pt x="1862185" y="2922000"/>
+                  </a:lnTo>
+                  <a:lnTo>
+                    <a:pt x="1933808" y="2914286"/>
+                  </a:lnTo>
+                  <a:lnTo>
+                    <a:pt x="2005430" y="2906490"/>
+                  </a:lnTo>
+                  <a:lnTo>
+                    <a:pt x="2077053" y="2898613"/>
+                  </a:lnTo>
+                  <a:lnTo>
+                    <a:pt x="2148675" y="2890651"/>
+                  </a:lnTo>
+                  <a:lnTo>
+                    <a:pt x="2220298" y="2882606"/>
+                  </a:lnTo>
+                  <a:lnTo>
+                    <a:pt x="2291920" y="2874476"/>
+                  </a:lnTo>
+                  <a:lnTo>
+                    <a:pt x="2363543" y="2866260"/>
+                  </a:lnTo>
+                  <a:lnTo>
+                    <a:pt x="2435165" y="2857958"/>
+                  </a:lnTo>
+                  <a:lnTo>
+                    <a:pt x="2506788" y="2849567"/>
+                  </a:lnTo>
+                  <a:lnTo>
+                    <a:pt x="2578410" y="2841089"/>
+                  </a:lnTo>
+                  <a:lnTo>
+                    <a:pt x="2650033" y="2832520"/>
+                  </a:lnTo>
+                  <a:lnTo>
+                    <a:pt x="2721655" y="2823861"/>
+                  </a:lnTo>
+                  <a:lnTo>
+                    <a:pt x="2793278" y="2815111"/>
+                  </a:lnTo>
+                  <a:lnTo>
+                    <a:pt x="2864901" y="2806268"/>
+                  </a:lnTo>
+                  <a:lnTo>
+                    <a:pt x="2936523" y="2797332"/>
+                  </a:lnTo>
+                  <a:lnTo>
+                    <a:pt x="3008146" y="2788302"/>
+                  </a:lnTo>
+                  <a:lnTo>
+                    <a:pt x="3079768" y="2755480"/>
+                  </a:lnTo>
+                  <a:lnTo>
+                    <a:pt x="3151391" y="2685458"/>
+                  </a:lnTo>
+                  <a:lnTo>
+                    <a:pt x="3223013" y="2609971"/>
+                  </a:lnTo>
+                  <a:lnTo>
+                    <a:pt x="3294636" y="2528593"/>
+                  </a:lnTo>
+                  <a:lnTo>
+                    <a:pt x="3366258" y="2440863"/>
+                  </a:lnTo>
+                  <a:lnTo>
+                    <a:pt x="3437881" y="2346285"/>
+                  </a:lnTo>
+                  <a:lnTo>
+                    <a:pt x="3509503" y="2244327"/>
+                  </a:lnTo>
+                  <a:lnTo>
+                    <a:pt x="3581126" y="2134410"/>
+                  </a:lnTo>
+                  <a:lnTo>
+                    <a:pt x="3652748" y="2015915"/>
+                  </a:lnTo>
+                  <a:lnTo>
+                    <a:pt x="3724371" y="1888171"/>
+                  </a:lnTo>
+                  <a:lnTo>
+                    <a:pt x="3795993" y="1750457"/>
+                  </a:lnTo>
+                  <a:lnTo>
+                    <a:pt x="3867616" y="1601995"/>
+                  </a:lnTo>
+                  <a:lnTo>
+                    <a:pt x="3939238" y="1441946"/>
+                  </a:lnTo>
+                  <a:lnTo>
+                    <a:pt x="4010861" y="1269405"/>
+                  </a:lnTo>
+                  <a:lnTo>
+                    <a:pt x="4082483" y="1083398"/>
+                  </a:lnTo>
+                  <a:lnTo>
+                    <a:pt x="4154106" y="882873"/>
+                  </a:lnTo>
+                  <a:lnTo>
+                    <a:pt x="4225729" y="666697"/>
+                  </a:lnTo>
+                  <a:lnTo>
+                    <a:pt x="4297351" y="433650"/>
+                  </a:lnTo>
+                  <a:lnTo>
+                    <a:pt x="4368974" y="182413"/>
+                  </a:lnTo>
+                  <a:lnTo>
+                    <a:pt x="4417211" y="0"/>
                   </a:lnTo>
                   <a:lnTo>
                     <a:pt x="7090630" y="0"/>
                   </a:lnTo>
                   <a:lnTo>
-                    <a:pt x="7090630" y="2552535"/>
-                  </a:lnTo>
-                  <a:lnTo>
-                    <a:pt x="7019007" y="2557109"/>
-                  </a:lnTo>
-                  <a:lnTo>
-                    <a:pt x="6947385" y="2561664"/>
-                  </a:lnTo>
-                  <a:lnTo>
-                    <a:pt x="6875762" y="2566200"/>
-                  </a:lnTo>
-                  <a:lnTo>
-                    <a:pt x="6804139" y="2570717"/>
-                  </a:lnTo>
-                  <a:lnTo>
-                    <a:pt x="6732517" y="2575215"/>
-                  </a:lnTo>
-                  <a:lnTo>
-                    <a:pt x="6660894" y="2579695"/>
-                  </a:lnTo>
-                  <a:lnTo>
-                    <a:pt x="6589272" y="2584156"/>
-                  </a:lnTo>
-                  <a:lnTo>
-                    <a:pt x="6517649" y="2588598"/>
-                  </a:lnTo>
-                  <a:lnTo>
-                    <a:pt x="6446027" y="2593022"/>
-                  </a:lnTo>
-                  <a:lnTo>
-                    <a:pt x="6374404" y="2597428"/>
-                  </a:lnTo>
-                  <a:lnTo>
-                    <a:pt x="6302782" y="2601815"/>
-                  </a:lnTo>
-                  <a:lnTo>
-                    <a:pt x="6231159" y="2606184"/>
-                  </a:lnTo>
-                  <a:lnTo>
-                    <a:pt x="6159537" y="2610535"/>
-                  </a:lnTo>
-                  <a:lnTo>
-                    <a:pt x="6087914" y="2614868"/>
-                  </a:lnTo>
-                  <a:lnTo>
-                    <a:pt x="6016292" y="2619183"/>
-                  </a:lnTo>
-                  <a:lnTo>
-                    <a:pt x="5944669" y="2623480"/>
-                  </a:lnTo>
-                  <a:lnTo>
-                    <a:pt x="5873047" y="2627758"/>
-                  </a:lnTo>
-                  <a:lnTo>
-                    <a:pt x="5801424" y="2632020"/>
-                  </a:lnTo>
-                  <a:lnTo>
-                    <a:pt x="5729802" y="2636263"/>
-                  </a:lnTo>
-                  <a:lnTo>
-                    <a:pt x="5658179" y="2640489"/>
-                  </a:lnTo>
-                  <a:lnTo>
-                    <a:pt x="5586557" y="2644697"/>
-                  </a:lnTo>
-                  <a:lnTo>
-                    <a:pt x="5514934" y="2648888"/>
-                  </a:lnTo>
-                  <a:lnTo>
-                    <a:pt x="5443311" y="2653061"/>
-                  </a:lnTo>
-                  <a:lnTo>
-                    <a:pt x="5371689" y="2657217"/>
-                  </a:lnTo>
-                  <a:lnTo>
-                    <a:pt x="5300066" y="2661356"/>
-                  </a:lnTo>
-                  <a:lnTo>
-                    <a:pt x="5228444" y="2665477"/>
-                  </a:lnTo>
-                  <a:lnTo>
-                    <a:pt x="5156821" y="2669582"/>
-                  </a:lnTo>
-                  <a:lnTo>
-                    <a:pt x="5085199" y="2673669"/>
-                  </a:lnTo>
-                  <a:lnTo>
-                    <a:pt x="5013576" y="2677739"/>
-                  </a:lnTo>
-                  <a:lnTo>
-                    <a:pt x="4941954" y="2681793"/>
-                  </a:lnTo>
-                  <a:lnTo>
-                    <a:pt x="4870331" y="2685829"/>
-                  </a:lnTo>
-                  <a:lnTo>
-                    <a:pt x="4798709" y="2689849"/>
-                  </a:lnTo>
-                  <a:lnTo>
-                    <a:pt x="4727086" y="2693852"/>
-                  </a:lnTo>
-                  <a:lnTo>
-                    <a:pt x="4655464" y="2697838"/>
-                  </a:lnTo>
-                  <a:lnTo>
-                    <a:pt x="4583841" y="2701808"/>
-                  </a:lnTo>
-                  <a:lnTo>
-                    <a:pt x="4512219" y="2705761"/>
-                  </a:lnTo>
-                  <a:lnTo>
-                    <a:pt x="4440596" y="2709698"/>
-                  </a:lnTo>
-                  <a:lnTo>
-                    <a:pt x="4368974" y="2713619"/>
-                  </a:lnTo>
-                  <a:lnTo>
-                    <a:pt x="4297351" y="2717523"/>
-                  </a:lnTo>
-                  <a:lnTo>
-                    <a:pt x="4225729" y="2721411"/>
-                  </a:lnTo>
-                  <a:lnTo>
-                    <a:pt x="4154106" y="2725283"/>
-                  </a:lnTo>
-                  <a:lnTo>
-                    <a:pt x="4082483" y="2729138"/>
-                  </a:lnTo>
-                  <a:lnTo>
-                    <a:pt x="4010861" y="2732978"/>
-                  </a:lnTo>
-                  <a:lnTo>
-                    <a:pt x="3939238" y="2736802"/>
-                  </a:lnTo>
-                  <a:lnTo>
-                    <a:pt x="3867616" y="2740609"/>
-                  </a:lnTo>
-                  <a:lnTo>
-                    <a:pt x="3795993" y="2744401"/>
-                  </a:lnTo>
-                  <a:lnTo>
-                    <a:pt x="3724371" y="2748178"/>
-                  </a:lnTo>
-                  <a:lnTo>
-                    <a:pt x="3652748" y="2751938"/>
-                  </a:lnTo>
-                  <a:lnTo>
-                    <a:pt x="3581126" y="2755683"/>
-                  </a:lnTo>
-                  <a:lnTo>
-                    <a:pt x="3509503" y="2759412"/>
-                  </a:lnTo>
-                  <a:lnTo>
-                    <a:pt x="3437881" y="2763126"/>
-                  </a:lnTo>
-                  <a:lnTo>
-                    <a:pt x="3366258" y="2766824"/>
-                  </a:lnTo>
-                  <a:lnTo>
-                    <a:pt x="3294636" y="2770507"/>
-                  </a:lnTo>
-                  <a:lnTo>
-                    <a:pt x="3223013" y="2774175"/>
-                  </a:lnTo>
-                  <a:lnTo>
-                    <a:pt x="3151391" y="2777827"/>
-                  </a:lnTo>
-                  <a:lnTo>
-                    <a:pt x="3079768" y="2781465"/>
-                  </a:lnTo>
-                  <a:lnTo>
-                    <a:pt x="3008146" y="2815862"/>
-                  </a:lnTo>
-                  <a:lnTo>
-                    <a:pt x="2936523" y="2869154"/>
-                  </a:lnTo>
-                  <a:lnTo>
-                    <a:pt x="2864901" y="2919051"/>
-                  </a:lnTo>
-                  <a:lnTo>
-                    <a:pt x="2793278" y="2965771"/>
-                  </a:lnTo>
-                  <a:lnTo>
-                    <a:pt x="2721655" y="3009516"/>
-                  </a:lnTo>
-                  <a:lnTo>
-                    <a:pt x="2650033" y="3050474"/>
-                  </a:lnTo>
-                  <a:lnTo>
-                    <a:pt x="2578410" y="3088824"/>
-                  </a:lnTo>
-                  <a:lnTo>
-                    <a:pt x="2506788" y="3124732"/>
-                  </a:lnTo>
-                  <a:lnTo>
-                    <a:pt x="2435165" y="3158353"/>
-                  </a:lnTo>
-                  <a:lnTo>
-                    <a:pt x="2363543" y="3189832"/>
-                  </a:lnTo>
-                  <a:lnTo>
-                    <a:pt x="2291920" y="3219307"/>
-                  </a:lnTo>
-                  <a:lnTo>
-                    <a:pt x="2220298" y="3246905"/>
-                  </a:lnTo>
-                  <a:lnTo>
-                    <a:pt x="2148675" y="3272745"/>
-                  </a:lnTo>
-                  <a:lnTo>
-                    <a:pt x="2077053" y="3296939"/>
-                  </a:lnTo>
-                  <a:lnTo>
-                    <a:pt x="2005430" y="3319593"/>
-                  </a:lnTo>
-                  <a:lnTo>
-                    <a:pt x="1933808" y="3340804"/>
-                  </a:lnTo>
-                  <a:lnTo>
-                    <a:pt x="1862185" y="3360664"/>
-                  </a:lnTo>
-                  <a:lnTo>
-                    <a:pt x="1790563" y="3379259"/>
-                  </a:lnTo>
-                  <a:lnTo>
-                    <a:pt x="1718940" y="3396670"/>
-                  </a:lnTo>
-                  <a:lnTo>
-                    <a:pt x="1647318" y="3412972"/>
-                  </a:lnTo>
-                  <a:lnTo>
-                    <a:pt x="1575695" y="3428235"/>
-                  </a:lnTo>
-                  <a:lnTo>
-                    <a:pt x="1504073" y="3442527"/>
-                  </a:lnTo>
-                  <a:lnTo>
-                    <a:pt x="1432450" y="3455909"/>
-                  </a:lnTo>
-                  <a:lnTo>
-                    <a:pt x="1360827" y="3468438"/>
-                  </a:lnTo>
-                  <a:lnTo>
-                    <a:pt x="1289205" y="3480169"/>
-                  </a:lnTo>
-                  <a:lnTo>
-                    <a:pt x="1217582" y="3491154"/>
-                  </a:lnTo>
-                  <a:lnTo>
-                    <a:pt x="1145960" y="3501438"/>
-                  </a:lnTo>
-                  <a:lnTo>
-                    <a:pt x="1074337" y="3511068"/>
-                  </a:lnTo>
-                  <a:lnTo>
-                    <a:pt x="1002715" y="3520085"/>
-                  </a:lnTo>
-                  <a:lnTo>
-                    <a:pt x="931092" y="3528527"/>
-                  </a:lnTo>
-                  <a:lnTo>
-                    <a:pt x="859470" y="3536431"/>
-                  </a:lnTo>
-                  <a:lnTo>
-                    <a:pt x="787847" y="3543832"/>
-                  </a:lnTo>
-                  <a:lnTo>
-                    <a:pt x="716225" y="3550762"/>
-                  </a:lnTo>
-                  <a:lnTo>
-                    <a:pt x="644602" y="3557251"/>
-                  </a:lnTo>
-                  <a:lnTo>
-                    <a:pt x="572980" y="3563326"/>
-                  </a:lnTo>
-                  <a:lnTo>
-                    <a:pt x="501357" y="3569014"/>
-                  </a:lnTo>
-                  <a:lnTo>
-                    <a:pt x="429735" y="3574340"/>
-                  </a:lnTo>
-                  <a:lnTo>
-                    <a:pt x="358112" y="3579327"/>
-                  </a:lnTo>
-                  <a:lnTo>
-                    <a:pt x="286490" y="3583996"/>
-                  </a:lnTo>
-                  <a:lnTo>
-                    <a:pt x="214867" y="3588368"/>
-                  </a:lnTo>
-                  <a:lnTo>
-                    <a:pt x="143245" y="3592462"/>
-                  </a:lnTo>
-                  <a:lnTo>
-                    <a:pt x="71622" y="3596294"/>
-                  </a:lnTo>
-                  <a:lnTo>
-                    <a:pt x="0" y="3599883"/>
+                    <a:pt x="7090630" y="2079833"/>
+                  </a:lnTo>
+                  <a:lnTo>
+                    <a:pt x="7019007" y="2096265"/>
+                  </a:lnTo>
+                  <a:lnTo>
+                    <a:pt x="6947385" y="2112525"/>
+                  </a:lnTo>
+                  <a:lnTo>
+                    <a:pt x="6875762" y="2128616"/>
+                  </a:lnTo>
+                  <a:lnTo>
+                    <a:pt x="6804139" y="2144539"/>
+                  </a:lnTo>
+                  <a:lnTo>
+                    <a:pt x="6732517" y="2160295"/>
+                  </a:lnTo>
+                  <a:lnTo>
+                    <a:pt x="6660894" y="2175887"/>
+                  </a:lnTo>
+                  <a:lnTo>
+                    <a:pt x="6589272" y="2191315"/>
+                  </a:lnTo>
+                  <a:lnTo>
+                    <a:pt x="6517649" y="2206583"/>
+                  </a:lnTo>
+                  <a:lnTo>
+                    <a:pt x="6446027" y="2221691"/>
+                  </a:lnTo>
+                  <a:lnTo>
+                    <a:pt x="6374404" y="2236641"/>
+                  </a:lnTo>
+                  <a:lnTo>
+                    <a:pt x="6302782" y="2251435"/>
+                  </a:lnTo>
+                  <a:lnTo>
+                    <a:pt x="6231159" y="2266074"/>
+                  </a:lnTo>
+                  <a:lnTo>
+                    <a:pt x="6159537" y="2280561"/>
+                  </a:lnTo>
+                  <a:lnTo>
+                    <a:pt x="6087914" y="2294896"/>
+                  </a:lnTo>
+                  <a:lnTo>
+                    <a:pt x="6016292" y="2309081"/>
+                  </a:lnTo>
+                  <a:lnTo>
+                    <a:pt x="5944669" y="2323118"/>
+                  </a:lnTo>
+                  <a:lnTo>
+                    <a:pt x="5873047" y="2337009"/>
+                  </a:lnTo>
+                  <a:lnTo>
+                    <a:pt x="5801424" y="2350754"/>
+                  </a:lnTo>
+                  <a:lnTo>
+                    <a:pt x="5729802" y="2364356"/>
+                  </a:lnTo>
+                  <a:lnTo>
+                    <a:pt x="5658179" y="2377816"/>
+                  </a:lnTo>
+                  <a:lnTo>
+                    <a:pt x="5586557" y="2391135"/>
+                  </a:lnTo>
+                  <a:lnTo>
+                    <a:pt x="5514934" y="2404315"/>
+                  </a:lnTo>
+                  <a:lnTo>
+                    <a:pt x="5443311" y="2417357"/>
+                  </a:lnTo>
+                  <a:lnTo>
+                    <a:pt x="5371689" y="2430263"/>
+                  </a:lnTo>
+                  <a:lnTo>
+                    <a:pt x="5300066" y="2443034"/>
+                  </a:lnTo>
+                  <a:lnTo>
+                    <a:pt x="5228444" y="2455671"/>
+                  </a:lnTo>
+                  <a:lnTo>
+                    <a:pt x="5156821" y="2468177"/>
+                  </a:lnTo>
+                  <a:lnTo>
+                    <a:pt x="5085199" y="2480552"/>
+                  </a:lnTo>
+                  <a:lnTo>
+                    <a:pt x="5013576" y="2492798"/>
+                  </a:lnTo>
+                  <a:lnTo>
+                    <a:pt x="4941954" y="2504915"/>
+                  </a:lnTo>
+                  <a:lnTo>
+                    <a:pt x="4870331" y="2516906"/>
+                  </a:lnTo>
+                  <a:lnTo>
+                    <a:pt x="4798709" y="2528772"/>
+                  </a:lnTo>
+                  <a:lnTo>
+                    <a:pt x="4727086" y="2540514"/>
+                  </a:lnTo>
+                  <a:lnTo>
+                    <a:pt x="4655464" y="2552133"/>
+                  </a:lnTo>
+                  <a:lnTo>
+                    <a:pt x="4583841" y="2563631"/>
+                  </a:lnTo>
+                  <a:lnTo>
+                    <a:pt x="4512219" y="2575009"/>
+                  </a:lnTo>
+                  <a:lnTo>
+                    <a:pt x="4440596" y="2586268"/>
+                  </a:lnTo>
+                  <a:lnTo>
+                    <a:pt x="4368974" y="2597409"/>
+                  </a:lnTo>
+                  <a:lnTo>
+                    <a:pt x="4297351" y="2608433"/>
+                  </a:lnTo>
+                  <a:lnTo>
+                    <a:pt x="4225729" y="2619343"/>
+                  </a:lnTo>
+                  <a:lnTo>
+                    <a:pt x="4154106" y="2630139"/>
+                  </a:lnTo>
+                  <a:lnTo>
+                    <a:pt x="4082483" y="2640822"/>
+                  </a:lnTo>
+                  <a:lnTo>
+                    <a:pt x="4010861" y="2651393"/>
+                  </a:lnTo>
+                  <a:lnTo>
+                    <a:pt x="3939238" y="2661853"/>
+                  </a:lnTo>
+                  <a:lnTo>
+                    <a:pt x="3867616" y="2672205"/>
+                  </a:lnTo>
+                  <a:lnTo>
+                    <a:pt x="3795993" y="2682448"/>
+                  </a:lnTo>
+                  <a:lnTo>
+                    <a:pt x="3724371" y="2692585"/>
+                  </a:lnTo>
+                  <a:lnTo>
+                    <a:pt x="3652748" y="2702615"/>
+                  </a:lnTo>
+                  <a:lnTo>
+                    <a:pt x="3581126" y="2712541"/>
+                  </a:lnTo>
+                  <a:lnTo>
+                    <a:pt x="3509503" y="2722363"/>
+                  </a:lnTo>
+                  <a:lnTo>
+                    <a:pt x="3437881" y="2732082"/>
+                  </a:lnTo>
+                  <a:lnTo>
+                    <a:pt x="3366258" y="2741700"/>
+                  </a:lnTo>
+                  <a:lnTo>
+                    <a:pt x="3294636" y="2751217"/>
+                  </a:lnTo>
+                  <a:lnTo>
+                    <a:pt x="3223013" y="2760635"/>
+                  </a:lnTo>
+                  <a:lnTo>
+                    <a:pt x="3151391" y="2769954"/>
+                  </a:lnTo>
+                  <a:lnTo>
+                    <a:pt x="3079768" y="2779176"/>
+                  </a:lnTo>
+                  <a:lnTo>
+                    <a:pt x="3008146" y="2820433"/>
+                  </a:lnTo>
+                  <a:lnTo>
+                    <a:pt x="2936523" y="2880683"/>
+                  </a:lnTo>
+                  <a:lnTo>
+                    <a:pt x="2864901" y="2936571"/>
+                  </a:lnTo>
+                  <a:lnTo>
+                    <a:pt x="2793278" y="2988413"/>
+                  </a:lnTo>
+                  <a:lnTo>
+                    <a:pt x="2721655" y="3036502"/>
+                  </a:lnTo>
+                  <a:lnTo>
+                    <a:pt x="2650033" y="3081109"/>
+                  </a:lnTo>
+                  <a:lnTo>
+                    <a:pt x="2578410" y="3122487"/>
+                  </a:lnTo>
+                  <a:lnTo>
+                    <a:pt x="2506788" y="3160869"/>
+                  </a:lnTo>
+                  <a:lnTo>
+                    <a:pt x="2435165" y="3196472"/>
+                  </a:lnTo>
+                  <a:lnTo>
+                    <a:pt x="2363543" y="3229498"/>
+                  </a:lnTo>
+                  <a:lnTo>
+                    <a:pt x="2291920" y="3260133"/>
+                  </a:lnTo>
+                  <a:lnTo>
+                    <a:pt x="2220298" y="3288549"/>
+                  </a:lnTo>
+                  <a:lnTo>
+                    <a:pt x="2148675" y="3314909"/>
+                  </a:lnTo>
+                  <a:lnTo>
+                    <a:pt x="2077053" y="3339360"/>
+                  </a:lnTo>
+                  <a:lnTo>
+                    <a:pt x="2005430" y="3362041"/>
+                  </a:lnTo>
+                  <a:lnTo>
+                    <a:pt x="1933808" y="3383080"/>
+                  </a:lnTo>
+                  <a:lnTo>
+                    <a:pt x="1862185" y="3402596"/>
+                  </a:lnTo>
+                  <a:lnTo>
+                    <a:pt x="1790563" y="3420699"/>
+                  </a:lnTo>
+                  <a:lnTo>
+                    <a:pt x="1718940" y="3437491"/>
+                  </a:lnTo>
+                  <a:lnTo>
+                    <a:pt x="1647318" y="3453067"/>
+                  </a:lnTo>
+                  <a:lnTo>
+                    <a:pt x="1575695" y="3467516"/>
+                  </a:lnTo>
+                  <a:lnTo>
+                    <a:pt x="1504073" y="3480919"/>
+                  </a:lnTo>
+                  <a:lnTo>
+                    <a:pt x="1432450" y="3493351"/>
+                  </a:lnTo>
+                  <a:lnTo>
+                    <a:pt x="1360827" y="3504884"/>
+                  </a:lnTo>
+                  <a:lnTo>
+                    <a:pt x="1289205" y="3515581"/>
+                  </a:lnTo>
+                  <a:lnTo>
+                    <a:pt x="1217582" y="3525504"/>
+                  </a:lnTo>
+                  <a:lnTo>
+                    <a:pt x="1145960" y="3534709"/>
+                  </a:lnTo>
+                  <a:lnTo>
+                    <a:pt x="1074337" y="3543247"/>
+                  </a:lnTo>
+                  <a:lnTo>
+                    <a:pt x="1002715" y="3551167"/>
+                  </a:lnTo>
+                  <a:lnTo>
+                    <a:pt x="931092" y="3558514"/>
+                  </a:lnTo>
+                  <a:lnTo>
+                    <a:pt x="859470" y="3565328"/>
+                  </a:lnTo>
+                  <a:lnTo>
+                    <a:pt x="787847" y="3571650"/>
+                  </a:lnTo>
+                  <a:lnTo>
+                    <a:pt x="716225" y="3577514"/>
+                  </a:lnTo>
+                  <a:lnTo>
+                    <a:pt x="644602" y="3582953"/>
+                  </a:lnTo>
+                  <a:lnTo>
+                    <a:pt x="572980" y="3587998"/>
+                  </a:lnTo>
+                  <a:lnTo>
+                    <a:pt x="501357" y="3592678"/>
+                  </a:lnTo>
+                  <a:lnTo>
+                    <a:pt x="429735" y="3597020"/>
+                  </a:lnTo>
+                  <a:lnTo>
+                    <a:pt x="358112" y="3601047"/>
+                  </a:lnTo>
+                  <a:lnTo>
+                    <a:pt x="286490" y="3604782"/>
+                  </a:lnTo>
+                  <a:lnTo>
+                    <a:pt x="214867" y="3608247"/>
+                  </a:lnTo>
+                  <a:lnTo>
+                    <a:pt x="143245" y="3611461"/>
+                  </a:lnTo>
+                  <a:lnTo>
+                    <a:pt x="71622" y="3614443"/>
+                  </a:lnTo>
+                  <a:lnTo>
+                    <a:pt x="0" y="3617208"/>
                   </a:lnTo>
                   <a:close/>
                 </a:path>
@@ -3664,209 +3655,200 @@
           <p:spPr>
             <a:xfrm>
               <a:off x="1172049" y="1896563"/>
-              <a:ext cx="4611509" cy="2924358"/>
+              <a:ext cx="4417211" cy="3096595"/>
             </a:xfrm>
             <a:custGeom>
               <a:avLst/>
               <a:pathLst>
-                <a:path w="4611509" h="2924358">
+                <a:path w="4417211" h="3096595">
                   <a:moveTo>
-                    <a:pt x="0" y="2924358"/>
+                    <a:pt x="0" y="3096595"/>
                   </a:moveTo>
                   <a:lnTo>
-                    <a:pt x="71622" y="2921317"/>
-                  </a:lnTo>
-                  <a:lnTo>
-                    <a:pt x="143245" y="2918264"/>
-                  </a:lnTo>
-                  <a:lnTo>
-                    <a:pt x="214867" y="2915198"/>
-                  </a:lnTo>
-                  <a:lnTo>
-                    <a:pt x="286490" y="2912119"/>
-                  </a:lnTo>
-                  <a:lnTo>
-                    <a:pt x="358112" y="2909027"/>
-                  </a:lnTo>
-                  <a:lnTo>
-                    <a:pt x="429735" y="2905923"/>
-                  </a:lnTo>
-                  <a:lnTo>
-                    <a:pt x="501357" y="2902805"/>
-                  </a:lnTo>
-                  <a:lnTo>
-                    <a:pt x="572980" y="2899674"/>
-                  </a:lnTo>
-                  <a:lnTo>
-                    <a:pt x="644602" y="2896531"/>
-                  </a:lnTo>
-                  <a:lnTo>
-                    <a:pt x="716225" y="2893374"/>
-                  </a:lnTo>
-                  <a:lnTo>
-                    <a:pt x="787847" y="2890204"/>
-                  </a:lnTo>
-                  <a:lnTo>
-                    <a:pt x="859470" y="2887021"/>
-                  </a:lnTo>
-                  <a:lnTo>
-                    <a:pt x="931092" y="2883824"/>
-                  </a:lnTo>
-                  <a:lnTo>
-                    <a:pt x="1002715" y="2880614"/>
-                  </a:lnTo>
-                  <a:lnTo>
-                    <a:pt x="1074337" y="2877391"/>
-                  </a:lnTo>
-                  <a:lnTo>
-                    <a:pt x="1145960" y="2874154"/>
-                  </a:lnTo>
-                  <a:lnTo>
-                    <a:pt x="1217582" y="2870904"/>
-                  </a:lnTo>
-                  <a:lnTo>
-                    <a:pt x="1289205" y="2867640"/>
-                  </a:lnTo>
-                  <a:lnTo>
-                    <a:pt x="1360827" y="2864363"/>
-                  </a:lnTo>
-                  <a:lnTo>
-                    <a:pt x="1432450" y="2861072"/>
-                  </a:lnTo>
-                  <a:lnTo>
-                    <a:pt x="1504073" y="2857767"/>
-                  </a:lnTo>
-                  <a:lnTo>
-                    <a:pt x="1575695" y="2854448"/>
-                  </a:lnTo>
-                  <a:lnTo>
-                    <a:pt x="1647318" y="2851116"/>
-                  </a:lnTo>
-                  <a:lnTo>
-                    <a:pt x="1718940" y="2847769"/>
-                  </a:lnTo>
-                  <a:lnTo>
-                    <a:pt x="1790563" y="2844409"/>
-                  </a:lnTo>
-                  <a:lnTo>
-                    <a:pt x="1862185" y="2841034"/>
-                  </a:lnTo>
-                  <a:lnTo>
-                    <a:pt x="1933808" y="2837646"/>
-                  </a:lnTo>
-                  <a:lnTo>
-                    <a:pt x="2005430" y="2834243"/>
-                  </a:lnTo>
-                  <a:lnTo>
-                    <a:pt x="2077053" y="2830826"/>
-                  </a:lnTo>
-                  <a:lnTo>
-                    <a:pt x="2148675" y="2827395"/>
-                  </a:lnTo>
-                  <a:lnTo>
-                    <a:pt x="2220298" y="2823950"/>
-                  </a:lnTo>
-                  <a:lnTo>
-                    <a:pt x="2291920" y="2820490"/>
-                  </a:lnTo>
-                  <a:lnTo>
-                    <a:pt x="2363543" y="2817016"/>
-                  </a:lnTo>
-                  <a:lnTo>
-                    <a:pt x="2435165" y="2813527"/>
-                  </a:lnTo>
-                  <a:lnTo>
-                    <a:pt x="2506788" y="2810023"/>
-                  </a:lnTo>
-                  <a:lnTo>
-                    <a:pt x="2578410" y="2806505"/>
-                  </a:lnTo>
-                  <a:lnTo>
-                    <a:pt x="2650033" y="2802973"/>
-                  </a:lnTo>
-                  <a:lnTo>
-                    <a:pt x="2721655" y="2799425"/>
-                  </a:lnTo>
-                  <a:lnTo>
-                    <a:pt x="2793278" y="2795863"/>
-                  </a:lnTo>
-                  <a:lnTo>
-                    <a:pt x="2864901" y="2792286"/>
-                  </a:lnTo>
-                  <a:lnTo>
-                    <a:pt x="2936523" y="2788694"/>
-                  </a:lnTo>
-                  <a:lnTo>
-                    <a:pt x="3008146" y="2785087"/>
-                  </a:lnTo>
-                  <a:lnTo>
-                    <a:pt x="3079768" y="2758946"/>
-                  </a:lnTo>
-                  <a:lnTo>
-                    <a:pt x="3151391" y="2698158"/>
-                  </a:lnTo>
-                  <a:lnTo>
-                    <a:pt x="3223013" y="2633235"/>
-                  </a:lnTo>
-                  <a:lnTo>
-                    <a:pt x="3294636" y="2563897"/>
-                  </a:lnTo>
-                  <a:lnTo>
-                    <a:pt x="3366258" y="2489842"/>
-                  </a:lnTo>
-                  <a:lnTo>
-                    <a:pt x="3437881" y="2410751"/>
-                  </a:lnTo>
-                  <a:lnTo>
-                    <a:pt x="3509503" y="2326279"/>
-                  </a:lnTo>
-                  <a:lnTo>
-                    <a:pt x="3581126" y="2236062"/>
-                  </a:lnTo>
-                  <a:lnTo>
-                    <a:pt x="3652748" y="2139709"/>
-                  </a:lnTo>
-                  <a:lnTo>
-                    <a:pt x="3724371" y="2036801"/>
-                  </a:lnTo>
-                  <a:lnTo>
-                    <a:pt x="3795993" y="1926895"/>
-                  </a:lnTo>
-                  <a:lnTo>
-                    <a:pt x="3867616" y="1809512"/>
-                  </a:lnTo>
-                  <a:lnTo>
-                    <a:pt x="3939238" y="1684145"/>
-                  </a:lnTo>
-                  <a:lnTo>
-                    <a:pt x="4010861" y="1550252"/>
-                  </a:lnTo>
-                  <a:lnTo>
-                    <a:pt x="4082483" y="1407250"/>
-                  </a:lnTo>
-                  <a:lnTo>
-                    <a:pt x="4154106" y="1254523"/>
-                  </a:lnTo>
-                  <a:lnTo>
-                    <a:pt x="4225729" y="1091407"/>
-                  </a:lnTo>
-                  <a:lnTo>
-                    <a:pt x="4297351" y="917196"/>
-                  </a:lnTo>
-                  <a:lnTo>
-                    <a:pt x="4368974" y="731135"/>
-                  </a:lnTo>
-                  <a:lnTo>
-                    <a:pt x="4440596" y="532419"/>
-                  </a:lnTo>
-                  <a:lnTo>
-                    <a:pt x="4512219" y="320187"/>
-                  </a:lnTo>
-                  <a:lnTo>
-                    <a:pt x="4583841" y="93519"/>
-                  </a:lnTo>
-                  <a:lnTo>
-                    <a:pt x="4611509" y="0"/>
+                    <a:pt x="71622" y="3090724"/>
+                  </a:lnTo>
+                  <a:lnTo>
+                    <a:pt x="143245" y="3084791"/>
+                  </a:lnTo>
+                  <a:lnTo>
+                    <a:pt x="214867" y="3078796"/>
+                  </a:lnTo>
+                  <a:lnTo>
+                    <a:pt x="286490" y="3072737"/>
+                  </a:lnTo>
+                  <a:lnTo>
+                    <a:pt x="358112" y="3066614"/>
+                  </a:lnTo>
+                  <a:lnTo>
+                    <a:pt x="429735" y="3060427"/>
+                  </a:lnTo>
+                  <a:lnTo>
+                    <a:pt x="501357" y="3054174"/>
+                  </a:lnTo>
+                  <a:lnTo>
+                    <a:pt x="572980" y="3047856"/>
+                  </a:lnTo>
+                  <a:lnTo>
+                    <a:pt x="644602" y="3041470"/>
+                  </a:lnTo>
+                  <a:lnTo>
+                    <a:pt x="716225" y="3035018"/>
+                  </a:lnTo>
+                  <a:lnTo>
+                    <a:pt x="787847" y="3028497"/>
+                  </a:lnTo>
+                  <a:lnTo>
+                    <a:pt x="859470" y="3021907"/>
+                  </a:lnTo>
+                  <a:lnTo>
+                    <a:pt x="931092" y="3015248"/>
+                  </a:lnTo>
+                  <a:lnTo>
+                    <a:pt x="1002715" y="3008518"/>
+                  </a:lnTo>
+                  <a:lnTo>
+                    <a:pt x="1074337" y="3001717"/>
+                  </a:lnTo>
+                  <a:lnTo>
+                    <a:pt x="1145960" y="2994845"/>
+                  </a:lnTo>
+                  <a:lnTo>
+                    <a:pt x="1217582" y="2987900"/>
+                  </a:lnTo>
+                  <a:lnTo>
+                    <a:pt x="1289205" y="2980881"/>
+                  </a:lnTo>
+                  <a:lnTo>
+                    <a:pt x="1360827" y="2973789"/>
+                  </a:lnTo>
+                  <a:lnTo>
+                    <a:pt x="1432450" y="2966622"/>
+                  </a:lnTo>
+                  <a:lnTo>
+                    <a:pt x="1504073" y="2959379"/>
+                  </a:lnTo>
+                  <a:lnTo>
+                    <a:pt x="1575695" y="2952059"/>
+                  </a:lnTo>
+                  <a:lnTo>
+                    <a:pt x="1647318" y="2944662"/>
+                  </a:lnTo>
+                  <a:lnTo>
+                    <a:pt x="1718940" y="2937187"/>
+                  </a:lnTo>
+                  <a:lnTo>
+                    <a:pt x="1790563" y="2929634"/>
+                  </a:lnTo>
+                  <a:lnTo>
+                    <a:pt x="1862185" y="2922000"/>
+                  </a:lnTo>
+                  <a:lnTo>
+                    <a:pt x="1933808" y="2914286"/>
+                  </a:lnTo>
+                  <a:lnTo>
+                    <a:pt x="2005430" y="2906490"/>
+                  </a:lnTo>
+                  <a:lnTo>
+                    <a:pt x="2077053" y="2898613"/>
+                  </a:lnTo>
+                  <a:lnTo>
+                    <a:pt x="2148675" y="2890651"/>
+                  </a:lnTo>
+                  <a:lnTo>
+                    <a:pt x="2220298" y="2882606"/>
+                  </a:lnTo>
+                  <a:lnTo>
+                    <a:pt x="2291920" y="2874476"/>
+                  </a:lnTo>
+                  <a:lnTo>
+                    <a:pt x="2363543" y="2866260"/>
+                  </a:lnTo>
+                  <a:lnTo>
+                    <a:pt x="2435165" y="2857958"/>
+                  </a:lnTo>
+                  <a:lnTo>
+                    <a:pt x="2506788" y="2849567"/>
+                  </a:lnTo>
+                  <a:lnTo>
+                    <a:pt x="2578410" y="2841089"/>
+                  </a:lnTo>
+                  <a:lnTo>
+                    <a:pt x="2650033" y="2832520"/>
+                  </a:lnTo>
+                  <a:lnTo>
+                    <a:pt x="2721655" y="2823861"/>
+                  </a:lnTo>
+                  <a:lnTo>
+                    <a:pt x="2793278" y="2815111"/>
+                  </a:lnTo>
+                  <a:lnTo>
+                    <a:pt x="2864901" y="2806268"/>
+                  </a:lnTo>
+                  <a:lnTo>
+                    <a:pt x="2936523" y="2797332"/>
+                  </a:lnTo>
+                  <a:lnTo>
+                    <a:pt x="3008146" y="2788302"/>
+                  </a:lnTo>
+                  <a:lnTo>
+                    <a:pt x="3079768" y="2755480"/>
+                  </a:lnTo>
+                  <a:lnTo>
+                    <a:pt x="3151391" y="2685458"/>
+                  </a:lnTo>
+                  <a:lnTo>
+                    <a:pt x="3223013" y="2609971"/>
+                  </a:lnTo>
+                  <a:lnTo>
+                    <a:pt x="3294636" y="2528593"/>
+                  </a:lnTo>
+                  <a:lnTo>
+                    <a:pt x="3366258" y="2440863"/>
+                  </a:lnTo>
+                  <a:lnTo>
+                    <a:pt x="3437881" y="2346285"/>
+                  </a:lnTo>
+                  <a:lnTo>
+                    <a:pt x="3509503" y="2244327"/>
+                  </a:lnTo>
+                  <a:lnTo>
+                    <a:pt x="3581126" y="2134410"/>
+                  </a:lnTo>
+                  <a:lnTo>
+                    <a:pt x="3652748" y="2015915"/>
+                  </a:lnTo>
+                  <a:lnTo>
+                    <a:pt x="3724371" y="1888171"/>
+                  </a:lnTo>
+                  <a:lnTo>
+                    <a:pt x="3795993" y="1750457"/>
+                  </a:lnTo>
+                  <a:lnTo>
+                    <a:pt x="3867616" y="1601995"/>
+                  </a:lnTo>
+                  <a:lnTo>
+                    <a:pt x="3939238" y="1441946"/>
+                  </a:lnTo>
+                  <a:lnTo>
+                    <a:pt x="4010861" y="1269405"/>
+                  </a:lnTo>
+                  <a:lnTo>
+                    <a:pt x="4082483" y="1083398"/>
+                  </a:lnTo>
+                  <a:lnTo>
+                    <a:pt x="4154106" y="882873"/>
+                  </a:lnTo>
+                  <a:lnTo>
+                    <a:pt x="4225729" y="666697"/>
+                  </a:lnTo>
+                  <a:lnTo>
+                    <a:pt x="4297351" y="433650"/>
+                  </a:lnTo>
+                  <a:lnTo>
+                    <a:pt x="4368974" y="182413"/>
+                  </a:lnTo>
+                  <a:lnTo>
+                    <a:pt x="4417211" y="0"/>
                   </a:lnTo>
                 </a:path>
               </a:pathLst>
@@ -3886,312 +3868,312 @@
           </p:nvSpPr>
           <p:spPr>
             <a:xfrm>
-              <a:off x="1172049" y="4449099"/>
-              <a:ext cx="7090630" cy="1047347"/>
+              <a:off x="1172049" y="3976396"/>
+              <a:ext cx="7090630" cy="1537375"/>
             </a:xfrm>
             <a:custGeom>
               <a:avLst/>
               <a:pathLst>
-                <a:path w="7090630" h="1047347">
+                <a:path w="7090630" h="1537375">
                   <a:moveTo>
                     <a:pt x="7090630" y="0"/>
                   </a:moveTo>
                   <a:lnTo>
-                    <a:pt x="7019007" y="4573"/>
-                  </a:lnTo>
-                  <a:lnTo>
-                    <a:pt x="6947385" y="9128"/>
-                  </a:lnTo>
-                  <a:lnTo>
-                    <a:pt x="6875762" y="13664"/>
-                  </a:lnTo>
-                  <a:lnTo>
-                    <a:pt x="6804139" y="18181"/>
-                  </a:lnTo>
-                  <a:lnTo>
-                    <a:pt x="6732517" y="22680"/>
-                  </a:lnTo>
-                  <a:lnTo>
-                    <a:pt x="6660894" y="27159"/>
-                  </a:lnTo>
-                  <a:lnTo>
-                    <a:pt x="6589272" y="31620"/>
-                  </a:lnTo>
-                  <a:lnTo>
-                    <a:pt x="6517649" y="36063"/>
-                  </a:lnTo>
-                  <a:lnTo>
-                    <a:pt x="6446027" y="40487"/>
-                  </a:lnTo>
-                  <a:lnTo>
-                    <a:pt x="6374404" y="44892"/>
-                  </a:lnTo>
-                  <a:lnTo>
-                    <a:pt x="6302782" y="49280"/>
-                  </a:lnTo>
-                  <a:lnTo>
-                    <a:pt x="6231159" y="53649"/>
-                  </a:lnTo>
-                  <a:lnTo>
-                    <a:pt x="6159537" y="58000"/>
-                  </a:lnTo>
-                  <a:lnTo>
-                    <a:pt x="6087914" y="62332"/>
-                  </a:lnTo>
-                  <a:lnTo>
-                    <a:pt x="6016292" y="66647"/>
-                  </a:lnTo>
-                  <a:lnTo>
-                    <a:pt x="5944669" y="70944"/>
-                  </a:lnTo>
-                  <a:lnTo>
-                    <a:pt x="5873047" y="75223"/>
-                  </a:lnTo>
-                  <a:lnTo>
-                    <a:pt x="5801424" y="79484"/>
-                  </a:lnTo>
-                  <a:lnTo>
-                    <a:pt x="5729802" y="83728"/>
-                  </a:lnTo>
-                  <a:lnTo>
-                    <a:pt x="5658179" y="87953"/>
-                  </a:lnTo>
-                  <a:lnTo>
-                    <a:pt x="5586557" y="92162"/>
-                  </a:lnTo>
-                  <a:lnTo>
-                    <a:pt x="5514934" y="96352"/>
-                  </a:lnTo>
-                  <a:lnTo>
-                    <a:pt x="5443311" y="100526"/>
-                  </a:lnTo>
-                  <a:lnTo>
-                    <a:pt x="5371689" y="104682"/>
-                  </a:lnTo>
-                  <a:lnTo>
-                    <a:pt x="5300066" y="108820"/>
-                  </a:lnTo>
-                  <a:lnTo>
-                    <a:pt x="5228444" y="112942"/>
-                  </a:lnTo>
-                  <a:lnTo>
-                    <a:pt x="5156821" y="117046"/>
-                  </a:lnTo>
-                  <a:lnTo>
-                    <a:pt x="5085199" y="121133"/>
-                  </a:lnTo>
-                  <a:lnTo>
-                    <a:pt x="5013576" y="125204"/>
-                  </a:lnTo>
-                  <a:lnTo>
-                    <a:pt x="4941954" y="129257"/>
-                  </a:lnTo>
-                  <a:lnTo>
-                    <a:pt x="4870331" y="133294"/>
-                  </a:lnTo>
-                  <a:lnTo>
-                    <a:pt x="4798709" y="137313"/>
-                  </a:lnTo>
-                  <a:lnTo>
-                    <a:pt x="4727086" y="141316"/>
-                  </a:lnTo>
-                  <a:lnTo>
-                    <a:pt x="4655464" y="145303"/>
-                  </a:lnTo>
-                  <a:lnTo>
-                    <a:pt x="4583841" y="149272"/>
-                  </a:lnTo>
-                  <a:lnTo>
-                    <a:pt x="4512219" y="153226"/>
-                  </a:lnTo>
-                  <a:lnTo>
-                    <a:pt x="4440596" y="157163"/>
-                  </a:lnTo>
-                  <a:lnTo>
-                    <a:pt x="4368974" y="161083"/>
-                  </a:lnTo>
-                  <a:lnTo>
-                    <a:pt x="4297351" y="164987"/>
-                  </a:lnTo>
-                  <a:lnTo>
-                    <a:pt x="4225729" y="168875"/>
-                  </a:lnTo>
-                  <a:lnTo>
-                    <a:pt x="4154106" y="172747"/>
-                  </a:lnTo>
-                  <a:lnTo>
-                    <a:pt x="4082483" y="176603"/>
-                  </a:lnTo>
-                  <a:lnTo>
-                    <a:pt x="4010861" y="180442"/>
-                  </a:lnTo>
-                  <a:lnTo>
-                    <a:pt x="3939238" y="184266"/>
-                  </a:lnTo>
-                  <a:lnTo>
-                    <a:pt x="3867616" y="188074"/>
-                  </a:lnTo>
-                  <a:lnTo>
-                    <a:pt x="3795993" y="191866"/>
-                  </a:lnTo>
-                  <a:lnTo>
-                    <a:pt x="3724371" y="195642"/>
-                  </a:lnTo>
-                  <a:lnTo>
-                    <a:pt x="3652748" y="199403"/>
-                  </a:lnTo>
-                  <a:lnTo>
-                    <a:pt x="3581126" y="203147"/>
-                  </a:lnTo>
-                  <a:lnTo>
-                    <a:pt x="3509503" y="206877"/>
-                  </a:lnTo>
-                  <a:lnTo>
-                    <a:pt x="3437881" y="210590"/>
-                  </a:lnTo>
-                  <a:lnTo>
-                    <a:pt x="3366258" y="214289"/>
-                  </a:lnTo>
-                  <a:lnTo>
-                    <a:pt x="3294636" y="217972"/>
-                  </a:lnTo>
-                  <a:lnTo>
-                    <a:pt x="3223013" y="221639"/>
-                  </a:lnTo>
-                  <a:lnTo>
-                    <a:pt x="3151391" y="225292"/>
-                  </a:lnTo>
-                  <a:lnTo>
-                    <a:pt x="3079768" y="228929"/>
-                  </a:lnTo>
-                  <a:lnTo>
-                    <a:pt x="3008146" y="263327"/>
-                  </a:lnTo>
-                  <a:lnTo>
-                    <a:pt x="2936523" y="316618"/>
-                  </a:lnTo>
-                  <a:lnTo>
-                    <a:pt x="2864901" y="366516"/>
-                  </a:lnTo>
-                  <a:lnTo>
-                    <a:pt x="2793278" y="413236"/>
-                  </a:lnTo>
-                  <a:lnTo>
-                    <a:pt x="2721655" y="456980"/>
-                  </a:lnTo>
-                  <a:lnTo>
-                    <a:pt x="2650033" y="497939"/>
-                  </a:lnTo>
-                  <a:lnTo>
-                    <a:pt x="2578410" y="536289"/>
-                  </a:lnTo>
-                  <a:lnTo>
-                    <a:pt x="2506788" y="572196"/>
-                  </a:lnTo>
-                  <a:lnTo>
-                    <a:pt x="2435165" y="605817"/>
-                  </a:lnTo>
-                  <a:lnTo>
-                    <a:pt x="2363543" y="637297"/>
-                  </a:lnTo>
-                  <a:lnTo>
-                    <a:pt x="2291920" y="666772"/>
-                  </a:lnTo>
-                  <a:lnTo>
-                    <a:pt x="2220298" y="694369"/>
-                  </a:lnTo>
-                  <a:lnTo>
-                    <a:pt x="2148675" y="720209"/>
-                  </a:lnTo>
-                  <a:lnTo>
-                    <a:pt x="2077053" y="744404"/>
-                  </a:lnTo>
-                  <a:lnTo>
-                    <a:pt x="2005430" y="767057"/>
-                  </a:lnTo>
-                  <a:lnTo>
-                    <a:pt x="1933808" y="788268"/>
-                  </a:lnTo>
-                  <a:lnTo>
-                    <a:pt x="1862185" y="808128"/>
-                  </a:lnTo>
-                  <a:lnTo>
-                    <a:pt x="1790563" y="826723"/>
-                  </a:lnTo>
-                  <a:lnTo>
-                    <a:pt x="1718940" y="844134"/>
-                  </a:lnTo>
-                  <a:lnTo>
-                    <a:pt x="1647318" y="860436"/>
-                  </a:lnTo>
-                  <a:lnTo>
-                    <a:pt x="1575695" y="875700"/>
-                  </a:lnTo>
-                  <a:lnTo>
-                    <a:pt x="1504073" y="889992"/>
-                  </a:lnTo>
-                  <a:lnTo>
-                    <a:pt x="1432450" y="903373"/>
-                  </a:lnTo>
-                  <a:lnTo>
-                    <a:pt x="1360827" y="915902"/>
-                  </a:lnTo>
-                  <a:lnTo>
-                    <a:pt x="1289205" y="927634"/>
-                  </a:lnTo>
-                  <a:lnTo>
-                    <a:pt x="1217582" y="938618"/>
-                  </a:lnTo>
-                  <a:lnTo>
-                    <a:pt x="1145960" y="948903"/>
-                  </a:lnTo>
-                  <a:lnTo>
-                    <a:pt x="1074337" y="958533"/>
-                  </a:lnTo>
-                  <a:lnTo>
-                    <a:pt x="1002715" y="967549"/>
-                  </a:lnTo>
-                  <a:lnTo>
-                    <a:pt x="931092" y="975991"/>
-                  </a:lnTo>
-                  <a:lnTo>
-                    <a:pt x="859470" y="983896"/>
-                  </a:lnTo>
-                  <a:lnTo>
-                    <a:pt x="787847" y="991297"/>
-                  </a:lnTo>
-                  <a:lnTo>
-                    <a:pt x="716225" y="998227"/>
-                  </a:lnTo>
-                  <a:lnTo>
-                    <a:pt x="644602" y="1004715"/>
-                  </a:lnTo>
-                  <a:lnTo>
-                    <a:pt x="572980" y="1010790"/>
-                  </a:lnTo>
-                  <a:lnTo>
-                    <a:pt x="501357" y="1016479"/>
-                  </a:lnTo>
-                  <a:lnTo>
-                    <a:pt x="429735" y="1021805"/>
-                  </a:lnTo>
-                  <a:lnTo>
-                    <a:pt x="358112" y="1026791"/>
-                  </a:lnTo>
-                  <a:lnTo>
-                    <a:pt x="286490" y="1031461"/>
-                  </a:lnTo>
-                  <a:lnTo>
-                    <a:pt x="214867" y="1035833"/>
-                  </a:lnTo>
-                  <a:lnTo>
-                    <a:pt x="143245" y="1039926"/>
-                  </a:lnTo>
-                  <a:lnTo>
-                    <a:pt x="71622" y="1043759"/>
-                  </a:lnTo>
-                  <a:lnTo>
-                    <a:pt x="0" y="1047347"/>
+                    <a:pt x="7019007" y="16432"/>
+                  </a:lnTo>
+                  <a:lnTo>
+                    <a:pt x="6947385" y="32692"/>
+                  </a:lnTo>
+                  <a:lnTo>
+                    <a:pt x="6875762" y="48783"/>
+                  </a:lnTo>
+                  <a:lnTo>
+                    <a:pt x="6804139" y="64706"/>
+                  </a:lnTo>
+                  <a:lnTo>
+                    <a:pt x="6732517" y="80462"/>
+                  </a:lnTo>
+                  <a:lnTo>
+                    <a:pt x="6660894" y="96053"/>
+                  </a:lnTo>
+                  <a:lnTo>
+                    <a:pt x="6589272" y="111482"/>
+                  </a:lnTo>
+                  <a:lnTo>
+                    <a:pt x="6517649" y="126750"/>
+                  </a:lnTo>
+                  <a:lnTo>
+                    <a:pt x="6446027" y="141858"/>
+                  </a:lnTo>
+                  <a:lnTo>
+                    <a:pt x="6374404" y="156808"/>
+                  </a:lnTo>
+                  <a:lnTo>
+                    <a:pt x="6302782" y="171602"/>
+                  </a:lnTo>
+                  <a:lnTo>
+                    <a:pt x="6231159" y="186241"/>
+                  </a:lnTo>
+                  <a:lnTo>
+                    <a:pt x="6159537" y="200728"/>
+                  </a:lnTo>
+                  <a:lnTo>
+                    <a:pt x="6087914" y="215063"/>
+                  </a:lnTo>
+                  <a:lnTo>
+                    <a:pt x="6016292" y="229248"/>
+                  </a:lnTo>
+                  <a:lnTo>
+                    <a:pt x="5944669" y="243285"/>
+                  </a:lnTo>
+                  <a:lnTo>
+                    <a:pt x="5873047" y="257176"/>
+                  </a:lnTo>
+                  <a:lnTo>
+                    <a:pt x="5801424" y="270921"/>
+                  </a:lnTo>
+                  <a:lnTo>
+                    <a:pt x="5729802" y="284523"/>
+                  </a:lnTo>
+                  <a:lnTo>
+                    <a:pt x="5658179" y="297983"/>
+                  </a:lnTo>
+                  <a:lnTo>
+                    <a:pt x="5586557" y="311302"/>
+                  </a:lnTo>
+                  <a:lnTo>
+                    <a:pt x="5514934" y="324481"/>
+                  </a:lnTo>
+                  <a:lnTo>
+                    <a:pt x="5443311" y="337524"/>
+                  </a:lnTo>
+                  <a:lnTo>
+                    <a:pt x="5371689" y="350429"/>
+                  </a:lnTo>
+                  <a:lnTo>
+                    <a:pt x="5300066" y="363201"/>
+                  </a:lnTo>
+                  <a:lnTo>
+                    <a:pt x="5228444" y="375838"/>
+                  </a:lnTo>
+                  <a:lnTo>
+                    <a:pt x="5156821" y="388344"/>
+                  </a:lnTo>
+                  <a:lnTo>
+                    <a:pt x="5085199" y="400719"/>
+                  </a:lnTo>
+                  <a:lnTo>
+                    <a:pt x="5013576" y="412964"/>
+                  </a:lnTo>
+                  <a:lnTo>
+                    <a:pt x="4941954" y="425082"/>
+                  </a:lnTo>
+                  <a:lnTo>
+                    <a:pt x="4870331" y="437073"/>
+                  </a:lnTo>
+                  <a:lnTo>
+                    <a:pt x="4798709" y="448939"/>
+                  </a:lnTo>
+                  <a:lnTo>
+                    <a:pt x="4727086" y="460681"/>
+                  </a:lnTo>
+                  <a:lnTo>
+                    <a:pt x="4655464" y="472300"/>
+                  </a:lnTo>
+                  <a:lnTo>
+                    <a:pt x="4583841" y="483798"/>
+                  </a:lnTo>
+                  <a:lnTo>
+                    <a:pt x="4512219" y="495176"/>
+                  </a:lnTo>
+                  <a:lnTo>
+                    <a:pt x="4440596" y="506434"/>
+                  </a:lnTo>
+                  <a:lnTo>
+                    <a:pt x="4368974" y="517576"/>
+                  </a:lnTo>
+                  <a:lnTo>
+                    <a:pt x="4297351" y="528600"/>
+                  </a:lnTo>
+                  <a:lnTo>
+                    <a:pt x="4225729" y="539510"/>
+                  </a:lnTo>
+                  <a:lnTo>
+                    <a:pt x="4154106" y="550306"/>
+                  </a:lnTo>
+                  <a:lnTo>
+                    <a:pt x="4082483" y="560988"/>
+                  </a:lnTo>
+                  <a:lnTo>
+                    <a:pt x="4010861" y="571560"/>
+                  </a:lnTo>
+                  <a:lnTo>
+                    <a:pt x="3939238" y="582020"/>
+                  </a:lnTo>
+                  <a:lnTo>
+                    <a:pt x="3867616" y="592372"/>
+                  </a:lnTo>
+                  <a:lnTo>
+                    <a:pt x="3795993" y="602615"/>
+                  </a:lnTo>
+                  <a:lnTo>
+                    <a:pt x="3724371" y="612752"/>
+                  </a:lnTo>
+                  <a:lnTo>
+                    <a:pt x="3652748" y="622782"/>
+                  </a:lnTo>
+                  <a:lnTo>
+                    <a:pt x="3581126" y="632708"/>
+                  </a:lnTo>
+                  <a:lnTo>
+                    <a:pt x="3509503" y="642529"/>
+                  </a:lnTo>
+                  <a:lnTo>
+                    <a:pt x="3437881" y="652249"/>
+                  </a:lnTo>
+                  <a:lnTo>
+                    <a:pt x="3366258" y="661866"/>
+                  </a:lnTo>
+                  <a:lnTo>
+                    <a:pt x="3294636" y="671384"/>
+                  </a:lnTo>
+                  <a:lnTo>
+                    <a:pt x="3223013" y="680802"/>
+                  </a:lnTo>
+                  <a:lnTo>
+                    <a:pt x="3151391" y="690121"/>
+                  </a:lnTo>
+                  <a:lnTo>
+                    <a:pt x="3079768" y="699343"/>
+                  </a:lnTo>
+                  <a:lnTo>
+                    <a:pt x="3008146" y="740600"/>
+                  </a:lnTo>
+                  <a:lnTo>
+                    <a:pt x="2936523" y="800850"/>
+                  </a:lnTo>
+                  <a:lnTo>
+                    <a:pt x="2864901" y="856738"/>
+                  </a:lnTo>
+                  <a:lnTo>
+                    <a:pt x="2793278" y="908580"/>
+                  </a:lnTo>
+                  <a:lnTo>
+                    <a:pt x="2721655" y="956669"/>
+                  </a:lnTo>
+                  <a:lnTo>
+                    <a:pt x="2650033" y="1001276"/>
+                  </a:lnTo>
+                  <a:lnTo>
+                    <a:pt x="2578410" y="1042654"/>
+                  </a:lnTo>
+                  <a:lnTo>
+                    <a:pt x="2506788" y="1081036"/>
+                  </a:lnTo>
+                  <a:lnTo>
+                    <a:pt x="2435165" y="1116639"/>
+                  </a:lnTo>
+                  <a:lnTo>
+                    <a:pt x="2363543" y="1149665"/>
+                  </a:lnTo>
+                  <a:lnTo>
+                    <a:pt x="2291920" y="1180299"/>
+                  </a:lnTo>
+                  <a:lnTo>
+                    <a:pt x="2220298" y="1208716"/>
+                  </a:lnTo>
+                  <a:lnTo>
+                    <a:pt x="2148675" y="1235076"/>
+                  </a:lnTo>
+                  <a:lnTo>
+                    <a:pt x="2077053" y="1259527"/>
+                  </a:lnTo>
+                  <a:lnTo>
+                    <a:pt x="2005430" y="1282208"/>
+                  </a:lnTo>
+                  <a:lnTo>
+                    <a:pt x="1933808" y="1303247"/>
+                  </a:lnTo>
+                  <a:lnTo>
+                    <a:pt x="1862185" y="1322763"/>
+                  </a:lnTo>
+                  <a:lnTo>
+                    <a:pt x="1790563" y="1340865"/>
+                  </a:lnTo>
+                  <a:lnTo>
+                    <a:pt x="1718940" y="1357658"/>
+                  </a:lnTo>
+                  <a:lnTo>
+                    <a:pt x="1647318" y="1373234"/>
+                  </a:lnTo>
+                  <a:lnTo>
+                    <a:pt x="1575695" y="1387683"/>
+                  </a:lnTo>
+                  <a:lnTo>
+                    <a:pt x="1504073" y="1401086"/>
+                  </a:lnTo>
+                  <a:lnTo>
+                    <a:pt x="1432450" y="1413518"/>
+                  </a:lnTo>
+                  <a:lnTo>
+                    <a:pt x="1360827" y="1425051"/>
+                  </a:lnTo>
+                  <a:lnTo>
+                    <a:pt x="1289205" y="1435748"/>
+                  </a:lnTo>
+                  <a:lnTo>
+                    <a:pt x="1217582" y="1445671"/>
+                  </a:lnTo>
+                  <a:lnTo>
+                    <a:pt x="1145960" y="1454876"/>
+                  </a:lnTo>
+                  <a:lnTo>
+                    <a:pt x="1074337" y="1463414"/>
+                  </a:lnTo>
+                  <a:lnTo>
+                    <a:pt x="1002715" y="1471334"/>
+                  </a:lnTo>
+                  <a:lnTo>
+                    <a:pt x="931092" y="1478681"/>
+                  </a:lnTo>
+                  <a:lnTo>
+                    <a:pt x="859470" y="1485495"/>
+                  </a:lnTo>
+                  <a:lnTo>
+                    <a:pt x="787847" y="1491817"/>
+                  </a:lnTo>
+                  <a:lnTo>
+                    <a:pt x="716225" y="1497680"/>
+                  </a:lnTo>
+                  <a:lnTo>
+                    <a:pt x="644602" y="1503120"/>
+                  </a:lnTo>
+                  <a:lnTo>
+                    <a:pt x="572980" y="1508165"/>
+                  </a:lnTo>
+                  <a:lnTo>
+                    <a:pt x="501357" y="1512845"/>
+                  </a:lnTo>
+                  <a:lnTo>
+                    <a:pt x="429735" y="1517187"/>
+                  </a:lnTo>
+                  <a:lnTo>
+                    <a:pt x="358112" y="1521214"/>
+                  </a:lnTo>
+                  <a:lnTo>
+                    <a:pt x="286490" y="1524949"/>
+                  </a:lnTo>
+                  <a:lnTo>
+                    <a:pt x="214867" y="1528414"/>
+                  </a:lnTo>
+                  <a:lnTo>
+                    <a:pt x="143245" y="1531628"/>
+                  </a:lnTo>
+                  <a:lnTo>
+                    <a:pt x="71622" y="1534610"/>
+                  </a:lnTo>
+                  <a:lnTo>
+                    <a:pt x="0" y="1537375"/>
                   </a:lnTo>
                 </a:path>
               </a:pathLst>
@@ -4212,266 +4194,245 @@
           <p:spPr>
             <a:xfrm>
               <a:off x="1172049" y="1896563"/>
-              <a:ext cx="5987717" cy="3456622"/>
+              <a:ext cx="5449951" cy="3512274"/>
             </a:xfrm>
             <a:custGeom>
               <a:avLst/>
               <a:pathLst>
-                <a:path w="5987717" h="3456622">
+                <a:path w="5449951" h="3512274">
                   <a:moveTo>
-                    <a:pt x="0" y="3456622"/>
+                    <a:pt x="0" y="3512274"/>
                   </a:moveTo>
                   <a:lnTo>
-                    <a:pt x="71622" y="3449642"/>
-                  </a:lnTo>
-                  <a:lnTo>
-                    <a:pt x="143245" y="3442414"/>
-                  </a:lnTo>
-                  <a:lnTo>
-                    <a:pt x="214867" y="3434929"/>
-                  </a:lnTo>
-                  <a:lnTo>
-                    <a:pt x="286490" y="3427178"/>
-                  </a:lnTo>
-                  <a:lnTo>
-                    <a:pt x="358112" y="3419150"/>
-                  </a:lnTo>
-                  <a:lnTo>
-                    <a:pt x="429735" y="3410836"/>
-                  </a:lnTo>
-                  <a:lnTo>
-                    <a:pt x="501357" y="3402227"/>
-                  </a:lnTo>
-                  <a:lnTo>
-                    <a:pt x="572980" y="3393311"/>
-                  </a:lnTo>
-                  <a:lnTo>
-                    <a:pt x="644602" y="3384077"/>
-                  </a:lnTo>
-                  <a:lnTo>
-                    <a:pt x="716225" y="3374515"/>
-                  </a:lnTo>
-                  <a:lnTo>
-                    <a:pt x="787847" y="3364613"/>
-                  </a:lnTo>
-                  <a:lnTo>
-                    <a:pt x="859470" y="3354357"/>
-                  </a:lnTo>
-                  <a:lnTo>
-                    <a:pt x="931092" y="3343737"/>
-                  </a:lnTo>
-                  <a:lnTo>
-                    <a:pt x="1002715" y="3332738"/>
-                  </a:lnTo>
-                  <a:lnTo>
-                    <a:pt x="1074337" y="3321348"/>
-                  </a:lnTo>
-                  <a:lnTo>
-                    <a:pt x="1145960" y="3309552"/>
-                  </a:lnTo>
-                  <a:lnTo>
-                    <a:pt x="1217582" y="3297337"/>
-                  </a:lnTo>
-                  <a:lnTo>
-                    <a:pt x="1289205" y="3284686"/>
-                  </a:lnTo>
-                  <a:lnTo>
-                    <a:pt x="1360827" y="3271585"/>
-                  </a:lnTo>
-                  <a:lnTo>
-                    <a:pt x="1432450" y="3258018"/>
-                  </a:lnTo>
-                  <a:lnTo>
-                    <a:pt x="1504073" y="3243967"/>
-                  </a:lnTo>
-                  <a:lnTo>
-                    <a:pt x="1575695" y="3229416"/>
-                  </a:lnTo>
-                  <a:lnTo>
-                    <a:pt x="1647318" y="3214347"/>
-                  </a:lnTo>
-                  <a:lnTo>
-                    <a:pt x="1718940" y="3198742"/>
-                  </a:lnTo>
-                  <a:lnTo>
-                    <a:pt x="1790563" y="3182581"/>
-                  </a:lnTo>
-                  <a:lnTo>
-                    <a:pt x="1862185" y="3165844"/>
-                  </a:lnTo>
-                  <a:lnTo>
-                    <a:pt x="1933808" y="3148512"/>
-                  </a:lnTo>
-                  <a:lnTo>
-                    <a:pt x="2005430" y="3130562"/>
-                  </a:lnTo>
-                  <a:lnTo>
-                    <a:pt x="2077053" y="3111974"/>
-                  </a:lnTo>
-                  <a:lnTo>
-                    <a:pt x="2148675" y="3092723"/>
-                  </a:lnTo>
-                  <a:lnTo>
-                    <a:pt x="2220298" y="3072787"/>
-                  </a:lnTo>
-                  <a:lnTo>
-                    <a:pt x="2291920" y="3052142"/>
-                  </a:lnTo>
-                  <a:lnTo>
-                    <a:pt x="2363543" y="3030761"/>
-                  </a:lnTo>
-                  <a:lnTo>
-                    <a:pt x="2435165" y="3008619"/>
-                  </a:lnTo>
-                  <a:lnTo>
-                    <a:pt x="2506788" y="2985689"/>
-                  </a:lnTo>
-                  <a:lnTo>
-                    <a:pt x="2578410" y="2961942"/>
-                  </a:lnTo>
-                  <a:lnTo>
-                    <a:pt x="2650033" y="2937349"/>
-                  </a:lnTo>
-                  <a:lnTo>
-                    <a:pt x="2721655" y="2911881"/>
-                  </a:lnTo>
-                  <a:lnTo>
-                    <a:pt x="2793278" y="2885507"/>
-                  </a:lnTo>
-                  <a:lnTo>
-                    <a:pt x="2864901" y="2858193"/>
-                  </a:lnTo>
-                  <a:lnTo>
-                    <a:pt x="2936523" y="2829907"/>
-                  </a:lnTo>
-                  <a:lnTo>
-                    <a:pt x="3008146" y="2800613"/>
-                  </a:lnTo>
-                  <a:lnTo>
-                    <a:pt x="3079768" y="2770277"/>
-                  </a:lnTo>
-                  <a:lnTo>
-                    <a:pt x="3151391" y="2738861"/>
-                  </a:lnTo>
-                  <a:lnTo>
-                    <a:pt x="3223013" y="2706325"/>
-                  </a:lnTo>
-                  <a:lnTo>
-                    <a:pt x="3294636" y="2672632"/>
-                  </a:lnTo>
-                  <a:lnTo>
-                    <a:pt x="3366258" y="2637739"/>
-                  </a:lnTo>
-                  <a:lnTo>
-                    <a:pt x="3437881" y="2601603"/>
-                  </a:lnTo>
-                  <a:lnTo>
-                    <a:pt x="3509503" y="2564181"/>
-                  </a:lnTo>
-                  <a:lnTo>
-                    <a:pt x="3581126" y="2525427"/>
-                  </a:lnTo>
-                  <a:lnTo>
-                    <a:pt x="3652748" y="2485292"/>
-                  </a:lnTo>
-                  <a:lnTo>
-                    <a:pt x="3724371" y="2443729"/>
-                  </a:lnTo>
-                  <a:lnTo>
-                    <a:pt x="3795993" y="2400686"/>
-                  </a:lnTo>
-                  <a:lnTo>
-                    <a:pt x="3867616" y="2356110"/>
-                  </a:lnTo>
-                  <a:lnTo>
-                    <a:pt x="3939238" y="2309947"/>
-                  </a:lnTo>
-                  <a:lnTo>
-                    <a:pt x="4010861" y="2262141"/>
-                  </a:lnTo>
-                  <a:lnTo>
-                    <a:pt x="4082483" y="2212632"/>
-                  </a:lnTo>
-                  <a:lnTo>
-                    <a:pt x="4154106" y="2161361"/>
-                  </a:lnTo>
-                  <a:lnTo>
-                    <a:pt x="4225729" y="2108264"/>
-                  </a:lnTo>
-                  <a:lnTo>
-                    <a:pt x="4297351" y="2053277"/>
-                  </a:lnTo>
-                  <a:lnTo>
-                    <a:pt x="4368974" y="1996332"/>
-                  </a:lnTo>
-                  <a:lnTo>
-                    <a:pt x="4440596" y="1937359"/>
-                  </a:lnTo>
-                  <a:lnTo>
-                    <a:pt x="4512219" y="1876287"/>
-                  </a:lnTo>
-                  <a:lnTo>
-                    <a:pt x="4583841" y="1813040"/>
-                  </a:lnTo>
-                  <a:lnTo>
-                    <a:pt x="4655464" y="1747541"/>
-                  </a:lnTo>
-                  <a:lnTo>
-                    <a:pt x="4727086" y="1679710"/>
-                  </a:lnTo>
-                  <a:lnTo>
-                    <a:pt x="4798709" y="1609464"/>
-                  </a:lnTo>
-                  <a:lnTo>
-                    <a:pt x="4870331" y="1536717"/>
-                  </a:lnTo>
-                  <a:lnTo>
-                    <a:pt x="4941954" y="1461380"/>
-                  </a:lnTo>
-                  <a:lnTo>
-                    <a:pt x="5013576" y="1383361"/>
-                  </a:lnTo>
-                  <a:lnTo>
-                    <a:pt x="5085199" y="1302563"/>
-                  </a:lnTo>
-                  <a:lnTo>
-                    <a:pt x="5156821" y="1218889"/>
-                  </a:lnTo>
-                  <a:lnTo>
-                    <a:pt x="5228444" y="1132236"/>
-                  </a:lnTo>
-                  <a:lnTo>
-                    <a:pt x="5300066" y="1042497"/>
-                  </a:lnTo>
-                  <a:lnTo>
-                    <a:pt x="5371689" y="949563"/>
-                  </a:lnTo>
-                  <a:lnTo>
-                    <a:pt x="5443311" y="853320"/>
-                  </a:lnTo>
-                  <a:lnTo>
-                    <a:pt x="5514934" y="753651"/>
-                  </a:lnTo>
-                  <a:lnTo>
-                    <a:pt x="5586557" y="650433"/>
-                  </a:lnTo>
-                  <a:lnTo>
-                    <a:pt x="5658179" y="543540"/>
-                  </a:lnTo>
-                  <a:lnTo>
-                    <a:pt x="5729802" y="432841"/>
-                  </a:lnTo>
-                  <a:lnTo>
-                    <a:pt x="5801424" y="318200"/>
-                  </a:lnTo>
-                  <a:lnTo>
-                    <a:pt x="5873047" y="199478"/>
-                  </a:lnTo>
-                  <a:lnTo>
-                    <a:pt x="5944669" y="76529"/>
-                  </a:lnTo>
-                  <a:lnTo>
-                    <a:pt x="5987717" y="0"/>
+                    <a:pt x="71622" y="3506132"/>
+                  </a:lnTo>
+                  <a:lnTo>
+                    <a:pt x="143245" y="3499721"/>
+                  </a:lnTo>
+                  <a:lnTo>
+                    <a:pt x="214867" y="3493029"/>
+                  </a:lnTo>
+                  <a:lnTo>
+                    <a:pt x="286490" y="3486045"/>
+                  </a:lnTo>
+                  <a:lnTo>
+                    <a:pt x="358112" y="3478755"/>
+                  </a:lnTo>
+                  <a:lnTo>
+                    <a:pt x="429735" y="3471146"/>
+                  </a:lnTo>
+                  <a:lnTo>
+                    <a:pt x="501357" y="3463204"/>
+                  </a:lnTo>
+                  <a:lnTo>
+                    <a:pt x="572980" y="3454915"/>
+                  </a:lnTo>
+                  <a:lnTo>
+                    <a:pt x="644602" y="3446263"/>
+                  </a:lnTo>
+                  <a:lnTo>
+                    <a:pt x="716225" y="3437232"/>
+                  </a:lnTo>
+                  <a:lnTo>
+                    <a:pt x="787847" y="3427806"/>
+                  </a:lnTo>
+                  <a:lnTo>
+                    <a:pt x="859470" y="3417968"/>
+                  </a:lnTo>
+                  <a:lnTo>
+                    <a:pt x="931092" y="3407699"/>
+                  </a:lnTo>
+                  <a:lnTo>
+                    <a:pt x="1002715" y="3396981"/>
+                  </a:lnTo>
+                  <a:lnTo>
+                    <a:pt x="1074337" y="3385793"/>
+                  </a:lnTo>
+                  <a:lnTo>
+                    <a:pt x="1145960" y="3374117"/>
+                  </a:lnTo>
+                  <a:lnTo>
+                    <a:pt x="1217582" y="3361929"/>
+                  </a:lnTo>
+                  <a:lnTo>
+                    <a:pt x="1289205" y="3349208"/>
+                  </a:lnTo>
+                  <a:lnTo>
+                    <a:pt x="1360827" y="3335930"/>
+                  </a:lnTo>
+                  <a:lnTo>
+                    <a:pt x="1432450" y="3322072"/>
+                  </a:lnTo>
+                  <a:lnTo>
+                    <a:pt x="1504073" y="3307606"/>
+                  </a:lnTo>
+                  <a:lnTo>
+                    <a:pt x="1575695" y="3292508"/>
+                  </a:lnTo>
+                  <a:lnTo>
+                    <a:pt x="1647318" y="3276750"/>
+                  </a:lnTo>
+                  <a:lnTo>
+                    <a:pt x="1718940" y="3260302"/>
+                  </a:lnTo>
+                  <a:lnTo>
+                    <a:pt x="1790563" y="3243134"/>
+                  </a:lnTo>
+                  <a:lnTo>
+                    <a:pt x="1862185" y="3225214"/>
+                  </a:lnTo>
+                  <a:lnTo>
+                    <a:pt x="1933808" y="3206511"/>
+                  </a:lnTo>
+                  <a:lnTo>
+                    <a:pt x="2005430" y="3186989"/>
+                  </a:lnTo>
+                  <a:lnTo>
+                    <a:pt x="2077053" y="3166613"/>
+                  </a:lnTo>
+                  <a:lnTo>
+                    <a:pt x="2148675" y="3145346"/>
+                  </a:lnTo>
+                  <a:lnTo>
+                    <a:pt x="2220298" y="3123148"/>
+                  </a:lnTo>
+                  <a:lnTo>
+                    <a:pt x="2291920" y="3099978"/>
+                  </a:lnTo>
+                  <a:lnTo>
+                    <a:pt x="2363543" y="3075795"/>
+                  </a:lnTo>
+                  <a:lnTo>
+                    <a:pt x="2435165" y="3050553"/>
+                  </a:lnTo>
+                  <a:lnTo>
+                    <a:pt x="2506788" y="3024207"/>
+                  </a:lnTo>
+                  <a:lnTo>
+                    <a:pt x="2578410" y="2996708"/>
+                  </a:lnTo>
+                  <a:lnTo>
+                    <a:pt x="2650033" y="2968006"/>
+                  </a:lnTo>
+                  <a:lnTo>
+                    <a:pt x="2721655" y="2938048"/>
+                  </a:lnTo>
+                  <a:lnTo>
+                    <a:pt x="2793278" y="2906778"/>
+                  </a:lnTo>
+                  <a:lnTo>
+                    <a:pt x="2864901" y="2874141"/>
+                  </a:lnTo>
+                  <a:lnTo>
+                    <a:pt x="2936523" y="2840076"/>
+                  </a:lnTo>
+                  <a:lnTo>
+                    <a:pt x="3008146" y="2804519"/>
+                  </a:lnTo>
+                  <a:lnTo>
+                    <a:pt x="3079768" y="2767408"/>
+                  </a:lnTo>
+                  <a:lnTo>
+                    <a:pt x="3151391" y="2728672"/>
+                  </a:lnTo>
+                  <a:lnTo>
+                    <a:pt x="3223013" y="2688241"/>
+                  </a:lnTo>
+                  <a:lnTo>
+                    <a:pt x="3294636" y="2646041"/>
+                  </a:lnTo>
+                  <a:lnTo>
+                    <a:pt x="3366258" y="2601994"/>
+                  </a:lnTo>
+                  <a:lnTo>
+                    <a:pt x="3437881" y="2556020"/>
+                  </a:lnTo>
+                  <a:lnTo>
+                    <a:pt x="3509503" y="2508034"/>
+                  </a:lnTo>
+                  <a:lnTo>
+                    <a:pt x="3581126" y="2457949"/>
+                  </a:lnTo>
+                  <a:lnTo>
+                    <a:pt x="3652748" y="2405672"/>
+                  </a:lnTo>
+                  <a:lnTo>
+                    <a:pt x="3724371" y="2351107"/>
+                  </a:lnTo>
+                  <a:lnTo>
+                    <a:pt x="3795993" y="2294155"/>
+                  </a:lnTo>
+                  <a:lnTo>
+                    <a:pt x="3867616" y="2234710"/>
+                  </a:lnTo>
+                  <a:lnTo>
+                    <a:pt x="3939238" y="2172665"/>
+                  </a:lnTo>
+                  <a:lnTo>
+                    <a:pt x="4010861" y="2107904"/>
+                  </a:lnTo>
+                  <a:lnTo>
+                    <a:pt x="4082483" y="2040310"/>
+                  </a:lnTo>
+                  <a:lnTo>
+                    <a:pt x="4154106" y="1969758"/>
+                  </a:lnTo>
+                  <a:lnTo>
+                    <a:pt x="4225729" y="1896119"/>
+                  </a:lnTo>
+                  <a:lnTo>
+                    <a:pt x="4297351" y="1819257"/>
+                  </a:lnTo>
+                  <a:lnTo>
+                    <a:pt x="4368974" y="1739032"/>
+                  </a:lnTo>
+                  <a:lnTo>
+                    <a:pt x="4440596" y="1655297"/>
+                  </a:lnTo>
+                  <a:lnTo>
+                    <a:pt x="4512219" y="1567898"/>
+                  </a:lnTo>
+                  <a:lnTo>
+                    <a:pt x="4583841" y="1476674"/>
+                  </a:lnTo>
+                  <a:lnTo>
+                    <a:pt x="4655464" y="1381458"/>
+                  </a:lnTo>
+                  <a:lnTo>
+                    <a:pt x="4727086" y="1282077"/>
+                  </a:lnTo>
+                  <a:lnTo>
+                    <a:pt x="4798709" y="1178346"/>
+                  </a:lnTo>
+                  <a:lnTo>
+                    <a:pt x="4870331" y="1070076"/>
+                  </a:lnTo>
+                  <a:lnTo>
+                    <a:pt x="4941954" y="957069"/>
+                  </a:lnTo>
+                  <a:lnTo>
+                    <a:pt x="5013576" y="839117"/>
+                  </a:lnTo>
+                  <a:lnTo>
+                    <a:pt x="5085199" y="716003"/>
+                  </a:lnTo>
+                  <a:lnTo>
+                    <a:pt x="5156821" y="587503"/>
+                  </a:lnTo>
+                  <a:lnTo>
+                    <a:pt x="5228444" y="453379"/>
+                  </a:lnTo>
+                  <a:lnTo>
+                    <a:pt x="5300066" y="313386"/>
+                  </a:lnTo>
+                  <a:lnTo>
+                    <a:pt x="5371689" y="167268"/>
+                  </a:lnTo>
+                  <a:lnTo>
+                    <a:pt x="5443311" y="14756"/>
+                  </a:lnTo>
+                  <a:lnTo>
+                    <a:pt x="5449951" y="0"/>
                   </a:lnTo>
                 </a:path>
               </a:pathLst>

--- a/docs/plots/carbo/jx_carbo_linsubhr_dosedisc_death.pptx
+++ b/docs/plots/carbo/jx_carbo_linsubhr_dosedisc_death.pptx
@@ -3132,503 +3132,512 @@
           <p:spPr>
             <a:xfrm>
               <a:off x="1172049" y="1896563"/>
-              <a:ext cx="7090630" cy="3617208"/>
+              <a:ext cx="7090630" cy="3599883"/>
             </a:xfrm>
             <a:custGeom>
               <a:avLst/>
               <a:pathLst>
-                <a:path w="7090630" h="3617208">
+                <a:path w="7090630" h="3599883">
                   <a:moveTo>
-                    <a:pt x="0" y="3096595"/>
+                    <a:pt x="0" y="2924358"/>
                   </a:moveTo>
                   <a:lnTo>
-                    <a:pt x="71622" y="3090724"/>
-                  </a:lnTo>
-                  <a:lnTo>
-                    <a:pt x="143245" y="3084791"/>
-                  </a:lnTo>
-                  <a:lnTo>
-                    <a:pt x="214867" y="3078796"/>
-                  </a:lnTo>
-                  <a:lnTo>
-                    <a:pt x="286490" y="3072737"/>
-                  </a:lnTo>
-                  <a:lnTo>
-                    <a:pt x="358112" y="3066614"/>
-                  </a:lnTo>
-                  <a:lnTo>
-                    <a:pt x="429735" y="3060427"/>
-                  </a:lnTo>
-                  <a:lnTo>
-                    <a:pt x="501357" y="3054174"/>
-                  </a:lnTo>
-                  <a:lnTo>
-                    <a:pt x="572980" y="3047856"/>
-                  </a:lnTo>
-                  <a:lnTo>
-                    <a:pt x="644602" y="3041470"/>
-                  </a:lnTo>
-                  <a:lnTo>
-                    <a:pt x="716225" y="3035018"/>
-                  </a:lnTo>
-                  <a:lnTo>
-                    <a:pt x="787847" y="3028497"/>
-                  </a:lnTo>
-                  <a:lnTo>
-                    <a:pt x="859470" y="3021907"/>
-                  </a:lnTo>
-                  <a:lnTo>
-                    <a:pt x="931092" y="3015248"/>
-                  </a:lnTo>
-                  <a:lnTo>
-                    <a:pt x="1002715" y="3008518"/>
-                  </a:lnTo>
-                  <a:lnTo>
-                    <a:pt x="1074337" y="3001717"/>
-                  </a:lnTo>
-                  <a:lnTo>
-                    <a:pt x="1145960" y="2994845"/>
-                  </a:lnTo>
-                  <a:lnTo>
-                    <a:pt x="1217582" y="2987900"/>
-                  </a:lnTo>
-                  <a:lnTo>
-                    <a:pt x="1289205" y="2980881"/>
-                  </a:lnTo>
-                  <a:lnTo>
-                    <a:pt x="1360827" y="2973789"/>
-                  </a:lnTo>
-                  <a:lnTo>
-                    <a:pt x="1432450" y="2966622"/>
-                  </a:lnTo>
-                  <a:lnTo>
-                    <a:pt x="1504073" y="2959379"/>
-                  </a:lnTo>
-                  <a:lnTo>
-                    <a:pt x="1575695" y="2952059"/>
-                  </a:lnTo>
-                  <a:lnTo>
-                    <a:pt x="1647318" y="2944662"/>
-                  </a:lnTo>
-                  <a:lnTo>
-                    <a:pt x="1718940" y="2937187"/>
-                  </a:lnTo>
-                  <a:lnTo>
-                    <a:pt x="1790563" y="2929634"/>
-                  </a:lnTo>
-                  <a:lnTo>
-                    <a:pt x="1862185" y="2922000"/>
-                  </a:lnTo>
-                  <a:lnTo>
-                    <a:pt x="1933808" y="2914286"/>
-                  </a:lnTo>
-                  <a:lnTo>
-                    <a:pt x="2005430" y="2906490"/>
-                  </a:lnTo>
-                  <a:lnTo>
-                    <a:pt x="2077053" y="2898613"/>
-                  </a:lnTo>
-                  <a:lnTo>
-                    <a:pt x="2148675" y="2890651"/>
-                  </a:lnTo>
-                  <a:lnTo>
-                    <a:pt x="2220298" y="2882606"/>
-                  </a:lnTo>
-                  <a:lnTo>
-                    <a:pt x="2291920" y="2874476"/>
-                  </a:lnTo>
-                  <a:lnTo>
-                    <a:pt x="2363543" y="2866260"/>
-                  </a:lnTo>
-                  <a:lnTo>
-                    <a:pt x="2435165" y="2857958"/>
-                  </a:lnTo>
-                  <a:lnTo>
-                    <a:pt x="2506788" y="2849567"/>
-                  </a:lnTo>
-                  <a:lnTo>
-                    <a:pt x="2578410" y="2841089"/>
-                  </a:lnTo>
-                  <a:lnTo>
-                    <a:pt x="2650033" y="2832520"/>
-                  </a:lnTo>
-                  <a:lnTo>
-                    <a:pt x="2721655" y="2823861"/>
-                  </a:lnTo>
-                  <a:lnTo>
-                    <a:pt x="2793278" y="2815111"/>
-                  </a:lnTo>
-                  <a:lnTo>
-                    <a:pt x="2864901" y="2806268"/>
-                  </a:lnTo>
-                  <a:lnTo>
-                    <a:pt x="2936523" y="2797332"/>
-                  </a:lnTo>
-                  <a:lnTo>
-                    <a:pt x="3008146" y="2788302"/>
-                  </a:lnTo>
-                  <a:lnTo>
-                    <a:pt x="3079768" y="2755480"/>
-                  </a:lnTo>
-                  <a:lnTo>
-                    <a:pt x="3151391" y="2685458"/>
-                  </a:lnTo>
-                  <a:lnTo>
-                    <a:pt x="3223013" y="2609971"/>
-                  </a:lnTo>
-                  <a:lnTo>
-                    <a:pt x="3294636" y="2528593"/>
-                  </a:lnTo>
-                  <a:lnTo>
-                    <a:pt x="3366258" y="2440863"/>
-                  </a:lnTo>
-                  <a:lnTo>
-                    <a:pt x="3437881" y="2346285"/>
-                  </a:lnTo>
-                  <a:lnTo>
-                    <a:pt x="3509503" y="2244327"/>
-                  </a:lnTo>
-                  <a:lnTo>
-                    <a:pt x="3581126" y="2134410"/>
-                  </a:lnTo>
-                  <a:lnTo>
-                    <a:pt x="3652748" y="2015915"/>
-                  </a:lnTo>
-                  <a:lnTo>
-                    <a:pt x="3724371" y="1888171"/>
-                  </a:lnTo>
-                  <a:lnTo>
-                    <a:pt x="3795993" y="1750457"/>
-                  </a:lnTo>
-                  <a:lnTo>
-                    <a:pt x="3867616" y="1601995"/>
-                  </a:lnTo>
-                  <a:lnTo>
-                    <a:pt x="3939238" y="1441946"/>
-                  </a:lnTo>
-                  <a:lnTo>
-                    <a:pt x="4010861" y="1269405"/>
-                  </a:lnTo>
-                  <a:lnTo>
-                    <a:pt x="4082483" y="1083398"/>
-                  </a:lnTo>
-                  <a:lnTo>
-                    <a:pt x="4154106" y="882873"/>
-                  </a:lnTo>
-                  <a:lnTo>
-                    <a:pt x="4225729" y="666697"/>
-                  </a:lnTo>
-                  <a:lnTo>
-                    <a:pt x="4297351" y="433650"/>
-                  </a:lnTo>
-                  <a:lnTo>
-                    <a:pt x="4368974" y="182413"/>
-                  </a:lnTo>
-                  <a:lnTo>
-                    <a:pt x="4417211" y="0"/>
+                    <a:pt x="71622" y="2921317"/>
+                  </a:lnTo>
+                  <a:lnTo>
+                    <a:pt x="143245" y="2918264"/>
+                  </a:lnTo>
+                  <a:lnTo>
+                    <a:pt x="214867" y="2915198"/>
+                  </a:lnTo>
+                  <a:lnTo>
+                    <a:pt x="286490" y="2912119"/>
+                  </a:lnTo>
+                  <a:lnTo>
+                    <a:pt x="358112" y="2909027"/>
+                  </a:lnTo>
+                  <a:lnTo>
+                    <a:pt x="429735" y="2905923"/>
+                  </a:lnTo>
+                  <a:lnTo>
+                    <a:pt x="501357" y="2902805"/>
+                  </a:lnTo>
+                  <a:lnTo>
+                    <a:pt x="572980" y="2899674"/>
+                  </a:lnTo>
+                  <a:lnTo>
+                    <a:pt x="644602" y="2896531"/>
+                  </a:lnTo>
+                  <a:lnTo>
+                    <a:pt x="716225" y="2893374"/>
+                  </a:lnTo>
+                  <a:lnTo>
+                    <a:pt x="787847" y="2890204"/>
+                  </a:lnTo>
+                  <a:lnTo>
+                    <a:pt x="859470" y="2887021"/>
+                  </a:lnTo>
+                  <a:lnTo>
+                    <a:pt x="931092" y="2883824"/>
+                  </a:lnTo>
+                  <a:lnTo>
+                    <a:pt x="1002715" y="2880614"/>
+                  </a:lnTo>
+                  <a:lnTo>
+                    <a:pt x="1074337" y="2877391"/>
+                  </a:lnTo>
+                  <a:lnTo>
+                    <a:pt x="1145960" y="2874154"/>
+                  </a:lnTo>
+                  <a:lnTo>
+                    <a:pt x="1217582" y="2870904"/>
+                  </a:lnTo>
+                  <a:lnTo>
+                    <a:pt x="1289205" y="2867640"/>
+                  </a:lnTo>
+                  <a:lnTo>
+                    <a:pt x="1360827" y="2864363"/>
+                  </a:lnTo>
+                  <a:lnTo>
+                    <a:pt x="1432450" y="2861072"/>
+                  </a:lnTo>
+                  <a:lnTo>
+                    <a:pt x="1504073" y="2857767"/>
+                  </a:lnTo>
+                  <a:lnTo>
+                    <a:pt x="1575695" y="2854448"/>
+                  </a:lnTo>
+                  <a:lnTo>
+                    <a:pt x="1647318" y="2851116"/>
+                  </a:lnTo>
+                  <a:lnTo>
+                    <a:pt x="1718940" y="2847769"/>
+                  </a:lnTo>
+                  <a:lnTo>
+                    <a:pt x="1790563" y="2844409"/>
+                  </a:lnTo>
+                  <a:lnTo>
+                    <a:pt x="1862185" y="2841034"/>
+                  </a:lnTo>
+                  <a:lnTo>
+                    <a:pt x="1933808" y="2837646"/>
+                  </a:lnTo>
+                  <a:lnTo>
+                    <a:pt x="2005430" y="2834243"/>
+                  </a:lnTo>
+                  <a:lnTo>
+                    <a:pt x="2077053" y="2830826"/>
+                  </a:lnTo>
+                  <a:lnTo>
+                    <a:pt x="2148675" y="2827395"/>
+                  </a:lnTo>
+                  <a:lnTo>
+                    <a:pt x="2220298" y="2823950"/>
+                  </a:lnTo>
+                  <a:lnTo>
+                    <a:pt x="2291920" y="2820490"/>
+                  </a:lnTo>
+                  <a:lnTo>
+                    <a:pt x="2363543" y="2817016"/>
+                  </a:lnTo>
+                  <a:lnTo>
+                    <a:pt x="2435165" y="2813527"/>
+                  </a:lnTo>
+                  <a:lnTo>
+                    <a:pt x="2506788" y="2810023"/>
+                  </a:lnTo>
+                  <a:lnTo>
+                    <a:pt x="2578410" y="2806505"/>
+                  </a:lnTo>
+                  <a:lnTo>
+                    <a:pt x="2650033" y="2802973"/>
+                  </a:lnTo>
+                  <a:lnTo>
+                    <a:pt x="2721655" y="2799425"/>
+                  </a:lnTo>
+                  <a:lnTo>
+                    <a:pt x="2793278" y="2795863"/>
+                  </a:lnTo>
+                  <a:lnTo>
+                    <a:pt x="2864901" y="2792286"/>
+                  </a:lnTo>
+                  <a:lnTo>
+                    <a:pt x="2936523" y="2788694"/>
+                  </a:lnTo>
+                  <a:lnTo>
+                    <a:pt x="3008146" y="2785087"/>
+                  </a:lnTo>
+                  <a:lnTo>
+                    <a:pt x="3079768" y="2758946"/>
+                  </a:lnTo>
+                  <a:lnTo>
+                    <a:pt x="3151391" y="2698158"/>
+                  </a:lnTo>
+                  <a:lnTo>
+                    <a:pt x="3223013" y="2633235"/>
+                  </a:lnTo>
+                  <a:lnTo>
+                    <a:pt x="3294636" y="2563897"/>
+                  </a:lnTo>
+                  <a:lnTo>
+                    <a:pt x="3366258" y="2489842"/>
+                  </a:lnTo>
+                  <a:lnTo>
+                    <a:pt x="3437881" y="2410751"/>
+                  </a:lnTo>
+                  <a:lnTo>
+                    <a:pt x="3509503" y="2326279"/>
+                  </a:lnTo>
+                  <a:lnTo>
+                    <a:pt x="3581126" y="2236062"/>
+                  </a:lnTo>
+                  <a:lnTo>
+                    <a:pt x="3652748" y="2139709"/>
+                  </a:lnTo>
+                  <a:lnTo>
+                    <a:pt x="3724371" y="2036801"/>
+                  </a:lnTo>
+                  <a:lnTo>
+                    <a:pt x="3795993" y="1926895"/>
+                  </a:lnTo>
+                  <a:lnTo>
+                    <a:pt x="3867616" y="1809512"/>
+                  </a:lnTo>
+                  <a:lnTo>
+                    <a:pt x="3939238" y="1684145"/>
+                  </a:lnTo>
+                  <a:lnTo>
+                    <a:pt x="4010861" y="1550252"/>
+                  </a:lnTo>
+                  <a:lnTo>
+                    <a:pt x="4082483" y="1407250"/>
+                  </a:lnTo>
+                  <a:lnTo>
+                    <a:pt x="4154106" y="1254523"/>
+                  </a:lnTo>
+                  <a:lnTo>
+                    <a:pt x="4225729" y="1091407"/>
+                  </a:lnTo>
+                  <a:lnTo>
+                    <a:pt x="4297351" y="917196"/>
+                  </a:lnTo>
+                  <a:lnTo>
+                    <a:pt x="4368974" y="731135"/>
+                  </a:lnTo>
+                  <a:lnTo>
+                    <a:pt x="4440596" y="532419"/>
+                  </a:lnTo>
+                  <a:lnTo>
+                    <a:pt x="4512219" y="320187"/>
+                  </a:lnTo>
+                  <a:lnTo>
+                    <a:pt x="4583841" y="93519"/>
+                  </a:lnTo>
+                  <a:lnTo>
+                    <a:pt x="4611509" y="0"/>
                   </a:lnTo>
                   <a:lnTo>
                     <a:pt x="7090630" y="0"/>
                   </a:lnTo>
                   <a:lnTo>
-                    <a:pt x="7090630" y="2079833"/>
-                  </a:lnTo>
-                  <a:lnTo>
-                    <a:pt x="7019007" y="2096265"/>
-                  </a:lnTo>
-                  <a:lnTo>
-                    <a:pt x="6947385" y="2112525"/>
-                  </a:lnTo>
-                  <a:lnTo>
-                    <a:pt x="6875762" y="2128616"/>
-                  </a:lnTo>
-                  <a:lnTo>
-                    <a:pt x="6804139" y="2144539"/>
-                  </a:lnTo>
-                  <a:lnTo>
-                    <a:pt x="6732517" y="2160295"/>
-                  </a:lnTo>
-                  <a:lnTo>
-                    <a:pt x="6660894" y="2175887"/>
-                  </a:lnTo>
-                  <a:lnTo>
-                    <a:pt x="6589272" y="2191315"/>
-                  </a:lnTo>
-                  <a:lnTo>
-                    <a:pt x="6517649" y="2206583"/>
-                  </a:lnTo>
-                  <a:lnTo>
-                    <a:pt x="6446027" y="2221691"/>
-                  </a:lnTo>
-                  <a:lnTo>
-                    <a:pt x="6374404" y="2236641"/>
-                  </a:lnTo>
-                  <a:lnTo>
-                    <a:pt x="6302782" y="2251435"/>
-                  </a:lnTo>
-                  <a:lnTo>
-                    <a:pt x="6231159" y="2266074"/>
-                  </a:lnTo>
-                  <a:lnTo>
-                    <a:pt x="6159537" y="2280561"/>
-                  </a:lnTo>
-                  <a:lnTo>
-                    <a:pt x="6087914" y="2294896"/>
-                  </a:lnTo>
-                  <a:lnTo>
-                    <a:pt x="6016292" y="2309081"/>
-                  </a:lnTo>
-                  <a:lnTo>
-                    <a:pt x="5944669" y="2323118"/>
-                  </a:lnTo>
-                  <a:lnTo>
-                    <a:pt x="5873047" y="2337009"/>
-                  </a:lnTo>
-                  <a:lnTo>
-                    <a:pt x="5801424" y="2350754"/>
-                  </a:lnTo>
-                  <a:lnTo>
-                    <a:pt x="5729802" y="2364356"/>
-                  </a:lnTo>
-                  <a:lnTo>
-                    <a:pt x="5658179" y="2377816"/>
-                  </a:lnTo>
-                  <a:lnTo>
-                    <a:pt x="5586557" y="2391135"/>
-                  </a:lnTo>
-                  <a:lnTo>
-                    <a:pt x="5514934" y="2404315"/>
-                  </a:lnTo>
-                  <a:lnTo>
-                    <a:pt x="5443311" y="2417357"/>
-                  </a:lnTo>
-                  <a:lnTo>
-                    <a:pt x="5371689" y="2430263"/>
-                  </a:lnTo>
-                  <a:lnTo>
-                    <a:pt x="5300066" y="2443034"/>
-                  </a:lnTo>
-                  <a:lnTo>
-                    <a:pt x="5228444" y="2455671"/>
-                  </a:lnTo>
-                  <a:lnTo>
-                    <a:pt x="5156821" y="2468177"/>
-                  </a:lnTo>
-                  <a:lnTo>
-                    <a:pt x="5085199" y="2480552"/>
-                  </a:lnTo>
-                  <a:lnTo>
-                    <a:pt x="5013576" y="2492798"/>
-                  </a:lnTo>
-                  <a:lnTo>
-                    <a:pt x="4941954" y="2504915"/>
-                  </a:lnTo>
-                  <a:lnTo>
-                    <a:pt x="4870331" y="2516906"/>
-                  </a:lnTo>
-                  <a:lnTo>
-                    <a:pt x="4798709" y="2528772"/>
-                  </a:lnTo>
-                  <a:lnTo>
-                    <a:pt x="4727086" y="2540514"/>
-                  </a:lnTo>
-                  <a:lnTo>
-                    <a:pt x="4655464" y="2552133"/>
-                  </a:lnTo>
-                  <a:lnTo>
-                    <a:pt x="4583841" y="2563631"/>
-                  </a:lnTo>
-                  <a:lnTo>
-                    <a:pt x="4512219" y="2575009"/>
-                  </a:lnTo>
-                  <a:lnTo>
-                    <a:pt x="4440596" y="2586268"/>
-                  </a:lnTo>
-                  <a:lnTo>
-                    <a:pt x="4368974" y="2597409"/>
-                  </a:lnTo>
-                  <a:lnTo>
-                    <a:pt x="4297351" y="2608433"/>
-                  </a:lnTo>
-                  <a:lnTo>
-                    <a:pt x="4225729" y="2619343"/>
-                  </a:lnTo>
-                  <a:lnTo>
-                    <a:pt x="4154106" y="2630139"/>
-                  </a:lnTo>
-                  <a:lnTo>
-                    <a:pt x="4082483" y="2640822"/>
-                  </a:lnTo>
-                  <a:lnTo>
-                    <a:pt x="4010861" y="2651393"/>
-                  </a:lnTo>
-                  <a:lnTo>
-                    <a:pt x="3939238" y="2661853"/>
-                  </a:lnTo>
-                  <a:lnTo>
-                    <a:pt x="3867616" y="2672205"/>
-                  </a:lnTo>
-                  <a:lnTo>
-                    <a:pt x="3795993" y="2682448"/>
-                  </a:lnTo>
-                  <a:lnTo>
-                    <a:pt x="3724371" y="2692585"/>
-                  </a:lnTo>
-                  <a:lnTo>
-                    <a:pt x="3652748" y="2702615"/>
-                  </a:lnTo>
-                  <a:lnTo>
-                    <a:pt x="3581126" y="2712541"/>
-                  </a:lnTo>
-                  <a:lnTo>
-                    <a:pt x="3509503" y="2722363"/>
-                  </a:lnTo>
-                  <a:lnTo>
-                    <a:pt x="3437881" y="2732082"/>
-                  </a:lnTo>
-                  <a:lnTo>
-                    <a:pt x="3366258" y="2741700"/>
-                  </a:lnTo>
-                  <a:lnTo>
-                    <a:pt x="3294636" y="2751217"/>
-                  </a:lnTo>
-                  <a:lnTo>
-                    <a:pt x="3223013" y="2760635"/>
-                  </a:lnTo>
-                  <a:lnTo>
-                    <a:pt x="3151391" y="2769954"/>
-                  </a:lnTo>
-                  <a:lnTo>
-                    <a:pt x="3079768" y="2779176"/>
-                  </a:lnTo>
-                  <a:lnTo>
-                    <a:pt x="3008146" y="2820433"/>
-                  </a:lnTo>
-                  <a:lnTo>
-                    <a:pt x="2936523" y="2880683"/>
-                  </a:lnTo>
-                  <a:lnTo>
-                    <a:pt x="2864901" y="2936571"/>
-                  </a:lnTo>
-                  <a:lnTo>
-                    <a:pt x="2793278" y="2988413"/>
-                  </a:lnTo>
-                  <a:lnTo>
-                    <a:pt x="2721655" y="3036502"/>
-                  </a:lnTo>
-                  <a:lnTo>
-                    <a:pt x="2650033" y="3081109"/>
-                  </a:lnTo>
-                  <a:lnTo>
-                    <a:pt x="2578410" y="3122487"/>
-                  </a:lnTo>
-                  <a:lnTo>
-                    <a:pt x="2506788" y="3160869"/>
-                  </a:lnTo>
-                  <a:lnTo>
-                    <a:pt x="2435165" y="3196472"/>
-                  </a:lnTo>
-                  <a:lnTo>
-                    <a:pt x="2363543" y="3229498"/>
-                  </a:lnTo>
-                  <a:lnTo>
-                    <a:pt x="2291920" y="3260133"/>
-                  </a:lnTo>
-                  <a:lnTo>
-                    <a:pt x="2220298" y="3288549"/>
-                  </a:lnTo>
-                  <a:lnTo>
-                    <a:pt x="2148675" y="3314909"/>
-                  </a:lnTo>
-                  <a:lnTo>
-                    <a:pt x="2077053" y="3339360"/>
-                  </a:lnTo>
-                  <a:lnTo>
-                    <a:pt x="2005430" y="3362041"/>
-                  </a:lnTo>
-                  <a:lnTo>
-                    <a:pt x="1933808" y="3383080"/>
-                  </a:lnTo>
-                  <a:lnTo>
-                    <a:pt x="1862185" y="3402596"/>
-                  </a:lnTo>
-                  <a:lnTo>
-                    <a:pt x="1790563" y="3420699"/>
-                  </a:lnTo>
-                  <a:lnTo>
-                    <a:pt x="1718940" y="3437491"/>
-                  </a:lnTo>
-                  <a:lnTo>
-                    <a:pt x="1647318" y="3453067"/>
-                  </a:lnTo>
-                  <a:lnTo>
-                    <a:pt x="1575695" y="3467516"/>
-                  </a:lnTo>
-                  <a:lnTo>
-                    <a:pt x="1504073" y="3480919"/>
-                  </a:lnTo>
-                  <a:lnTo>
-                    <a:pt x="1432450" y="3493351"/>
-                  </a:lnTo>
-                  <a:lnTo>
-                    <a:pt x="1360827" y="3504884"/>
-                  </a:lnTo>
-                  <a:lnTo>
-                    <a:pt x="1289205" y="3515581"/>
-                  </a:lnTo>
-                  <a:lnTo>
-                    <a:pt x="1217582" y="3525504"/>
-                  </a:lnTo>
-                  <a:lnTo>
-                    <a:pt x="1145960" y="3534709"/>
-                  </a:lnTo>
-                  <a:lnTo>
-                    <a:pt x="1074337" y="3543247"/>
-                  </a:lnTo>
-                  <a:lnTo>
-                    <a:pt x="1002715" y="3551167"/>
-                  </a:lnTo>
-                  <a:lnTo>
-                    <a:pt x="931092" y="3558514"/>
-                  </a:lnTo>
-                  <a:lnTo>
-                    <a:pt x="859470" y="3565328"/>
-                  </a:lnTo>
-                  <a:lnTo>
-                    <a:pt x="787847" y="3571650"/>
-                  </a:lnTo>
-                  <a:lnTo>
-                    <a:pt x="716225" y="3577514"/>
-                  </a:lnTo>
-                  <a:lnTo>
-                    <a:pt x="644602" y="3582953"/>
-                  </a:lnTo>
-                  <a:lnTo>
-                    <a:pt x="572980" y="3587998"/>
-                  </a:lnTo>
-                  <a:lnTo>
-                    <a:pt x="501357" y="3592678"/>
-                  </a:lnTo>
-                  <a:lnTo>
-                    <a:pt x="429735" y="3597020"/>
-                  </a:lnTo>
-                  <a:lnTo>
-                    <a:pt x="358112" y="3601047"/>
-                  </a:lnTo>
-                  <a:lnTo>
-                    <a:pt x="286490" y="3604782"/>
-                  </a:lnTo>
-                  <a:lnTo>
-                    <a:pt x="214867" y="3608247"/>
-                  </a:lnTo>
-                  <a:lnTo>
-                    <a:pt x="143245" y="3611461"/>
-                  </a:lnTo>
-                  <a:lnTo>
-                    <a:pt x="71622" y="3614443"/>
-                  </a:lnTo>
-                  <a:lnTo>
-                    <a:pt x="0" y="3617208"/>
+                    <a:pt x="7090630" y="2552535"/>
+                  </a:lnTo>
+                  <a:lnTo>
+                    <a:pt x="7019007" y="2557109"/>
+                  </a:lnTo>
+                  <a:lnTo>
+                    <a:pt x="6947385" y="2561664"/>
+                  </a:lnTo>
+                  <a:lnTo>
+                    <a:pt x="6875762" y="2566200"/>
+                  </a:lnTo>
+                  <a:lnTo>
+                    <a:pt x="6804139" y="2570717"/>
+                  </a:lnTo>
+                  <a:lnTo>
+                    <a:pt x="6732517" y="2575215"/>
+                  </a:lnTo>
+                  <a:lnTo>
+                    <a:pt x="6660894" y="2579695"/>
+                  </a:lnTo>
+                  <a:lnTo>
+                    <a:pt x="6589272" y="2584156"/>
+                  </a:lnTo>
+                  <a:lnTo>
+                    <a:pt x="6517649" y="2588598"/>
+                  </a:lnTo>
+                  <a:lnTo>
+                    <a:pt x="6446027" y="2593022"/>
+                  </a:lnTo>
+                  <a:lnTo>
+                    <a:pt x="6374404" y="2597428"/>
+                  </a:lnTo>
+                  <a:lnTo>
+                    <a:pt x="6302782" y="2601815"/>
+                  </a:lnTo>
+                  <a:lnTo>
+                    <a:pt x="6231159" y="2606184"/>
+                  </a:lnTo>
+                  <a:lnTo>
+                    <a:pt x="6159537" y="2610535"/>
+                  </a:lnTo>
+                  <a:lnTo>
+                    <a:pt x="6087914" y="2614868"/>
+                  </a:lnTo>
+                  <a:lnTo>
+                    <a:pt x="6016292" y="2619183"/>
+                  </a:lnTo>
+                  <a:lnTo>
+                    <a:pt x="5944669" y="2623480"/>
+                  </a:lnTo>
+                  <a:lnTo>
+                    <a:pt x="5873047" y="2627758"/>
+                  </a:lnTo>
+                  <a:lnTo>
+                    <a:pt x="5801424" y="2632020"/>
+                  </a:lnTo>
+                  <a:lnTo>
+                    <a:pt x="5729802" y="2636263"/>
+                  </a:lnTo>
+                  <a:lnTo>
+                    <a:pt x="5658179" y="2640489"/>
+                  </a:lnTo>
+                  <a:lnTo>
+                    <a:pt x="5586557" y="2644697"/>
+                  </a:lnTo>
+                  <a:lnTo>
+                    <a:pt x="5514934" y="2648888"/>
+                  </a:lnTo>
+                  <a:lnTo>
+                    <a:pt x="5443311" y="2653061"/>
+                  </a:lnTo>
+                  <a:lnTo>
+                    <a:pt x="5371689" y="2657217"/>
+                  </a:lnTo>
+                  <a:lnTo>
+                    <a:pt x="5300066" y="2661356"/>
+                  </a:lnTo>
+                  <a:lnTo>
+                    <a:pt x="5228444" y="2665477"/>
+                  </a:lnTo>
+                  <a:lnTo>
+                    <a:pt x="5156821" y="2669582"/>
+                  </a:lnTo>
+                  <a:lnTo>
+                    <a:pt x="5085199" y="2673669"/>
+                  </a:lnTo>
+                  <a:lnTo>
+                    <a:pt x="5013576" y="2677739"/>
+                  </a:lnTo>
+                  <a:lnTo>
+                    <a:pt x="4941954" y="2681793"/>
+                  </a:lnTo>
+                  <a:lnTo>
+                    <a:pt x="4870331" y="2685829"/>
+                  </a:lnTo>
+                  <a:lnTo>
+                    <a:pt x="4798709" y="2689849"/>
+                  </a:lnTo>
+                  <a:lnTo>
+                    <a:pt x="4727086" y="2693852"/>
+                  </a:lnTo>
+                  <a:lnTo>
+                    <a:pt x="4655464" y="2697838"/>
+                  </a:lnTo>
+                  <a:lnTo>
+                    <a:pt x="4583841" y="2701808"/>
+                  </a:lnTo>
+                  <a:lnTo>
+                    <a:pt x="4512219" y="2705761"/>
+                  </a:lnTo>
+                  <a:lnTo>
+                    <a:pt x="4440596" y="2709698"/>
+                  </a:lnTo>
+                  <a:lnTo>
+                    <a:pt x="4368974" y="2713619"/>
+                  </a:lnTo>
+                  <a:lnTo>
+                    <a:pt x="4297351" y="2717523"/>
+                  </a:lnTo>
+                  <a:lnTo>
+                    <a:pt x="4225729" y="2721411"/>
+                  </a:lnTo>
+                  <a:lnTo>
+                    <a:pt x="4154106" y="2725283"/>
+                  </a:lnTo>
+                  <a:lnTo>
+                    <a:pt x="4082483" y="2729138"/>
+                  </a:lnTo>
+                  <a:lnTo>
+                    <a:pt x="4010861" y="2732978"/>
+                  </a:lnTo>
+                  <a:lnTo>
+                    <a:pt x="3939238" y="2736802"/>
+                  </a:lnTo>
+                  <a:lnTo>
+                    <a:pt x="3867616" y="2740609"/>
+                  </a:lnTo>
+                  <a:lnTo>
+                    <a:pt x="3795993" y="2744401"/>
+                  </a:lnTo>
+                  <a:lnTo>
+                    <a:pt x="3724371" y="2748178"/>
+                  </a:lnTo>
+                  <a:lnTo>
+                    <a:pt x="3652748" y="2751938"/>
+                  </a:lnTo>
+                  <a:lnTo>
+                    <a:pt x="3581126" y="2755683"/>
+                  </a:lnTo>
+                  <a:lnTo>
+                    <a:pt x="3509503" y="2759412"/>
+                  </a:lnTo>
+                  <a:lnTo>
+                    <a:pt x="3437881" y="2763126"/>
+                  </a:lnTo>
+                  <a:lnTo>
+                    <a:pt x="3366258" y="2766824"/>
+                  </a:lnTo>
+                  <a:lnTo>
+                    <a:pt x="3294636" y="2770507"/>
+                  </a:lnTo>
+                  <a:lnTo>
+                    <a:pt x="3223013" y="2774175"/>
+                  </a:lnTo>
+                  <a:lnTo>
+                    <a:pt x="3151391" y="2777827"/>
+                  </a:lnTo>
+                  <a:lnTo>
+                    <a:pt x="3079768" y="2781465"/>
+                  </a:lnTo>
+                  <a:lnTo>
+                    <a:pt x="3008146" y="2815862"/>
+                  </a:lnTo>
+                  <a:lnTo>
+                    <a:pt x="2936523" y="2869154"/>
+                  </a:lnTo>
+                  <a:lnTo>
+                    <a:pt x="2864901" y="2919051"/>
+                  </a:lnTo>
+                  <a:lnTo>
+                    <a:pt x="2793278" y="2965771"/>
+                  </a:lnTo>
+                  <a:lnTo>
+                    <a:pt x="2721655" y="3009516"/>
+                  </a:lnTo>
+                  <a:lnTo>
+                    <a:pt x="2650033" y="3050474"/>
+                  </a:lnTo>
+                  <a:lnTo>
+                    <a:pt x="2578410" y="3088824"/>
+                  </a:lnTo>
+                  <a:lnTo>
+                    <a:pt x="2506788" y="3124732"/>
+                  </a:lnTo>
+                  <a:lnTo>
+                    <a:pt x="2435165" y="3158353"/>
+                  </a:lnTo>
+                  <a:lnTo>
+                    <a:pt x="2363543" y="3189832"/>
+                  </a:lnTo>
+                  <a:lnTo>
+                    <a:pt x="2291920" y="3219307"/>
+                  </a:lnTo>
+                  <a:lnTo>
+                    <a:pt x="2220298" y="3246905"/>
+                  </a:lnTo>
+                  <a:lnTo>
+                    <a:pt x="2148675" y="3272745"/>
+                  </a:lnTo>
+                  <a:lnTo>
+                    <a:pt x="2077053" y="3296939"/>
+                  </a:lnTo>
+                  <a:lnTo>
+                    <a:pt x="2005430" y="3319593"/>
+                  </a:lnTo>
+                  <a:lnTo>
+                    <a:pt x="1933808" y="3340804"/>
+                  </a:lnTo>
+                  <a:lnTo>
+                    <a:pt x="1862185" y="3360664"/>
+                  </a:lnTo>
+                  <a:lnTo>
+                    <a:pt x="1790563" y="3379259"/>
+                  </a:lnTo>
+                  <a:lnTo>
+                    <a:pt x="1718940" y="3396670"/>
+                  </a:lnTo>
+                  <a:lnTo>
+                    <a:pt x="1647318" y="3412972"/>
+                  </a:lnTo>
+                  <a:lnTo>
+                    <a:pt x="1575695" y="3428235"/>
+                  </a:lnTo>
+                  <a:lnTo>
+                    <a:pt x="1504073" y="3442527"/>
+                  </a:lnTo>
+                  <a:lnTo>
+                    <a:pt x="1432450" y="3455909"/>
+                  </a:lnTo>
+                  <a:lnTo>
+                    <a:pt x="1360827" y="3468438"/>
+                  </a:lnTo>
+                  <a:lnTo>
+                    <a:pt x="1289205" y="3480169"/>
+                  </a:lnTo>
+                  <a:lnTo>
+                    <a:pt x="1217582" y="3491154"/>
+                  </a:lnTo>
+                  <a:lnTo>
+                    <a:pt x="1145960" y="3501438"/>
+                  </a:lnTo>
+                  <a:lnTo>
+                    <a:pt x="1074337" y="3511068"/>
+                  </a:lnTo>
+                  <a:lnTo>
+                    <a:pt x="1002715" y="3520085"/>
+                  </a:lnTo>
+                  <a:lnTo>
+                    <a:pt x="931092" y="3528527"/>
+                  </a:lnTo>
+                  <a:lnTo>
+                    <a:pt x="859470" y="3536431"/>
+                  </a:lnTo>
+                  <a:lnTo>
+                    <a:pt x="787847" y="3543832"/>
+                  </a:lnTo>
+                  <a:lnTo>
+                    <a:pt x="716225" y="3550762"/>
+                  </a:lnTo>
+                  <a:lnTo>
+                    <a:pt x="644602" y="3557251"/>
+                  </a:lnTo>
+                  <a:lnTo>
+                    <a:pt x="572980" y="3563326"/>
+                  </a:lnTo>
+                  <a:lnTo>
+                    <a:pt x="501357" y="3569014"/>
+                  </a:lnTo>
+                  <a:lnTo>
+                    <a:pt x="429735" y="3574340"/>
+                  </a:lnTo>
+                  <a:lnTo>
+                    <a:pt x="358112" y="3579327"/>
+                  </a:lnTo>
+                  <a:lnTo>
+                    <a:pt x="286490" y="3583996"/>
+                  </a:lnTo>
+                  <a:lnTo>
+                    <a:pt x="214867" y="3588368"/>
+                  </a:lnTo>
+                  <a:lnTo>
+                    <a:pt x="143245" y="3592462"/>
+                  </a:lnTo>
+                  <a:lnTo>
+                    <a:pt x="71622" y="3596294"/>
+                  </a:lnTo>
+                  <a:lnTo>
+                    <a:pt x="0" y="3599883"/>
                   </a:lnTo>
                   <a:close/>
                 </a:path>
@@ -3655,200 +3664,209 @@
           <p:spPr>
             <a:xfrm>
               <a:off x="1172049" y="1896563"/>
-              <a:ext cx="4417211" cy="3096595"/>
+              <a:ext cx="4611509" cy="2924358"/>
             </a:xfrm>
             <a:custGeom>
               <a:avLst/>
               <a:pathLst>
-                <a:path w="4417211" h="3096595">
+                <a:path w="4611509" h="2924358">
                   <a:moveTo>
-                    <a:pt x="0" y="3096595"/>
+                    <a:pt x="0" y="2924358"/>
                   </a:moveTo>
                   <a:lnTo>
-                    <a:pt x="71622" y="3090724"/>
-                  </a:lnTo>
-                  <a:lnTo>
-                    <a:pt x="143245" y="3084791"/>
-                  </a:lnTo>
-                  <a:lnTo>
-                    <a:pt x="214867" y="3078796"/>
-                  </a:lnTo>
-                  <a:lnTo>
-                    <a:pt x="286490" y="3072737"/>
-                  </a:lnTo>
-                  <a:lnTo>
-                    <a:pt x="358112" y="3066614"/>
-                  </a:lnTo>
-                  <a:lnTo>
-                    <a:pt x="429735" y="3060427"/>
-                  </a:lnTo>
-                  <a:lnTo>
-                    <a:pt x="501357" y="3054174"/>
-                  </a:lnTo>
-                  <a:lnTo>
-                    <a:pt x="572980" y="3047856"/>
-                  </a:lnTo>
-                  <a:lnTo>
-                    <a:pt x="644602" y="3041470"/>
-                  </a:lnTo>
-                  <a:lnTo>
-                    <a:pt x="716225" y="3035018"/>
-                  </a:lnTo>
-                  <a:lnTo>
-                    <a:pt x="787847" y="3028497"/>
-                  </a:lnTo>
-                  <a:lnTo>
-                    <a:pt x="859470" y="3021907"/>
-                  </a:lnTo>
-                  <a:lnTo>
-                    <a:pt x="931092" y="3015248"/>
-                  </a:lnTo>
-                  <a:lnTo>
-                    <a:pt x="1002715" y="3008518"/>
-                  </a:lnTo>
-                  <a:lnTo>
-                    <a:pt x="1074337" y="3001717"/>
-                  </a:lnTo>
-                  <a:lnTo>
-                    <a:pt x="1145960" y="2994845"/>
-                  </a:lnTo>
-                  <a:lnTo>
-                    <a:pt x="1217582" y="2987900"/>
-                  </a:lnTo>
-                  <a:lnTo>
-                    <a:pt x="1289205" y="2980881"/>
-                  </a:lnTo>
-                  <a:lnTo>
-                    <a:pt x="1360827" y="2973789"/>
-                  </a:lnTo>
-                  <a:lnTo>
-                    <a:pt x="1432450" y="2966622"/>
-                  </a:lnTo>
-                  <a:lnTo>
-                    <a:pt x="1504073" y="2959379"/>
-                  </a:lnTo>
-                  <a:lnTo>
-                    <a:pt x="1575695" y="2952059"/>
-                  </a:lnTo>
-                  <a:lnTo>
-                    <a:pt x="1647318" y="2944662"/>
-                  </a:lnTo>
-                  <a:lnTo>
-                    <a:pt x="1718940" y="2937187"/>
-                  </a:lnTo>
-                  <a:lnTo>
-                    <a:pt x="1790563" y="2929634"/>
-                  </a:lnTo>
-                  <a:lnTo>
-                    <a:pt x="1862185" y="2922000"/>
-                  </a:lnTo>
-                  <a:lnTo>
-                    <a:pt x="1933808" y="2914286"/>
-                  </a:lnTo>
-                  <a:lnTo>
-                    <a:pt x="2005430" y="2906490"/>
-                  </a:lnTo>
-                  <a:lnTo>
-                    <a:pt x="2077053" y="2898613"/>
-                  </a:lnTo>
-                  <a:lnTo>
-                    <a:pt x="2148675" y="2890651"/>
-                  </a:lnTo>
-                  <a:lnTo>
-                    <a:pt x="2220298" y="2882606"/>
-                  </a:lnTo>
-                  <a:lnTo>
-                    <a:pt x="2291920" y="2874476"/>
-                  </a:lnTo>
-                  <a:lnTo>
-                    <a:pt x="2363543" y="2866260"/>
-                  </a:lnTo>
-                  <a:lnTo>
-                    <a:pt x="2435165" y="2857958"/>
-                  </a:lnTo>
-                  <a:lnTo>
-                    <a:pt x="2506788" y="2849567"/>
-                  </a:lnTo>
-                  <a:lnTo>
-                    <a:pt x="2578410" y="2841089"/>
-                  </a:lnTo>
-                  <a:lnTo>
-                    <a:pt x="2650033" y="2832520"/>
-                  </a:lnTo>
-                  <a:lnTo>
-                    <a:pt x="2721655" y="2823861"/>
-                  </a:lnTo>
-                  <a:lnTo>
-                    <a:pt x="2793278" y="2815111"/>
-                  </a:lnTo>
-                  <a:lnTo>
-                    <a:pt x="2864901" y="2806268"/>
-                  </a:lnTo>
-                  <a:lnTo>
-                    <a:pt x="2936523" y="2797332"/>
-                  </a:lnTo>
-                  <a:lnTo>
-                    <a:pt x="3008146" y="2788302"/>
-                  </a:lnTo>
-                  <a:lnTo>
-                    <a:pt x="3079768" y="2755480"/>
-                  </a:lnTo>
-                  <a:lnTo>
-                    <a:pt x="3151391" y="2685458"/>
-                  </a:lnTo>
-                  <a:lnTo>
-                    <a:pt x="3223013" y="2609971"/>
-                  </a:lnTo>
-                  <a:lnTo>
-                    <a:pt x="3294636" y="2528593"/>
-                  </a:lnTo>
-                  <a:lnTo>
-                    <a:pt x="3366258" y="2440863"/>
-                  </a:lnTo>
-                  <a:lnTo>
-                    <a:pt x="3437881" y="2346285"/>
-                  </a:lnTo>
-                  <a:lnTo>
-                    <a:pt x="3509503" y="2244327"/>
-                  </a:lnTo>
-                  <a:lnTo>
-                    <a:pt x="3581126" y="2134410"/>
-                  </a:lnTo>
-                  <a:lnTo>
-                    <a:pt x="3652748" y="2015915"/>
-                  </a:lnTo>
-                  <a:lnTo>
-                    <a:pt x="3724371" y="1888171"/>
-                  </a:lnTo>
-                  <a:lnTo>
-                    <a:pt x="3795993" y="1750457"/>
-                  </a:lnTo>
-                  <a:lnTo>
-                    <a:pt x="3867616" y="1601995"/>
-                  </a:lnTo>
-                  <a:lnTo>
-                    <a:pt x="3939238" y="1441946"/>
-                  </a:lnTo>
-                  <a:lnTo>
-                    <a:pt x="4010861" y="1269405"/>
-                  </a:lnTo>
-                  <a:lnTo>
-                    <a:pt x="4082483" y="1083398"/>
-                  </a:lnTo>
-                  <a:lnTo>
-                    <a:pt x="4154106" y="882873"/>
-                  </a:lnTo>
-                  <a:lnTo>
-                    <a:pt x="4225729" y="666697"/>
-                  </a:lnTo>
-                  <a:lnTo>
-                    <a:pt x="4297351" y="433650"/>
-                  </a:lnTo>
-                  <a:lnTo>
-                    <a:pt x="4368974" y="182413"/>
-                  </a:lnTo>
-                  <a:lnTo>
-                    <a:pt x="4417211" y="0"/>
+                    <a:pt x="71622" y="2921317"/>
+                  </a:lnTo>
+                  <a:lnTo>
+                    <a:pt x="143245" y="2918264"/>
+                  </a:lnTo>
+                  <a:lnTo>
+                    <a:pt x="214867" y="2915198"/>
+                  </a:lnTo>
+                  <a:lnTo>
+                    <a:pt x="286490" y="2912119"/>
+                  </a:lnTo>
+                  <a:lnTo>
+                    <a:pt x="358112" y="2909027"/>
+                  </a:lnTo>
+                  <a:lnTo>
+                    <a:pt x="429735" y="2905923"/>
+                  </a:lnTo>
+                  <a:lnTo>
+                    <a:pt x="501357" y="2902805"/>
+                  </a:lnTo>
+                  <a:lnTo>
+                    <a:pt x="572980" y="2899674"/>
+                  </a:lnTo>
+                  <a:lnTo>
+                    <a:pt x="644602" y="2896531"/>
+                  </a:lnTo>
+                  <a:lnTo>
+                    <a:pt x="716225" y="2893374"/>
+                  </a:lnTo>
+                  <a:lnTo>
+                    <a:pt x="787847" y="2890204"/>
+                  </a:lnTo>
+                  <a:lnTo>
+                    <a:pt x="859470" y="2887021"/>
+                  </a:lnTo>
+                  <a:lnTo>
+                    <a:pt x="931092" y="2883824"/>
+                  </a:lnTo>
+                  <a:lnTo>
+                    <a:pt x="1002715" y="2880614"/>
+                  </a:lnTo>
+                  <a:lnTo>
+                    <a:pt x="1074337" y="2877391"/>
+                  </a:lnTo>
+                  <a:lnTo>
+                    <a:pt x="1145960" y="2874154"/>
+                  </a:lnTo>
+                  <a:lnTo>
+                    <a:pt x="1217582" y="2870904"/>
+                  </a:lnTo>
+                  <a:lnTo>
+                    <a:pt x="1289205" y="2867640"/>
+                  </a:lnTo>
+                  <a:lnTo>
+                    <a:pt x="1360827" y="2864363"/>
+                  </a:lnTo>
+                  <a:lnTo>
+                    <a:pt x="1432450" y="2861072"/>
+                  </a:lnTo>
+                  <a:lnTo>
+                    <a:pt x="1504073" y="2857767"/>
+                  </a:lnTo>
+                  <a:lnTo>
+                    <a:pt x="1575695" y="2854448"/>
+                  </a:lnTo>
+                  <a:lnTo>
+                    <a:pt x="1647318" y="2851116"/>
+                  </a:lnTo>
+                  <a:lnTo>
+                    <a:pt x="1718940" y="2847769"/>
+                  </a:lnTo>
+                  <a:lnTo>
+                    <a:pt x="1790563" y="2844409"/>
+                  </a:lnTo>
+                  <a:lnTo>
+                    <a:pt x="1862185" y="2841034"/>
+                  </a:lnTo>
+                  <a:lnTo>
+                    <a:pt x="1933808" y="2837646"/>
+                  </a:lnTo>
+                  <a:lnTo>
+                    <a:pt x="2005430" y="2834243"/>
+                  </a:lnTo>
+                  <a:lnTo>
+                    <a:pt x="2077053" y="2830826"/>
+                  </a:lnTo>
+                  <a:lnTo>
+                    <a:pt x="2148675" y="2827395"/>
+                  </a:lnTo>
+                  <a:lnTo>
+                    <a:pt x="2220298" y="2823950"/>
+                  </a:lnTo>
+                  <a:lnTo>
+                    <a:pt x="2291920" y="2820490"/>
+                  </a:lnTo>
+                  <a:lnTo>
+                    <a:pt x="2363543" y="2817016"/>
+                  </a:lnTo>
+                  <a:lnTo>
+                    <a:pt x="2435165" y="2813527"/>
+                  </a:lnTo>
+                  <a:lnTo>
+                    <a:pt x="2506788" y="2810023"/>
+                  </a:lnTo>
+                  <a:lnTo>
+                    <a:pt x="2578410" y="2806505"/>
+                  </a:lnTo>
+                  <a:lnTo>
+                    <a:pt x="2650033" y="2802973"/>
+                  </a:lnTo>
+                  <a:lnTo>
+                    <a:pt x="2721655" y="2799425"/>
+                  </a:lnTo>
+                  <a:lnTo>
+                    <a:pt x="2793278" y="2795863"/>
+                  </a:lnTo>
+                  <a:lnTo>
+                    <a:pt x="2864901" y="2792286"/>
+                  </a:lnTo>
+                  <a:lnTo>
+                    <a:pt x="2936523" y="2788694"/>
+                  </a:lnTo>
+                  <a:lnTo>
+                    <a:pt x="3008146" y="2785087"/>
+                  </a:lnTo>
+                  <a:lnTo>
+                    <a:pt x="3079768" y="2758946"/>
+                  </a:lnTo>
+                  <a:lnTo>
+                    <a:pt x="3151391" y="2698158"/>
+                  </a:lnTo>
+                  <a:lnTo>
+                    <a:pt x="3223013" y="2633235"/>
+                  </a:lnTo>
+                  <a:lnTo>
+                    <a:pt x="3294636" y="2563897"/>
+                  </a:lnTo>
+                  <a:lnTo>
+                    <a:pt x="3366258" y="2489842"/>
+                  </a:lnTo>
+                  <a:lnTo>
+                    <a:pt x="3437881" y="2410751"/>
+                  </a:lnTo>
+                  <a:lnTo>
+                    <a:pt x="3509503" y="2326279"/>
+                  </a:lnTo>
+                  <a:lnTo>
+                    <a:pt x="3581126" y="2236062"/>
+                  </a:lnTo>
+                  <a:lnTo>
+                    <a:pt x="3652748" y="2139709"/>
+                  </a:lnTo>
+                  <a:lnTo>
+                    <a:pt x="3724371" y="2036801"/>
+                  </a:lnTo>
+                  <a:lnTo>
+                    <a:pt x="3795993" y="1926895"/>
+                  </a:lnTo>
+                  <a:lnTo>
+                    <a:pt x="3867616" y="1809512"/>
+                  </a:lnTo>
+                  <a:lnTo>
+                    <a:pt x="3939238" y="1684145"/>
+                  </a:lnTo>
+                  <a:lnTo>
+                    <a:pt x="4010861" y="1550252"/>
+                  </a:lnTo>
+                  <a:lnTo>
+                    <a:pt x="4082483" y="1407250"/>
+                  </a:lnTo>
+                  <a:lnTo>
+                    <a:pt x="4154106" y="1254523"/>
+                  </a:lnTo>
+                  <a:lnTo>
+                    <a:pt x="4225729" y="1091407"/>
+                  </a:lnTo>
+                  <a:lnTo>
+                    <a:pt x="4297351" y="917196"/>
+                  </a:lnTo>
+                  <a:lnTo>
+                    <a:pt x="4368974" y="731135"/>
+                  </a:lnTo>
+                  <a:lnTo>
+                    <a:pt x="4440596" y="532419"/>
+                  </a:lnTo>
+                  <a:lnTo>
+                    <a:pt x="4512219" y="320187"/>
+                  </a:lnTo>
+                  <a:lnTo>
+                    <a:pt x="4583841" y="93519"/>
+                  </a:lnTo>
+                  <a:lnTo>
+                    <a:pt x="4611509" y="0"/>
                   </a:lnTo>
                 </a:path>
               </a:pathLst>
@@ -3868,312 +3886,312 @@
           </p:nvSpPr>
           <p:spPr>
             <a:xfrm>
-              <a:off x="1172049" y="3976396"/>
-              <a:ext cx="7090630" cy="1537375"/>
+              <a:off x="1172049" y="4449099"/>
+              <a:ext cx="7090630" cy="1047347"/>
             </a:xfrm>
             <a:custGeom>
               <a:avLst/>
               <a:pathLst>
-                <a:path w="7090630" h="1537375">
+                <a:path w="7090630" h="1047347">
                   <a:moveTo>
                     <a:pt x="7090630" y="0"/>
                   </a:moveTo>
                   <a:lnTo>
-                    <a:pt x="7019007" y="16432"/>
-                  </a:lnTo>
-                  <a:lnTo>
-                    <a:pt x="6947385" y="32692"/>
-                  </a:lnTo>
-                  <a:lnTo>
-                    <a:pt x="6875762" y="48783"/>
-                  </a:lnTo>
-                  <a:lnTo>
-                    <a:pt x="6804139" y="64706"/>
-                  </a:lnTo>
-                  <a:lnTo>
-                    <a:pt x="6732517" y="80462"/>
-                  </a:lnTo>
-                  <a:lnTo>
-                    <a:pt x="6660894" y="96053"/>
-                  </a:lnTo>
-                  <a:lnTo>
-                    <a:pt x="6589272" y="111482"/>
-                  </a:lnTo>
-                  <a:lnTo>
-                    <a:pt x="6517649" y="126750"/>
-                  </a:lnTo>
-                  <a:lnTo>
-                    <a:pt x="6446027" y="141858"/>
-                  </a:lnTo>
-                  <a:lnTo>
-                    <a:pt x="6374404" y="156808"/>
-                  </a:lnTo>
-                  <a:lnTo>
-                    <a:pt x="6302782" y="171602"/>
-                  </a:lnTo>
-                  <a:lnTo>
-                    <a:pt x="6231159" y="186241"/>
-                  </a:lnTo>
-                  <a:lnTo>
-                    <a:pt x="6159537" y="200728"/>
-                  </a:lnTo>
-                  <a:lnTo>
-                    <a:pt x="6087914" y="215063"/>
-                  </a:lnTo>
-                  <a:lnTo>
-                    <a:pt x="6016292" y="229248"/>
-                  </a:lnTo>
-                  <a:lnTo>
-                    <a:pt x="5944669" y="243285"/>
-                  </a:lnTo>
-                  <a:lnTo>
-                    <a:pt x="5873047" y="257176"/>
-                  </a:lnTo>
-                  <a:lnTo>
-                    <a:pt x="5801424" y="270921"/>
-                  </a:lnTo>
-                  <a:lnTo>
-                    <a:pt x="5729802" y="284523"/>
-                  </a:lnTo>
-                  <a:lnTo>
-                    <a:pt x="5658179" y="297983"/>
-                  </a:lnTo>
-                  <a:lnTo>
-                    <a:pt x="5586557" y="311302"/>
-                  </a:lnTo>
-                  <a:lnTo>
-                    <a:pt x="5514934" y="324481"/>
-                  </a:lnTo>
-                  <a:lnTo>
-                    <a:pt x="5443311" y="337524"/>
-                  </a:lnTo>
-                  <a:lnTo>
-                    <a:pt x="5371689" y="350429"/>
-                  </a:lnTo>
-                  <a:lnTo>
-                    <a:pt x="5300066" y="363201"/>
-                  </a:lnTo>
-                  <a:lnTo>
-                    <a:pt x="5228444" y="375838"/>
-                  </a:lnTo>
-                  <a:lnTo>
-                    <a:pt x="5156821" y="388344"/>
-                  </a:lnTo>
-                  <a:lnTo>
-                    <a:pt x="5085199" y="400719"/>
-                  </a:lnTo>
-                  <a:lnTo>
-                    <a:pt x="5013576" y="412964"/>
-                  </a:lnTo>
-                  <a:lnTo>
-                    <a:pt x="4941954" y="425082"/>
-                  </a:lnTo>
-                  <a:lnTo>
-                    <a:pt x="4870331" y="437073"/>
-                  </a:lnTo>
-                  <a:lnTo>
-                    <a:pt x="4798709" y="448939"/>
-                  </a:lnTo>
-                  <a:lnTo>
-                    <a:pt x="4727086" y="460681"/>
-                  </a:lnTo>
-                  <a:lnTo>
-                    <a:pt x="4655464" y="472300"/>
-                  </a:lnTo>
-                  <a:lnTo>
-                    <a:pt x="4583841" y="483798"/>
-                  </a:lnTo>
-                  <a:lnTo>
-                    <a:pt x="4512219" y="495176"/>
-                  </a:lnTo>
-                  <a:lnTo>
-                    <a:pt x="4440596" y="506434"/>
-                  </a:lnTo>
-                  <a:lnTo>
-                    <a:pt x="4368974" y="517576"/>
-                  </a:lnTo>
-                  <a:lnTo>
-                    <a:pt x="4297351" y="528600"/>
-                  </a:lnTo>
-                  <a:lnTo>
-                    <a:pt x="4225729" y="539510"/>
-                  </a:lnTo>
-                  <a:lnTo>
-                    <a:pt x="4154106" y="550306"/>
-                  </a:lnTo>
-                  <a:lnTo>
-                    <a:pt x="4082483" y="560988"/>
-                  </a:lnTo>
-                  <a:lnTo>
-                    <a:pt x="4010861" y="571560"/>
-                  </a:lnTo>
-                  <a:lnTo>
-                    <a:pt x="3939238" y="582020"/>
-                  </a:lnTo>
-                  <a:lnTo>
-                    <a:pt x="3867616" y="592372"/>
-                  </a:lnTo>
-                  <a:lnTo>
-                    <a:pt x="3795993" y="602615"/>
-                  </a:lnTo>
-                  <a:lnTo>
-                    <a:pt x="3724371" y="612752"/>
-                  </a:lnTo>
-                  <a:lnTo>
-                    <a:pt x="3652748" y="622782"/>
-                  </a:lnTo>
-                  <a:lnTo>
-                    <a:pt x="3581126" y="632708"/>
-                  </a:lnTo>
-                  <a:lnTo>
-                    <a:pt x="3509503" y="642529"/>
-                  </a:lnTo>
-                  <a:lnTo>
-                    <a:pt x="3437881" y="652249"/>
-                  </a:lnTo>
-                  <a:lnTo>
-                    <a:pt x="3366258" y="661866"/>
-                  </a:lnTo>
-                  <a:lnTo>
-                    <a:pt x="3294636" y="671384"/>
-                  </a:lnTo>
-                  <a:lnTo>
-                    <a:pt x="3223013" y="680802"/>
-                  </a:lnTo>
-                  <a:lnTo>
-                    <a:pt x="3151391" y="690121"/>
-                  </a:lnTo>
-                  <a:lnTo>
-                    <a:pt x="3079768" y="699343"/>
-                  </a:lnTo>
-                  <a:lnTo>
-                    <a:pt x="3008146" y="740600"/>
-                  </a:lnTo>
-                  <a:lnTo>
-                    <a:pt x="2936523" y="800850"/>
-                  </a:lnTo>
-                  <a:lnTo>
-                    <a:pt x="2864901" y="856738"/>
-                  </a:lnTo>
-                  <a:lnTo>
-                    <a:pt x="2793278" y="908580"/>
-                  </a:lnTo>
-                  <a:lnTo>
-                    <a:pt x="2721655" y="956669"/>
-                  </a:lnTo>
-                  <a:lnTo>
-                    <a:pt x="2650033" y="1001276"/>
-                  </a:lnTo>
-                  <a:lnTo>
-                    <a:pt x="2578410" y="1042654"/>
-                  </a:lnTo>
-                  <a:lnTo>
-                    <a:pt x="2506788" y="1081036"/>
-                  </a:lnTo>
-                  <a:lnTo>
-                    <a:pt x="2435165" y="1116639"/>
-                  </a:lnTo>
-                  <a:lnTo>
-                    <a:pt x="2363543" y="1149665"/>
-                  </a:lnTo>
-                  <a:lnTo>
-                    <a:pt x="2291920" y="1180299"/>
-                  </a:lnTo>
-                  <a:lnTo>
-                    <a:pt x="2220298" y="1208716"/>
-                  </a:lnTo>
-                  <a:lnTo>
-                    <a:pt x="2148675" y="1235076"/>
-                  </a:lnTo>
-                  <a:lnTo>
-                    <a:pt x="2077053" y="1259527"/>
-                  </a:lnTo>
-                  <a:lnTo>
-                    <a:pt x="2005430" y="1282208"/>
-                  </a:lnTo>
-                  <a:lnTo>
-                    <a:pt x="1933808" y="1303247"/>
-                  </a:lnTo>
-                  <a:lnTo>
-                    <a:pt x="1862185" y="1322763"/>
-                  </a:lnTo>
-                  <a:lnTo>
-                    <a:pt x="1790563" y="1340865"/>
-                  </a:lnTo>
-                  <a:lnTo>
-                    <a:pt x="1718940" y="1357658"/>
-                  </a:lnTo>
-                  <a:lnTo>
-                    <a:pt x="1647318" y="1373234"/>
-                  </a:lnTo>
-                  <a:lnTo>
-                    <a:pt x="1575695" y="1387683"/>
-                  </a:lnTo>
-                  <a:lnTo>
-                    <a:pt x="1504073" y="1401086"/>
-                  </a:lnTo>
-                  <a:lnTo>
-                    <a:pt x="1432450" y="1413518"/>
-                  </a:lnTo>
-                  <a:lnTo>
-                    <a:pt x="1360827" y="1425051"/>
-                  </a:lnTo>
-                  <a:lnTo>
-                    <a:pt x="1289205" y="1435748"/>
-                  </a:lnTo>
-                  <a:lnTo>
-                    <a:pt x="1217582" y="1445671"/>
-                  </a:lnTo>
-                  <a:lnTo>
-                    <a:pt x="1145960" y="1454876"/>
-                  </a:lnTo>
-                  <a:lnTo>
-                    <a:pt x="1074337" y="1463414"/>
-                  </a:lnTo>
-                  <a:lnTo>
-                    <a:pt x="1002715" y="1471334"/>
-                  </a:lnTo>
-                  <a:lnTo>
-                    <a:pt x="931092" y="1478681"/>
-                  </a:lnTo>
-                  <a:lnTo>
-                    <a:pt x="859470" y="1485495"/>
-                  </a:lnTo>
-                  <a:lnTo>
-                    <a:pt x="787847" y="1491817"/>
-                  </a:lnTo>
-                  <a:lnTo>
-                    <a:pt x="716225" y="1497680"/>
-                  </a:lnTo>
-                  <a:lnTo>
-                    <a:pt x="644602" y="1503120"/>
-                  </a:lnTo>
-                  <a:lnTo>
-                    <a:pt x="572980" y="1508165"/>
-                  </a:lnTo>
-                  <a:lnTo>
-                    <a:pt x="501357" y="1512845"/>
-                  </a:lnTo>
-                  <a:lnTo>
-                    <a:pt x="429735" y="1517187"/>
-                  </a:lnTo>
-                  <a:lnTo>
-                    <a:pt x="358112" y="1521214"/>
-                  </a:lnTo>
-                  <a:lnTo>
-                    <a:pt x="286490" y="1524949"/>
-                  </a:lnTo>
-                  <a:lnTo>
-                    <a:pt x="214867" y="1528414"/>
-                  </a:lnTo>
-                  <a:lnTo>
-                    <a:pt x="143245" y="1531628"/>
-                  </a:lnTo>
-                  <a:lnTo>
-                    <a:pt x="71622" y="1534610"/>
-                  </a:lnTo>
-                  <a:lnTo>
-                    <a:pt x="0" y="1537375"/>
+                    <a:pt x="7019007" y="4573"/>
+                  </a:lnTo>
+                  <a:lnTo>
+                    <a:pt x="6947385" y="9128"/>
+                  </a:lnTo>
+                  <a:lnTo>
+                    <a:pt x="6875762" y="13664"/>
+                  </a:lnTo>
+                  <a:lnTo>
+                    <a:pt x="6804139" y="18181"/>
+                  </a:lnTo>
+                  <a:lnTo>
+                    <a:pt x="6732517" y="22680"/>
+                  </a:lnTo>
+                  <a:lnTo>
+                    <a:pt x="6660894" y="27159"/>
+                  </a:lnTo>
+                  <a:lnTo>
+                    <a:pt x="6589272" y="31620"/>
+                  </a:lnTo>
+                  <a:lnTo>
+                    <a:pt x="6517649" y="36063"/>
+                  </a:lnTo>
+                  <a:lnTo>
+                    <a:pt x="6446027" y="40487"/>
+                  </a:lnTo>
+                  <a:lnTo>
+                    <a:pt x="6374404" y="44892"/>
+                  </a:lnTo>
+                  <a:lnTo>
+                    <a:pt x="6302782" y="49280"/>
+                  </a:lnTo>
+                  <a:lnTo>
+                    <a:pt x="6231159" y="53649"/>
+                  </a:lnTo>
+                  <a:lnTo>
+                    <a:pt x="6159537" y="58000"/>
+                  </a:lnTo>
+                  <a:lnTo>
+                    <a:pt x="6087914" y="62332"/>
+                  </a:lnTo>
+                  <a:lnTo>
+                    <a:pt x="6016292" y="66647"/>
+                  </a:lnTo>
+                  <a:lnTo>
+                    <a:pt x="5944669" y="70944"/>
+                  </a:lnTo>
+                  <a:lnTo>
+                    <a:pt x="5873047" y="75223"/>
+                  </a:lnTo>
+                  <a:lnTo>
+                    <a:pt x="5801424" y="79484"/>
+                  </a:lnTo>
+                  <a:lnTo>
+                    <a:pt x="5729802" y="83728"/>
+                  </a:lnTo>
+                  <a:lnTo>
+                    <a:pt x="5658179" y="87953"/>
+                  </a:lnTo>
+                  <a:lnTo>
+                    <a:pt x="5586557" y="92162"/>
+                  </a:lnTo>
+                  <a:lnTo>
+                    <a:pt x="5514934" y="96352"/>
+                  </a:lnTo>
+                  <a:lnTo>
+                    <a:pt x="5443311" y="100526"/>
+                  </a:lnTo>
+                  <a:lnTo>
+                    <a:pt x="5371689" y="104682"/>
+                  </a:lnTo>
+                  <a:lnTo>
+                    <a:pt x="5300066" y="108820"/>
+                  </a:lnTo>
+                  <a:lnTo>
+                    <a:pt x="5228444" y="112942"/>
+                  </a:lnTo>
+                  <a:lnTo>
+                    <a:pt x="5156821" y="117046"/>
+                  </a:lnTo>
+                  <a:lnTo>
+                    <a:pt x="5085199" y="121133"/>
+                  </a:lnTo>
+                  <a:lnTo>
+                    <a:pt x="5013576" y="125204"/>
+                  </a:lnTo>
+                  <a:lnTo>
+                    <a:pt x="4941954" y="129257"/>
+                  </a:lnTo>
+                  <a:lnTo>
+                    <a:pt x="4870331" y="133294"/>
+                  </a:lnTo>
+                  <a:lnTo>
+                    <a:pt x="4798709" y="137313"/>
+                  </a:lnTo>
+                  <a:lnTo>
+                    <a:pt x="4727086" y="141316"/>
+                  </a:lnTo>
+                  <a:lnTo>
+                    <a:pt x="4655464" y="145303"/>
+                  </a:lnTo>
+                  <a:lnTo>
+                    <a:pt x="4583841" y="149272"/>
+                  </a:lnTo>
+                  <a:lnTo>
+                    <a:pt x="4512219" y="153226"/>
+                  </a:lnTo>
+                  <a:lnTo>
+                    <a:pt x="4440596" y="157163"/>
+                  </a:lnTo>
+                  <a:lnTo>
+                    <a:pt x="4368974" y="161083"/>
+                  </a:lnTo>
+                  <a:lnTo>
+                    <a:pt x="4297351" y="164987"/>
+                  </a:lnTo>
+                  <a:lnTo>
+                    <a:pt x="4225729" y="168875"/>
+                  </a:lnTo>
+                  <a:lnTo>
+                    <a:pt x="4154106" y="172747"/>
+                  </a:lnTo>
+                  <a:lnTo>
+                    <a:pt x="4082483" y="176603"/>
+                  </a:lnTo>
+                  <a:lnTo>
+                    <a:pt x="4010861" y="180442"/>
+                  </a:lnTo>
+                  <a:lnTo>
+                    <a:pt x="3939238" y="184266"/>
+                  </a:lnTo>
+                  <a:lnTo>
+                    <a:pt x="3867616" y="188074"/>
+                  </a:lnTo>
+                  <a:lnTo>
+                    <a:pt x="3795993" y="191866"/>
+                  </a:lnTo>
+                  <a:lnTo>
+                    <a:pt x="3724371" y="195642"/>
+                  </a:lnTo>
+                  <a:lnTo>
+                    <a:pt x="3652748" y="199403"/>
+                  </a:lnTo>
+                  <a:lnTo>
+                    <a:pt x="3581126" y="203147"/>
+                  </a:lnTo>
+                  <a:lnTo>
+                    <a:pt x="3509503" y="206877"/>
+                  </a:lnTo>
+                  <a:lnTo>
+                    <a:pt x="3437881" y="210590"/>
+                  </a:lnTo>
+                  <a:lnTo>
+                    <a:pt x="3366258" y="214289"/>
+                  </a:lnTo>
+                  <a:lnTo>
+                    <a:pt x="3294636" y="217972"/>
+                  </a:lnTo>
+                  <a:lnTo>
+                    <a:pt x="3223013" y="221639"/>
+                  </a:lnTo>
+                  <a:lnTo>
+                    <a:pt x="3151391" y="225292"/>
+                  </a:lnTo>
+                  <a:lnTo>
+                    <a:pt x="3079768" y="228929"/>
+                  </a:lnTo>
+                  <a:lnTo>
+                    <a:pt x="3008146" y="263327"/>
+                  </a:lnTo>
+                  <a:lnTo>
+                    <a:pt x="2936523" y="316618"/>
+                  </a:lnTo>
+                  <a:lnTo>
+                    <a:pt x="2864901" y="366516"/>
+                  </a:lnTo>
+                  <a:lnTo>
+                    <a:pt x="2793278" y="413236"/>
+                  </a:lnTo>
+                  <a:lnTo>
+                    <a:pt x="2721655" y="456980"/>
+                  </a:lnTo>
+                  <a:lnTo>
+                    <a:pt x="2650033" y="497939"/>
+                  </a:lnTo>
+                  <a:lnTo>
+                    <a:pt x="2578410" y="536289"/>
+                  </a:lnTo>
+                  <a:lnTo>
+                    <a:pt x="2506788" y="572196"/>
+                  </a:lnTo>
+                  <a:lnTo>
+                    <a:pt x="2435165" y="605817"/>
+                  </a:lnTo>
+                  <a:lnTo>
+                    <a:pt x="2363543" y="637297"/>
+                  </a:lnTo>
+                  <a:lnTo>
+                    <a:pt x="2291920" y="666772"/>
+                  </a:lnTo>
+                  <a:lnTo>
+                    <a:pt x="2220298" y="694369"/>
+                  </a:lnTo>
+                  <a:lnTo>
+                    <a:pt x="2148675" y="720209"/>
+                  </a:lnTo>
+                  <a:lnTo>
+                    <a:pt x="2077053" y="744404"/>
+                  </a:lnTo>
+                  <a:lnTo>
+                    <a:pt x="2005430" y="767057"/>
+                  </a:lnTo>
+                  <a:lnTo>
+                    <a:pt x="1933808" y="788268"/>
+                  </a:lnTo>
+                  <a:lnTo>
+                    <a:pt x="1862185" y="808128"/>
+                  </a:lnTo>
+                  <a:lnTo>
+                    <a:pt x="1790563" y="826723"/>
+                  </a:lnTo>
+                  <a:lnTo>
+                    <a:pt x="1718940" y="844134"/>
+                  </a:lnTo>
+                  <a:lnTo>
+                    <a:pt x="1647318" y="860436"/>
+                  </a:lnTo>
+                  <a:lnTo>
+                    <a:pt x="1575695" y="875700"/>
+                  </a:lnTo>
+                  <a:lnTo>
+                    <a:pt x="1504073" y="889992"/>
+                  </a:lnTo>
+                  <a:lnTo>
+                    <a:pt x="1432450" y="903373"/>
+                  </a:lnTo>
+                  <a:lnTo>
+                    <a:pt x="1360827" y="915902"/>
+                  </a:lnTo>
+                  <a:lnTo>
+                    <a:pt x="1289205" y="927634"/>
+                  </a:lnTo>
+                  <a:lnTo>
+                    <a:pt x="1217582" y="938618"/>
+                  </a:lnTo>
+                  <a:lnTo>
+                    <a:pt x="1145960" y="948903"/>
+                  </a:lnTo>
+                  <a:lnTo>
+                    <a:pt x="1074337" y="958533"/>
+                  </a:lnTo>
+                  <a:lnTo>
+                    <a:pt x="1002715" y="967549"/>
+                  </a:lnTo>
+                  <a:lnTo>
+                    <a:pt x="931092" y="975991"/>
+                  </a:lnTo>
+                  <a:lnTo>
+                    <a:pt x="859470" y="983896"/>
+                  </a:lnTo>
+                  <a:lnTo>
+                    <a:pt x="787847" y="991297"/>
+                  </a:lnTo>
+                  <a:lnTo>
+                    <a:pt x="716225" y="998227"/>
+                  </a:lnTo>
+                  <a:lnTo>
+                    <a:pt x="644602" y="1004715"/>
+                  </a:lnTo>
+                  <a:lnTo>
+                    <a:pt x="572980" y="1010790"/>
+                  </a:lnTo>
+                  <a:lnTo>
+                    <a:pt x="501357" y="1016479"/>
+                  </a:lnTo>
+                  <a:lnTo>
+                    <a:pt x="429735" y="1021805"/>
+                  </a:lnTo>
+                  <a:lnTo>
+                    <a:pt x="358112" y="1026791"/>
+                  </a:lnTo>
+                  <a:lnTo>
+                    <a:pt x="286490" y="1031461"/>
+                  </a:lnTo>
+                  <a:lnTo>
+                    <a:pt x="214867" y="1035833"/>
+                  </a:lnTo>
+                  <a:lnTo>
+                    <a:pt x="143245" y="1039926"/>
+                  </a:lnTo>
+                  <a:lnTo>
+                    <a:pt x="71622" y="1043759"/>
+                  </a:lnTo>
+                  <a:lnTo>
+                    <a:pt x="0" y="1047347"/>
                   </a:lnTo>
                 </a:path>
               </a:pathLst>
@@ -4194,245 +4212,266 @@
           <p:spPr>
             <a:xfrm>
               <a:off x="1172049" y="1896563"/>
-              <a:ext cx="5449951" cy="3512274"/>
+              <a:ext cx="5987717" cy="3456622"/>
             </a:xfrm>
             <a:custGeom>
               <a:avLst/>
               <a:pathLst>
-                <a:path w="5449951" h="3512274">
+                <a:path w="5987717" h="3456622">
                   <a:moveTo>
-                    <a:pt x="0" y="3512274"/>
+                    <a:pt x="0" y="3456622"/>
                   </a:moveTo>
                   <a:lnTo>
-                    <a:pt x="71622" y="3506132"/>
-                  </a:lnTo>
-                  <a:lnTo>
-                    <a:pt x="143245" y="3499721"/>
-                  </a:lnTo>
-                  <a:lnTo>
-                    <a:pt x="214867" y="3493029"/>
-                  </a:lnTo>
-                  <a:lnTo>
-                    <a:pt x="286490" y="3486045"/>
-                  </a:lnTo>
-                  <a:lnTo>
-                    <a:pt x="358112" y="3478755"/>
-                  </a:lnTo>
-                  <a:lnTo>
-                    <a:pt x="429735" y="3471146"/>
-                  </a:lnTo>
-                  <a:lnTo>
-                    <a:pt x="501357" y="3463204"/>
-                  </a:lnTo>
-                  <a:lnTo>
-                    <a:pt x="572980" y="3454915"/>
-                  </a:lnTo>
-                  <a:lnTo>
-                    <a:pt x="644602" y="3446263"/>
-                  </a:lnTo>
-                  <a:lnTo>
-                    <a:pt x="716225" y="3437232"/>
-                  </a:lnTo>
-                  <a:lnTo>
-                    <a:pt x="787847" y="3427806"/>
-                  </a:lnTo>
-                  <a:lnTo>
-                    <a:pt x="859470" y="3417968"/>
-                  </a:lnTo>
-                  <a:lnTo>
-                    <a:pt x="931092" y="3407699"/>
-                  </a:lnTo>
-                  <a:lnTo>
-                    <a:pt x="1002715" y="3396981"/>
-                  </a:lnTo>
-                  <a:lnTo>
-                    <a:pt x="1074337" y="3385793"/>
-                  </a:lnTo>
-                  <a:lnTo>
-                    <a:pt x="1145960" y="3374117"/>
-                  </a:lnTo>
-                  <a:lnTo>
-                    <a:pt x="1217582" y="3361929"/>
-                  </a:lnTo>
-                  <a:lnTo>
-                    <a:pt x="1289205" y="3349208"/>
-                  </a:lnTo>
-                  <a:lnTo>
-                    <a:pt x="1360827" y="3335930"/>
-                  </a:lnTo>
-                  <a:lnTo>
-                    <a:pt x="1432450" y="3322072"/>
-                  </a:lnTo>
-                  <a:lnTo>
-                    <a:pt x="1504073" y="3307606"/>
-                  </a:lnTo>
-                  <a:lnTo>
-                    <a:pt x="1575695" y="3292508"/>
-                  </a:lnTo>
-                  <a:lnTo>
-                    <a:pt x="1647318" y="3276750"/>
-                  </a:lnTo>
-                  <a:lnTo>
-                    <a:pt x="1718940" y="3260302"/>
-                  </a:lnTo>
-                  <a:lnTo>
-                    <a:pt x="1790563" y="3243134"/>
-                  </a:lnTo>
-                  <a:lnTo>
-                    <a:pt x="1862185" y="3225214"/>
-                  </a:lnTo>
-                  <a:lnTo>
-                    <a:pt x="1933808" y="3206511"/>
-                  </a:lnTo>
-                  <a:lnTo>
-                    <a:pt x="2005430" y="3186989"/>
-                  </a:lnTo>
-                  <a:lnTo>
-                    <a:pt x="2077053" y="3166613"/>
-                  </a:lnTo>
-                  <a:lnTo>
-                    <a:pt x="2148675" y="3145346"/>
-                  </a:lnTo>
-                  <a:lnTo>
-                    <a:pt x="2220298" y="3123148"/>
-                  </a:lnTo>
-                  <a:lnTo>
-                    <a:pt x="2291920" y="3099978"/>
-                  </a:lnTo>
-                  <a:lnTo>
-                    <a:pt x="2363543" y="3075795"/>
-                  </a:lnTo>
-                  <a:lnTo>
-                    <a:pt x="2435165" y="3050553"/>
-                  </a:lnTo>
-                  <a:lnTo>
-                    <a:pt x="2506788" y="3024207"/>
-                  </a:lnTo>
-                  <a:lnTo>
-                    <a:pt x="2578410" y="2996708"/>
-                  </a:lnTo>
-                  <a:lnTo>
-                    <a:pt x="2650033" y="2968006"/>
-                  </a:lnTo>
-                  <a:lnTo>
-                    <a:pt x="2721655" y="2938048"/>
-                  </a:lnTo>
-                  <a:lnTo>
-                    <a:pt x="2793278" y="2906778"/>
-                  </a:lnTo>
-                  <a:lnTo>
-                    <a:pt x="2864901" y="2874141"/>
-                  </a:lnTo>
-                  <a:lnTo>
-                    <a:pt x="2936523" y="2840076"/>
-                  </a:lnTo>
-                  <a:lnTo>
-                    <a:pt x="3008146" y="2804519"/>
-                  </a:lnTo>
-                  <a:lnTo>
-                    <a:pt x="3079768" y="2767408"/>
-                  </a:lnTo>
-                  <a:lnTo>
-                    <a:pt x="3151391" y="2728672"/>
-                  </a:lnTo>
-                  <a:lnTo>
-                    <a:pt x="3223013" y="2688241"/>
-                  </a:lnTo>
-                  <a:lnTo>
-                    <a:pt x="3294636" y="2646041"/>
-                  </a:lnTo>
-                  <a:lnTo>
-                    <a:pt x="3366258" y="2601994"/>
-                  </a:lnTo>
-                  <a:lnTo>
-                    <a:pt x="3437881" y="2556020"/>
-                  </a:lnTo>
-                  <a:lnTo>
-                    <a:pt x="3509503" y="2508034"/>
-                  </a:lnTo>
-                  <a:lnTo>
-                    <a:pt x="3581126" y="2457949"/>
-                  </a:lnTo>
-                  <a:lnTo>
-                    <a:pt x="3652748" y="2405672"/>
-                  </a:lnTo>
-                  <a:lnTo>
-                    <a:pt x="3724371" y="2351107"/>
-                  </a:lnTo>
-                  <a:lnTo>
-                    <a:pt x="3795993" y="2294155"/>
-                  </a:lnTo>
-                  <a:lnTo>
-                    <a:pt x="3867616" y="2234710"/>
-                  </a:lnTo>
-                  <a:lnTo>
-                    <a:pt x="3939238" y="2172665"/>
-                  </a:lnTo>
-                  <a:lnTo>
-                    <a:pt x="4010861" y="2107904"/>
-                  </a:lnTo>
-                  <a:lnTo>
-                    <a:pt x="4082483" y="2040310"/>
-                  </a:lnTo>
-                  <a:lnTo>
-                    <a:pt x="4154106" y="1969758"/>
-                  </a:lnTo>
-                  <a:lnTo>
-                    <a:pt x="4225729" y="1896119"/>
-                  </a:lnTo>
-                  <a:lnTo>
-                    <a:pt x="4297351" y="1819257"/>
-                  </a:lnTo>
-                  <a:lnTo>
-                    <a:pt x="4368974" y="1739032"/>
-                  </a:lnTo>
-                  <a:lnTo>
-                    <a:pt x="4440596" y="1655297"/>
-                  </a:lnTo>
-                  <a:lnTo>
-                    <a:pt x="4512219" y="1567898"/>
-                  </a:lnTo>
-                  <a:lnTo>
-                    <a:pt x="4583841" y="1476674"/>
-                  </a:lnTo>
-                  <a:lnTo>
-                    <a:pt x="4655464" y="1381458"/>
-                  </a:lnTo>
-                  <a:lnTo>
-                    <a:pt x="4727086" y="1282077"/>
-                  </a:lnTo>
-                  <a:lnTo>
-                    <a:pt x="4798709" y="1178346"/>
-                  </a:lnTo>
-                  <a:lnTo>
-                    <a:pt x="4870331" y="1070076"/>
-                  </a:lnTo>
-                  <a:lnTo>
-                    <a:pt x="4941954" y="957069"/>
-                  </a:lnTo>
-                  <a:lnTo>
-                    <a:pt x="5013576" y="839117"/>
-                  </a:lnTo>
-                  <a:lnTo>
-                    <a:pt x="5085199" y="716003"/>
-                  </a:lnTo>
-                  <a:lnTo>
-                    <a:pt x="5156821" y="587503"/>
-                  </a:lnTo>
-                  <a:lnTo>
-                    <a:pt x="5228444" y="453379"/>
-                  </a:lnTo>
-                  <a:lnTo>
-                    <a:pt x="5300066" y="313386"/>
-                  </a:lnTo>
-                  <a:lnTo>
-                    <a:pt x="5371689" y="167268"/>
-                  </a:lnTo>
-                  <a:lnTo>
-                    <a:pt x="5443311" y="14756"/>
-                  </a:lnTo>
-                  <a:lnTo>
-                    <a:pt x="5449951" y="0"/>
+                    <a:pt x="71622" y="3449642"/>
+                  </a:lnTo>
+                  <a:lnTo>
+                    <a:pt x="143245" y="3442414"/>
+                  </a:lnTo>
+                  <a:lnTo>
+                    <a:pt x="214867" y="3434929"/>
+                  </a:lnTo>
+                  <a:lnTo>
+                    <a:pt x="286490" y="3427178"/>
+                  </a:lnTo>
+                  <a:lnTo>
+                    <a:pt x="358112" y="3419150"/>
+                  </a:lnTo>
+                  <a:lnTo>
+                    <a:pt x="429735" y="3410836"/>
+                  </a:lnTo>
+                  <a:lnTo>
+                    <a:pt x="501357" y="3402227"/>
+                  </a:lnTo>
+                  <a:lnTo>
+                    <a:pt x="572980" y="3393311"/>
+                  </a:lnTo>
+                  <a:lnTo>
+                    <a:pt x="644602" y="3384077"/>
+                  </a:lnTo>
+                  <a:lnTo>
+                    <a:pt x="716225" y="3374515"/>
+                  </a:lnTo>
+                  <a:lnTo>
+                    <a:pt x="787847" y="3364613"/>
+                  </a:lnTo>
+                  <a:lnTo>
+                    <a:pt x="859470" y="3354357"/>
+                  </a:lnTo>
+                  <a:lnTo>
+                    <a:pt x="931092" y="3343737"/>
+                  </a:lnTo>
+                  <a:lnTo>
+                    <a:pt x="1002715" y="3332738"/>
+                  </a:lnTo>
+                  <a:lnTo>
+                    <a:pt x="1074337" y="3321348"/>
+                  </a:lnTo>
+                  <a:lnTo>
+                    <a:pt x="1145960" y="3309552"/>
+                  </a:lnTo>
+                  <a:lnTo>
+                    <a:pt x="1217582" y="3297337"/>
+                  </a:lnTo>
+                  <a:lnTo>
+                    <a:pt x="1289205" y="3284686"/>
+                  </a:lnTo>
+                  <a:lnTo>
+                    <a:pt x="1360827" y="3271585"/>
+                  </a:lnTo>
+                  <a:lnTo>
+                    <a:pt x="1432450" y="3258018"/>
+                  </a:lnTo>
+                  <a:lnTo>
+                    <a:pt x="1504073" y="3243967"/>
+                  </a:lnTo>
+                  <a:lnTo>
+                    <a:pt x="1575695" y="3229416"/>
+                  </a:lnTo>
+                  <a:lnTo>
+                    <a:pt x="1647318" y="3214347"/>
+                  </a:lnTo>
+                  <a:lnTo>
+                    <a:pt x="1718940" y="3198742"/>
+                  </a:lnTo>
+                  <a:lnTo>
+                    <a:pt x="1790563" y="3182581"/>
+                  </a:lnTo>
+                  <a:lnTo>
+                    <a:pt x="1862185" y="3165844"/>
+                  </a:lnTo>
+                  <a:lnTo>
+                    <a:pt x="1933808" y="3148512"/>
+                  </a:lnTo>
+                  <a:lnTo>
+                    <a:pt x="2005430" y="3130562"/>
+                  </a:lnTo>
+                  <a:lnTo>
+                    <a:pt x="2077053" y="3111974"/>
+                  </a:lnTo>
+                  <a:lnTo>
+                    <a:pt x="2148675" y="3092723"/>
+                  </a:lnTo>
+                  <a:lnTo>
+                    <a:pt x="2220298" y="3072787"/>
+                  </a:lnTo>
+                  <a:lnTo>
+                    <a:pt x="2291920" y="3052142"/>
+                  </a:lnTo>
+                  <a:lnTo>
+                    <a:pt x="2363543" y="3030761"/>
+                  </a:lnTo>
+                  <a:lnTo>
+                    <a:pt x="2435165" y="3008619"/>
+                  </a:lnTo>
+                  <a:lnTo>
+                    <a:pt x="2506788" y="2985689"/>
+                  </a:lnTo>
+                  <a:lnTo>
+                    <a:pt x="2578410" y="2961942"/>
+                  </a:lnTo>
+                  <a:lnTo>
+                    <a:pt x="2650033" y="2937349"/>
+                  </a:lnTo>
+                  <a:lnTo>
+                    <a:pt x="2721655" y="2911881"/>
+                  </a:lnTo>
+                  <a:lnTo>
+                    <a:pt x="2793278" y="2885507"/>
+                  </a:lnTo>
+                  <a:lnTo>
+                    <a:pt x="2864901" y="2858193"/>
+                  </a:lnTo>
+                  <a:lnTo>
+                    <a:pt x="2936523" y="2829907"/>
+                  </a:lnTo>
+                  <a:lnTo>
+                    <a:pt x="3008146" y="2800613"/>
+                  </a:lnTo>
+                  <a:lnTo>
+                    <a:pt x="3079768" y="2770277"/>
+                  </a:lnTo>
+                  <a:lnTo>
+                    <a:pt x="3151391" y="2738861"/>
+                  </a:lnTo>
+                  <a:lnTo>
+                    <a:pt x="3223013" y="2706325"/>
+                  </a:lnTo>
+                  <a:lnTo>
+                    <a:pt x="3294636" y="2672632"/>
+                  </a:lnTo>
+                  <a:lnTo>
+                    <a:pt x="3366258" y="2637739"/>
+                  </a:lnTo>
+                  <a:lnTo>
+                    <a:pt x="3437881" y="2601603"/>
+                  </a:lnTo>
+                  <a:lnTo>
+                    <a:pt x="3509503" y="2564181"/>
+                  </a:lnTo>
+                  <a:lnTo>
+                    <a:pt x="3581126" y="2525427"/>
+                  </a:lnTo>
+                  <a:lnTo>
+                    <a:pt x="3652748" y="2485292"/>
+                  </a:lnTo>
+                  <a:lnTo>
+                    <a:pt x="3724371" y="2443729"/>
+                  </a:lnTo>
+                  <a:lnTo>
+                    <a:pt x="3795993" y="2400686"/>
+                  </a:lnTo>
+                  <a:lnTo>
+                    <a:pt x="3867616" y="2356110"/>
+                  </a:lnTo>
+                  <a:lnTo>
+                    <a:pt x="3939238" y="2309947"/>
+                  </a:lnTo>
+                  <a:lnTo>
+                    <a:pt x="4010861" y="2262141"/>
+                  </a:lnTo>
+                  <a:lnTo>
+                    <a:pt x="4082483" y="2212632"/>
+                  </a:lnTo>
+                  <a:lnTo>
+                    <a:pt x="4154106" y="2161361"/>
+                  </a:lnTo>
+                  <a:lnTo>
+                    <a:pt x="4225729" y="2108264"/>
+                  </a:lnTo>
+                  <a:lnTo>
+                    <a:pt x="4297351" y="2053277"/>
+                  </a:lnTo>
+                  <a:lnTo>
+                    <a:pt x="4368974" y="1996332"/>
+                  </a:lnTo>
+                  <a:lnTo>
+                    <a:pt x="4440596" y="1937359"/>
+                  </a:lnTo>
+                  <a:lnTo>
+                    <a:pt x="4512219" y="1876287"/>
+                  </a:lnTo>
+                  <a:lnTo>
+                    <a:pt x="4583841" y="1813040"/>
+                  </a:lnTo>
+                  <a:lnTo>
+                    <a:pt x="4655464" y="1747541"/>
+                  </a:lnTo>
+                  <a:lnTo>
+                    <a:pt x="4727086" y="1679710"/>
+                  </a:lnTo>
+                  <a:lnTo>
+                    <a:pt x="4798709" y="1609464"/>
+                  </a:lnTo>
+                  <a:lnTo>
+                    <a:pt x="4870331" y="1536717"/>
+                  </a:lnTo>
+                  <a:lnTo>
+                    <a:pt x="4941954" y="1461380"/>
+                  </a:lnTo>
+                  <a:lnTo>
+                    <a:pt x="5013576" y="1383361"/>
+                  </a:lnTo>
+                  <a:lnTo>
+                    <a:pt x="5085199" y="1302563"/>
+                  </a:lnTo>
+                  <a:lnTo>
+                    <a:pt x="5156821" y="1218889"/>
+                  </a:lnTo>
+                  <a:lnTo>
+                    <a:pt x="5228444" y="1132236"/>
+                  </a:lnTo>
+                  <a:lnTo>
+                    <a:pt x="5300066" y="1042497"/>
+                  </a:lnTo>
+                  <a:lnTo>
+                    <a:pt x="5371689" y="949563"/>
+                  </a:lnTo>
+                  <a:lnTo>
+                    <a:pt x="5443311" y="853320"/>
+                  </a:lnTo>
+                  <a:lnTo>
+                    <a:pt x="5514934" y="753651"/>
+                  </a:lnTo>
+                  <a:lnTo>
+                    <a:pt x="5586557" y="650433"/>
+                  </a:lnTo>
+                  <a:lnTo>
+                    <a:pt x="5658179" y="543540"/>
+                  </a:lnTo>
+                  <a:lnTo>
+                    <a:pt x="5729802" y="432841"/>
+                  </a:lnTo>
+                  <a:lnTo>
+                    <a:pt x="5801424" y="318200"/>
+                  </a:lnTo>
+                  <a:lnTo>
+                    <a:pt x="5873047" y="199478"/>
+                  </a:lnTo>
+                  <a:lnTo>
+                    <a:pt x="5944669" y="76529"/>
+                  </a:lnTo>
+                  <a:lnTo>
+                    <a:pt x="5987717" y="0"/>
                   </a:lnTo>
                 </a:path>
               </a:pathLst>

--- a/docs/plots/carbo/jx_carbo_linsubhr_dosedisc_death.pptx
+++ b/docs/plots/carbo/jx_carbo_linsubhr_dosedisc_death.pptx
@@ -3157,7 +3157,7 @@
                     <a:pt x="358112" y="2909027"/>
                   </a:lnTo>
                   <a:lnTo>
-                    <a:pt x="429735" y="2905923"/>
+                    <a:pt x="429735" y="2905922"/>
                   </a:lnTo>
                   <a:lnTo>
                     <a:pt x="501357" y="2902805"/>
@@ -3208,7 +3208,7 @@
                     <a:pt x="1575695" y="2854448"/>
                   </a:lnTo>
                   <a:lnTo>
-                    <a:pt x="1647318" y="2851116"/>
+                    <a:pt x="1647318" y="2851115"/>
                   </a:lnTo>
                   <a:lnTo>
                     <a:pt x="1718940" y="2847769"/>
@@ -3238,7 +3238,7 @@
                     <a:pt x="2291920" y="2820490"/>
                   </a:lnTo>
                   <a:lnTo>
-                    <a:pt x="2363543" y="2817016"/>
+                    <a:pt x="2363543" y="2817015"/>
                   </a:lnTo>
                   <a:lnTo>
                     <a:pt x="2435165" y="2813527"/>
@@ -3304,13 +3304,13 @@
                     <a:pt x="3867616" y="1809512"/>
                   </a:lnTo>
                   <a:lnTo>
-                    <a:pt x="3939238" y="1684145"/>
+                    <a:pt x="3939238" y="1684146"/>
                   </a:lnTo>
                   <a:lnTo>
                     <a:pt x="4010861" y="1550252"/>
                   </a:lnTo>
                   <a:lnTo>
-                    <a:pt x="4082483" y="1407250"/>
+                    <a:pt x="4082483" y="1407251"/>
                   </a:lnTo>
                   <a:lnTo>
                     <a:pt x="4154106" y="1254523"/>
@@ -3355,7 +3355,7 @@
                     <a:pt x="6804139" y="2570717"/>
                   </a:lnTo>
                   <a:lnTo>
-                    <a:pt x="6732517" y="2575215"/>
+                    <a:pt x="6732517" y="2575216"/>
                   </a:lnTo>
                   <a:lnTo>
                     <a:pt x="6660894" y="2579695"/>
@@ -3364,10 +3364,10 @@
                     <a:pt x="6589272" y="2584156"/>
                   </a:lnTo>
                   <a:lnTo>
-                    <a:pt x="6517649" y="2588598"/>
-                  </a:lnTo>
-                  <a:lnTo>
-                    <a:pt x="6446027" y="2593022"/>
+                    <a:pt x="6517649" y="2588599"/>
+                  </a:lnTo>
+                  <a:lnTo>
+                    <a:pt x="6446027" y="2593023"/>
                   </a:lnTo>
                   <a:lnTo>
                     <a:pt x="6374404" y="2597428"/>
@@ -3391,7 +3391,7 @@
                     <a:pt x="5944669" y="2623480"/>
                   </a:lnTo>
                   <a:lnTo>
-                    <a:pt x="5873047" y="2627758"/>
+                    <a:pt x="5873047" y="2627759"/>
                   </a:lnTo>
                   <a:lnTo>
                     <a:pt x="5801424" y="2632020"/>
@@ -3559,7 +3559,7 @@
                     <a:pt x="1933808" y="3340804"/>
                   </a:lnTo>
                   <a:lnTo>
-                    <a:pt x="1862185" y="3360664"/>
+                    <a:pt x="1862185" y="3360663"/>
                   </a:lnTo>
                   <a:lnTo>
                     <a:pt x="1790563" y="3379259"/>
@@ -3689,7 +3689,7 @@
                     <a:pt x="358112" y="2909027"/>
                   </a:lnTo>
                   <a:lnTo>
-                    <a:pt x="429735" y="2905923"/>
+                    <a:pt x="429735" y="2905922"/>
                   </a:lnTo>
                   <a:lnTo>
                     <a:pt x="501357" y="2902805"/>
@@ -3740,7 +3740,7 @@
                     <a:pt x="1575695" y="2854448"/>
                   </a:lnTo>
                   <a:lnTo>
-                    <a:pt x="1647318" y="2851116"/>
+                    <a:pt x="1647318" y="2851115"/>
                   </a:lnTo>
                   <a:lnTo>
                     <a:pt x="1718940" y="2847769"/>
@@ -3770,7 +3770,7 @@
                     <a:pt x="2291920" y="2820490"/>
                   </a:lnTo>
                   <a:lnTo>
-                    <a:pt x="2363543" y="2817016"/>
+                    <a:pt x="2363543" y="2817015"/>
                   </a:lnTo>
                   <a:lnTo>
                     <a:pt x="2435165" y="2813527"/>
@@ -3836,13 +3836,13 @@
                     <a:pt x="3867616" y="1809512"/>
                   </a:lnTo>
                   <a:lnTo>
-                    <a:pt x="3939238" y="1684145"/>
+                    <a:pt x="3939238" y="1684146"/>
                   </a:lnTo>
                   <a:lnTo>
                     <a:pt x="4010861" y="1550252"/>
                   </a:lnTo>
                   <a:lnTo>
-                    <a:pt x="4082483" y="1407250"/>
+                    <a:pt x="4082483" y="1407251"/>
                   </a:lnTo>
                   <a:lnTo>
                     <a:pt x="4154106" y="1254523"/>
@@ -3951,13 +3951,13 @@
                     <a:pt x="5801424" y="79484"/>
                   </a:lnTo>
                   <a:lnTo>
-                    <a:pt x="5729802" y="83728"/>
+                    <a:pt x="5729802" y="83727"/>
                   </a:lnTo>
                   <a:lnTo>
                     <a:pt x="5658179" y="87953"/>
                   </a:lnTo>
                   <a:lnTo>
-                    <a:pt x="5586557" y="92162"/>
+                    <a:pt x="5586557" y="92161"/>
                   </a:lnTo>
                   <a:lnTo>
                     <a:pt x="5514934" y="96352"/>
@@ -3966,7 +3966,7 @@
                     <a:pt x="5443311" y="100526"/>
                   </a:lnTo>
                   <a:lnTo>
-                    <a:pt x="5371689" y="104682"/>
+                    <a:pt x="5371689" y="104681"/>
                   </a:lnTo>
                   <a:lnTo>
                     <a:pt x="5300066" y="108820"/>
@@ -3987,7 +3987,7 @@
                     <a:pt x="4941954" y="129257"/>
                   </a:lnTo>
                   <a:lnTo>
-                    <a:pt x="4870331" y="133294"/>
+                    <a:pt x="4870331" y="133293"/>
                   </a:lnTo>
                   <a:lnTo>
                     <a:pt x="4798709" y="137313"/>
@@ -3996,7 +3996,7 @@
                     <a:pt x="4727086" y="141316"/>
                   </a:lnTo>
                   <a:lnTo>
-                    <a:pt x="4655464" y="145303"/>
+                    <a:pt x="4655464" y="145302"/>
                   </a:lnTo>
                   <a:lnTo>
                     <a:pt x="4583841" y="149272"/>
@@ -4005,7 +4005,7 @@
                     <a:pt x="4512219" y="153226"/>
                   </a:lnTo>
                   <a:lnTo>
-                    <a:pt x="4440596" y="157163"/>
+                    <a:pt x="4440596" y="157162"/>
                   </a:lnTo>
                   <a:lnTo>
                     <a:pt x="4368974" y="161083"/>
@@ -4038,13 +4038,13 @@
                     <a:pt x="3724371" y="195642"/>
                   </a:lnTo>
                   <a:lnTo>
-                    <a:pt x="3652748" y="199403"/>
+                    <a:pt x="3652748" y="199402"/>
                   </a:lnTo>
                   <a:lnTo>
                     <a:pt x="3581126" y="203147"/>
                   </a:lnTo>
                   <a:lnTo>
-                    <a:pt x="3509503" y="206877"/>
+                    <a:pt x="3509503" y="206876"/>
                   </a:lnTo>
                   <a:lnTo>
                     <a:pt x="3437881" y="210590"/>
@@ -4065,7 +4065,7 @@
                     <a:pt x="3079768" y="228929"/>
                   </a:lnTo>
                   <a:lnTo>
-                    <a:pt x="3008146" y="263327"/>
+                    <a:pt x="3008146" y="263326"/>
                   </a:lnTo>
                   <a:lnTo>
                     <a:pt x="2936523" y="316618"/>
@@ -4074,16 +4074,16 @@
                     <a:pt x="2864901" y="366516"/>
                   </a:lnTo>
                   <a:lnTo>
-                    <a:pt x="2793278" y="413236"/>
+                    <a:pt x="2793278" y="413235"/>
                   </a:lnTo>
                   <a:lnTo>
                     <a:pt x="2721655" y="456980"/>
                   </a:lnTo>
                   <a:lnTo>
-                    <a:pt x="2650033" y="497939"/>
-                  </a:lnTo>
-                  <a:lnTo>
-                    <a:pt x="2578410" y="536289"/>
+                    <a:pt x="2650033" y="497938"/>
+                  </a:lnTo>
+                  <a:lnTo>
+                    <a:pt x="2578410" y="536288"/>
                   </a:lnTo>
                   <a:lnTo>
                     <a:pt x="2506788" y="572196"/>
@@ -4092,10 +4092,10 @@
                     <a:pt x="2435165" y="605817"/>
                   </a:lnTo>
                   <a:lnTo>
-                    <a:pt x="2363543" y="637297"/>
-                  </a:lnTo>
-                  <a:lnTo>
-                    <a:pt x="2291920" y="666772"/>
+                    <a:pt x="2363543" y="637296"/>
+                  </a:lnTo>
+                  <a:lnTo>
+                    <a:pt x="2291920" y="666771"/>
                   </a:lnTo>
                   <a:lnTo>
                     <a:pt x="2220298" y="694369"/>
@@ -4104,7 +4104,7 @@
                     <a:pt x="2148675" y="720209"/>
                   </a:lnTo>
                   <a:lnTo>
-                    <a:pt x="2077053" y="744404"/>
+                    <a:pt x="2077053" y="744403"/>
                   </a:lnTo>
                   <a:lnTo>
                     <a:pt x="2005430" y="767057"/>
@@ -4128,7 +4128,7 @@
                     <a:pt x="1575695" y="875700"/>
                   </a:lnTo>
                   <a:lnTo>
-                    <a:pt x="1504073" y="889992"/>
+                    <a:pt x="1504073" y="889991"/>
                   </a:lnTo>
                   <a:lnTo>
                     <a:pt x="1432450" y="903373"/>
@@ -4146,7 +4146,7 @@
                     <a:pt x="1145960" y="948903"/>
                   </a:lnTo>
                   <a:lnTo>
-                    <a:pt x="1074337" y="958533"/>
+                    <a:pt x="1074337" y="958532"/>
                   </a:lnTo>
                   <a:lnTo>
                     <a:pt x="1002715" y="967549"/>
@@ -4155,13 +4155,13 @@
                     <a:pt x="931092" y="975991"/>
                   </a:lnTo>
                   <a:lnTo>
-                    <a:pt x="859470" y="983896"/>
+                    <a:pt x="859470" y="983895"/>
                   </a:lnTo>
                   <a:lnTo>
                     <a:pt x="787847" y="991297"/>
                   </a:lnTo>
                   <a:lnTo>
-                    <a:pt x="716225" y="998227"/>
+                    <a:pt x="716225" y="998226"/>
                   </a:lnTo>
                   <a:lnTo>
                     <a:pt x="644602" y="1004715"/>
@@ -4170,19 +4170,19 @@
                     <a:pt x="572980" y="1010790"/>
                   </a:lnTo>
                   <a:lnTo>
-                    <a:pt x="501357" y="1016479"/>
-                  </a:lnTo>
-                  <a:lnTo>
-                    <a:pt x="429735" y="1021805"/>
+                    <a:pt x="501357" y="1016478"/>
+                  </a:lnTo>
+                  <a:lnTo>
+                    <a:pt x="429735" y="1021804"/>
                   </a:lnTo>
                   <a:lnTo>
                     <a:pt x="358112" y="1026791"/>
                   </a:lnTo>
                   <a:lnTo>
-                    <a:pt x="286490" y="1031461"/>
-                  </a:lnTo>
-                  <a:lnTo>
-                    <a:pt x="214867" y="1035833"/>
+                    <a:pt x="286490" y="1031460"/>
+                  </a:lnTo>
+                  <a:lnTo>
+                    <a:pt x="214867" y="1035832"/>
                   </a:lnTo>
                   <a:lnTo>
                     <a:pt x="143245" y="1039926"/>
@@ -4212,12 +4212,12 @@
           <p:spPr>
             <a:xfrm>
               <a:off x="1172049" y="1896563"/>
-              <a:ext cx="5987717" cy="3456622"/>
+              <a:ext cx="5987718" cy="3456622"/>
             </a:xfrm>
             <a:custGeom>
               <a:avLst/>
               <a:pathLst>
-                <a:path w="5987717" h="3456622">
+                <a:path w="5987718" h="3456622">
                   <a:moveTo>
                     <a:pt x="0" y="3456622"/>
                   </a:moveTo>
@@ -4279,7 +4279,7 @@
                     <a:pt x="1360827" y="3271585"/>
                   </a:lnTo>
                   <a:lnTo>
-                    <a:pt x="1432450" y="3258018"/>
+                    <a:pt x="1432450" y="3258017"/>
                   </a:lnTo>
                   <a:lnTo>
                     <a:pt x="1504073" y="3243967"/>
@@ -4324,7 +4324,7 @@
                     <a:pt x="2435165" y="3008619"/>
                   </a:lnTo>
                   <a:lnTo>
-                    <a:pt x="2506788" y="2985689"/>
+                    <a:pt x="2506788" y="2985688"/>
                   </a:lnTo>
                   <a:lnTo>
                     <a:pt x="2578410" y="2961942"/>
@@ -4447,7 +4447,7 @@
                     <a:pt x="5371689" y="949563"/>
                   </a:lnTo>
                   <a:lnTo>
-                    <a:pt x="5443311" y="853320"/>
+                    <a:pt x="5443311" y="853321"/>
                   </a:lnTo>
                   <a:lnTo>
                     <a:pt x="5514934" y="753651"/>
@@ -4462,7 +4462,7 @@
                     <a:pt x="5729802" y="432841"/>
                   </a:lnTo>
                   <a:lnTo>
-                    <a:pt x="5801424" y="318200"/>
+                    <a:pt x="5801424" y="318201"/>
                   </a:lnTo>
                   <a:lnTo>
                     <a:pt x="5873047" y="199478"/>
@@ -4471,7 +4471,7 @@
                     <a:pt x="5944669" y="76529"/>
                   </a:lnTo>
                   <a:lnTo>
-                    <a:pt x="5987717" y="0"/>
+                    <a:pt x="5987718" y="0"/>
                   </a:lnTo>
                 </a:path>
               </a:pathLst>

--- a/docs/plots/carbo/jx_carbo_linsubhr_dosedisc_death.pptx
+++ b/docs/plots/carbo/jx_carbo_linsubhr_dosedisc_death.pptx
@@ -2271,7 +2271,7 @@
           </p:nvSpPr>
           <p:spPr>
             <a:xfrm>
-              <a:off x="817517" y="5114368"/>
+              <a:off x="817517" y="5142518"/>
               <a:ext cx="7799693" cy="0"/>
             </a:xfrm>
             <a:custGeom>
@@ -2314,7 +2314,7 @@
           </p:nvSpPr>
           <p:spPr>
             <a:xfrm>
-              <a:off x="817517" y="4244691"/>
+              <a:off x="817517" y="4313054"/>
               <a:ext cx="7799693" cy="0"/>
             </a:xfrm>
             <a:custGeom>
@@ -2357,7 +2357,7 @@
           </p:nvSpPr>
           <p:spPr>
             <a:xfrm>
-              <a:off x="817517" y="3375014"/>
+              <a:off x="817517" y="3483591"/>
               <a:ext cx="7799693" cy="0"/>
             </a:xfrm>
             <a:custGeom>
@@ -2400,7 +2400,7 @@
           </p:nvSpPr>
           <p:spPr>
             <a:xfrm>
-              <a:off x="817517" y="2505337"/>
+              <a:off x="817517" y="2654127"/>
               <a:ext cx="7799693" cy="0"/>
             </a:xfrm>
             <a:custGeom>
@@ -2443,15 +2443,15 @@
           </p:nvSpPr>
           <p:spPr>
             <a:xfrm>
-              <a:off x="2122745" y="1896563"/>
-              <a:ext cx="0" cy="3826579"/>
+              <a:off x="2122745" y="2073503"/>
+              <a:ext cx="0" cy="3649639"/>
             </a:xfrm>
             <a:custGeom>
               <a:avLst/>
               <a:pathLst>
-                <a:path w="0" h="3826579">
+                <a:path w="0" h="3649639">
                   <a:moveTo>
-                    <a:pt x="0" y="3826579"/>
+                    <a:pt x="0" y="3649639"/>
                   </a:moveTo>
                   <a:lnTo>
                     <a:pt x="0" y="0"/>
@@ -2486,15 +2486,15 @@
           </p:nvSpPr>
           <p:spPr>
             <a:xfrm>
-              <a:off x="3487174" y="1896563"/>
-              <a:ext cx="0" cy="3826579"/>
+              <a:off x="3487174" y="2073503"/>
+              <a:ext cx="0" cy="3649639"/>
             </a:xfrm>
             <a:custGeom>
               <a:avLst/>
               <a:pathLst>
-                <a:path w="0" h="3826579">
+                <a:path w="0" h="3649639">
                   <a:moveTo>
-                    <a:pt x="0" y="3826579"/>
+                    <a:pt x="0" y="3649639"/>
                   </a:moveTo>
                   <a:lnTo>
                     <a:pt x="0" y="0"/>
@@ -2529,15 +2529,15 @@
           </p:nvSpPr>
           <p:spPr>
             <a:xfrm>
-              <a:off x="4851604" y="1896563"/>
-              <a:ext cx="0" cy="3826579"/>
+              <a:off x="4851604" y="2073503"/>
+              <a:ext cx="0" cy="3649639"/>
             </a:xfrm>
             <a:custGeom>
               <a:avLst/>
               <a:pathLst>
-                <a:path w="0" h="3826579">
+                <a:path w="0" h="3649639">
                   <a:moveTo>
-                    <a:pt x="0" y="3826579"/>
+                    <a:pt x="0" y="3649639"/>
                   </a:moveTo>
                   <a:lnTo>
                     <a:pt x="0" y="0"/>
@@ -2572,15 +2572,15 @@
           </p:nvSpPr>
           <p:spPr>
             <a:xfrm>
-              <a:off x="6216034" y="1896563"/>
-              <a:ext cx="0" cy="3826579"/>
+              <a:off x="6216034" y="2073503"/>
+              <a:ext cx="0" cy="3649639"/>
             </a:xfrm>
             <a:custGeom>
               <a:avLst/>
               <a:pathLst>
-                <a:path w="0" h="3826579">
+                <a:path w="0" h="3649639">
                   <a:moveTo>
-                    <a:pt x="0" y="3826579"/>
+                    <a:pt x="0" y="3649639"/>
                   </a:moveTo>
                   <a:lnTo>
                     <a:pt x="0" y="0"/>
@@ -2615,15 +2615,15 @@
           </p:nvSpPr>
           <p:spPr>
             <a:xfrm>
-              <a:off x="7580464" y="1896563"/>
-              <a:ext cx="0" cy="3826579"/>
+              <a:off x="7580464" y="2073503"/>
+              <a:ext cx="0" cy="3649639"/>
             </a:xfrm>
             <a:custGeom>
               <a:avLst/>
               <a:pathLst>
-                <a:path w="0" h="3826579">
+                <a:path w="0" h="3649639">
                   <a:moveTo>
-                    <a:pt x="0" y="3826579"/>
+                    <a:pt x="0" y="3649639"/>
                   </a:moveTo>
                   <a:lnTo>
                     <a:pt x="0" y="0"/>
@@ -2658,7 +2658,7 @@
           </p:nvSpPr>
           <p:spPr>
             <a:xfrm>
-              <a:off x="817517" y="5549207"/>
+              <a:off x="817517" y="5557249"/>
               <a:ext cx="7799693" cy="0"/>
             </a:xfrm>
             <a:custGeom>
@@ -2701,7 +2701,7 @@
           </p:nvSpPr>
           <p:spPr>
             <a:xfrm>
-              <a:off x="817517" y="4679530"/>
+              <a:off x="817517" y="4727786"/>
               <a:ext cx="7799693" cy="0"/>
             </a:xfrm>
             <a:custGeom>
@@ -2744,7 +2744,7 @@
           </p:nvSpPr>
           <p:spPr>
             <a:xfrm>
-              <a:off x="817517" y="3809853"/>
+              <a:off x="817517" y="3898322"/>
               <a:ext cx="7799693" cy="0"/>
             </a:xfrm>
             <a:custGeom>
@@ -2787,7 +2787,7 @@
           </p:nvSpPr>
           <p:spPr>
             <a:xfrm>
-              <a:off x="817517" y="2940175"/>
+              <a:off x="817517" y="3068859"/>
               <a:ext cx="7799693" cy="0"/>
             </a:xfrm>
             <a:custGeom>
@@ -2830,7 +2830,7 @@
           </p:nvSpPr>
           <p:spPr>
             <a:xfrm>
-              <a:off x="817517" y="2070498"/>
+              <a:off x="817517" y="2239395"/>
               <a:ext cx="7799693" cy="0"/>
             </a:xfrm>
             <a:custGeom>
@@ -2873,15 +2873,15 @@
           </p:nvSpPr>
           <p:spPr>
             <a:xfrm>
-              <a:off x="1440530" y="1896563"/>
-              <a:ext cx="0" cy="3826579"/>
+              <a:off x="1440530" y="2073503"/>
+              <a:ext cx="0" cy="3649639"/>
             </a:xfrm>
             <a:custGeom>
               <a:avLst/>
               <a:pathLst>
-                <a:path w="0" h="3826579">
+                <a:path w="0" h="3649639">
                   <a:moveTo>
-                    <a:pt x="0" y="3826579"/>
+                    <a:pt x="0" y="3649639"/>
                   </a:moveTo>
                   <a:lnTo>
                     <a:pt x="0" y="0"/>
@@ -2916,15 +2916,15 @@
           </p:nvSpPr>
           <p:spPr>
             <a:xfrm>
-              <a:off x="2804959" y="1896563"/>
-              <a:ext cx="0" cy="3826579"/>
+              <a:off x="2804959" y="2073503"/>
+              <a:ext cx="0" cy="3649639"/>
             </a:xfrm>
             <a:custGeom>
               <a:avLst/>
               <a:pathLst>
-                <a:path w="0" h="3826579">
+                <a:path w="0" h="3649639">
                   <a:moveTo>
-                    <a:pt x="0" y="3826579"/>
+                    <a:pt x="0" y="3649639"/>
                   </a:moveTo>
                   <a:lnTo>
                     <a:pt x="0" y="0"/>
@@ -2959,15 +2959,15 @@
           </p:nvSpPr>
           <p:spPr>
             <a:xfrm>
-              <a:off x="4169389" y="1896563"/>
-              <a:ext cx="0" cy="3826579"/>
+              <a:off x="4169389" y="2073503"/>
+              <a:ext cx="0" cy="3649639"/>
             </a:xfrm>
             <a:custGeom>
               <a:avLst/>
               <a:pathLst>
-                <a:path w="0" h="3826579">
+                <a:path w="0" h="3649639">
                   <a:moveTo>
-                    <a:pt x="0" y="3826579"/>
+                    <a:pt x="0" y="3649639"/>
                   </a:moveTo>
                   <a:lnTo>
                     <a:pt x="0" y="0"/>
@@ -3002,15 +3002,15 @@
           </p:nvSpPr>
           <p:spPr>
             <a:xfrm>
-              <a:off x="5533819" y="1896563"/>
-              <a:ext cx="0" cy="3826579"/>
+              <a:off x="5533819" y="2073503"/>
+              <a:ext cx="0" cy="3649639"/>
             </a:xfrm>
             <a:custGeom>
               <a:avLst/>
               <a:pathLst>
-                <a:path w="0" h="3826579">
+                <a:path w="0" h="3649639">
                   <a:moveTo>
-                    <a:pt x="0" y="3826579"/>
+                    <a:pt x="0" y="3649639"/>
                   </a:moveTo>
                   <a:lnTo>
                     <a:pt x="0" y="0"/>
@@ -3045,15 +3045,15 @@
           </p:nvSpPr>
           <p:spPr>
             <a:xfrm>
-              <a:off x="6898249" y="1896563"/>
-              <a:ext cx="0" cy="3826579"/>
+              <a:off x="6898249" y="2073503"/>
+              <a:ext cx="0" cy="3649639"/>
             </a:xfrm>
             <a:custGeom>
               <a:avLst/>
               <a:pathLst>
-                <a:path w="0" h="3826579">
+                <a:path w="0" h="3649639">
                   <a:moveTo>
-                    <a:pt x="0" y="3826579"/>
+                    <a:pt x="0" y="3649639"/>
                   </a:moveTo>
                   <a:lnTo>
                     <a:pt x="0" y="0"/>
@@ -3088,15 +3088,15 @@
           </p:nvSpPr>
           <p:spPr>
             <a:xfrm>
-              <a:off x="8262679" y="1896563"/>
-              <a:ext cx="0" cy="3826579"/>
+              <a:off x="8262679" y="2073503"/>
+              <a:ext cx="0" cy="3649639"/>
             </a:xfrm>
             <a:custGeom>
               <a:avLst/>
               <a:pathLst>
-                <a:path w="0" h="3826579">
+                <a:path w="0" h="3649639">
                   <a:moveTo>
-                    <a:pt x="0" y="3826579"/>
+                    <a:pt x="0" y="3649639"/>
                   </a:moveTo>
                   <a:lnTo>
                     <a:pt x="0" y="0"/>
@@ -3131,207 +3131,207 @@
           </p:nvSpPr>
           <p:spPr>
             <a:xfrm>
-              <a:off x="1172049" y="1896563"/>
-              <a:ext cx="7090630" cy="3599883"/>
+              <a:off x="1172049" y="2073503"/>
+              <a:ext cx="7090630" cy="3433426"/>
             </a:xfrm>
             <a:custGeom>
               <a:avLst/>
               <a:pathLst>
-                <a:path w="7090630" h="3599883">
+                <a:path w="7090630" h="3433426">
                   <a:moveTo>
-                    <a:pt x="0" y="2924358"/>
+                    <a:pt x="0" y="2789137"/>
                   </a:moveTo>
                   <a:lnTo>
-                    <a:pt x="71622" y="2921317"/>
-                  </a:lnTo>
-                  <a:lnTo>
-                    <a:pt x="143245" y="2918264"/>
-                  </a:lnTo>
-                  <a:lnTo>
-                    <a:pt x="214867" y="2915198"/>
-                  </a:lnTo>
-                  <a:lnTo>
-                    <a:pt x="286490" y="2912119"/>
-                  </a:lnTo>
-                  <a:lnTo>
-                    <a:pt x="358112" y="2909027"/>
-                  </a:lnTo>
-                  <a:lnTo>
-                    <a:pt x="429735" y="2905922"/>
-                  </a:lnTo>
-                  <a:lnTo>
-                    <a:pt x="501357" y="2902805"/>
-                  </a:lnTo>
-                  <a:lnTo>
-                    <a:pt x="572980" y="2899674"/>
-                  </a:lnTo>
-                  <a:lnTo>
-                    <a:pt x="644602" y="2896531"/>
-                  </a:lnTo>
-                  <a:lnTo>
-                    <a:pt x="716225" y="2893374"/>
-                  </a:lnTo>
-                  <a:lnTo>
-                    <a:pt x="787847" y="2890204"/>
-                  </a:lnTo>
-                  <a:lnTo>
-                    <a:pt x="859470" y="2887021"/>
-                  </a:lnTo>
-                  <a:lnTo>
-                    <a:pt x="931092" y="2883824"/>
-                  </a:lnTo>
-                  <a:lnTo>
-                    <a:pt x="1002715" y="2880614"/>
-                  </a:lnTo>
-                  <a:lnTo>
-                    <a:pt x="1074337" y="2877391"/>
-                  </a:lnTo>
-                  <a:lnTo>
-                    <a:pt x="1145960" y="2874154"/>
-                  </a:lnTo>
-                  <a:lnTo>
-                    <a:pt x="1217582" y="2870904"/>
-                  </a:lnTo>
-                  <a:lnTo>
-                    <a:pt x="1289205" y="2867640"/>
-                  </a:lnTo>
-                  <a:lnTo>
-                    <a:pt x="1360827" y="2864363"/>
-                  </a:lnTo>
-                  <a:lnTo>
-                    <a:pt x="1432450" y="2861072"/>
-                  </a:lnTo>
-                  <a:lnTo>
-                    <a:pt x="1504073" y="2857767"/>
-                  </a:lnTo>
-                  <a:lnTo>
-                    <a:pt x="1575695" y="2854448"/>
-                  </a:lnTo>
-                  <a:lnTo>
-                    <a:pt x="1647318" y="2851115"/>
-                  </a:lnTo>
-                  <a:lnTo>
-                    <a:pt x="1718940" y="2847769"/>
-                  </a:lnTo>
-                  <a:lnTo>
-                    <a:pt x="1790563" y="2844409"/>
-                  </a:lnTo>
-                  <a:lnTo>
-                    <a:pt x="1862185" y="2841034"/>
-                  </a:lnTo>
-                  <a:lnTo>
-                    <a:pt x="1933808" y="2837646"/>
-                  </a:lnTo>
-                  <a:lnTo>
-                    <a:pt x="2005430" y="2834243"/>
-                  </a:lnTo>
-                  <a:lnTo>
-                    <a:pt x="2077053" y="2830826"/>
-                  </a:lnTo>
-                  <a:lnTo>
-                    <a:pt x="2148675" y="2827395"/>
-                  </a:lnTo>
-                  <a:lnTo>
-                    <a:pt x="2220298" y="2823950"/>
-                  </a:lnTo>
-                  <a:lnTo>
-                    <a:pt x="2291920" y="2820490"/>
-                  </a:lnTo>
-                  <a:lnTo>
-                    <a:pt x="2363543" y="2817015"/>
-                  </a:lnTo>
-                  <a:lnTo>
-                    <a:pt x="2435165" y="2813527"/>
-                  </a:lnTo>
-                  <a:lnTo>
-                    <a:pt x="2506788" y="2810023"/>
-                  </a:lnTo>
-                  <a:lnTo>
-                    <a:pt x="2578410" y="2806505"/>
-                  </a:lnTo>
-                  <a:lnTo>
-                    <a:pt x="2650033" y="2802973"/>
-                  </a:lnTo>
-                  <a:lnTo>
-                    <a:pt x="2721655" y="2799425"/>
-                  </a:lnTo>
-                  <a:lnTo>
-                    <a:pt x="2793278" y="2795863"/>
-                  </a:lnTo>
-                  <a:lnTo>
-                    <a:pt x="2864901" y="2792286"/>
-                  </a:lnTo>
-                  <a:lnTo>
-                    <a:pt x="2936523" y="2788694"/>
-                  </a:lnTo>
-                  <a:lnTo>
-                    <a:pt x="3008146" y="2785087"/>
-                  </a:lnTo>
-                  <a:lnTo>
-                    <a:pt x="3079768" y="2758946"/>
-                  </a:lnTo>
-                  <a:lnTo>
-                    <a:pt x="3151391" y="2698158"/>
-                  </a:lnTo>
-                  <a:lnTo>
-                    <a:pt x="3223013" y="2633235"/>
-                  </a:lnTo>
-                  <a:lnTo>
-                    <a:pt x="3294636" y="2563897"/>
-                  </a:lnTo>
-                  <a:lnTo>
-                    <a:pt x="3366258" y="2489842"/>
-                  </a:lnTo>
-                  <a:lnTo>
-                    <a:pt x="3437881" y="2410751"/>
-                  </a:lnTo>
-                  <a:lnTo>
-                    <a:pt x="3509503" y="2326279"/>
-                  </a:lnTo>
-                  <a:lnTo>
-                    <a:pt x="3581126" y="2236062"/>
-                  </a:lnTo>
-                  <a:lnTo>
-                    <a:pt x="3652748" y="2139709"/>
-                  </a:lnTo>
-                  <a:lnTo>
-                    <a:pt x="3724371" y="2036801"/>
-                  </a:lnTo>
-                  <a:lnTo>
-                    <a:pt x="3795993" y="1926895"/>
-                  </a:lnTo>
-                  <a:lnTo>
-                    <a:pt x="3867616" y="1809512"/>
-                  </a:lnTo>
-                  <a:lnTo>
-                    <a:pt x="3939238" y="1684146"/>
-                  </a:lnTo>
-                  <a:lnTo>
-                    <a:pt x="4010861" y="1550252"/>
-                  </a:lnTo>
-                  <a:lnTo>
-                    <a:pt x="4082483" y="1407251"/>
-                  </a:lnTo>
-                  <a:lnTo>
-                    <a:pt x="4154106" y="1254523"/>
-                  </a:lnTo>
-                  <a:lnTo>
-                    <a:pt x="4225729" y="1091407"/>
-                  </a:lnTo>
-                  <a:lnTo>
-                    <a:pt x="4297351" y="917196"/>
-                  </a:lnTo>
-                  <a:lnTo>
-                    <a:pt x="4368974" y="731135"/>
-                  </a:lnTo>
-                  <a:lnTo>
-                    <a:pt x="4440596" y="532419"/>
-                  </a:lnTo>
-                  <a:lnTo>
-                    <a:pt x="4512219" y="320187"/>
-                  </a:lnTo>
-                  <a:lnTo>
-                    <a:pt x="4583841" y="93519"/>
+                    <a:pt x="71622" y="2786236"/>
+                  </a:lnTo>
+                  <a:lnTo>
+                    <a:pt x="143245" y="2783324"/>
+                  </a:lnTo>
+                  <a:lnTo>
+                    <a:pt x="214867" y="2780400"/>
+                  </a:lnTo>
+                  <a:lnTo>
+                    <a:pt x="286490" y="2777464"/>
+                  </a:lnTo>
+                  <a:lnTo>
+                    <a:pt x="358112" y="2774515"/>
+                  </a:lnTo>
+                  <a:lnTo>
+                    <a:pt x="429735" y="2771554"/>
+                  </a:lnTo>
+                  <a:lnTo>
+                    <a:pt x="501357" y="2768580"/>
+                  </a:lnTo>
+                  <a:lnTo>
+                    <a:pt x="572980" y="2765594"/>
+                  </a:lnTo>
+                  <a:lnTo>
+                    <a:pt x="644602" y="2762596"/>
+                  </a:lnTo>
+                  <a:lnTo>
+                    <a:pt x="716225" y="2759585"/>
+                  </a:lnTo>
+                  <a:lnTo>
+                    <a:pt x="787847" y="2756562"/>
+                  </a:lnTo>
+                  <a:lnTo>
+                    <a:pt x="859470" y="2753526"/>
+                  </a:lnTo>
+                  <a:lnTo>
+                    <a:pt x="931092" y="2750477"/>
+                  </a:lnTo>
+                  <a:lnTo>
+                    <a:pt x="1002715" y="2747416"/>
+                  </a:lnTo>
+                  <a:lnTo>
+                    <a:pt x="1074337" y="2744341"/>
+                  </a:lnTo>
+                  <a:lnTo>
+                    <a:pt x="1145960" y="2741254"/>
+                  </a:lnTo>
+                  <a:lnTo>
+                    <a:pt x="1217582" y="2738154"/>
+                  </a:lnTo>
+                  <a:lnTo>
+                    <a:pt x="1289205" y="2735041"/>
+                  </a:lnTo>
+                  <a:lnTo>
+                    <a:pt x="1360827" y="2731916"/>
+                  </a:lnTo>
+                  <a:lnTo>
+                    <a:pt x="1432450" y="2728777"/>
+                  </a:lnTo>
+                  <a:lnTo>
+                    <a:pt x="1504073" y="2725625"/>
+                  </a:lnTo>
+                  <a:lnTo>
+                    <a:pt x="1575695" y="2722459"/>
+                  </a:lnTo>
+                  <a:lnTo>
+                    <a:pt x="1647318" y="2719281"/>
+                  </a:lnTo>
+                  <a:lnTo>
+                    <a:pt x="1718940" y="2716089"/>
+                  </a:lnTo>
+                  <a:lnTo>
+                    <a:pt x="1790563" y="2712884"/>
+                  </a:lnTo>
+                  <a:lnTo>
+                    <a:pt x="1862185" y="2709666"/>
+                  </a:lnTo>
+                  <a:lnTo>
+                    <a:pt x="1933808" y="2706434"/>
+                  </a:lnTo>
+                  <a:lnTo>
+                    <a:pt x="2005430" y="2703189"/>
+                  </a:lnTo>
+                  <a:lnTo>
+                    <a:pt x="2077053" y="2699930"/>
+                  </a:lnTo>
+                  <a:lnTo>
+                    <a:pt x="2148675" y="2696657"/>
+                  </a:lnTo>
+                  <a:lnTo>
+                    <a:pt x="2220298" y="2693371"/>
+                  </a:lnTo>
+                  <a:lnTo>
+                    <a:pt x="2291920" y="2690071"/>
+                  </a:lnTo>
+                  <a:lnTo>
+                    <a:pt x="2363543" y="2686758"/>
+                  </a:lnTo>
+                  <a:lnTo>
+                    <a:pt x="2435165" y="2683430"/>
+                  </a:lnTo>
+                  <a:lnTo>
+                    <a:pt x="2506788" y="2680089"/>
+                  </a:lnTo>
+                  <a:lnTo>
+                    <a:pt x="2578410" y="2676734"/>
+                  </a:lnTo>
+                  <a:lnTo>
+                    <a:pt x="2650033" y="2673364"/>
+                  </a:lnTo>
+                  <a:lnTo>
+                    <a:pt x="2721655" y="2669981"/>
+                  </a:lnTo>
+                  <a:lnTo>
+                    <a:pt x="2793278" y="2666583"/>
+                  </a:lnTo>
+                  <a:lnTo>
+                    <a:pt x="2864901" y="2663172"/>
+                  </a:lnTo>
+                  <a:lnTo>
+                    <a:pt x="2936523" y="2659746"/>
+                  </a:lnTo>
+                  <a:lnTo>
+                    <a:pt x="3008146" y="2656305"/>
+                  </a:lnTo>
+                  <a:lnTo>
+                    <a:pt x="3079768" y="2631373"/>
+                  </a:lnTo>
+                  <a:lnTo>
+                    <a:pt x="3151391" y="2573396"/>
+                  </a:lnTo>
+                  <a:lnTo>
+                    <a:pt x="3223013" y="2511476"/>
+                  </a:lnTo>
+                  <a:lnTo>
+                    <a:pt x="3294636" y="2445343"/>
+                  </a:lnTo>
+                  <a:lnTo>
+                    <a:pt x="3366258" y="2374713"/>
+                  </a:lnTo>
+                  <a:lnTo>
+                    <a:pt x="3437881" y="2299278"/>
+                  </a:lnTo>
+                  <a:lnTo>
+                    <a:pt x="3509503" y="2218713"/>
+                  </a:lnTo>
+                  <a:lnTo>
+                    <a:pt x="3581126" y="2132667"/>
+                  </a:lnTo>
+                  <a:lnTo>
+                    <a:pt x="3652748" y="2040769"/>
+                  </a:lnTo>
+                  <a:lnTo>
+                    <a:pt x="3724371" y="1942620"/>
+                  </a:lnTo>
+                  <a:lnTo>
+                    <a:pt x="3795993" y="1837796"/>
+                  </a:lnTo>
+                  <a:lnTo>
+                    <a:pt x="3867616" y="1725841"/>
+                  </a:lnTo>
+                  <a:lnTo>
+                    <a:pt x="3939238" y="1606271"/>
+                  </a:lnTo>
+                  <a:lnTo>
+                    <a:pt x="4010861" y="1478569"/>
+                  </a:lnTo>
+                  <a:lnTo>
+                    <a:pt x="4082483" y="1342180"/>
+                  </a:lnTo>
+                  <a:lnTo>
+                    <a:pt x="4154106" y="1196514"/>
+                  </a:lnTo>
+                  <a:lnTo>
+                    <a:pt x="4225729" y="1040940"/>
+                  </a:lnTo>
+                  <a:lnTo>
+                    <a:pt x="4297351" y="874785"/>
+                  </a:lnTo>
+                  <a:lnTo>
+                    <a:pt x="4368974" y="697328"/>
+                  </a:lnTo>
+                  <a:lnTo>
+                    <a:pt x="4440596" y="507800"/>
+                  </a:lnTo>
+                  <a:lnTo>
+                    <a:pt x="4512219" y="305382"/>
+                  </a:lnTo>
+                  <a:lnTo>
+                    <a:pt x="4583841" y="89195"/>
                   </a:lnTo>
                   <a:lnTo>
                     <a:pt x="4611509" y="0"/>
@@ -3340,304 +3340,304 @@
                     <a:pt x="7090630" y="0"/>
                   </a:lnTo>
                   <a:lnTo>
-                    <a:pt x="7090630" y="2552535"/>
-                  </a:lnTo>
-                  <a:lnTo>
-                    <a:pt x="7019007" y="2557109"/>
-                  </a:lnTo>
-                  <a:lnTo>
-                    <a:pt x="6947385" y="2561664"/>
-                  </a:lnTo>
-                  <a:lnTo>
-                    <a:pt x="6875762" y="2566200"/>
-                  </a:lnTo>
-                  <a:lnTo>
-                    <a:pt x="6804139" y="2570717"/>
-                  </a:lnTo>
-                  <a:lnTo>
-                    <a:pt x="6732517" y="2575216"/>
-                  </a:lnTo>
-                  <a:lnTo>
-                    <a:pt x="6660894" y="2579695"/>
-                  </a:lnTo>
-                  <a:lnTo>
-                    <a:pt x="6589272" y="2584156"/>
-                  </a:lnTo>
-                  <a:lnTo>
-                    <a:pt x="6517649" y="2588599"/>
-                  </a:lnTo>
-                  <a:lnTo>
-                    <a:pt x="6446027" y="2593023"/>
-                  </a:lnTo>
-                  <a:lnTo>
-                    <a:pt x="6374404" y="2597428"/>
-                  </a:lnTo>
-                  <a:lnTo>
-                    <a:pt x="6302782" y="2601815"/>
-                  </a:lnTo>
-                  <a:lnTo>
-                    <a:pt x="6231159" y="2606184"/>
-                  </a:lnTo>
-                  <a:lnTo>
-                    <a:pt x="6159537" y="2610535"/>
-                  </a:lnTo>
-                  <a:lnTo>
-                    <a:pt x="6087914" y="2614868"/>
-                  </a:lnTo>
-                  <a:lnTo>
-                    <a:pt x="6016292" y="2619183"/>
-                  </a:lnTo>
-                  <a:lnTo>
-                    <a:pt x="5944669" y="2623480"/>
-                  </a:lnTo>
-                  <a:lnTo>
-                    <a:pt x="5873047" y="2627759"/>
-                  </a:lnTo>
-                  <a:lnTo>
-                    <a:pt x="5801424" y="2632020"/>
-                  </a:lnTo>
-                  <a:lnTo>
-                    <a:pt x="5729802" y="2636263"/>
-                  </a:lnTo>
-                  <a:lnTo>
-                    <a:pt x="5658179" y="2640489"/>
-                  </a:lnTo>
-                  <a:lnTo>
-                    <a:pt x="5586557" y="2644697"/>
-                  </a:lnTo>
-                  <a:lnTo>
-                    <a:pt x="5514934" y="2648888"/>
-                  </a:lnTo>
-                  <a:lnTo>
-                    <a:pt x="5443311" y="2653061"/>
-                  </a:lnTo>
-                  <a:lnTo>
-                    <a:pt x="5371689" y="2657217"/>
-                  </a:lnTo>
-                  <a:lnTo>
-                    <a:pt x="5300066" y="2661356"/>
-                  </a:lnTo>
-                  <a:lnTo>
-                    <a:pt x="5228444" y="2665477"/>
-                  </a:lnTo>
-                  <a:lnTo>
-                    <a:pt x="5156821" y="2669582"/>
-                  </a:lnTo>
-                  <a:lnTo>
-                    <a:pt x="5085199" y="2673669"/>
-                  </a:lnTo>
-                  <a:lnTo>
-                    <a:pt x="5013576" y="2677739"/>
-                  </a:lnTo>
-                  <a:lnTo>
-                    <a:pt x="4941954" y="2681793"/>
-                  </a:lnTo>
-                  <a:lnTo>
-                    <a:pt x="4870331" y="2685829"/>
-                  </a:lnTo>
-                  <a:lnTo>
-                    <a:pt x="4798709" y="2689849"/>
-                  </a:lnTo>
-                  <a:lnTo>
-                    <a:pt x="4727086" y="2693852"/>
-                  </a:lnTo>
-                  <a:lnTo>
-                    <a:pt x="4655464" y="2697838"/>
-                  </a:lnTo>
-                  <a:lnTo>
-                    <a:pt x="4583841" y="2701808"/>
-                  </a:lnTo>
-                  <a:lnTo>
-                    <a:pt x="4512219" y="2705761"/>
-                  </a:lnTo>
-                  <a:lnTo>
-                    <a:pt x="4440596" y="2709698"/>
-                  </a:lnTo>
-                  <a:lnTo>
-                    <a:pt x="4368974" y="2713619"/>
-                  </a:lnTo>
-                  <a:lnTo>
-                    <a:pt x="4297351" y="2717523"/>
-                  </a:lnTo>
-                  <a:lnTo>
-                    <a:pt x="4225729" y="2721411"/>
-                  </a:lnTo>
-                  <a:lnTo>
-                    <a:pt x="4154106" y="2725283"/>
-                  </a:lnTo>
-                  <a:lnTo>
-                    <a:pt x="4082483" y="2729138"/>
-                  </a:lnTo>
-                  <a:lnTo>
-                    <a:pt x="4010861" y="2732978"/>
-                  </a:lnTo>
-                  <a:lnTo>
-                    <a:pt x="3939238" y="2736802"/>
-                  </a:lnTo>
-                  <a:lnTo>
-                    <a:pt x="3867616" y="2740609"/>
-                  </a:lnTo>
-                  <a:lnTo>
-                    <a:pt x="3795993" y="2744401"/>
-                  </a:lnTo>
-                  <a:lnTo>
-                    <a:pt x="3724371" y="2748178"/>
-                  </a:lnTo>
-                  <a:lnTo>
-                    <a:pt x="3652748" y="2751938"/>
-                  </a:lnTo>
-                  <a:lnTo>
-                    <a:pt x="3581126" y="2755683"/>
-                  </a:lnTo>
-                  <a:lnTo>
-                    <a:pt x="3509503" y="2759412"/>
-                  </a:lnTo>
-                  <a:lnTo>
-                    <a:pt x="3437881" y="2763126"/>
-                  </a:lnTo>
-                  <a:lnTo>
-                    <a:pt x="3366258" y="2766824"/>
-                  </a:lnTo>
-                  <a:lnTo>
-                    <a:pt x="3294636" y="2770507"/>
-                  </a:lnTo>
-                  <a:lnTo>
-                    <a:pt x="3223013" y="2774175"/>
-                  </a:lnTo>
-                  <a:lnTo>
-                    <a:pt x="3151391" y="2777827"/>
-                  </a:lnTo>
-                  <a:lnTo>
-                    <a:pt x="3079768" y="2781465"/>
-                  </a:lnTo>
-                  <a:lnTo>
-                    <a:pt x="3008146" y="2815862"/>
-                  </a:lnTo>
-                  <a:lnTo>
-                    <a:pt x="2936523" y="2869154"/>
-                  </a:lnTo>
-                  <a:lnTo>
-                    <a:pt x="2864901" y="2919051"/>
-                  </a:lnTo>
-                  <a:lnTo>
-                    <a:pt x="2793278" y="2965771"/>
-                  </a:lnTo>
-                  <a:lnTo>
-                    <a:pt x="2721655" y="3009516"/>
-                  </a:lnTo>
-                  <a:lnTo>
-                    <a:pt x="2650033" y="3050474"/>
-                  </a:lnTo>
-                  <a:lnTo>
-                    <a:pt x="2578410" y="3088824"/>
-                  </a:lnTo>
-                  <a:lnTo>
-                    <a:pt x="2506788" y="3124732"/>
-                  </a:lnTo>
-                  <a:lnTo>
-                    <a:pt x="2435165" y="3158353"/>
-                  </a:lnTo>
-                  <a:lnTo>
-                    <a:pt x="2363543" y="3189832"/>
-                  </a:lnTo>
-                  <a:lnTo>
-                    <a:pt x="2291920" y="3219307"/>
-                  </a:lnTo>
-                  <a:lnTo>
-                    <a:pt x="2220298" y="3246905"/>
-                  </a:lnTo>
-                  <a:lnTo>
-                    <a:pt x="2148675" y="3272745"/>
-                  </a:lnTo>
-                  <a:lnTo>
-                    <a:pt x="2077053" y="3296939"/>
-                  </a:lnTo>
-                  <a:lnTo>
-                    <a:pt x="2005430" y="3319593"/>
-                  </a:lnTo>
-                  <a:lnTo>
-                    <a:pt x="1933808" y="3340804"/>
-                  </a:lnTo>
-                  <a:lnTo>
-                    <a:pt x="1862185" y="3360663"/>
-                  </a:lnTo>
-                  <a:lnTo>
-                    <a:pt x="1790563" y="3379259"/>
-                  </a:lnTo>
-                  <a:lnTo>
-                    <a:pt x="1718940" y="3396670"/>
-                  </a:lnTo>
-                  <a:lnTo>
-                    <a:pt x="1647318" y="3412972"/>
-                  </a:lnTo>
-                  <a:lnTo>
-                    <a:pt x="1575695" y="3428235"/>
-                  </a:lnTo>
-                  <a:lnTo>
-                    <a:pt x="1504073" y="3442527"/>
-                  </a:lnTo>
-                  <a:lnTo>
-                    <a:pt x="1432450" y="3455909"/>
-                  </a:lnTo>
-                  <a:lnTo>
-                    <a:pt x="1360827" y="3468438"/>
-                  </a:lnTo>
-                  <a:lnTo>
-                    <a:pt x="1289205" y="3480169"/>
-                  </a:lnTo>
-                  <a:lnTo>
-                    <a:pt x="1217582" y="3491154"/>
-                  </a:lnTo>
-                  <a:lnTo>
-                    <a:pt x="1145960" y="3501438"/>
-                  </a:lnTo>
-                  <a:lnTo>
-                    <a:pt x="1074337" y="3511068"/>
-                  </a:lnTo>
-                  <a:lnTo>
-                    <a:pt x="1002715" y="3520085"/>
-                  </a:lnTo>
-                  <a:lnTo>
-                    <a:pt x="931092" y="3528527"/>
-                  </a:lnTo>
-                  <a:lnTo>
-                    <a:pt x="859470" y="3536431"/>
-                  </a:lnTo>
-                  <a:lnTo>
-                    <a:pt x="787847" y="3543832"/>
-                  </a:lnTo>
-                  <a:lnTo>
-                    <a:pt x="716225" y="3550762"/>
-                  </a:lnTo>
-                  <a:lnTo>
-                    <a:pt x="644602" y="3557251"/>
-                  </a:lnTo>
-                  <a:lnTo>
-                    <a:pt x="572980" y="3563326"/>
-                  </a:lnTo>
-                  <a:lnTo>
-                    <a:pt x="501357" y="3569014"/>
-                  </a:lnTo>
-                  <a:lnTo>
-                    <a:pt x="429735" y="3574340"/>
-                  </a:lnTo>
-                  <a:lnTo>
-                    <a:pt x="358112" y="3579327"/>
-                  </a:lnTo>
-                  <a:lnTo>
-                    <a:pt x="286490" y="3583996"/>
-                  </a:lnTo>
-                  <a:lnTo>
-                    <a:pt x="214867" y="3588368"/>
-                  </a:lnTo>
-                  <a:lnTo>
-                    <a:pt x="143245" y="3592462"/>
-                  </a:lnTo>
-                  <a:lnTo>
-                    <a:pt x="71622" y="3596294"/>
-                  </a:lnTo>
-                  <a:lnTo>
-                    <a:pt x="0" y="3599883"/>
+                    <a:pt x="7090630" y="2434507"/>
+                  </a:lnTo>
+                  <a:lnTo>
+                    <a:pt x="7019007" y="2438869"/>
+                  </a:lnTo>
+                  <a:lnTo>
+                    <a:pt x="6947385" y="2443214"/>
+                  </a:lnTo>
+                  <a:lnTo>
+                    <a:pt x="6875762" y="2447540"/>
+                  </a:lnTo>
+                  <a:lnTo>
+                    <a:pt x="6804139" y="2451848"/>
+                  </a:lnTo>
+                  <a:lnTo>
+                    <a:pt x="6732517" y="2456139"/>
+                  </a:lnTo>
+                  <a:lnTo>
+                    <a:pt x="6660894" y="2460411"/>
+                  </a:lnTo>
+                  <a:lnTo>
+                    <a:pt x="6589272" y="2464666"/>
+                  </a:lnTo>
+                  <a:lnTo>
+                    <a:pt x="6517649" y="2468903"/>
+                  </a:lnTo>
+                  <a:lnTo>
+                    <a:pt x="6446027" y="2473122"/>
+                  </a:lnTo>
+                  <a:lnTo>
+                    <a:pt x="6374404" y="2477324"/>
+                  </a:lnTo>
+                  <a:lnTo>
+                    <a:pt x="6302782" y="2481508"/>
+                  </a:lnTo>
+                  <a:lnTo>
+                    <a:pt x="6231159" y="2485675"/>
+                  </a:lnTo>
+                  <a:lnTo>
+                    <a:pt x="6159537" y="2489825"/>
+                  </a:lnTo>
+                  <a:lnTo>
+                    <a:pt x="6087914" y="2493958"/>
+                  </a:lnTo>
+                  <a:lnTo>
+                    <a:pt x="6016292" y="2498073"/>
+                  </a:lnTo>
+                  <a:lnTo>
+                    <a:pt x="5944669" y="2502171"/>
+                  </a:lnTo>
+                  <a:lnTo>
+                    <a:pt x="5873047" y="2506252"/>
+                  </a:lnTo>
+                  <a:lnTo>
+                    <a:pt x="5801424" y="2510316"/>
+                  </a:lnTo>
+                  <a:lnTo>
+                    <a:pt x="5729802" y="2514363"/>
+                  </a:lnTo>
+                  <a:lnTo>
+                    <a:pt x="5658179" y="2518394"/>
+                  </a:lnTo>
+                  <a:lnTo>
+                    <a:pt x="5586557" y="2522407"/>
+                  </a:lnTo>
+                  <a:lnTo>
+                    <a:pt x="5514934" y="2526404"/>
+                  </a:lnTo>
+                  <a:lnTo>
+                    <a:pt x="5443311" y="2530385"/>
+                  </a:lnTo>
+                  <a:lnTo>
+                    <a:pt x="5371689" y="2534349"/>
+                  </a:lnTo>
+                  <a:lnTo>
+                    <a:pt x="5300066" y="2538296"/>
+                  </a:lnTo>
+                  <a:lnTo>
+                    <a:pt x="5228444" y="2542227"/>
+                  </a:lnTo>
+                  <a:lnTo>
+                    <a:pt x="5156821" y="2546141"/>
+                  </a:lnTo>
+                  <a:lnTo>
+                    <a:pt x="5085199" y="2550040"/>
+                  </a:lnTo>
+                  <a:lnTo>
+                    <a:pt x="5013576" y="2553922"/>
+                  </a:lnTo>
+                  <a:lnTo>
+                    <a:pt x="4941954" y="2557788"/>
+                  </a:lnTo>
+                  <a:lnTo>
+                    <a:pt x="4870331" y="2561637"/>
+                  </a:lnTo>
+                  <a:lnTo>
+                    <a:pt x="4798709" y="2565471"/>
+                  </a:lnTo>
+                  <a:lnTo>
+                    <a:pt x="4727086" y="2569289"/>
+                  </a:lnTo>
+                  <a:lnTo>
+                    <a:pt x="4655464" y="2573091"/>
+                  </a:lnTo>
+                  <a:lnTo>
+                    <a:pt x="4583841" y="2576878"/>
+                  </a:lnTo>
+                  <a:lnTo>
+                    <a:pt x="4512219" y="2580648"/>
+                  </a:lnTo>
+                  <a:lnTo>
+                    <a:pt x="4440596" y="2584403"/>
+                  </a:lnTo>
+                  <a:lnTo>
+                    <a:pt x="4368974" y="2588142"/>
+                  </a:lnTo>
+                  <a:lnTo>
+                    <a:pt x="4297351" y="2591866"/>
+                  </a:lnTo>
+                  <a:lnTo>
+                    <a:pt x="4225729" y="2595574"/>
+                  </a:lnTo>
+                  <a:lnTo>
+                    <a:pt x="4154106" y="2599267"/>
+                  </a:lnTo>
+                  <a:lnTo>
+                    <a:pt x="4082483" y="2602944"/>
+                  </a:lnTo>
+                  <a:lnTo>
+                    <a:pt x="4010861" y="2606606"/>
+                  </a:lnTo>
+                  <a:lnTo>
+                    <a:pt x="3939238" y="2610253"/>
+                  </a:lnTo>
+                  <a:lnTo>
+                    <a:pt x="3867616" y="2613885"/>
+                  </a:lnTo>
+                  <a:lnTo>
+                    <a:pt x="3795993" y="2617501"/>
+                  </a:lnTo>
+                  <a:lnTo>
+                    <a:pt x="3724371" y="2621103"/>
+                  </a:lnTo>
+                  <a:lnTo>
+                    <a:pt x="3652748" y="2624690"/>
+                  </a:lnTo>
+                  <a:lnTo>
+                    <a:pt x="3581126" y="2628261"/>
+                  </a:lnTo>
+                  <a:lnTo>
+                    <a:pt x="3509503" y="2631818"/>
+                  </a:lnTo>
+                  <a:lnTo>
+                    <a:pt x="3437881" y="2635360"/>
+                  </a:lnTo>
+                  <a:lnTo>
+                    <a:pt x="3366258" y="2638887"/>
+                  </a:lnTo>
+                  <a:lnTo>
+                    <a:pt x="3294636" y="2642400"/>
+                  </a:lnTo>
+                  <a:lnTo>
+                    <a:pt x="3223013" y="2645898"/>
+                  </a:lnTo>
+                  <a:lnTo>
+                    <a:pt x="3151391" y="2649382"/>
+                  </a:lnTo>
+                  <a:lnTo>
+                    <a:pt x="3079768" y="2652851"/>
+                  </a:lnTo>
+                  <a:lnTo>
+                    <a:pt x="3008146" y="2685658"/>
+                  </a:lnTo>
+                  <a:lnTo>
+                    <a:pt x="2936523" y="2736485"/>
+                  </a:lnTo>
+                  <a:lnTo>
+                    <a:pt x="2864901" y="2784076"/>
+                  </a:lnTo>
+                  <a:lnTo>
+                    <a:pt x="2793278" y="2828635"/>
+                  </a:lnTo>
+                  <a:lnTo>
+                    <a:pt x="2721655" y="2870357"/>
+                  </a:lnTo>
+                  <a:lnTo>
+                    <a:pt x="2650033" y="2909421"/>
+                  </a:lnTo>
+                  <a:lnTo>
+                    <a:pt x="2578410" y="2945998"/>
+                  </a:lnTo>
+                  <a:lnTo>
+                    <a:pt x="2506788" y="2980245"/>
+                  </a:lnTo>
+                  <a:lnTo>
+                    <a:pt x="2435165" y="3012312"/>
+                  </a:lnTo>
+                  <a:lnTo>
+                    <a:pt x="2363543" y="3042336"/>
+                  </a:lnTo>
+                  <a:lnTo>
+                    <a:pt x="2291920" y="3070448"/>
+                  </a:lnTo>
+                  <a:lnTo>
+                    <a:pt x="2220298" y="3096769"/>
+                  </a:lnTo>
+                  <a:lnTo>
+                    <a:pt x="2148675" y="3121414"/>
+                  </a:lnTo>
+                  <a:lnTo>
+                    <a:pt x="2077053" y="3144490"/>
+                  </a:lnTo>
+                  <a:lnTo>
+                    <a:pt x="2005430" y="3166096"/>
+                  </a:lnTo>
+                  <a:lnTo>
+                    <a:pt x="1933808" y="3186326"/>
+                  </a:lnTo>
+                  <a:lnTo>
+                    <a:pt x="1862185" y="3205268"/>
+                  </a:lnTo>
+                  <a:lnTo>
+                    <a:pt x="1790563" y="3223003"/>
+                  </a:lnTo>
+                  <a:lnTo>
+                    <a:pt x="1718940" y="3239609"/>
+                  </a:lnTo>
+                  <a:lnTo>
+                    <a:pt x="1647318" y="3255157"/>
+                  </a:lnTo>
+                  <a:lnTo>
+                    <a:pt x="1575695" y="3269715"/>
+                  </a:lnTo>
+                  <a:lnTo>
+                    <a:pt x="1504073" y="3283346"/>
+                  </a:lnTo>
+                  <a:lnTo>
+                    <a:pt x="1432450" y="3296109"/>
+                  </a:lnTo>
+                  <a:lnTo>
+                    <a:pt x="1360827" y="3308059"/>
+                  </a:lnTo>
+                  <a:lnTo>
+                    <a:pt x="1289205" y="3319248"/>
+                  </a:lnTo>
+                  <a:lnTo>
+                    <a:pt x="1217582" y="3329724"/>
+                  </a:lnTo>
+                  <a:lnTo>
+                    <a:pt x="1145960" y="3339533"/>
+                  </a:lnTo>
+                  <a:lnTo>
+                    <a:pt x="1074337" y="3348718"/>
+                  </a:lnTo>
+                  <a:lnTo>
+                    <a:pt x="1002715" y="3357317"/>
+                  </a:lnTo>
+                  <a:lnTo>
+                    <a:pt x="931092" y="3365369"/>
+                  </a:lnTo>
+                  <a:lnTo>
+                    <a:pt x="859470" y="3372908"/>
+                  </a:lnTo>
+                  <a:lnTo>
+                    <a:pt x="787847" y="3379967"/>
+                  </a:lnTo>
+                  <a:lnTo>
+                    <a:pt x="716225" y="3386576"/>
+                  </a:lnTo>
+                  <a:lnTo>
+                    <a:pt x="644602" y="3392765"/>
+                  </a:lnTo>
+                  <a:lnTo>
+                    <a:pt x="572980" y="3398559"/>
+                  </a:lnTo>
+                  <a:lnTo>
+                    <a:pt x="501357" y="3403984"/>
+                  </a:lnTo>
+                  <a:lnTo>
+                    <a:pt x="429735" y="3409064"/>
+                  </a:lnTo>
+                  <a:lnTo>
+                    <a:pt x="358112" y="3413820"/>
+                  </a:lnTo>
+                  <a:lnTo>
+                    <a:pt x="286490" y="3418274"/>
+                  </a:lnTo>
+                  <a:lnTo>
+                    <a:pt x="214867" y="3422443"/>
+                  </a:lnTo>
+                  <a:lnTo>
+                    <a:pt x="143245" y="3426348"/>
+                  </a:lnTo>
+                  <a:lnTo>
+                    <a:pt x="71622" y="3430003"/>
+                  </a:lnTo>
+                  <a:lnTo>
+                    <a:pt x="0" y="3433426"/>
                   </a:lnTo>
                   <a:close/>
                 </a:path>
@@ -3663,207 +3663,207 @@
           </p:nvSpPr>
           <p:spPr>
             <a:xfrm>
-              <a:off x="1172049" y="1896563"/>
-              <a:ext cx="4611509" cy="2924358"/>
+              <a:off x="1172049" y="2073503"/>
+              <a:ext cx="4611509" cy="2789137"/>
             </a:xfrm>
             <a:custGeom>
               <a:avLst/>
               <a:pathLst>
-                <a:path w="4611509" h="2924358">
+                <a:path w="4611509" h="2789137">
                   <a:moveTo>
-                    <a:pt x="0" y="2924358"/>
+                    <a:pt x="0" y="2789137"/>
                   </a:moveTo>
                   <a:lnTo>
-                    <a:pt x="71622" y="2921317"/>
-                  </a:lnTo>
-                  <a:lnTo>
-                    <a:pt x="143245" y="2918264"/>
-                  </a:lnTo>
-                  <a:lnTo>
-                    <a:pt x="214867" y="2915198"/>
-                  </a:lnTo>
-                  <a:lnTo>
-                    <a:pt x="286490" y="2912119"/>
-                  </a:lnTo>
-                  <a:lnTo>
-                    <a:pt x="358112" y="2909027"/>
-                  </a:lnTo>
-                  <a:lnTo>
-                    <a:pt x="429735" y="2905922"/>
-                  </a:lnTo>
-                  <a:lnTo>
-                    <a:pt x="501357" y="2902805"/>
-                  </a:lnTo>
-                  <a:lnTo>
-                    <a:pt x="572980" y="2899674"/>
-                  </a:lnTo>
-                  <a:lnTo>
-                    <a:pt x="644602" y="2896531"/>
-                  </a:lnTo>
-                  <a:lnTo>
-                    <a:pt x="716225" y="2893374"/>
-                  </a:lnTo>
-                  <a:lnTo>
-                    <a:pt x="787847" y="2890204"/>
-                  </a:lnTo>
-                  <a:lnTo>
-                    <a:pt x="859470" y="2887021"/>
-                  </a:lnTo>
-                  <a:lnTo>
-                    <a:pt x="931092" y="2883824"/>
-                  </a:lnTo>
-                  <a:lnTo>
-                    <a:pt x="1002715" y="2880614"/>
-                  </a:lnTo>
-                  <a:lnTo>
-                    <a:pt x="1074337" y="2877391"/>
-                  </a:lnTo>
-                  <a:lnTo>
-                    <a:pt x="1145960" y="2874154"/>
-                  </a:lnTo>
-                  <a:lnTo>
-                    <a:pt x="1217582" y="2870904"/>
-                  </a:lnTo>
-                  <a:lnTo>
-                    <a:pt x="1289205" y="2867640"/>
-                  </a:lnTo>
-                  <a:lnTo>
-                    <a:pt x="1360827" y="2864363"/>
-                  </a:lnTo>
-                  <a:lnTo>
-                    <a:pt x="1432450" y="2861072"/>
-                  </a:lnTo>
-                  <a:lnTo>
-                    <a:pt x="1504073" y="2857767"/>
-                  </a:lnTo>
-                  <a:lnTo>
-                    <a:pt x="1575695" y="2854448"/>
-                  </a:lnTo>
-                  <a:lnTo>
-                    <a:pt x="1647318" y="2851115"/>
-                  </a:lnTo>
-                  <a:lnTo>
-                    <a:pt x="1718940" y="2847769"/>
-                  </a:lnTo>
-                  <a:lnTo>
-                    <a:pt x="1790563" y="2844409"/>
-                  </a:lnTo>
-                  <a:lnTo>
-                    <a:pt x="1862185" y="2841034"/>
-                  </a:lnTo>
-                  <a:lnTo>
-                    <a:pt x="1933808" y="2837646"/>
-                  </a:lnTo>
-                  <a:lnTo>
-                    <a:pt x="2005430" y="2834243"/>
-                  </a:lnTo>
-                  <a:lnTo>
-                    <a:pt x="2077053" y="2830826"/>
-                  </a:lnTo>
-                  <a:lnTo>
-                    <a:pt x="2148675" y="2827395"/>
-                  </a:lnTo>
-                  <a:lnTo>
-                    <a:pt x="2220298" y="2823950"/>
-                  </a:lnTo>
-                  <a:lnTo>
-                    <a:pt x="2291920" y="2820490"/>
-                  </a:lnTo>
-                  <a:lnTo>
-                    <a:pt x="2363543" y="2817015"/>
-                  </a:lnTo>
-                  <a:lnTo>
-                    <a:pt x="2435165" y="2813527"/>
-                  </a:lnTo>
-                  <a:lnTo>
-                    <a:pt x="2506788" y="2810023"/>
-                  </a:lnTo>
-                  <a:lnTo>
-                    <a:pt x="2578410" y="2806505"/>
-                  </a:lnTo>
-                  <a:lnTo>
-                    <a:pt x="2650033" y="2802973"/>
-                  </a:lnTo>
-                  <a:lnTo>
-                    <a:pt x="2721655" y="2799425"/>
-                  </a:lnTo>
-                  <a:lnTo>
-                    <a:pt x="2793278" y="2795863"/>
-                  </a:lnTo>
-                  <a:lnTo>
-                    <a:pt x="2864901" y="2792286"/>
-                  </a:lnTo>
-                  <a:lnTo>
-                    <a:pt x="2936523" y="2788694"/>
-                  </a:lnTo>
-                  <a:lnTo>
-                    <a:pt x="3008146" y="2785087"/>
-                  </a:lnTo>
-                  <a:lnTo>
-                    <a:pt x="3079768" y="2758946"/>
-                  </a:lnTo>
-                  <a:lnTo>
-                    <a:pt x="3151391" y="2698158"/>
-                  </a:lnTo>
-                  <a:lnTo>
-                    <a:pt x="3223013" y="2633235"/>
-                  </a:lnTo>
-                  <a:lnTo>
-                    <a:pt x="3294636" y="2563897"/>
-                  </a:lnTo>
-                  <a:lnTo>
-                    <a:pt x="3366258" y="2489842"/>
-                  </a:lnTo>
-                  <a:lnTo>
-                    <a:pt x="3437881" y="2410751"/>
-                  </a:lnTo>
-                  <a:lnTo>
-                    <a:pt x="3509503" y="2326279"/>
-                  </a:lnTo>
-                  <a:lnTo>
-                    <a:pt x="3581126" y="2236062"/>
-                  </a:lnTo>
-                  <a:lnTo>
-                    <a:pt x="3652748" y="2139709"/>
-                  </a:lnTo>
-                  <a:lnTo>
-                    <a:pt x="3724371" y="2036801"/>
-                  </a:lnTo>
-                  <a:lnTo>
-                    <a:pt x="3795993" y="1926895"/>
-                  </a:lnTo>
-                  <a:lnTo>
-                    <a:pt x="3867616" y="1809512"/>
-                  </a:lnTo>
-                  <a:lnTo>
-                    <a:pt x="3939238" y="1684146"/>
-                  </a:lnTo>
-                  <a:lnTo>
-                    <a:pt x="4010861" y="1550252"/>
-                  </a:lnTo>
-                  <a:lnTo>
-                    <a:pt x="4082483" y="1407251"/>
-                  </a:lnTo>
-                  <a:lnTo>
-                    <a:pt x="4154106" y="1254523"/>
-                  </a:lnTo>
-                  <a:lnTo>
-                    <a:pt x="4225729" y="1091407"/>
-                  </a:lnTo>
-                  <a:lnTo>
-                    <a:pt x="4297351" y="917196"/>
-                  </a:lnTo>
-                  <a:lnTo>
-                    <a:pt x="4368974" y="731135"/>
-                  </a:lnTo>
-                  <a:lnTo>
-                    <a:pt x="4440596" y="532419"/>
-                  </a:lnTo>
-                  <a:lnTo>
-                    <a:pt x="4512219" y="320187"/>
-                  </a:lnTo>
-                  <a:lnTo>
-                    <a:pt x="4583841" y="93519"/>
+                    <a:pt x="71622" y="2786236"/>
+                  </a:lnTo>
+                  <a:lnTo>
+                    <a:pt x="143245" y="2783324"/>
+                  </a:lnTo>
+                  <a:lnTo>
+                    <a:pt x="214867" y="2780400"/>
+                  </a:lnTo>
+                  <a:lnTo>
+                    <a:pt x="286490" y="2777464"/>
+                  </a:lnTo>
+                  <a:lnTo>
+                    <a:pt x="358112" y="2774515"/>
+                  </a:lnTo>
+                  <a:lnTo>
+                    <a:pt x="429735" y="2771554"/>
+                  </a:lnTo>
+                  <a:lnTo>
+                    <a:pt x="501357" y="2768580"/>
+                  </a:lnTo>
+                  <a:lnTo>
+                    <a:pt x="572980" y="2765594"/>
+                  </a:lnTo>
+                  <a:lnTo>
+                    <a:pt x="644602" y="2762596"/>
+                  </a:lnTo>
+                  <a:lnTo>
+                    <a:pt x="716225" y="2759585"/>
+                  </a:lnTo>
+                  <a:lnTo>
+                    <a:pt x="787847" y="2756562"/>
+                  </a:lnTo>
+                  <a:lnTo>
+                    <a:pt x="859470" y="2753526"/>
+                  </a:lnTo>
+                  <a:lnTo>
+                    <a:pt x="931092" y="2750477"/>
+                  </a:lnTo>
+                  <a:lnTo>
+                    <a:pt x="1002715" y="2747416"/>
+                  </a:lnTo>
+                  <a:lnTo>
+                    <a:pt x="1074337" y="2744341"/>
+                  </a:lnTo>
+                  <a:lnTo>
+                    <a:pt x="1145960" y="2741254"/>
+                  </a:lnTo>
+                  <a:lnTo>
+                    <a:pt x="1217582" y="2738154"/>
+                  </a:lnTo>
+                  <a:lnTo>
+                    <a:pt x="1289205" y="2735041"/>
+                  </a:lnTo>
+                  <a:lnTo>
+                    <a:pt x="1360827" y="2731916"/>
+                  </a:lnTo>
+                  <a:lnTo>
+                    <a:pt x="1432450" y="2728777"/>
+                  </a:lnTo>
+                  <a:lnTo>
+                    <a:pt x="1504073" y="2725625"/>
+                  </a:lnTo>
+                  <a:lnTo>
+                    <a:pt x="1575695" y="2722459"/>
+                  </a:lnTo>
+                  <a:lnTo>
+                    <a:pt x="1647318" y="2719281"/>
+                  </a:lnTo>
+                  <a:lnTo>
+                    <a:pt x="1718940" y="2716089"/>
+                  </a:lnTo>
+                  <a:lnTo>
+                    <a:pt x="1790563" y="2712884"/>
+                  </a:lnTo>
+                  <a:lnTo>
+                    <a:pt x="1862185" y="2709666"/>
+                  </a:lnTo>
+                  <a:lnTo>
+                    <a:pt x="1933808" y="2706434"/>
+                  </a:lnTo>
+                  <a:lnTo>
+                    <a:pt x="2005430" y="2703189"/>
+                  </a:lnTo>
+                  <a:lnTo>
+                    <a:pt x="2077053" y="2699930"/>
+                  </a:lnTo>
+                  <a:lnTo>
+                    <a:pt x="2148675" y="2696657"/>
+                  </a:lnTo>
+                  <a:lnTo>
+                    <a:pt x="2220298" y="2693371"/>
+                  </a:lnTo>
+                  <a:lnTo>
+                    <a:pt x="2291920" y="2690071"/>
+                  </a:lnTo>
+                  <a:lnTo>
+                    <a:pt x="2363543" y="2686758"/>
+                  </a:lnTo>
+                  <a:lnTo>
+                    <a:pt x="2435165" y="2683430"/>
+                  </a:lnTo>
+                  <a:lnTo>
+                    <a:pt x="2506788" y="2680089"/>
+                  </a:lnTo>
+                  <a:lnTo>
+                    <a:pt x="2578410" y="2676734"/>
+                  </a:lnTo>
+                  <a:lnTo>
+                    <a:pt x="2650033" y="2673364"/>
+                  </a:lnTo>
+                  <a:lnTo>
+                    <a:pt x="2721655" y="2669981"/>
+                  </a:lnTo>
+                  <a:lnTo>
+                    <a:pt x="2793278" y="2666583"/>
+                  </a:lnTo>
+                  <a:lnTo>
+                    <a:pt x="2864901" y="2663172"/>
+                  </a:lnTo>
+                  <a:lnTo>
+                    <a:pt x="2936523" y="2659746"/>
+                  </a:lnTo>
+                  <a:lnTo>
+                    <a:pt x="3008146" y="2656305"/>
+                  </a:lnTo>
+                  <a:lnTo>
+                    <a:pt x="3079768" y="2631373"/>
+                  </a:lnTo>
+                  <a:lnTo>
+                    <a:pt x="3151391" y="2573396"/>
+                  </a:lnTo>
+                  <a:lnTo>
+                    <a:pt x="3223013" y="2511476"/>
+                  </a:lnTo>
+                  <a:lnTo>
+                    <a:pt x="3294636" y="2445343"/>
+                  </a:lnTo>
+                  <a:lnTo>
+                    <a:pt x="3366258" y="2374713"/>
+                  </a:lnTo>
+                  <a:lnTo>
+                    <a:pt x="3437881" y="2299278"/>
+                  </a:lnTo>
+                  <a:lnTo>
+                    <a:pt x="3509503" y="2218713"/>
+                  </a:lnTo>
+                  <a:lnTo>
+                    <a:pt x="3581126" y="2132667"/>
+                  </a:lnTo>
+                  <a:lnTo>
+                    <a:pt x="3652748" y="2040769"/>
+                  </a:lnTo>
+                  <a:lnTo>
+                    <a:pt x="3724371" y="1942620"/>
+                  </a:lnTo>
+                  <a:lnTo>
+                    <a:pt x="3795993" y="1837796"/>
+                  </a:lnTo>
+                  <a:lnTo>
+                    <a:pt x="3867616" y="1725841"/>
+                  </a:lnTo>
+                  <a:lnTo>
+                    <a:pt x="3939238" y="1606271"/>
+                  </a:lnTo>
+                  <a:lnTo>
+                    <a:pt x="4010861" y="1478569"/>
+                  </a:lnTo>
+                  <a:lnTo>
+                    <a:pt x="4082483" y="1342180"/>
+                  </a:lnTo>
+                  <a:lnTo>
+                    <a:pt x="4154106" y="1196514"/>
+                  </a:lnTo>
+                  <a:lnTo>
+                    <a:pt x="4225729" y="1040940"/>
+                  </a:lnTo>
+                  <a:lnTo>
+                    <a:pt x="4297351" y="874785"/>
+                  </a:lnTo>
+                  <a:lnTo>
+                    <a:pt x="4368974" y="697328"/>
+                  </a:lnTo>
+                  <a:lnTo>
+                    <a:pt x="4440596" y="507800"/>
+                  </a:lnTo>
+                  <a:lnTo>
+                    <a:pt x="4512219" y="305382"/>
+                  </a:lnTo>
+                  <a:lnTo>
+                    <a:pt x="4583841" y="89195"/>
                   </a:lnTo>
                   <a:lnTo>
                     <a:pt x="4611509" y="0"/>
@@ -3886,312 +3886,312 @@
           </p:nvSpPr>
           <p:spPr>
             <a:xfrm>
-              <a:off x="1172049" y="4449099"/>
-              <a:ext cx="7090630" cy="1047347"/>
+              <a:off x="1172049" y="4508010"/>
+              <a:ext cx="7090630" cy="998918"/>
             </a:xfrm>
             <a:custGeom>
               <a:avLst/>
               <a:pathLst>
-                <a:path w="7090630" h="1047347">
+                <a:path w="7090630" h="998918">
                   <a:moveTo>
                     <a:pt x="7090630" y="0"/>
                   </a:moveTo>
                   <a:lnTo>
-                    <a:pt x="7019007" y="4573"/>
-                  </a:lnTo>
-                  <a:lnTo>
-                    <a:pt x="6947385" y="9128"/>
-                  </a:lnTo>
-                  <a:lnTo>
-                    <a:pt x="6875762" y="13664"/>
-                  </a:lnTo>
-                  <a:lnTo>
-                    <a:pt x="6804139" y="18181"/>
-                  </a:lnTo>
-                  <a:lnTo>
-                    <a:pt x="6732517" y="22680"/>
-                  </a:lnTo>
-                  <a:lnTo>
-                    <a:pt x="6660894" y="27159"/>
-                  </a:lnTo>
-                  <a:lnTo>
-                    <a:pt x="6589272" y="31620"/>
-                  </a:lnTo>
-                  <a:lnTo>
-                    <a:pt x="6517649" y="36063"/>
-                  </a:lnTo>
-                  <a:lnTo>
-                    <a:pt x="6446027" y="40487"/>
-                  </a:lnTo>
-                  <a:lnTo>
-                    <a:pt x="6374404" y="44892"/>
-                  </a:lnTo>
-                  <a:lnTo>
-                    <a:pt x="6302782" y="49280"/>
-                  </a:lnTo>
-                  <a:lnTo>
-                    <a:pt x="6231159" y="53649"/>
-                  </a:lnTo>
-                  <a:lnTo>
-                    <a:pt x="6159537" y="58000"/>
-                  </a:lnTo>
-                  <a:lnTo>
-                    <a:pt x="6087914" y="62332"/>
-                  </a:lnTo>
-                  <a:lnTo>
-                    <a:pt x="6016292" y="66647"/>
-                  </a:lnTo>
-                  <a:lnTo>
-                    <a:pt x="5944669" y="70944"/>
-                  </a:lnTo>
-                  <a:lnTo>
-                    <a:pt x="5873047" y="75223"/>
-                  </a:lnTo>
-                  <a:lnTo>
-                    <a:pt x="5801424" y="79484"/>
-                  </a:lnTo>
-                  <a:lnTo>
-                    <a:pt x="5729802" y="83727"/>
-                  </a:lnTo>
-                  <a:lnTo>
-                    <a:pt x="5658179" y="87953"/>
-                  </a:lnTo>
-                  <a:lnTo>
-                    <a:pt x="5586557" y="92161"/>
-                  </a:lnTo>
-                  <a:lnTo>
-                    <a:pt x="5514934" y="96352"/>
-                  </a:lnTo>
-                  <a:lnTo>
-                    <a:pt x="5443311" y="100526"/>
-                  </a:lnTo>
-                  <a:lnTo>
-                    <a:pt x="5371689" y="104681"/>
-                  </a:lnTo>
-                  <a:lnTo>
-                    <a:pt x="5300066" y="108820"/>
-                  </a:lnTo>
-                  <a:lnTo>
-                    <a:pt x="5228444" y="112942"/>
-                  </a:lnTo>
-                  <a:lnTo>
-                    <a:pt x="5156821" y="117046"/>
-                  </a:lnTo>
-                  <a:lnTo>
-                    <a:pt x="5085199" y="121133"/>
-                  </a:lnTo>
-                  <a:lnTo>
-                    <a:pt x="5013576" y="125204"/>
-                  </a:lnTo>
-                  <a:lnTo>
-                    <a:pt x="4941954" y="129257"/>
-                  </a:lnTo>
-                  <a:lnTo>
-                    <a:pt x="4870331" y="133293"/>
-                  </a:lnTo>
-                  <a:lnTo>
-                    <a:pt x="4798709" y="137313"/>
-                  </a:lnTo>
-                  <a:lnTo>
-                    <a:pt x="4727086" y="141316"/>
-                  </a:lnTo>
-                  <a:lnTo>
-                    <a:pt x="4655464" y="145302"/>
-                  </a:lnTo>
-                  <a:lnTo>
-                    <a:pt x="4583841" y="149272"/>
-                  </a:lnTo>
-                  <a:lnTo>
-                    <a:pt x="4512219" y="153226"/>
-                  </a:lnTo>
-                  <a:lnTo>
-                    <a:pt x="4440596" y="157162"/>
-                  </a:lnTo>
-                  <a:lnTo>
-                    <a:pt x="4368974" y="161083"/>
-                  </a:lnTo>
-                  <a:lnTo>
-                    <a:pt x="4297351" y="164987"/>
-                  </a:lnTo>
-                  <a:lnTo>
-                    <a:pt x="4225729" y="168875"/>
-                  </a:lnTo>
-                  <a:lnTo>
-                    <a:pt x="4154106" y="172747"/>
-                  </a:lnTo>
-                  <a:lnTo>
-                    <a:pt x="4082483" y="176603"/>
-                  </a:lnTo>
-                  <a:lnTo>
-                    <a:pt x="4010861" y="180442"/>
-                  </a:lnTo>
-                  <a:lnTo>
-                    <a:pt x="3939238" y="184266"/>
-                  </a:lnTo>
-                  <a:lnTo>
-                    <a:pt x="3867616" y="188074"/>
-                  </a:lnTo>
-                  <a:lnTo>
-                    <a:pt x="3795993" y="191866"/>
-                  </a:lnTo>
-                  <a:lnTo>
-                    <a:pt x="3724371" y="195642"/>
-                  </a:lnTo>
-                  <a:lnTo>
-                    <a:pt x="3652748" y="199402"/>
-                  </a:lnTo>
-                  <a:lnTo>
-                    <a:pt x="3581126" y="203147"/>
-                  </a:lnTo>
-                  <a:lnTo>
-                    <a:pt x="3509503" y="206876"/>
-                  </a:lnTo>
-                  <a:lnTo>
-                    <a:pt x="3437881" y="210590"/>
-                  </a:lnTo>
-                  <a:lnTo>
-                    <a:pt x="3366258" y="214289"/>
-                  </a:lnTo>
-                  <a:lnTo>
-                    <a:pt x="3294636" y="217972"/>
-                  </a:lnTo>
-                  <a:lnTo>
-                    <a:pt x="3223013" y="221639"/>
-                  </a:lnTo>
-                  <a:lnTo>
-                    <a:pt x="3151391" y="225292"/>
-                  </a:lnTo>
-                  <a:lnTo>
-                    <a:pt x="3079768" y="228929"/>
-                  </a:lnTo>
-                  <a:lnTo>
-                    <a:pt x="3008146" y="263326"/>
-                  </a:lnTo>
-                  <a:lnTo>
-                    <a:pt x="2936523" y="316618"/>
-                  </a:lnTo>
-                  <a:lnTo>
-                    <a:pt x="2864901" y="366516"/>
-                  </a:lnTo>
-                  <a:lnTo>
-                    <a:pt x="2793278" y="413235"/>
-                  </a:lnTo>
-                  <a:lnTo>
-                    <a:pt x="2721655" y="456980"/>
-                  </a:lnTo>
-                  <a:lnTo>
-                    <a:pt x="2650033" y="497938"/>
-                  </a:lnTo>
-                  <a:lnTo>
-                    <a:pt x="2578410" y="536288"/>
-                  </a:lnTo>
-                  <a:lnTo>
-                    <a:pt x="2506788" y="572196"/>
-                  </a:lnTo>
-                  <a:lnTo>
-                    <a:pt x="2435165" y="605817"/>
-                  </a:lnTo>
-                  <a:lnTo>
-                    <a:pt x="2363543" y="637296"/>
-                  </a:lnTo>
-                  <a:lnTo>
-                    <a:pt x="2291920" y="666771"/>
-                  </a:lnTo>
-                  <a:lnTo>
-                    <a:pt x="2220298" y="694369"/>
-                  </a:lnTo>
-                  <a:lnTo>
-                    <a:pt x="2148675" y="720209"/>
-                  </a:lnTo>
-                  <a:lnTo>
-                    <a:pt x="2077053" y="744403"/>
-                  </a:lnTo>
-                  <a:lnTo>
-                    <a:pt x="2005430" y="767057"/>
-                  </a:lnTo>
-                  <a:lnTo>
-                    <a:pt x="1933808" y="788268"/>
-                  </a:lnTo>
-                  <a:lnTo>
-                    <a:pt x="1862185" y="808128"/>
-                  </a:lnTo>
-                  <a:lnTo>
-                    <a:pt x="1790563" y="826723"/>
-                  </a:lnTo>
-                  <a:lnTo>
-                    <a:pt x="1718940" y="844134"/>
-                  </a:lnTo>
-                  <a:lnTo>
-                    <a:pt x="1647318" y="860436"/>
-                  </a:lnTo>
-                  <a:lnTo>
-                    <a:pt x="1575695" y="875700"/>
-                  </a:lnTo>
-                  <a:lnTo>
-                    <a:pt x="1504073" y="889991"/>
-                  </a:lnTo>
-                  <a:lnTo>
-                    <a:pt x="1432450" y="903373"/>
-                  </a:lnTo>
-                  <a:lnTo>
-                    <a:pt x="1360827" y="915902"/>
-                  </a:lnTo>
-                  <a:lnTo>
-                    <a:pt x="1289205" y="927634"/>
-                  </a:lnTo>
-                  <a:lnTo>
-                    <a:pt x="1217582" y="938618"/>
-                  </a:lnTo>
-                  <a:lnTo>
-                    <a:pt x="1145960" y="948903"/>
-                  </a:lnTo>
-                  <a:lnTo>
-                    <a:pt x="1074337" y="958532"/>
-                  </a:lnTo>
-                  <a:lnTo>
-                    <a:pt x="1002715" y="967549"/>
-                  </a:lnTo>
-                  <a:lnTo>
-                    <a:pt x="931092" y="975991"/>
-                  </a:lnTo>
-                  <a:lnTo>
-                    <a:pt x="859470" y="983895"/>
-                  </a:lnTo>
-                  <a:lnTo>
-                    <a:pt x="787847" y="991297"/>
-                  </a:lnTo>
-                  <a:lnTo>
-                    <a:pt x="716225" y="998226"/>
-                  </a:lnTo>
-                  <a:lnTo>
-                    <a:pt x="644602" y="1004715"/>
-                  </a:lnTo>
-                  <a:lnTo>
-                    <a:pt x="572980" y="1010790"/>
-                  </a:lnTo>
-                  <a:lnTo>
-                    <a:pt x="501357" y="1016478"/>
-                  </a:lnTo>
-                  <a:lnTo>
-                    <a:pt x="429735" y="1021804"/>
-                  </a:lnTo>
-                  <a:lnTo>
-                    <a:pt x="358112" y="1026791"/>
-                  </a:lnTo>
-                  <a:lnTo>
-                    <a:pt x="286490" y="1031460"/>
-                  </a:lnTo>
-                  <a:lnTo>
-                    <a:pt x="214867" y="1035832"/>
-                  </a:lnTo>
-                  <a:lnTo>
-                    <a:pt x="143245" y="1039926"/>
-                  </a:lnTo>
-                  <a:lnTo>
-                    <a:pt x="71622" y="1043759"/>
-                  </a:lnTo>
-                  <a:lnTo>
-                    <a:pt x="0" y="1047347"/>
+                    <a:pt x="7019007" y="4362"/>
+                  </a:lnTo>
+                  <a:lnTo>
+                    <a:pt x="6947385" y="8706"/>
+                  </a:lnTo>
+                  <a:lnTo>
+                    <a:pt x="6875762" y="13032"/>
+                  </a:lnTo>
+                  <a:lnTo>
+                    <a:pt x="6804139" y="17341"/>
+                  </a:lnTo>
+                  <a:lnTo>
+                    <a:pt x="6732517" y="21631"/>
+                  </a:lnTo>
+                  <a:lnTo>
+                    <a:pt x="6660894" y="25903"/>
+                  </a:lnTo>
+                  <a:lnTo>
+                    <a:pt x="6589272" y="30158"/>
+                  </a:lnTo>
+                  <a:lnTo>
+                    <a:pt x="6517649" y="34395"/>
+                  </a:lnTo>
+                  <a:lnTo>
+                    <a:pt x="6446027" y="38615"/>
+                  </a:lnTo>
+                  <a:lnTo>
+                    <a:pt x="6374404" y="42817"/>
+                  </a:lnTo>
+                  <a:lnTo>
+                    <a:pt x="6302782" y="47001"/>
+                  </a:lnTo>
+                  <a:lnTo>
+                    <a:pt x="6231159" y="51168"/>
+                  </a:lnTo>
+                  <a:lnTo>
+                    <a:pt x="6159537" y="55318"/>
+                  </a:lnTo>
+                  <a:lnTo>
+                    <a:pt x="6087914" y="59450"/>
+                  </a:lnTo>
+                  <a:lnTo>
+                    <a:pt x="6016292" y="63565"/>
+                  </a:lnTo>
+                  <a:lnTo>
+                    <a:pt x="5944669" y="67663"/>
+                  </a:lnTo>
+                  <a:lnTo>
+                    <a:pt x="5873047" y="71745"/>
+                  </a:lnTo>
+                  <a:lnTo>
+                    <a:pt x="5801424" y="75809"/>
+                  </a:lnTo>
+                  <a:lnTo>
+                    <a:pt x="5729802" y="79856"/>
+                  </a:lnTo>
+                  <a:lnTo>
+                    <a:pt x="5658179" y="83886"/>
+                  </a:lnTo>
+                  <a:lnTo>
+                    <a:pt x="5586557" y="87900"/>
+                  </a:lnTo>
+                  <a:lnTo>
+                    <a:pt x="5514934" y="91897"/>
+                  </a:lnTo>
+                  <a:lnTo>
+                    <a:pt x="5443311" y="95877"/>
+                  </a:lnTo>
+                  <a:lnTo>
+                    <a:pt x="5371689" y="99841"/>
+                  </a:lnTo>
+                  <a:lnTo>
+                    <a:pt x="5300066" y="103788"/>
+                  </a:lnTo>
+                  <a:lnTo>
+                    <a:pt x="5228444" y="107719"/>
+                  </a:lnTo>
+                  <a:lnTo>
+                    <a:pt x="5156821" y="111634"/>
+                  </a:lnTo>
+                  <a:lnTo>
+                    <a:pt x="5085199" y="115532"/>
+                  </a:lnTo>
+                  <a:lnTo>
+                    <a:pt x="5013576" y="119414"/>
+                  </a:lnTo>
+                  <a:lnTo>
+                    <a:pt x="4941954" y="123280"/>
+                  </a:lnTo>
+                  <a:lnTo>
+                    <a:pt x="4870331" y="127130"/>
+                  </a:lnTo>
+                  <a:lnTo>
+                    <a:pt x="4798709" y="130964"/>
+                  </a:lnTo>
+                  <a:lnTo>
+                    <a:pt x="4727086" y="134782"/>
+                  </a:lnTo>
+                  <a:lnTo>
+                    <a:pt x="4655464" y="138584"/>
+                  </a:lnTo>
+                  <a:lnTo>
+                    <a:pt x="4583841" y="142370"/>
+                  </a:lnTo>
+                  <a:lnTo>
+                    <a:pt x="4512219" y="146140"/>
+                  </a:lnTo>
+                  <a:lnTo>
+                    <a:pt x="4440596" y="149895"/>
+                  </a:lnTo>
+                  <a:lnTo>
+                    <a:pt x="4368974" y="153634"/>
+                  </a:lnTo>
+                  <a:lnTo>
+                    <a:pt x="4297351" y="157358"/>
+                  </a:lnTo>
+                  <a:lnTo>
+                    <a:pt x="4225729" y="161066"/>
+                  </a:lnTo>
+                  <a:lnTo>
+                    <a:pt x="4154106" y="164759"/>
+                  </a:lnTo>
+                  <a:lnTo>
+                    <a:pt x="4082483" y="168436"/>
+                  </a:lnTo>
+                  <a:lnTo>
+                    <a:pt x="4010861" y="172099"/>
+                  </a:lnTo>
+                  <a:lnTo>
+                    <a:pt x="3939238" y="175745"/>
+                  </a:lnTo>
+                  <a:lnTo>
+                    <a:pt x="3867616" y="179377"/>
+                  </a:lnTo>
+                  <a:lnTo>
+                    <a:pt x="3795993" y="182994"/>
+                  </a:lnTo>
+                  <a:lnTo>
+                    <a:pt x="3724371" y="186595"/>
+                  </a:lnTo>
+                  <a:lnTo>
+                    <a:pt x="3652748" y="190182"/>
+                  </a:lnTo>
+                  <a:lnTo>
+                    <a:pt x="3581126" y="193754"/>
+                  </a:lnTo>
+                  <a:lnTo>
+                    <a:pt x="3509503" y="197311"/>
+                  </a:lnTo>
+                  <a:lnTo>
+                    <a:pt x="3437881" y="200853"/>
+                  </a:lnTo>
+                  <a:lnTo>
+                    <a:pt x="3366258" y="204380"/>
+                  </a:lnTo>
+                  <a:lnTo>
+                    <a:pt x="3294636" y="207893"/>
+                  </a:lnTo>
+                  <a:lnTo>
+                    <a:pt x="3223013" y="211391"/>
+                  </a:lnTo>
+                  <a:lnTo>
+                    <a:pt x="3151391" y="214874"/>
+                  </a:lnTo>
+                  <a:lnTo>
+                    <a:pt x="3079768" y="218343"/>
+                  </a:lnTo>
+                  <a:lnTo>
+                    <a:pt x="3008146" y="251150"/>
+                  </a:lnTo>
+                  <a:lnTo>
+                    <a:pt x="2936523" y="301978"/>
+                  </a:lnTo>
+                  <a:lnTo>
+                    <a:pt x="2864901" y="349568"/>
+                  </a:lnTo>
+                  <a:lnTo>
+                    <a:pt x="2793278" y="394128"/>
+                  </a:lnTo>
+                  <a:lnTo>
+                    <a:pt x="2721655" y="435849"/>
+                  </a:lnTo>
+                  <a:lnTo>
+                    <a:pt x="2650033" y="474914"/>
+                  </a:lnTo>
+                  <a:lnTo>
+                    <a:pt x="2578410" y="511491"/>
+                  </a:lnTo>
+                  <a:lnTo>
+                    <a:pt x="2506788" y="545738"/>
+                  </a:lnTo>
+                  <a:lnTo>
+                    <a:pt x="2435165" y="577804"/>
+                  </a:lnTo>
+                  <a:lnTo>
+                    <a:pt x="2363543" y="607828"/>
+                  </a:lnTo>
+                  <a:lnTo>
+                    <a:pt x="2291920" y="635940"/>
+                  </a:lnTo>
+                  <a:lnTo>
+                    <a:pt x="2220298" y="662262"/>
+                  </a:lnTo>
+                  <a:lnTo>
+                    <a:pt x="2148675" y="686907"/>
+                  </a:lnTo>
+                  <a:lnTo>
+                    <a:pt x="2077053" y="709982"/>
+                  </a:lnTo>
+                  <a:lnTo>
+                    <a:pt x="2005430" y="731588"/>
+                  </a:lnTo>
+                  <a:lnTo>
+                    <a:pt x="1933808" y="751818"/>
+                  </a:lnTo>
+                  <a:lnTo>
+                    <a:pt x="1862185" y="770760"/>
+                  </a:lnTo>
+                  <a:lnTo>
+                    <a:pt x="1790563" y="788495"/>
+                  </a:lnTo>
+                  <a:lnTo>
+                    <a:pt x="1718940" y="805101"/>
+                  </a:lnTo>
+                  <a:lnTo>
+                    <a:pt x="1647318" y="820650"/>
+                  </a:lnTo>
+                  <a:lnTo>
+                    <a:pt x="1575695" y="835208"/>
+                  </a:lnTo>
+                  <a:lnTo>
+                    <a:pt x="1504073" y="848838"/>
+                  </a:lnTo>
+                  <a:lnTo>
+                    <a:pt x="1432450" y="861601"/>
+                  </a:lnTo>
+                  <a:lnTo>
+                    <a:pt x="1360827" y="873551"/>
+                  </a:lnTo>
+                  <a:lnTo>
+                    <a:pt x="1289205" y="884740"/>
+                  </a:lnTo>
+                  <a:lnTo>
+                    <a:pt x="1217582" y="895216"/>
+                  </a:lnTo>
+                  <a:lnTo>
+                    <a:pt x="1145960" y="905026"/>
+                  </a:lnTo>
+                  <a:lnTo>
+                    <a:pt x="1074337" y="914210"/>
+                  </a:lnTo>
+                  <a:lnTo>
+                    <a:pt x="1002715" y="922810"/>
+                  </a:lnTo>
+                  <a:lnTo>
+                    <a:pt x="931092" y="930861"/>
+                  </a:lnTo>
+                  <a:lnTo>
+                    <a:pt x="859470" y="938400"/>
+                  </a:lnTo>
+                  <a:lnTo>
+                    <a:pt x="787847" y="945459"/>
+                  </a:lnTo>
+                  <a:lnTo>
+                    <a:pt x="716225" y="952069"/>
+                  </a:lnTo>
+                  <a:lnTo>
+                    <a:pt x="644602" y="958257"/>
+                  </a:lnTo>
+                  <a:lnTo>
+                    <a:pt x="572980" y="964051"/>
+                  </a:lnTo>
+                  <a:lnTo>
+                    <a:pt x="501357" y="969477"/>
+                  </a:lnTo>
+                  <a:lnTo>
+                    <a:pt x="429735" y="974556"/>
+                  </a:lnTo>
+                  <a:lnTo>
+                    <a:pt x="358112" y="979313"/>
+                  </a:lnTo>
+                  <a:lnTo>
+                    <a:pt x="286490" y="983766"/>
+                  </a:lnTo>
+                  <a:lnTo>
+                    <a:pt x="214867" y="987936"/>
+                  </a:lnTo>
+                  <a:lnTo>
+                    <a:pt x="143245" y="991840"/>
+                  </a:lnTo>
+                  <a:lnTo>
+                    <a:pt x="71622" y="995496"/>
+                  </a:lnTo>
+                  <a:lnTo>
+                    <a:pt x="0" y="998918"/>
                   </a:lnTo>
                 </a:path>
               </a:pathLst>
@@ -4211,264 +4211,264 @@
           </p:nvSpPr>
           <p:spPr>
             <a:xfrm>
-              <a:off x="1172049" y="1896563"/>
-              <a:ext cx="5987718" cy="3456622"/>
+              <a:off x="1172049" y="2073503"/>
+              <a:ext cx="5987718" cy="3296789"/>
             </a:xfrm>
             <a:custGeom>
               <a:avLst/>
               <a:pathLst>
-                <a:path w="5987718" h="3456622">
+                <a:path w="5987718" h="3296789">
                   <a:moveTo>
-                    <a:pt x="0" y="3456622"/>
+                    <a:pt x="0" y="3296789"/>
                   </a:moveTo>
                   <a:lnTo>
-                    <a:pt x="71622" y="3449642"/>
-                  </a:lnTo>
-                  <a:lnTo>
-                    <a:pt x="143245" y="3442414"/>
-                  </a:lnTo>
-                  <a:lnTo>
-                    <a:pt x="214867" y="3434929"/>
-                  </a:lnTo>
-                  <a:lnTo>
-                    <a:pt x="286490" y="3427178"/>
-                  </a:lnTo>
-                  <a:lnTo>
-                    <a:pt x="358112" y="3419150"/>
-                  </a:lnTo>
-                  <a:lnTo>
-                    <a:pt x="429735" y="3410836"/>
-                  </a:lnTo>
-                  <a:lnTo>
-                    <a:pt x="501357" y="3402227"/>
-                  </a:lnTo>
-                  <a:lnTo>
-                    <a:pt x="572980" y="3393311"/>
-                  </a:lnTo>
-                  <a:lnTo>
-                    <a:pt x="644602" y="3384077"/>
-                  </a:lnTo>
-                  <a:lnTo>
-                    <a:pt x="716225" y="3374515"/>
-                  </a:lnTo>
-                  <a:lnTo>
-                    <a:pt x="787847" y="3364613"/>
-                  </a:lnTo>
-                  <a:lnTo>
-                    <a:pt x="859470" y="3354357"/>
-                  </a:lnTo>
-                  <a:lnTo>
-                    <a:pt x="931092" y="3343737"/>
-                  </a:lnTo>
-                  <a:lnTo>
-                    <a:pt x="1002715" y="3332738"/>
-                  </a:lnTo>
-                  <a:lnTo>
-                    <a:pt x="1074337" y="3321348"/>
-                  </a:lnTo>
-                  <a:lnTo>
-                    <a:pt x="1145960" y="3309552"/>
-                  </a:lnTo>
-                  <a:lnTo>
-                    <a:pt x="1217582" y="3297337"/>
-                  </a:lnTo>
-                  <a:lnTo>
-                    <a:pt x="1289205" y="3284686"/>
-                  </a:lnTo>
-                  <a:lnTo>
-                    <a:pt x="1360827" y="3271585"/>
-                  </a:lnTo>
-                  <a:lnTo>
-                    <a:pt x="1432450" y="3258017"/>
-                  </a:lnTo>
-                  <a:lnTo>
-                    <a:pt x="1504073" y="3243967"/>
-                  </a:lnTo>
-                  <a:lnTo>
-                    <a:pt x="1575695" y="3229416"/>
-                  </a:lnTo>
-                  <a:lnTo>
-                    <a:pt x="1647318" y="3214347"/>
-                  </a:lnTo>
-                  <a:lnTo>
-                    <a:pt x="1718940" y="3198742"/>
-                  </a:lnTo>
-                  <a:lnTo>
-                    <a:pt x="1790563" y="3182581"/>
-                  </a:lnTo>
-                  <a:lnTo>
-                    <a:pt x="1862185" y="3165844"/>
-                  </a:lnTo>
-                  <a:lnTo>
-                    <a:pt x="1933808" y="3148512"/>
-                  </a:lnTo>
-                  <a:lnTo>
-                    <a:pt x="2005430" y="3130562"/>
-                  </a:lnTo>
-                  <a:lnTo>
-                    <a:pt x="2077053" y="3111974"/>
-                  </a:lnTo>
-                  <a:lnTo>
-                    <a:pt x="2148675" y="3092723"/>
-                  </a:lnTo>
-                  <a:lnTo>
-                    <a:pt x="2220298" y="3072787"/>
-                  </a:lnTo>
-                  <a:lnTo>
-                    <a:pt x="2291920" y="3052142"/>
-                  </a:lnTo>
-                  <a:lnTo>
-                    <a:pt x="2363543" y="3030761"/>
-                  </a:lnTo>
-                  <a:lnTo>
-                    <a:pt x="2435165" y="3008619"/>
-                  </a:lnTo>
-                  <a:lnTo>
-                    <a:pt x="2506788" y="2985688"/>
-                  </a:lnTo>
-                  <a:lnTo>
-                    <a:pt x="2578410" y="2961942"/>
-                  </a:lnTo>
-                  <a:lnTo>
-                    <a:pt x="2650033" y="2937349"/>
-                  </a:lnTo>
-                  <a:lnTo>
-                    <a:pt x="2721655" y="2911881"/>
-                  </a:lnTo>
-                  <a:lnTo>
-                    <a:pt x="2793278" y="2885507"/>
-                  </a:lnTo>
-                  <a:lnTo>
-                    <a:pt x="2864901" y="2858193"/>
-                  </a:lnTo>
-                  <a:lnTo>
-                    <a:pt x="2936523" y="2829907"/>
-                  </a:lnTo>
-                  <a:lnTo>
-                    <a:pt x="3008146" y="2800613"/>
-                  </a:lnTo>
-                  <a:lnTo>
-                    <a:pt x="3079768" y="2770277"/>
-                  </a:lnTo>
-                  <a:lnTo>
-                    <a:pt x="3151391" y="2738861"/>
-                  </a:lnTo>
-                  <a:lnTo>
-                    <a:pt x="3223013" y="2706325"/>
-                  </a:lnTo>
-                  <a:lnTo>
-                    <a:pt x="3294636" y="2672632"/>
-                  </a:lnTo>
-                  <a:lnTo>
-                    <a:pt x="3366258" y="2637739"/>
-                  </a:lnTo>
-                  <a:lnTo>
-                    <a:pt x="3437881" y="2601603"/>
-                  </a:lnTo>
-                  <a:lnTo>
-                    <a:pt x="3509503" y="2564181"/>
-                  </a:lnTo>
-                  <a:lnTo>
-                    <a:pt x="3581126" y="2525427"/>
-                  </a:lnTo>
-                  <a:lnTo>
-                    <a:pt x="3652748" y="2485292"/>
-                  </a:lnTo>
-                  <a:lnTo>
-                    <a:pt x="3724371" y="2443729"/>
-                  </a:lnTo>
-                  <a:lnTo>
-                    <a:pt x="3795993" y="2400686"/>
-                  </a:lnTo>
-                  <a:lnTo>
-                    <a:pt x="3867616" y="2356110"/>
-                  </a:lnTo>
-                  <a:lnTo>
-                    <a:pt x="3939238" y="2309947"/>
-                  </a:lnTo>
-                  <a:lnTo>
-                    <a:pt x="4010861" y="2262141"/>
-                  </a:lnTo>
-                  <a:lnTo>
-                    <a:pt x="4082483" y="2212632"/>
-                  </a:lnTo>
-                  <a:lnTo>
-                    <a:pt x="4154106" y="2161361"/>
-                  </a:lnTo>
-                  <a:lnTo>
-                    <a:pt x="4225729" y="2108264"/>
-                  </a:lnTo>
-                  <a:lnTo>
-                    <a:pt x="4297351" y="2053277"/>
-                  </a:lnTo>
-                  <a:lnTo>
-                    <a:pt x="4368974" y="1996332"/>
-                  </a:lnTo>
-                  <a:lnTo>
-                    <a:pt x="4440596" y="1937359"/>
-                  </a:lnTo>
-                  <a:lnTo>
-                    <a:pt x="4512219" y="1876287"/>
-                  </a:lnTo>
-                  <a:lnTo>
-                    <a:pt x="4583841" y="1813040"/>
-                  </a:lnTo>
-                  <a:lnTo>
-                    <a:pt x="4655464" y="1747541"/>
-                  </a:lnTo>
-                  <a:lnTo>
-                    <a:pt x="4727086" y="1679710"/>
-                  </a:lnTo>
-                  <a:lnTo>
-                    <a:pt x="4798709" y="1609464"/>
-                  </a:lnTo>
-                  <a:lnTo>
-                    <a:pt x="4870331" y="1536717"/>
-                  </a:lnTo>
-                  <a:lnTo>
-                    <a:pt x="4941954" y="1461380"/>
-                  </a:lnTo>
-                  <a:lnTo>
-                    <a:pt x="5013576" y="1383361"/>
-                  </a:lnTo>
-                  <a:lnTo>
-                    <a:pt x="5085199" y="1302563"/>
-                  </a:lnTo>
-                  <a:lnTo>
-                    <a:pt x="5156821" y="1218889"/>
-                  </a:lnTo>
-                  <a:lnTo>
-                    <a:pt x="5228444" y="1132236"/>
-                  </a:lnTo>
-                  <a:lnTo>
-                    <a:pt x="5300066" y="1042497"/>
-                  </a:lnTo>
-                  <a:lnTo>
-                    <a:pt x="5371689" y="949563"/>
-                  </a:lnTo>
-                  <a:lnTo>
-                    <a:pt x="5443311" y="853321"/>
-                  </a:lnTo>
-                  <a:lnTo>
-                    <a:pt x="5514934" y="753651"/>
-                  </a:lnTo>
-                  <a:lnTo>
-                    <a:pt x="5586557" y="650433"/>
-                  </a:lnTo>
-                  <a:lnTo>
-                    <a:pt x="5658179" y="543540"/>
-                  </a:lnTo>
-                  <a:lnTo>
-                    <a:pt x="5729802" y="432841"/>
-                  </a:lnTo>
-                  <a:lnTo>
-                    <a:pt x="5801424" y="318201"/>
-                  </a:lnTo>
-                  <a:lnTo>
-                    <a:pt x="5873047" y="199478"/>
-                  </a:lnTo>
-                  <a:lnTo>
-                    <a:pt x="5944669" y="76529"/>
+                    <a:pt x="71622" y="3290132"/>
+                  </a:lnTo>
+                  <a:lnTo>
+                    <a:pt x="143245" y="3283238"/>
+                  </a:lnTo>
+                  <a:lnTo>
+                    <a:pt x="214867" y="3276099"/>
+                  </a:lnTo>
+                  <a:lnTo>
+                    <a:pt x="286490" y="3268706"/>
+                  </a:lnTo>
+                  <a:lnTo>
+                    <a:pt x="358112" y="3261050"/>
+                  </a:lnTo>
+                  <a:lnTo>
+                    <a:pt x="429735" y="3253121"/>
+                  </a:lnTo>
+                  <a:lnTo>
+                    <a:pt x="501357" y="3244909"/>
+                  </a:lnTo>
+                  <a:lnTo>
+                    <a:pt x="572980" y="3236405"/>
+                  </a:lnTo>
+                  <a:lnTo>
+                    <a:pt x="644602" y="3227599"/>
+                  </a:lnTo>
+                  <a:lnTo>
+                    <a:pt x="716225" y="3218479"/>
+                  </a:lnTo>
+                  <a:lnTo>
+                    <a:pt x="787847" y="3209034"/>
+                  </a:lnTo>
+                  <a:lnTo>
+                    <a:pt x="859470" y="3199253"/>
+                  </a:lnTo>
+                  <a:lnTo>
+                    <a:pt x="931092" y="3189124"/>
+                  </a:lnTo>
+                  <a:lnTo>
+                    <a:pt x="1002715" y="3178634"/>
+                  </a:lnTo>
+                  <a:lnTo>
+                    <a:pt x="1074337" y="3167770"/>
+                  </a:lnTo>
+                  <a:lnTo>
+                    <a:pt x="1145960" y="3156520"/>
+                  </a:lnTo>
+                  <a:lnTo>
+                    <a:pt x="1217582" y="3144869"/>
+                  </a:lnTo>
+                  <a:lnTo>
+                    <a:pt x="1289205" y="3132803"/>
+                  </a:lnTo>
+                  <a:lnTo>
+                    <a:pt x="1360827" y="3120308"/>
+                  </a:lnTo>
+                  <a:lnTo>
+                    <a:pt x="1432450" y="3107368"/>
+                  </a:lnTo>
+                  <a:lnTo>
+                    <a:pt x="1504073" y="3093967"/>
+                  </a:lnTo>
+                  <a:lnTo>
+                    <a:pt x="1575695" y="3080089"/>
+                  </a:lnTo>
+                  <a:lnTo>
+                    <a:pt x="1647318" y="3065717"/>
+                  </a:lnTo>
+                  <a:lnTo>
+                    <a:pt x="1718940" y="3050833"/>
+                  </a:lnTo>
+                  <a:lnTo>
+                    <a:pt x="1790563" y="3035419"/>
+                  </a:lnTo>
+                  <a:lnTo>
+                    <a:pt x="1862185" y="3019457"/>
+                  </a:lnTo>
+                  <a:lnTo>
+                    <a:pt x="1933808" y="3002926"/>
+                  </a:lnTo>
+                  <a:lnTo>
+                    <a:pt x="2005430" y="2985806"/>
+                  </a:lnTo>
+                  <a:lnTo>
+                    <a:pt x="2077053" y="2968077"/>
+                  </a:lnTo>
+                  <a:lnTo>
+                    <a:pt x="2148675" y="2949717"/>
+                  </a:lnTo>
+                  <a:lnTo>
+                    <a:pt x="2220298" y="2930703"/>
+                  </a:lnTo>
+                  <a:lnTo>
+                    <a:pt x="2291920" y="2911012"/>
+                  </a:lnTo>
+                  <a:lnTo>
+                    <a:pt x="2363543" y="2890620"/>
+                  </a:lnTo>
+                  <a:lnTo>
+                    <a:pt x="2435165" y="2869501"/>
+                  </a:lnTo>
+                  <a:lnTo>
+                    <a:pt x="2506788" y="2847631"/>
+                  </a:lnTo>
+                  <a:lnTo>
+                    <a:pt x="2578410" y="2824983"/>
+                  </a:lnTo>
+                  <a:lnTo>
+                    <a:pt x="2650033" y="2801527"/>
+                  </a:lnTo>
+                  <a:lnTo>
+                    <a:pt x="2721655" y="2777237"/>
+                  </a:lnTo>
+                  <a:lnTo>
+                    <a:pt x="2793278" y="2752082"/>
+                  </a:lnTo>
+                  <a:lnTo>
+                    <a:pt x="2864901" y="2726031"/>
+                  </a:lnTo>
+                  <a:lnTo>
+                    <a:pt x="2936523" y="2699053"/>
+                  </a:lnTo>
+                  <a:lnTo>
+                    <a:pt x="3008146" y="2671114"/>
+                  </a:lnTo>
+                  <a:lnTo>
+                    <a:pt x="3079768" y="2642180"/>
+                  </a:lnTo>
+                  <a:lnTo>
+                    <a:pt x="3151391" y="2612217"/>
+                  </a:lnTo>
+                  <a:lnTo>
+                    <a:pt x="3223013" y="2581186"/>
+                  </a:lnTo>
+                  <a:lnTo>
+                    <a:pt x="3294636" y="2549050"/>
+                  </a:lnTo>
+                  <a:lnTo>
+                    <a:pt x="3366258" y="2515771"/>
+                  </a:lnTo>
+                  <a:lnTo>
+                    <a:pt x="3437881" y="2481306"/>
+                  </a:lnTo>
+                  <a:lnTo>
+                    <a:pt x="3509503" y="2445614"/>
+                  </a:lnTo>
+                  <a:lnTo>
+                    <a:pt x="3581126" y="2408652"/>
+                  </a:lnTo>
+                  <a:lnTo>
+                    <a:pt x="3652748" y="2370373"/>
+                  </a:lnTo>
+                  <a:lnTo>
+                    <a:pt x="3724371" y="2330732"/>
+                  </a:lnTo>
+                  <a:lnTo>
+                    <a:pt x="3795993" y="2289679"/>
+                  </a:lnTo>
+                  <a:lnTo>
+                    <a:pt x="3867616" y="2247165"/>
+                  </a:lnTo>
+                  <a:lnTo>
+                    <a:pt x="3939238" y="2203136"/>
+                  </a:lnTo>
+                  <a:lnTo>
+                    <a:pt x="4010861" y="2157540"/>
+                  </a:lnTo>
+                  <a:lnTo>
+                    <a:pt x="4082483" y="2110321"/>
+                  </a:lnTo>
+                  <a:lnTo>
+                    <a:pt x="4154106" y="2061421"/>
+                  </a:lnTo>
+                  <a:lnTo>
+                    <a:pt x="4225729" y="2010779"/>
+                  </a:lnTo>
+                  <a:lnTo>
+                    <a:pt x="4297351" y="1958334"/>
+                  </a:lnTo>
+                  <a:lnTo>
+                    <a:pt x="4368974" y="1904022"/>
+                  </a:lnTo>
+                  <a:lnTo>
+                    <a:pt x="4440596" y="1847776"/>
+                  </a:lnTo>
+                  <a:lnTo>
+                    <a:pt x="4512219" y="1789528"/>
+                  </a:lnTo>
+                  <a:lnTo>
+                    <a:pt x="4583841" y="1729206"/>
+                  </a:lnTo>
+                  <a:lnTo>
+                    <a:pt x="4655464" y="1666735"/>
+                  </a:lnTo>
+                  <a:lnTo>
+                    <a:pt x="4727086" y="1602041"/>
+                  </a:lnTo>
+                  <a:lnTo>
+                    <a:pt x="4798709" y="1535043"/>
+                  </a:lnTo>
+                  <a:lnTo>
+                    <a:pt x="4870331" y="1465660"/>
+                  </a:lnTo>
+                  <a:lnTo>
+                    <a:pt x="4941954" y="1393807"/>
+                  </a:lnTo>
+                  <a:lnTo>
+                    <a:pt x="5013576" y="1319395"/>
+                  </a:lnTo>
+                  <a:lnTo>
+                    <a:pt x="5085199" y="1242333"/>
+                  </a:lnTo>
+                  <a:lnTo>
+                    <a:pt x="5156821" y="1162528"/>
+                  </a:lnTo>
+                  <a:lnTo>
+                    <a:pt x="5228444" y="1079882"/>
+                  </a:lnTo>
+                  <a:lnTo>
+                    <a:pt x="5300066" y="994292"/>
+                  </a:lnTo>
+                  <a:lnTo>
+                    <a:pt x="5371689" y="905656"/>
+                  </a:lnTo>
+                  <a:lnTo>
+                    <a:pt x="5443311" y="813863"/>
+                  </a:lnTo>
+                  <a:lnTo>
+                    <a:pt x="5514934" y="718803"/>
+                  </a:lnTo>
+                  <a:lnTo>
+                    <a:pt x="5586557" y="620357"/>
+                  </a:lnTo>
+                  <a:lnTo>
+                    <a:pt x="5658179" y="518407"/>
+                  </a:lnTo>
+                  <a:lnTo>
+                    <a:pt x="5729802" y="412827"/>
+                  </a:lnTo>
+                  <a:lnTo>
+                    <a:pt x="5801424" y="303487"/>
+                  </a:lnTo>
+                  <a:lnTo>
+                    <a:pt x="5873047" y="190255"/>
+                  </a:lnTo>
+                  <a:lnTo>
+                    <a:pt x="5944669" y="72990"/>
                   </a:lnTo>
                   <a:lnTo>
                     <a:pt x="5987718" y="0"/>
@@ -4500,7 +4500,7 @@
           </p:nvSpPr>
           <p:spPr>
             <a:xfrm>
-              <a:off x="817517" y="4679530"/>
+              <a:off x="817517" y="4727786"/>
               <a:ext cx="7799693" cy="0"/>
             </a:xfrm>
             <a:custGeom>
@@ -4543,15 +4543,15 @@
           </p:nvSpPr>
           <p:spPr>
             <a:xfrm>
-              <a:off x="4222163" y="1896563"/>
-              <a:ext cx="0" cy="3826579"/>
+              <a:off x="4222163" y="2073503"/>
+              <a:ext cx="0" cy="3649639"/>
             </a:xfrm>
             <a:custGeom>
               <a:avLst/>
               <a:pathLst>
-                <a:path w="0" h="3826579">
+                <a:path w="0" h="3649639">
                   <a:moveTo>
-                    <a:pt x="0" y="3826579"/>
+                    <a:pt x="0" y="3649639"/>
                   </a:moveTo>
                   <a:lnTo>
                     <a:pt x="0" y="0"/>
@@ -4586,7 +4586,7 @@
           </p:nvSpPr>
           <p:spPr>
             <a:xfrm>
-              <a:off x="692708" y="5509156"/>
+              <a:off x="692708" y="5517199"/>
               <a:ext cx="62179" cy="80101"/>
             </a:xfrm>
             <a:prstGeom prst="rect">
@@ -4632,7 +4632,7 @@
           </p:nvSpPr>
           <p:spPr>
             <a:xfrm>
-              <a:off x="692708" y="4639479"/>
+              <a:off x="692708" y="4687735"/>
               <a:ext cx="62179" cy="80101"/>
             </a:xfrm>
             <a:prstGeom prst="rect">
@@ -4678,7 +4678,7 @@
           </p:nvSpPr>
           <p:spPr>
             <a:xfrm>
-              <a:off x="692708" y="3769802"/>
+              <a:off x="692708" y="3858272"/>
               <a:ext cx="62179" cy="80101"/>
             </a:xfrm>
             <a:prstGeom prst="rect">
@@ -4724,7 +4724,7 @@
           </p:nvSpPr>
           <p:spPr>
             <a:xfrm>
-              <a:off x="692708" y="2900125"/>
+              <a:off x="692708" y="3028808"/>
               <a:ext cx="62179" cy="80101"/>
             </a:xfrm>
             <a:prstGeom prst="rect">
@@ -4770,7 +4770,7 @@
           </p:nvSpPr>
           <p:spPr>
             <a:xfrm>
-              <a:off x="692708" y="2030448"/>
+              <a:off x="692708" y="2199345"/>
               <a:ext cx="62179" cy="80101"/>
             </a:xfrm>
             <a:prstGeom prst="rect">
@@ -5138,7 +5138,7 @@
           </p:nvSpPr>
           <p:spPr>
             <a:xfrm rot="-5400000">
-              <a:off x="181100" y="3759743"/>
+              <a:off x="181100" y="3848213"/>
               <a:ext cx="791596" cy="100218"/>
             </a:xfrm>
             <a:prstGeom prst="rect">
@@ -5179,6 +5179,52 @@
         <p:sp>
           <p:nvSpPr>
             <p:cNvPr id="43" name="tx43"/>
+            <p:cNvSpPr/>
+            <p:nvPr/>
+          </p:nvSpPr>
+          <p:spPr>
+            <a:xfrm>
+              <a:off x="817517" y="1896563"/>
+              <a:ext cx="4750765" cy="82021"/>
+            </a:xfrm>
+            <a:prstGeom prst="rect">
+              <a:avLst/>
+            </a:prstGeom>
+            <a:noFill/>
+          </p:spPr>
+          <p:txBody>
+            <a:bodyPr lIns="0" rIns="0" tIns="0" bIns="0" anchorCtr="1" anchor="ctr" wrap="none"/>
+            <a:lstStyle/>
+            <a:p>
+              <a:pPr algn="l" marL="0" marR="0" indent="0">
+                <a:lnSpc>
+                  <a:spcPts val="900"/>
+                </a:lnSpc>
+                <a:spcBef>
+                  <a:spcPts val="0"/>
+                </a:spcBef>
+                <a:spcAft>
+                  <a:spcPts val="0"/>
+                </a:spcAft>
+              </a:pPr>
+              <a:r>
+                <a:rPr sz="900">
+                  <a:solidFill>
+                    <a:srgbClr val="404040">
+                      <a:alpha val="100000"/>
+                    </a:srgbClr>
+                  </a:solidFill>
+                  <a:latin typeface="Helvetica"/>
+                  <a:cs typeface="Helvetica"/>
+                </a:rPr>
+                <a:t>HR = 1.40 (95% CI 1.04-1.87), p = 0.026   (per 25 mg increase in dose discrepancy (Cox PH))</a:t>
+              </a:r>
+            </a:p>
+          </p:txBody>
+        </p:sp>
+        <p:sp>
+          <p:nvSpPr>
+            <p:cNvPr id="44" name="tx44"/>
             <p:cNvSpPr/>
             <p:nvPr/>
           </p:nvSpPr>

--- a/docs/plots/carbo/jx_carbo_linsubhr_dosedisc_death.pptx
+++ b/docs/plots/carbo/jx_carbo_linsubhr_dosedisc_death.pptx
@@ -2271,26 +2271,26 @@
           </p:nvSpPr>
           <p:spPr>
             <a:xfrm>
-              <a:off x="817517" y="5142518"/>
-              <a:ext cx="7799693" cy="0"/>
+              <a:off x="915645" y="5071743"/>
+              <a:ext cx="7682587" cy="0"/>
             </a:xfrm>
             <a:custGeom>
               <a:avLst/>
               <a:pathLst>
-                <a:path w="7799693" h="0">
+                <a:path w="7682587" h="0">
                   <a:moveTo>
                     <a:pt x="0" y="0"/>
                   </a:moveTo>
                   <a:lnTo>
-                    <a:pt x="7799693" y="0"/>
-                  </a:lnTo>
-                  <a:lnTo>
-                    <a:pt x="7799693" y="0"/>
+                    <a:pt x="7682587" y="0"/>
+                  </a:lnTo>
+                  <a:lnTo>
+                    <a:pt x="7682587" y="0"/>
                   </a:lnTo>
                 </a:path>
               </a:pathLst>
             </a:custGeom>
-            <a:ln w="6775" cap="flat">
+            <a:ln w="8623" cap="flat">
               <a:solidFill>
                 <a:srgbClr val="EBEBEB">
                   <a:alpha val="100000"/>
@@ -2314,26 +2314,26 @@
           </p:nvSpPr>
           <p:spPr>
             <a:xfrm>
-              <a:off x="817517" y="4313054"/>
-              <a:ext cx="7799693" cy="0"/>
+              <a:off x="915645" y="4298074"/>
+              <a:ext cx="7682587" cy="0"/>
             </a:xfrm>
             <a:custGeom>
               <a:avLst/>
               <a:pathLst>
-                <a:path w="7799693" h="0">
+                <a:path w="7682587" h="0">
                   <a:moveTo>
                     <a:pt x="0" y="0"/>
                   </a:moveTo>
                   <a:lnTo>
-                    <a:pt x="7799693" y="0"/>
-                  </a:lnTo>
-                  <a:lnTo>
-                    <a:pt x="7799693" y="0"/>
+                    <a:pt x="7682587" y="0"/>
+                  </a:lnTo>
+                  <a:lnTo>
+                    <a:pt x="7682587" y="0"/>
                   </a:lnTo>
                 </a:path>
               </a:pathLst>
             </a:custGeom>
-            <a:ln w="6775" cap="flat">
+            <a:ln w="8623" cap="flat">
               <a:solidFill>
                 <a:srgbClr val="EBEBEB">
                   <a:alpha val="100000"/>
@@ -2357,26 +2357,26 @@
           </p:nvSpPr>
           <p:spPr>
             <a:xfrm>
-              <a:off x="817517" y="3483591"/>
-              <a:ext cx="7799693" cy="0"/>
+              <a:off x="915645" y="3524405"/>
+              <a:ext cx="7682587" cy="0"/>
             </a:xfrm>
             <a:custGeom>
               <a:avLst/>
               <a:pathLst>
-                <a:path w="7799693" h="0">
+                <a:path w="7682587" h="0">
                   <a:moveTo>
                     <a:pt x="0" y="0"/>
                   </a:moveTo>
                   <a:lnTo>
-                    <a:pt x="7799693" y="0"/>
-                  </a:lnTo>
-                  <a:lnTo>
-                    <a:pt x="7799693" y="0"/>
+                    <a:pt x="7682587" y="0"/>
+                  </a:lnTo>
+                  <a:lnTo>
+                    <a:pt x="7682587" y="0"/>
                   </a:lnTo>
                 </a:path>
               </a:pathLst>
             </a:custGeom>
-            <a:ln w="6775" cap="flat">
+            <a:ln w="8623" cap="flat">
               <a:solidFill>
                 <a:srgbClr val="EBEBEB">
                   <a:alpha val="100000"/>
@@ -2400,26 +2400,26 @@
           </p:nvSpPr>
           <p:spPr>
             <a:xfrm>
-              <a:off x="817517" y="2654127"/>
-              <a:ext cx="7799693" cy="0"/>
+              <a:off x="915645" y="2750737"/>
+              <a:ext cx="7682587" cy="0"/>
             </a:xfrm>
             <a:custGeom>
               <a:avLst/>
               <a:pathLst>
-                <a:path w="7799693" h="0">
+                <a:path w="7682587" h="0">
                   <a:moveTo>
                     <a:pt x="0" y="0"/>
                   </a:moveTo>
                   <a:lnTo>
-                    <a:pt x="7799693" y="0"/>
-                  </a:lnTo>
-                  <a:lnTo>
-                    <a:pt x="7799693" y="0"/>
+                    <a:pt x="7682587" y="0"/>
+                  </a:lnTo>
+                  <a:lnTo>
+                    <a:pt x="7682587" y="0"/>
                   </a:lnTo>
                 </a:path>
               </a:pathLst>
             </a:custGeom>
-            <a:ln w="6775" cap="flat">
+            <a:ln w="8623" cap="flat">
               <a:solidFill>
                 <a:srgbClr val="EBEBEB">
                   <a:alpha val="100000"/>
@@ -2443,15 +2443,15 @@
           </p:nvSpPr>
           <p:spPr>
             <a:xfrm>
-              <a:off x="2122745" y="2073503"/>
-              <a:ext cx="0" cy="3649639"/>
+              <a:off x="2201275" y="2209169"/>
+              <a:ext cx="0" cy="3404141"/>
             </a:xfrm>
             <a:custGeom>
               <a:avLst/>
               <a:pathLst>
-                <a:path w="0" h="3649639">
+                <a:path w="0" h="3404141">
                   <a:moveTo>
-                    <a:pt x="0" y="3649639"/>
+                    <a:pt x="0" y="3404141"/>
                   </a:moveTo>
                   <a:lnTo>
                     <a:pt x="0" y="0"/>
@@ -2462,7 +2462,7 @@
                 </a:path>
               </a:pathLst>
             </a:custGeom>
-            <a:ln w="6775" cap="flat">
+            <a:ln w="8623" cap="flat">
               <a:solidFill>
                 <a:srgbClr val="EBEBEB">
                   <a:alpha val="100000"/>
@@ -2486,15 +2486,15 @@
           </p:nvSpPr>
           <p:spPr>
             <a:xfrm>
-              <a:off x="3487174" y="2073503"/>
-              <a:ext cx="0" cy="3649639"/>
+              <a:off x="3545219" y="2209169"/>
+              <a:ext cx="0" cy="3404141"/>
             </a:xfrm>
             <a:custGeom>
               <a:avLst/>
               <a:pathLst>
-                <a:path w="0" h="3649639">
+                <a:path w="0" h="3404141">
                   <a:moveTo>
-                    <a:pt x="0" y="3649639"/>
+                    <a:pt x="0" y="3404141"/>
                   </a:moveTo>
                   <a:lnTo>
                     <a:pt x="0" y="0"/>
@@ -2505,7 +2505,7 @@
                 </a:path>
               </a:pathLst>
             </a:custGeom>
-            <a:ln w="6775" cap="flat">
+            <a:ln w="8623" cap="flat">
               <a:solidFill>
                 <a:srgbClr val="EBEBEB">
                   <a:alpha val="100000"/>
@@ -2529,15 +2529,15 @@
           </p:nvSpPr>
           <p:spPr>
             <a:xfrm>
-              <a:off x="4851604" y="2073503"/>
-              <a:ext cx="0" cy="3649639"/>
+              <a:off x="4889163" y="2209169"/>
+              <a:ext cx="0" cy="3404141"/>
             </a:xfrm>
             <a:custGeom>
               <a:avLst/>
               <a:pathLst>
-                <a:path w="0" h="3649639">
+                <a:path w="0" h="3404141">
                   <a:moveTo>
-                    <a:pt x="0" y="3649639"/>
+                    <a:pt x="0" y="3404141"/>
                   </a:moveTo>
                   <a:lnTo>
                     <a:pt x="0" y="0"/>
@@ -2548,7 +2548,7 @@
                 </a:path>
               </a:pathLst>
             </a:custGeom>
-            <a:ln w="6775" cap="flat">
+            <a:ln w="8623" cap="flat">
               <a:solidFill>
                 <a:srgbClr val="EBEBEB">
                   <a:alpha val="100000"/>
@@ -2572,15 +2572,15 @@
           </p:nvSpPr>
           <p:spPr>
             <a:xfrm>
-              <a:off x="6216034" y="2073503"/>
-              <a:ext cx="0" cy="3649639"/>
+              <a:off x="6233107" y="2209169"/>
+              <a:ext cx="0" cy="3404141"/>
             </a:xfrm>
             <a:custGeom>
               <a:avLst/>
               <a:pathLst>
-                <a:path w="0" h="3649639">
+                <a:path w="0" h="3404141">
                   <a:moveTo>
-                    <a:pt x="0" y="3649639"/>
+                    <a:pt x="0" y="3404141"/>
                   </a:moveTo>
                   <a:lnTo>
                     <a:pt x="0" y="0"/>
@@ -2591,7 +2591,7 @@
                 </a:path>
               </a:pathLst>
             </a:custGeom>
-            <a:ln w="6775" cap="flat">
+            <a:ln w="8623" cap="flat">
               <a:solidFill>
                 <a:srgbClr val="EBEBEB">
                   <a:alpha val="100000"/>
@@ -2615,15 +2615,15 @@
           </p:nvSpPr>
           <p:spPr>
             <a:xfrm>
-              <a:off x="7580464" y="2073503"/>
-              <a:ext cx="0" cy="3649639"/>
+              <a:off x="7577051" y="2209169"/>
+              <a:ext cx="0" cy="3404141"/>
             </a:xfrm>
             <a:custGeom>
               <a:avLst/>
               <a:pathLst>
-                <a:path w="0" h="3649639">
+                <a:path w="0" h="3404141">
                   <a:moveTo>
-                    <a:pt x="0" y="3649639"/>
+                    <a:pt x="0" y="3404141"/>
                   </a:moveTo>
                   <a:lnTo>
                     <a:pt x="0" y="0"/>
@@ -2634,7 +2634,7 @@
                 </a:path>
               </a:pathLst>
             </a:custGeom>
-            <a:ln w="6775" cap="flat">
+            <a:ln w="8623" cap="flat">
               <a:solidFill>
                 <a:srgbClr val="EBEBEB">
                   <a:alpha val="100000"/>
@@ -2658,26 +2658,26 @@
           </p:nvSpPr>
           <p:spPr>
             <a:xfrm>
-              <a:off x="817517" y="5557249"/>
-              <a:ext cx="7799693" cy="0"/>
+              <a:off x="915645" y="5458577"/>
+              <a:ext cx="7682587" cy="0"/>
             </a:xfrm>
             <a:custGeom>
               <a:avLst/>
               <a:pathLst>
-                <a:path w="7799693" h="0">
+                <a:path w="7682587" h="0">
                   <a:moveTo>
                     <a:pt x="0" y="0"/>
                   </a:moveTo>
                   <a:lnTo>
-                    <a:pt x="7799693" y="0"/>
-                  </a:lnTo>
-                  <a:lnTo>
-                    <a:pt x="7799693" y="0"/>
+                    <a:pt x="7682587" y="0"/>
+                  </a:lnTo>
+                  <a:lnTo>
+                    <a:pt x="7682587" y="0"/>
                   </a:lnTo>
                 </a:path>
               </a:pathLst>
             </a:custGeom>
-            <a:ln w="13550" cap="flat">
+            <a:ln w="17246" cap="flat">
               <a:solidFill>
                 <a:srgbClr val="EBEBEB">
                   <a:alpha val="100000"/>
@@ -2701,26 +2701,26 @@
           </p:nvSpPr>
           <p:spPr>
             <a:xfrm>
-              <a:off x="817517" y="4727786"/>
-              <a:ext cx="7799693" cy="0"/>
+              <a:off x="915645" y="4684908"/>
+              <a:ext cx="7682587" cy="0"/>
             </a:xfrm>
             <a:custGeom>
               <a:avLst/>
               <a:pathLst>
-                <a:path w="7799693" h="0">
+                <a:path w="7682587" h="0">
                   <a:moveTo>
                     <a:pt x="0" y="0"/>
                   </a:moveTo>
                   <a:lnTo>
-                    <a:pt x="7799693" y="0"/>
-                  </a:lnTo>
-                  <a:lnTo>
-                    <a:pt x="7799693" y="0"/>
+                    <a:pt x="7682587" y="0"/>
+                  </a:lnTo>
+                  <a:lnTo>
+                    <a:pt x="7682587" y="0"/>
                   </a:lnTo>
                 </a:path>
               </a:pathLst>
             </a:custGeom>
-            <a:ln w="13550" cap="flat">
+            <a:ln w="17246" cap="flat">
               <a:solidFill>
                 <a:srgbClr val="EBEBEB">
                   <a:alpha val="100000"/>
@@ -2744,26 +2744,26 @@
           </p:nvSpPr>
           <p:spPr>
             <a:xfrm>
-              <a:off x="817517" y="3898322"/>
-              <a:ext cx="7799693" cy="0"/>
+              <a:off x="915645" y="3911240"/>
+              <a:ext cx="7682587" cy="0"/>
             </a:xfrm>
             <a:custGeom>
               <a:avLst/>
               <a:pathLst>
-                <a:path w="7799693" h="0">
+                <a:path w="7682587" h="0">
                   <a:moveTo>
                     <a:pt x="0" y="0"/>
                   </a:moveTo>
                   <a:lnTo>
-                    <a:pt x="7799693" y="0"/>
-                  </a:lnTo>
-                  <a:lnTo>
-                    <a:pt x="7799693" y="0"/>
+                    <a:pt x="7682587" y="0"/>
+                  </a:lnTo>
+                  <a:lnTo>
+                    <a:pt x="7682587" y="0"/>
                   </a:lnTo>
                 </a:path>
               </a:pathLst>
             </a:custGeom>
-            <a:ln w="13550" cap="flat">
+            <a:ln w="17246" cap="flat">
               <a:solidFill>
                 <a:srgbClr val="EBEBEB">
                   <a:alpha val="100000"/>
@@ -2787,26 +2787,26 @@
           </p:nvSpPr>
           <p:spPr>
             <a:xfrm>
-              <a:off x="817517" y="3068859"/>
-              <a:ext cx="7799693" cy="0"/>
+              <a:off x="915645" y="3137571"/>
+              <a:ext cx="7682587" cy="0"/>
             </a:xfrm>
             <a:custGeom>
               <a:avLst/>
               <a:pathLst>
-                <a:path w="7799693" h="0">
+                <a:path w="7682587" h="0">
                   <a:moveTo>
                     <a:pt x="0" y="0"/>
                   </a:moveTo>
                   <a:lnTo>
-                    <a:pt x="7799693" y="0"/>
-                  </a:lnTo>
-                  <a:lnTo>
-                    <a:pt x="7799693" y="0"/>
+                    <a:pt x="7682587" y="0"/>
+                  </a:lnTo>
+                  <a:lnTo>
+                    <a:pt x="7682587" y="0"/>
                   </a:lnTo>
                 </a:path>
               </a:pathLst>
             </a:custGeom>
-            <a:ln w="13550" cap="flat">
+            <a:ln w="17246" cap="flat">
               <a:solidFill>
                 <a:srgbClr val="EBEBEB">
                   <a:alpha val="100000"/>
@@ -2830,26 +2830,26 @@
           </p:nvSpPr>
           <p:spPr>
             <a:xfrm>
-              <a:off x="817517" y="2239395"/>
-              <a:ext cx="7799693" cy="0"/>
+              <a:off x="915645" y="2363903"/>
+              <a:ext cx="7682587" cy="0"/>
             </a:xfrm>
             <a:custGeom>
               <a:avLst/>
               <a:pathLst>
-                <a:path w="7799693" h="0">
+                <a:path w="7682587" h="0">
                   <a:moveTo>
                     <a:pt x="0" y="0"/>
                   </a:moveTo>
                   <a:lnTo>
-                    <a:pt x="7799693" y="0"/>
-                  </a:lnTo>
-                  <a:lnTo>
-                    <a:pt x="7799693" y="0"/>
+                    <a:pt x="7682587" y="0"/>
+                  </a:lnTo>
+                  <a:lnTo>
+                    <a:pt x="7682587" y="0"/>
                   </a:lnTo>
                 </a:path>
               </a:pathLst>
             </a:custGeom>
-            <a:ln w="13550" cap="flat">
+            <a:ln w="17246" cap="flat">
               <a:solidFill>
                 <a:srgbClr val="EBEBEB">
                   <a:alpha val="100000"/>
@@ -2873,15 +2873,15 @@
           </p:nvSpPr>
           <p:spPr>
             <a:xfrm>
-              <a:off x="1440530" y="2073503"/>
-              <a:ext cx="0" cy="3649639"/>
+              <a:off x="1529303" y="2209169"/>
+              <a:ext cx="0" cy="3404141"/>
             </a:xfrm>
             <a:custGeom>
               <a:avLst/>
               <a:pathLst>
-                <a:path w="0" h="3649639">
+                <a:path w="0" h="3404141">
                   <a:moveTo>
-                    <a:pt x="0" y="3649639"/>
+                    <a:pt x="0" y="3404141"/>
                   </a:moveTo>
                   <a:lnTo>
                     <a:pt x="0" y="0"/>
@@ -2892,7 +2892,7 @@
                 </a:path>
               </a:pathLst>
             </a:custGeom>
-            <a:ln w="13550" cap="flat">
+            <a:ln w="17246" cap="flat">
               <a:solidFill>
                 <a:srgbClr val="EBEBEB">
                   <a:alpha val="100000"/>
@@ -2916,15 +2916,15 @@
           </p:nvSpPr>
           <p:spPr>
             <a:xfrm>
-              <a:off x="2804959" y="2073503"/>
-              <a:ext cx="0" cy="3649639"/>
+              <a:off x="2873247" y="2209169"/>
+              <a:ext cx="0" cy="3404141"/>
             </a:xfrm>
             <a:custGeom>
               <a:avLst/>
               <a:pathLst>
-                <a:path w="0" h="3649639">
+                <a:path w="0" h="3404141">
                   <a:moveTo>
-                    <a:pt x="0" y="3649639"/>
+                    <a:pt x="0" y="3404141"/>
                   </a:moveTo>
                   <a:lnTo>
                     <a:pt x="0" y="0"/>
@@ -2935,7 +2935,7 @@
                 </a:path>
               </a:pathLst>
             </a:custGeom>
-            <a:ln w="13550" cap="flat">
+            <a:ln w="17246" cap="flat">
               <a:solidFill>
                 <a:srgbClr val="EBEBEB">
                   <a:alpha val="100000"/>
@@ -2959,15 +2959,15 @@
           </p:nvSpPr>
           <p:spPr>
             <a:xfrm>
-              <a:off x="4169389" y="2073503"/>
-              <a:ext cx="0" cy="3649639"/>
+              <a:off x="4217191" y="2209169"/>
+              <a:ext cx="0" cy="3404141"/>
             </a:xfrm>
             <a:custGeom>
               <a:avLst/>
               <a:pathLst>
-                <a:path w="0" h="3649639">
+                <a:path w="0" h="3404141">
                   <a:moveTo>
-                    <a:pt x="0" y="3649639"/>
+                    <a:pt x="0" y="3404141"/>
                   </a:moveTo>
                   <a:lnTo>
                     <a:pt x="0" y="0"/>
@@ -2978,7 +2978,7 @@
                 </a:path>
               </a:pathLst>
             </a:custGeom>
-            <a:ln w="13550" cap="flat">
+            <a:ln w="17246" cap="flat">
               <a:solidFill>
                 <a:srgbClr val="EBEBEB">
                   <a:alpha val="100000"/>
@@ -3002,15 +3002,15 @@
           </p:nvSpPr>
           <p:spPr>
             <a:xfrm>
-              <a:off x="5533819" y="2073503"/>
-              <a:ext cx="0" cy="3649639"/>
+              <a:off x="5561135" y="2209169"/>
+              <a:ext cx="0" cy="3404141"/>
             </a:xfrm>
             <a:custGeom>
               <a:avLst/>
               <a:pathLst>
-                <a:path w="0" h="3649639">
+                <a:path w="0" h="3404141">
                   <a:moveTo>
-                    <a:pt x="0" y="3649639"/>
+                    <a:pt x="0" y="3404141"/>
                   </a:moveTo>
                   <a:lnTo>
                     <a:pt x="0" y="0"/>
@@ -3021,7 +3021,7 @@
                 </a:path>
               </a:pathLst>
             </a:custGeom>
-            <a:ln w="13550" cap="flat">
+            <a:ln w="17246" cap="flat">
               <a:solidFill>
                 <a:srgbClr val="EBEBEB">
                   <a:alpha val="100000"/>
@@ -3045,15 +3045,15 @@
           </p:nvSpPr>
           <p:spPr>
             <a:xfrm>
-              <a:off x="6898249" y="2073503"/>
-              <a:ext cx="0" cy="3649639"/>
+              <a:off x="6905079" y="2209169"/>
+              <a:ext cx="0" cy="3404141"/>
             </a:xfrm>
             <a:custGeom>
               <a:avLst/>
               <a:pathLst>
-                <a:path w="0" h="3649639">
+                <a:path w="0" h="3404141">
                   <a:moveTo>
-                    <a:pt x="0" y="3649639"/>
+                    <a:pt x="0" y="3404141"/>
                   </a:moveTo>
                   <a:lnTo>
                     <a:pt x="0" y="0"/>
@@ -3064,7 +3064,7 @@
                 </a:path>
               </a:pathLst>
             </a:custGeom>
-            <a:ln w="13550" cap="flat">
+            <a:ln w="17246" cap="flat">
               <a:solidFill>
                 <a:srgbClr val="EBEBEB">
                   <a:alpha val="100000"/>
@@ -3088,15 +3088,15 @@
           </p:nvSpPr>
           <p:spPr>
             <a:xfrm>
-              <a:off x="8262679" y="2073503"/>
-              <a:ext cx="0" cy="3649639"/>
+              <a:off x="8249023" y="2209169"/>
+              <a:ext cx="0" cy="3404141"/>
             </a:xfrm>
             <a:custGeom>
               <a:avLst/>
               <a:pathLst>
-                <a:path w="0" h="3649639">
+                <a:path w="0" h="3404141">
                   <a:moveTo>
-                    <a:pt x="0" y="3649639"/>
+                    <a:pt x="0" y="3404141"/>
                   </a:moveTo>
                   <a:lnTo>
                     <a:pt x="0" y="0"/>
@@ -3107,7 +3107,7 @@
                 </a:path>
               </a:pathLst>
             </a:custGeom>
-            <a:ln w="13550" cap="flat">
+            <a:ln w="17246" cap="flat">
               <a:solidFill>
                 <a:srgbClr val="EBEBEB">
                   <a:alpha val="100000"/>
@@ -3131,513 +3131,513 @@
           </p:nvSpPr>
           <p:spPr>
             <a:xfrm>
-              <a:off x="1172049" y="2073503"/>
-              <a:ext cx="7090630" cy="3433426"/>
+              <a:off x="1264853" y="2209169"/>
+              <a:ext cx="6984170" cy="3202472"/>
             </a:xfrm>
             <a:custGeom>
               <a:avLst/>
               <a:pathLst>
-                <a:path w="7090630" h="3433426">
+                <a:path w="6984170" h="3202472">
                   <a:moveTo>
-                    <a:pt x="0" y="2789137"/>
+                    <a:pt x="0" y="2601522"/>
                   </a:moveTo>
                   <a:lnTo>
-                    <a:pt x="71622" y="2786236"/>
-                  </a:lnTo>
-                  <a:lnTo>
-                    <a:pt x="143245" y="2783324"/>
-                  </a:lnTo>
-                  <a:lnTo>
-                    <a:pt x="214867" y="2780400"/>
-                  </a:lnTo>
-                  <a:lnTo>
-                    <a:pt x="286490" y="2777464"/>
-                  </a:lnTo>
-                  <a:lnTo>
-                    <a:pt x="358112" y="2774515"/>
-                  </a:lnTo>
-                  <a:lnTo>
-                    <a:pt x="429735" y="2771554"/>
-                  </a:lnTo>
-                  <a:lnTo>
-                    <a:pt x="501357" y="2768580"/>
-                  </a:lnTo>
-                  <a:lnTo>
-                    <a:pt x="572980" y="2765594"/>
-                  </a:lnTo>
-                  <a:lnTo>
-                    <a:pt x="644602" y="2762596"/>
-                  </a:lnTo>
-                  <a:lnTo>
-                    <a:pt x="716225" y="2759585"/>
-                  </a:lnTo>
-                  <a:lnTo>
-                    <a:pt x="787847" y="2756562"/>
-                  </a:lnTo>
-                  <a:lnTo>
-                    <a:pt x="859470" y="2753526"/>
-                  </a:lnTo>
-                  <a:lnTo>
-                    <a:pt x="931092" y="2750477"/>
-                  </a:lnTo>
-                  <a:lnTo>
-                    <a:pt x="1002715" y="2747416"/>
-                  </a:lnTo>
-                  <a:lnTo>
-                    <a:pt x="1074337" y="2744341"/>
-                  </a:lnTo>
-                  <a:lnTo>
-                    <a:pt x="1145960" y="2741254"/>
-                  </a:lnTo>
-                  <a:lnTo>
-                    <a:pt x="1217582" y="2738154"/>
-                  </a:lnTo>
-                  <a:lnTo>
-                    <a:pt x="1289205" y="2735041"/>
-                  </a:lnTo>
-                  <a:lnTo>
-                    <a:pt x="1360827" y="2731916"/>
-                  </a:lnTo>
-                  <a:lnTo>
-                    <a:pt x="1432450" y="2728777"/>
-                  </a:lnTo>
-                  <a:lnTo>
-                    <a:pt x="1504073" y="2725625"/>
-                  </a:lnTo>
-                  <a:lnTo>
-                    <a:pt x="1575695" y="2722459"/>
-                  </a:lnTo>
-                  <a:lnTo>
-                    <a:pt x="1647318" y="2719281"/>
-                  </a:lnTo>
-                  <a:lnTo>
-                    <a:pt x="1718940" y="2716089"/>
-                  </a:lnTo>
-                  <a:lnTo>
-                    <a:pt x="1790563" y="2712884"/>
-                  </a:lnTo>
-                  <a:lnTo>
-                    <a:pt x="1862185" y="2709666"/>
-                  </a:lnTo>
-                  <a:lnTo>
-                    <a:pt x="1933808" y="2706434"/>
-                  </a:lnTo>
-                  <a:lnTo>
-                    <a:pt x="2005430" y="2703189"/>
-                  </a:lnTo>
-                  <a:lnTo>
-                    <a:pt x="2077053" y="2699930"/>
-                  </a:lnTo>
-                  <a:lnTo>
-                    <a:pt x="2148675" y="2696657"/>
-                  </a:lnTo>
-                  <a:lnTo>
-                    <a:pt x="2220298" y="2693371"/>
-                  </a:lnTo>
-                  <a:lnTo>
-                    <a:pt x="2291920" y="2690071"/>
-                  </a:lnTo>
-                  <a:lnTo>
-                    <a:pt x="2363543" y="2686758"/>
-                  </a:lnTo>
-                  <a:lnTo>
-                    <a:pt x="2435165" y="2683430"/>
-                  </a:lnTo>
-                  <a:lnTo>
-                    <a:pt x="2506788" y="2680089"/>
-                  </a:lnTo>
-                  <a:lnTo>
-                    <a:pt x="2578410" y="2676734"/>
-                  </a:lnTo>
-                  <a:lnTo>
-                    <a:pt x="2650033" y="2673364"/>
-                  </a:lnTo>
-                  <a:lnTo>
-                    <a:pt x="2721655" y="2669981"/>
-                  </a:lnTo>
-                  <a:lnTo>
-                    <a:pt x="2793278" y="2666583"/>
-                  </a:lnTo>
-                  <a:lnTo>
-                    <a:pt x="2864901" y="2663172"/>
-                  </a:lnTo>
-                  <a:lnTo>
-                    <a:pt x="2936523" y="2659746"/>
-                  </a:lnTo>
-                  <a:lnTo>
-                    <a:pt x="3008146" y="2656305"/>
-                  </a:lnTo>
-                  <a:lnTo>
-                    <a:pt x="3079768" y="2631373"/>
-                  </a:lnTo>
-                  <a:lnTo>
-                    <a:pt x="3151391" y="2573396"/>
-                  </a:lnTo>
-                  <a:lnTo>
-                    <a:pt x="3223013" y="2511476"/>
-                  </a:lnTo>
-                  <a:lnTo>
-                    <a:pt x="3294636" y="2445343"/>
-                  </a:lnTo>
-                  <a:lnTo>
-                    <a:pt x="3366258" y="2374713"/>
-                  </a:lnTo>
-                  <a:lnTo>
-                    <a:pt x="3437881" y="2299278"/>
-                  </a:lnTo>
-                  <a:lnTo>
-                    <a:pt x="3509503" y="2218713"/>
-                  </a:lnTo>
-                  <a:lnTo>
-                    <a:pt x="3581126" y="2132667"/>
-                  </a:lnTo>
-                  <a:lnTo>
-                    <a:pt x="3652748" y="2040769"/>
-                  </a:lnTo>
-                  <a:lnTo>
-                    <a:pt x="3724371" y="1942620"/>
-                  </a:lnTo>
-                  <a:lnTo>
-                    <a:pt x="3795993" y="1837796"/>
-                  </a:lnTo>
-                  <a:lnTo>
-                    <a:pt x="3867616" y="1725841"/>
-                  </a:lnTo>
-                  <a:lnTo>
-                    <a:pt x="3939238" y="1606271"/>
-                  </a:lnTo>
-                  <a:lnTo>
-                    <a:pt x="4010861" y="1478569"/>
-                  </a:lnTo>
-                  <a:lnTo>
-                    <a:pt x="4082483" y="1342180"/>
-                  </a:lnTo>
-                  <a:lnTo>
-                    <a:pt x="4154106" y="1196514"/>
-                  </a:lnTo>
-                  <a:lnTo>
-                    <a:pt x="4225729" y="1040940"/>
-                  </a:lnTo>
-                  <a:lnTo>
-                    <a:pt x="4297351" y="874785"/>
-                  </a:lnTo>
-                  <a:lnTo>
-                    <a:pt x="4368974" y="697328"/>
-                  </a:lnTo>
-                  <a:lnTo>
-                    <a:pt x="4440596" y="507800"/>
-                  </a:lnTo>
-                  <a:lnTo>
-                    <a:pt x="4512219" y="305382"/>
-                  </a:lnTo>
-                  <a:lnTo>
-                    <a:pt x="4583841" y="89195"/>
-                  </a:lnTo>
-                  <a:lnTo>
-                    <a:pt x="4611509" y="0"/>
-                  </a:lnTo>
-                  <a:lnTo>
-                    <a:pt x="7090630" y="0"/>
-                  </a:lnTo>
-                  <a:lnTo>
-                    <a:pt x="7090630" y="2434507"/>
-                  </a:lnTo>
-                  <a:lnTo>
-                    <a:pt x="7019007" y="2438869"/>
-                  </a:lnTo>
-                  <a:lnTo>
-                    <a:pt x="6947385" y="2443214"/>
-                  </a:lnTo>
-                  <a:lnTo>
-                    <a:pt x="6875762" y="2447540"/>
-                  </a:lnTo>
-                  <a:lnTo>
-                    <a:pt x="6804139" y="2451848"/>
-                  </a:lnTo>
-                  <a:lnTo>
-                    <a:pt x="6732517" y="2456139"/>
-                  </a:lnTo>
-                  <a:lnTo>
-                    <a:pt x="6660894" y="2460411"/>
-                  </a:lnTo>
-                  <a:lnTo>
-                    <a:pt x="6589272" y="2464666"/>
-                  </a:lnTo>
-                  <a:lnTo>
-                    <a:pt x="6517649" y="2468903"/>
-                  </a:lnTo>
-                  <a:lnTo>
-                    <a:pt x="6446027" y="2473122"/>
-                  </a:lnTo>
-                  <a:lnTo>
-                    <a:pt x="6374404" y="2477324"/>
-                  </a:lnTo>
-                  <a:lnTo>
-                    <a:pt x="6302782" y="2481508"/>
-                  </a:lnTo>
-                  <a:lnTo>
-                    <a:pt x="6231159" y="2485675"/>
-                  </a:lnTo>
-                  <a:lnTo>
-                    <a:pt x="6159537" y="2489825"/>
-                  </a:lnTo>
-                  <a:lnTo>
-                    <a:pt x="6087914" y="2493958"/>
-                  </a:lnTo>
-                  <a:lnTo>
-                    <a:pt x="6016292" y="2498073"/>
-                  </a:lnTo>
-                  <a:lnTo>
-                    <a:pt x="5944669" y="2502171"/>
-                  </a:lnTo>
-                  <a:lnTo>
-                    <a:pt x="5873047" y="2506252"/>
-                  </a:lnTo>
-                  <a:lnTo>
-                    <a:pt x="5801424" y="2510316"/>
-                  </a:lnTo>
-                  <a:lnTo>
-                    <a:pt x="5729802" y="2514363"/>
-                  </a:lnTo>
-                  <a:lnTo>
-                    <a:pt x="5658179" y="2518394"/>
-                  </a:lnTo>
-                  <a:lnTo>
-                    <a:pt x="5586557" y="2522407"/>
-                  </a:lnTo>
-                  <a:lnTo>
-                    <a:pt x="5514934" y="2526404"/>
-                  </a:lnTo>
-                  <a:lnTo>
-                    <a:pt x="5443311" y="2530385"/>
-                  </a:lnTo>
-                  <a:lnTo>
-                    <a:pt x="5371689" y="2534349"/>
-                  </a:lnTo>
-                  <a:lnTo>
-                    <a:pt x="5300066" y="2538296"/>
-                  </a:lnTo>
-                  <a:lnTo>
-                    <a:pt x="5228444" y="2542227"/>
-                  </a:lnTo>
-                  <a:lnTo>
-                    <a:pt x="5156821" y="2546141"/>
-                  </a:lnTo>
-                  <a:lnTo>
-                    <a:pt x="5085199" y="2550040"/>
-                  </a:lnTo>
-                  <a:lnTo>
-                    <a:pt x="5013576" y="2553922"/>
-                  </a:lnTo>
-                  <a:lnTo>
-                    <a:pt x="4941954" y="2557788"/>
-                  </a:lnTo>
-                  <a:lnTo>
-                    <a:pt x="4870331" y="2561637"/>
-                  </a:lnTo>
-                  <a:lnTo>
-                    <a:pt x="4798709" y="2565471"/>
-                  </a:lnTo>
-                  <a:lnTo>
-                    <a:pt x="4727086" y="2569289"/>
-                  </a:lnTo>
-                  <a:lnTo>
-                    <a:pt x="4655464" y="2573091"/>
-                  </a:lnTo>
-                  <a:lnTo>
-                    <a:pt x="4583841" y="2576878"/>
-                  </a:lnTo>
-                  <a:lnTo>
-                    <a:pt x="4512219" y="2580648"/>
-                  </a:lnTo>
-                  <a:lnTo>
-                    <a:pt x="4440596" y="2584403"/>
-                  </a:lnTo>
-                  <a:lnTo>
-                    <a:pt x="4368974" y="2588142"/>
-                  </a:lnTo>
-                  <a:lnTo>
-                    <a:pt x="4297351" y="2591866"/>
-                  </a:lnTo>
-                  <a:lnTo>
-                    <a:pt x="4225729" y="2595574"/>
-                  </a:lnTo>
-                  <a:lnTo>
-                    <a:pt x="4154106" y="2599267"/>
-                  </a:lnTo>
-                  <a:lnTo>
-                    <a:pt x="4082483" y="2602944"/>
-                  </a:lnTo>
-                  <a:lnTo>
-                    <a:pt x="4010861" y="2606606"/>
-                  </a:lnTo>
-                  <a:lnTo>
-                    <a:pt x="3939238" y="2610253"/>
-                  </a:lnTo>
-                  <a:lnTo>
-                    <a:pt x="3867616" y="2613885"/>
-                  </a:lnTo>
-                  <a:lnTo>
-                    <a:pt x="3795993" y="2617501"/>
-                  </a:lnTo>
-                  <a:lnTo>
-                    <a:pt x="3724371" y="2621103"/>
-                  </a:lnTo>
-                  <a:lnTo>
-                    <a:pt x="3652748" y="2624690"/>
-                  </a:lnTo>
-                  <a:lnTo>
-                    <a:pt x="3581126" y="2628261"/>
-                  </a:lnTo>
-                  <a:lnTo>
-                    <a:pt x="3509503" y="2631818"/>
-                  </a:lnTo>
-                  <a:lnTo>
-                    <a:pt x="3437881" y="2635360"/>
-                  </a:lnTo>
-                  <a:lnTo>
-                    <a:pt x="3366258" y="2638887"/>
-                  </a:lnTo>
-                  <a:lnTo>
-                    <a:pt x="3294636" y="2642400"/>
-                  </a:lnTo>
-                  <a:lnTo>
-                    <a:pt x="3223013" y="2645898"/>
-                  </a:lnTo>
-                  <a:lnTo>
-                    <a:pt x="3151391" y="2649382"/>
-                  </a:lnTo>
-                  <a:lnTo>
-                    <a:pt x="3079768" y="2652851"/>
-                  </a:lnTo>
-                  <a:lnTo>
-                    <a:pt x="3008146" y="2685658"/>
-                  </a:lnTo>
-                  <a:lnTo>
-                    <a:pt x="2936523" y="2736485"/>
-                  </a:lnTo>
-                  <a:lnTo>
-                    <a:pt x="2864901" y="2784076"/>
-                  </a:lnTo>
-                  <a:lnTo>
-                    <a:pt x="2793278" y="2828635"/>
-                  </a:lnTo>
-                  <a:lnTo>
-                    <a:pt x="2721655" y="2870357"/>
-                  </a:lnTo>
-                  <a:lnTo>
-                    <a:pt x="2650033" y="2909421"/>
-                  </a:lnTo>
-                  <a:lnTo>
-                    <a:pt x="2578410" y="2945998"/>
-                  </a:lnTo>
-                  <a:lnTo>
-                    <a:pt x="2506788" y="2980245"/>
-                  </a:lnTo>
-                  <a:lnTo>
-                    <a:pt x="2435165" y="3012312"/>
-                  </a:lnTo>
-                  <a:lnTo>
-                    <a:pt x="2363543" y="3042336"/>
-                  </a:lnTo>
-                  <a:lnTo>
-                    <a:pt x="2291920" y="3070448"/>
-                  </a:lnTo>
-                  <a:lnTo>
-                    <a:pt x="2220298" y="3096769"/>
-                  </a:lnTo>
-                  <a:lnTo>
-                    <a:pt x="2148675" y="3121414"/>
-                  </a:lnTo>
-                  <a:lnTo>
-                    <a:pt x="2077053" y="3144490"/>
-                  </a:lnTo>
-                  <a:lnTo>
-                    <a:pt x="2005430" y="3166096"/>
-                  </a:lnTo>
-                  <a:lnTo>
-                    <a:pt x="1933808" y="3186326"/>
-                  </a:lnTo>
-                  <a:lnTo>
-                    <a:pt x="1862185" y="3205268"/>
-                  </a:lnTo>
-                  <a:lnTo>
-                    <a:pt x="1790563" y="3223003"/>
-                  </a:lnTo>
-                  <a:lnTo>
-                    <a:pt x="1718940" y="3239609"/>
-                  </a:lnTo>
-                  <a:lnTo>
-                    <a:pt x="1647318" y="3255157"/>
-                  </a:lnTo>
-                  <a:lnTo>
-                    <a:pt x="1575695" y="3269715"/>
-                  </a:lnTo>
-                  <a:lnTo>
-                    <a:pt x="1504073" y="3283346"/>
-                  </a:lnTo>
-                  <a:lnTo>
-                    <a:pt x="1432450" y="3296109"/>
-                  </a:lnTo>
-                  <a:lnTo>
-                    <a:pt x="1360827" y="3308059"/>
-                  </a:lnTo>
-                  <a:lnTo>
-                    <a:pt x="1289205" y="3319248"/>
-                  </a:lnTo>
-                  <a:lnTo>
-                    <a:pt x="1217582" y="3329724"/>
-                  </a:lnTo>
-                  <a:lnTo>
-                    <a:pt x="1145960" y="3339533"/>
-                  </a:lnTo>
-                  <a:lnTo>
-                    <a:pt x="1074337" y="3348718"/>
-                  </a:lnTo>
-                  <a:lnTo>
-                    <a:pt x="1002715" y="3357317"/>
-                  </a:lnTo>
-                  <a:lnTo>
-                    <a:pt x="931092" y="3365369"/>
-                  </a:lnTo>
-                  <a:lnTo>
-                    <a:pt x="859470" y="3372908"/>
-                  </a:lnTo>
-                  <a:lnTo>
-                    <a:pt x="787847" y="3379967"/>
-                  </a:lnTo>
-                  <a:lnTo>
-                    <a:pt x="716225" y="3386576"/>
-                  </a:lnTo>
-                  <a:lnTo>
-                    <a:pt x="644602" y="3392765"/>
-                  </a:lnTo>
-                  <a:lnTo>
-                    <a:pt x="572980" y="3398559"/>
-                  </a:lnTo>
-                  <a:lnTo>
-                    <a:pt x="501357" y="3403984"/>
-                  </a:lnTo>
-                  <a:lnTo>
-                    <a:pt x="429735" y="3409064"/>
-                  </a:lnTo>
-                  <a:lnTo>
-                    <a:pt x="358112" y="3413820"/>
-                  </a:lnTo>
-                  <a:lnTo>
-                    <a:pt x="286490" y="3418274"/>
-                  </a:lnTo>
-                  <a:lnTo>
-                    <a:pt x="214867" y="3422443"/>
-                  </a:lnTo>
-                  <a:lnTo>
-                    <a:pt x="143245" y="3426348"/>
-                  </a:lnTo>
-                  <a:lnTo>
-                    <a:pt x="71622" y="3430003"/>
-                  </a:lnTo>
-                  <a:lnTo>
-                    <a:pt x="0" y="3433426"/>
+                    <a:pt x="70547" y="2598817"/>
+                  </a:lnTo>
+                  <a:lnTo>
+                    <a:pt x="141094" y="2596100"/>
+                  </a:lnTo>
+                  <a:lnTo>
+                    <a:pt x="211641" y="2593373"/>
+                  </a:lnTo>
+                  <a:lnTo>
+                    <a:pt x="282188" y="2590634"/>
+                  </a:lnTo>
+                  <a:lnTo>
+                    <a:pt x="352735" y="2587883"/>
+                  </a:lnTo>
+                  <a:lnTo>
+                    <a:pt x="423283" y="2585121"/>
+                  </a:lnTo>
+                  <a:lnTo>
+                    <a:pt x="493830" y="2582348"/>
+                  </a:lnTo>
+                  <a:lnTo>
+                    <a:pt x="564377" y="2579563"/>
+                  </a:lnTo>
+                  <a:lnTo>
+                    <a:pt x="634924" y="2576766"/>
+                  </a:lnTo>
+                  <a:lnTo>
+                    <a:pt x="705471" y="2573958"/>
+                  </a:lnTo>
+                  <a:lnTo>
+                    <a:pt x="776018" y="2571138"/>
+                  </a:lnTo>
+                  <a:lnTo>
+                    <a:pt x="846566" y="2568306"/>
+                  </a:lnTo>
+                  <a:lnTo>
+                    <a:pt x="917113" y="2565462"/>
+                  </a:lnTo>
+                  <a:lnTo>
+                    <a:pt x="987660" y="2562607"/>
+                  </a:lnTo>
+                  <a:lnTo>
+                    <a:pt x="1058207" y="2559740"/>
+                  </a:lnTo>
+                  <a:lnTo>
+                    <a:pt x="1128754" y="2556860"/>
+                  </a:lnTo>
+                  <a:lnTo>
+                    <a:pt x="1199301" y="2553969"/>
+                  </a:lnTo>
+                  <a:lnTo>
+                    <a:pt x="1269849" y="2551065"/>
+                  </a:lnTo>
+                  <a:lnTo>
+                    <a:pt x="1340396" y="2548150"/>
+                  </a:lnTo>
+                  <a:lnTo>
+                    <a:pt x="1410943" y="2545222"/>
+                  </a:lnTo>
+                  <a:lnTo>
+                    <a:pt x="1481490" y="2542282"/>
+                  </a:lnTo>
+                  <a:lnTo>
+                    <a:pt x="1552037" y="2539330"/>
+                  </a:lnTo>
+                  <a:lnTo>
+                    <a:pt x="1622584" y="2536365"/>
+                  </a:lnTo>
+                  <a:lnTo>
+                    <a:pt x="1693132" y="2533388"/>
+                  </a:lnTo>
+                  <a:lnTo>
+                    <a:pt x="1763679" y="2530398"/>
+                  </a:lnTo>
+                  <a:lnTo>
+                    <a:pt x="1834226" y="2527397"/>
+                  </a:lnTo>
+                  <a:lnTo>
+                    <a:pt x="1904773" y="2524382"/>
+                  </a:lnTo>
+                  <a:lnTo>
+                    <a:pt x="1975320" y="2521355"/>
+                  </a:lnTo>
+                  <a:lnTo>
+                    <a:pt x="2045868" y="2518315"/>
+                  </a:lnTo>
+                  <a:lnTo>
+                    <a:pt x="2116415" y="2515263"/>
+                  </a:lnTo>
+                  <a:lnTo>
+                    <a:pt x="2186962" y="2512198"/>
+                  </a:lnTo>
+                  <a:lnTo>
+                    <a:pt x="2257509" y="2509120"/>
+                  </a:lnTo>
+                  <a:lnTo>
+                    <a:pt x="2328056" y="2506029"/>
+                  </a:lnTo>
+                  <a:lnTo>
+                    <a:pt x="2398603" y="2502926"/>
+                  </a:lnTo>
+                  <a:lnTo>
+                    <a:pt x="2469151" y="2499809"/>
+                  </a:lnTo>
+                  <a:lnTo>
+                    <a:pt x="2539698" y="2496679"/>
+                  </a:lnTo>
+                  <a:lnTo>
+                    <a:pt x="2610245" y="2493537"/>
+                  </a:lnTo>
+                  <a:lnTo>
+                    <a:pt x="2680792" y="2490381"/>
+                  </a:lnTo>
+                  <a:lnTo>
+                    <a:pt x="2751339" y="2487212"/>
+                  </a:lnTo>
+                  <a:lnTo>
+                    <a:pt x="2821886" y="2484030"/>
+                  </a:lnTo>
+                  <a:lnTo>
+                    <a:pt x="2892434" y="2480834"/>
+                  </a:lnTo>
+                  <a:lnTo>
+                    <a:pt x="2962981" y="2477625"/>
+                  </a:lnTo>
+                  <a:lnTo>
+                    <a:pt x="3033528" y="2454370"/>
+                  </a:lnTo>
+                  <a:lnTo>
+                    <a:pt x="3104075" y="2400293"/>
+                  </a:lnTo>
+                  <a:lnTo>
+                    <a:pt x="3174622" y="2342538"/>
+                  </a:lnTo>
+                  <a:lnTo>
+                    <a:pt x="3245169" y="2280854"/>
+                  </a:lnTo>
+                  <a:lnTo>
+                    <a:pt x="3315717" y="2214975"/>
+                  </a:lnTo>
+                  <a:lnTo>
+                    <a:pt x="3386264" y="2144614"/>
+                  </a:lnTo>
+                  <a:lnTo>
+                    <a:pt x="3456811" y="2069468"/>
+                  </a:lnTo>
+                  <a:lnTo>
+                    <a:pt x="3527358" y="1989211"/>
+                  </a:lnTo>
+                  <a:lnTo>
+                    <a:pt x="3597905" y="1903494"/>
+                  </a:lnTo>
+                  <a:lnTo>
+                    <a:pt x="3668452" y="1811948"/>
+                  </a:lnTo>
+                  <a:lnTo>
+                    <a:pt x="3739000" y="1714174"/>
+                  </a:lnTo>
+                  <a:lnTo>
+                    <a:pt x="3809547" y="1609750"/>
+                  </a:lnTo>
+                  <a:lnTo>
+                    <a:pt x="3880094" y="1498223"/>
+                  </a:lnTo>
+                  <a:lnTo>
+                    <a:pt x="3950641" y="1379111"/>
+                  </a:lnTo>
+                  <a:lnTo>
+                    <a:pt x="4021188" y="1251896"/>
+                  </a:lnTo>
+                  <a:lnTo>
+                    <a:pt x="4091736" y="1116029"/>
+                  </a:lnTo>
+                  <a:lnTo>
+                    <a:pt x="4162283" y="970920"/>
+                  </a:lnTo>
+                  <a:lnTo>
+                    <a:pt x="4232830" y="815941"/>
+                  </a:lnTo>
+                  <a:lnTo>
+                    <a:pt x="4303377" y="650421"/>
+                  </a:lnTo>
+                  <a:lnTo>
+                    <a:pt x="4373924" y="473642"/>
+                  </a:lnTo>
+                  <a:lnTo>
+                    <a:pt x="4444471" y="284840"/>
+                  </a:lnTo>
+                  <a:lnTo>
+                    <a:pt x="4515019" y="83195"/>
+                  </a:lnTo>
+                  <a:lnTo>
+                    <a:pt x="4542271" y="0"/>
+                  </a:lnTo>
+                  <a:lnTo>
+                    <a:pt x="6984170" y="0"/>
+                  </a:lnTo>
+                  <a:lnTo>
+                    <a:pt x="6984170" y="2270747"/>
+                  </a:lnTo>
+                  <a:lnTo>
+                    <a:pt x="6913622" y="2274816"/>
+                  </a:lnTo>
+                  <a:lnTo>
+                    <a:pt x="6843075" y="2278868"/>
+                  </a:lnTo>
+                  <a:lnTo>
+                    <a:pt x="6772528" y="2282903"/>
+                  </a:lnTo>
+                  <a:lnTo>
+                    <a:pt x="6701981" y="2286921"/>
+                  </a:lnTo>
+                  <a:lnTo>
+                    <a:pt x="6631434" y="2290923"/>
+                  </a:lnTo>
+                  <a:lnTo>
+                    <a:pt x="6560887" y="2294908"/>
+                  </a:lnTo>
+                  <a:lnTo>
+                    <a:pt x="6490339" y="2298877"/>
+                  </a:lnTo>
+                  <a:lnTo>
+                    <a:pt x="6419792" y="2302829"/>
+                  </a:lnTo>
+                  <a:lnTo>
+                    <a:pt x="6349245" y="2306764"/>
+                  </a:lnTo>
+                  <a:lnTo>
+                    <a:pt x="6278698" y="2310684"/>
+                  </a:lnTo>
+                  <a:lnTo>
+                    <a:pt x="6208151" y="2314586"/>
+                  </a:lnTo>
+                  <a:lnTo>
+                    <a:pt x="6137604" y="2318473"/>
+                  </a:lnTo>
+                  <a:lnTo>
+                    <a:pt x="6067056" y="2322344"/>
+                  </a:lnTo>
+                  <a:lnTo>
+                    <a:pt x="5996509" y="2326198"/>
+                  </a:lnTo>
+                  <a:lnTo>
+                    <a:pt x="5925962" y="2330037"/>
+                  </a:lnTo>
+                  <a:lnTo>
+                    <a:pt x="5855415" y="2333859"/>
+                  </a:lnTo>
+                  <a:lnTo>
+                    <a:pt x="5784868" y="2337666"/>
+                  </a:lnTo>
+                  <a:lnTo>
+                    <a:pt x="5714320" y="2341456"/>
+                  </a:lnTo>
+                  <a:lnTo>
+                    <a:pt x="5643773" y="2345231"/>
+                  </a:lnTo>
+                  <a:lnTo>
+                    <a:pt x="5573226" y="2348991"/>
+                  </a:lnTo>
+                  <a:lnTo>
+                    <a:pt x="5502679" y="2352734"/>
+                  </a:lnTo>
+                  <a:lnTo>
+                    <a:pt x="5432132" y="2356462"/>
+                  </a:lnTo>
+                  <a:lnTo>
+                    <a:pt x="5361585" y="2360175"/>
+                  </a:lnTo>
+                  <a:lnTo>
+                    <a:pt x="5291037" y="2363872"/>
+                  </a:lnTo>
+                  <a:lnTo>
+                    <a:pt x="5220490" y="2367554"/>
+                  </a:lnTo>
+                  <a:lnTo>
+                    <a:pt x="5149943" y="2371220"/>
+                  </a:lnTo>
+                  <a:lnTo>
+                    <a:pt x="5079396" y="2374872"/>
+                  </a:lnTo>
+                  <a:lnTo>
+                    <a:pt x="5008849" y="2378508"/>
+                  </a:lnTo>
+                  <a:lnTo>
+                    <a:pt x="4938302" y="2382129"/>
+                  </a:lnTo>
+                  <a:lnTo>
+                    <a:pt x="4867754" y="2385735"/>
+                  </a:lnTo>
+                  <a:lnTo>
+                    <a:pt x="4797207" y="2389325"/>
+                  </a:lnTo>
+                  <a:lnTo>
+                    <a:pt x="4726660" y="2392901"/>
+                  </a:lnTo>
+                  <a:lnTo>
+                    <a:pt x="4656113" y="2396463"/>
+                  </a:lnTo>
+                  <a:lnTo>
+                    <a:pt x="4585566" y="2400009"/>
+                  </a:lnTo>
+                  <a:lnTo>
+                    <a:pt x="4515019" y="2403540"/>
+                  </a:lnTo>
+                  <a:lnTo>
+                    <a:pt x="4444471" y="2407057"/>
+                  </a:lnTo>
+                  <a:lnTo>
+                    <a:pt x="4373924" y="2410559"/>
+                  </a:lnTo>
+                  <a:lnTo>
+                    <a:pt x="4303377" y="2414047"/>
+                  </a:lnTo>
+                  <a:lnTo>
+                    <a:pt x="4232830" y="2417520"/>
+                  </a:lnTo>
+                  <a:lnTo>
+                    <a:pt x="4162283" y="2420979"/>
+                  </a:lnTo>
+                  <a:lnTo>
+                    <a:pt x="4091736" y="2424423"/>
+                  </a:lnTo>
+                  <a:lnTo>
+                    <a:pt x="4021188" y="2427853"/>
+                  </a:lnTo>
+                  <a:lnTo>
+                    <a:pt x="3950641" y="2431269"/>
+                  </a:lnTo>
+                  <a:lnTo>
+                    <a:pt x="3880094" y="2434671"/>
+                  </a:lnTo>
+                  <a:lnTo>
+                    <a:pt x="3809547" y="2438058"/>
+                  </a:lnTo>
+                  <a:lnTo>
+                    <a:pt x="3739000" y="2441432"/>
+                  </a:lnTo>
+                  <a:lnTo>
+                    <a:pt x="3668452" y="2444791"/>
+                  </a:lnTo>
+                  <a:lnTo>
+                    <a:pt x="3597905" y="2448136"/>
+                  </a:lnTo>
+                  <a:lnTo>
+                    <a:pt x="3527358" y="2451468"/>
+                  </a:lnTo>
+                  <a:lnTo>
+                    <a:pt x="3456811" y="2454785"/>
+                  </a:lnTo>
+                  <a:lnTo>
+                    <a:pt x="3386264" y="2458089"/>
+                  </a:lnTo>
+                  <a:lnTo>
+                    <a:pt x="3315717" y="2461379"/>
+                  </a:lnTo>
+                  <a:lnTo>
+                    <a:pt x="3245169" y="2464656"/>
+                  </a:lnTo>
+                  <a:lnTo>
+                    <a:pt x="3174622" y="2467918"/>
+                  </a:lnTo>
+                  <a:lnTo>
+                    <a:pt x="3104075" y="2471168"/>
+                  </a:lnTo>
+                  <a:lnTo>
+                    <a:pt x="3033528" y="2474403"/>
+                  </a:lnTo>
+                  <a:lnTo>
+                    <a:pt x="2962981" y="2505003"/>
+                  </a:lnTo>
+                  <a:lnTo>
+                    <a:pt x="2892434" y="2552412"/>
+                  </a:lnTo>
+                  <a:lnTo>
+                    <a:pt x="2821886" y="2596801"/>
+                  </a:lnTo>
+                  <a:lnTo>
+                    <a:pt x="2751339" y="2638363"/>
+                  </a:lnTo>
+                  <a:lnTo>
+                    <a:pt x="2680792" y="2677278"/>
+                  </a:lnTo>
+                  <a:lnTo>
+                    <a:pt x="2610245" y="2713715"/>
+                  </a:lnTo>
+                  <a:lnTo>
+                    <a:pt x="2539698" y="2747832"/>
+                  </a:lnTo>
+                  <a:lnTo>
+                    <a:pt x="2469151" y="2779775"/>
+                  </a:lnTo>
+                  <a:lnTo>
+                    <a:pt x="2398603" y="2809684"/>
+                  </a:lnTo>
+                  <a:lnTo>
+                    <a:pt x="2328056" y="2837689"/>
+                  </a:lnTo>
+                  <a:lnTo>
+                    <a:pt x="2257509" y="2863910"/>
+                  </a:lnTo>
+                  <a:lnTo>
+                    <a:pt x="2186962" y="2888461"/>
+                  </a:lnTo>
+                  <a:lnTo>
+                    <a:pt x="2116415" y="2911448"/>
+                  </a:lnTo>
+                  <a:lnTo>
+                    <a:pt x="2045868" y="2932972"/>
+                  </a:lnTo>
+                  <a:lnTo>
+                    <a:pt x="1975320" y="2953124"/>
+                  </a:lnTo>
+                  <a:lnTo>
+                    <a:pt x="1904773" y="2971994"/>
+                  </a:lnTo>
+                  <a:lnTo>
+                    <a:pt x="1834226" y="2989661"/>
+                  </a:lnTo>
+                  <a:lnTo>
+                    <a:pt x="1763679" y="3006203"/>
+                  </a:lnTo>
+                  <a:lnTo>
+                    <a:pt x="1693132" y="3021692"/>
+                  </a:lnTo>
+                  <a:lnTo>
+                    <a:pt x="1622584" y="3036195"/>
+                  </a:lnTo>
+                  <a:lnTo>
+                    <a:pt x="1552037" y="3049773"/>
+                  </a:lnTo>
+                  <a:lnTo>
+                    <a:pt x="1481490" y="3062487"/>
+                  </a:lnTo>
+                  <a:lnTo>
+                    <a:pt x="1410943" y="3074392"/>
+                  </a:lnTo>
+                  <a:lnTo>
+                    <a:pt x="1340396" y="3085538"/>
+                  </a:lnTo>
+                  <a:lnTo>
+                    <a:pt x="1269849" y="3095974"/>
+                  </a:lnTo>
+                  <a:lnTo>
+                    <a:pt x="1199301" y="3105746"/>
+                  </a:lnTo>
+                  <a:lnTo>
+                    <a:pt x="1128754" y="3114895"/>
+                  </a:lnTo>
+                  <a:lnTo>
+                    <a:pt x="1058207" y="3123462"/>
+                  </a:lnTo>
+                  <a:lnTo>
+                    <a:pt x="987660" y="3131483"/>
+                  </a:lnTo>
+                  <a:lnTo>
+                    <a:pt x="917113" y="3138993"/>
+                  </a:lnTo>
+                  <a:lnTo>
+                    <a:pt x="846566" y="3146025"/>
+                  </a:lnTo>
+                  <a:lnTo>
+                    <a:pt x="776018" y="3152609"/>
+                  </a:lnTo>
+                  <a:lnTo>
+                    <a:pt x="705471" y="3158774"/>
+                  </a:lnTo>
+                  <a:lnTo>
+                    <a:pt x="634924" y="3164546"/>
+                  </a:lnTo>
+                  <a:lnTo>
+                    <a:pt x="564377" y="3169950"/>
+                  </a:lnTo>
+                  <a:lnTo>
+                    <a:pt x="493830" y="3175011"/>
+                  </a:lnTo>
+                  <a:lnTo>
+                    <a:pt x="423283" y="3179749"/>
+                  </a:lnTo>
+                  <a:lnTo>
+                    <a:pt x="352735" y="3184185"/>
+                  </a:lnTo>
+                  <a:lnTo>
+                    <a:pt x="282188" y="3188339"/>
+                  </a:lnTo>
+                  <a:lnTo>
+                    <a:pt x="211641" y="3192228"/>
+                  </a:lnTo>
+                  <a:lnTo>
+                    <a:pt x="141094" y="3195870"/>
+                  </a:lnTo>
+                  <a:lnTo>
+                    <a:pt x="70547" y="3199279"/>
+                  </a:lnTo>
+                  <a:lnTo>
+                    <a:pt x="0" y="3202472"/>
                   </a:lnTo>
                   <a:close/>
                 </a:path>
@@ -3663,210 +3663,210 @@
           </p:nvSpPr>
           <p:spPr>
             <a:xfrm>
-              <a:off x="1172049" y="2073503"/>
-              <a:ext cx="4611509" cy="2789137"/>
+              <a:off x="1264853" y="2209169"/>
+              <a:ext cx="4542271" cy="2601522"/>
             </a:xfrm>
             <a:custGeom>
               <a:avLst/>
               <a:pathLst>
-                <a:path w="4611509" h="2789137">
+                <a:path w="4542271" h="2601522">
                   <a:moveTo>
-                    <a:pt x="0" y="2789137"/>
+                    <a:pt x="0" y="2601522"/>
                   </a:moveTo>
                   <a:lnTo>
-                    <a:pt x="71622" y="2786236"/>
-                  </a:lnTo>
-                  <a:lnTo>
-                    <a:pt x="143245" y="2783324"/>
-                  </a:lnTo>
-                  <a:lnTo>
-                    <a:pt x="214867" y="2780400"/>
-                  </a:lnTo>
-                  <a:lnTo>
-                    <a:pt x="286490" y="2777464"/>
-                  </a:lnTo>
-                  <a:lnTo>
-                    <a:pt x="358112" y="2774515"/>
-                  </a:lnTo>
-                  <a:lnTo>
-                    <a:pt x="429735" y="2771554"/>
-                  </a:lnTo>
-                  <a:lnTo>
-                    <a:pt x="501357" y="2768580"/>
-                  </a:lnTo>
-                  <a:lnTo>
-                    <a:pt x="572980" y="2765594"/>
-                  </a:lnTo>
-                  <a:lnTo>
-                    <a:pt x="644602" y="2762596"/>
-                  </a:lnTo>
-                  <a:lnTo>
-                    <a:pt x="716225" y="2759585"/>
-                  </a:lnTo>
-                  <a:lnTo>
-                    <a:pt x="787847" y="2756562"/>
-                  </a:lnTo>
-                  <a:lnTo>
-                    <a:pt x="859470" y="2753526"/>
-                  </a:lnTo>
-                  <a:lnTo>
-                    <a:pt x="931092" y="2750477"/>
-                  </a:lnTo>
-                  <a:lnTo>
-                    <a:pt x="1002715" y="2747416"/>
-                  </a:lnTo>
-                  <a:lnTo>
-                    <a:pt x="1074337" y="2744341"/>
-                  </a:lnTo>
-                  <a:lnTo>
-                    <a:pt x="1145960" y="2741254"/>
-                  </a:lnTo>
-                  <a:lnTo>
-                    <a:pt x="1217582" y="2738154"/>
-                  </a:lnTo>
-                  <a:lnTo>
-                    <a:pt x="1289205" y="2735041"/>
-                  </a:lnTo>
-                  <a:lnTo>
-                    <a:pt x="1360827" y="2731916"/>
-                  </a:lnTo>
-                  <a:lnTo>
-                    <a:pt x="1432450" y="2728777"/>
-                  </a:lnTo>
-                  <a:lnTo>
-                    <a:pt x="1504073" y="2725625"/>
-                  </a:lnTo>
-                  <a:lnTo>
-                    <a:pt x="1575695" y="2722459"/>
-                  </a:lnTo>
-                  <a:lnTo>
-                    <a:pt x="1647318" y="2719281"/>
-                  </a:lnTo>
-                  <a:lnTo>
-                    <a:pt x="1718940" y="2716089"/>
-                  </a:lnTo>
-                  <a:lnTo>
-                    <a:pt x="1790563" y="2712884"/>
-                  </a:lnTo>
-                  <a:lnTo>
-                    <a:pt x="1862185" y="2709666"/>
-                  </a:lnTo>
-                  <a:lnTo>
-                    <a:pt x="1933808" y="2706434"/>
-                  </a:lnTo>
-                  <a:lnTo>
-                    <a:pt x="2005430" y="2703189"/>
-                  </a:lnTo>
-                  <a:lnTo>
-                    <a:pt x="2077053" y="2699930"/>
-                  </a:lnTo>
-                  <a:lnTo>
-                    <a:pt x="2148675" y="2696657"/>
-                  </a:lnTo>
-                  <a:lnTo>
-                    <a:pt x="2220298" y="2693371"/>
-                  </a:lnTo>
-                  <a:lnTo>
-                    <a:pt x="2291920" y="2690071"/>
-                  </a:lnTo>
-                  <a:lnTo>
-                    <a:pt x="2363543" y="2686758"/>
-                  </a:lnTo>
-                  <a:lnTo>
-                    <a:pt x="2435165" y="2683430"/>
-                  </a:lnTo>
-                  <a:lnTo>
-                    <a:pt x="2506788" y="2680089"/>
-                  </a:lnTo>
-                  <a:lnTo>
-                    <a:pt x="2578410" y="2676734"/>
-                  </a:lnTo>
-                  <a:lnTo>
-                    <a:pt x="2650033" y="2673364"/>
-                  </a:lnTo>
-                  <a:lnTo>
-                    <a:pt x="2721655" y="2669981"/>
-                  </a:lnTo>
-                  <a:lnTo>
-                    <a:pt x="2793278" y="2666583"/>
-                  </a:lnTo>
-                  <a:lnTo>
-                    <a:pt x="2864901" y="2663172"/>
-                  </a:lnTo>
-                  <a:lnTo>
-                    <a:pt x="2936523" y="2659746"/>
-                  </a:lnTo>
-                  <a:lnTo>
-                    <a:pt x="3008146" y="2656305"/>
-                  </a:lnTo>
-                  <a:lnTo>
-                    <a:pt x="3079768" y="2631373"/>
-                  </a:lnTo>
-                  <a:lnTo>
-                    <a:pt x="3151391" y="2573396"/>
-                  </a:lnTo>
-                  <a:lnTo>
-                    <a:pt x="3223013" y="2511476"/>
-                  </a:lnTo>
-                  <a:lnTo>
-                    <a:pt x="3294636" y="2445343"/>
-                  </a:lnTo>
-                  <a:lnTo>
-                    <a:pt x="3366258" y="2374713"/>
-                  </a:lnTo>
-                  <a:lnTo>
-                    <a:pt x="3437881" y="2299278"/>
-                  </a:lnTo>
-                  <a:lnTo>
-                    <a:pt x="3509503" y="2218713"/>
-                  </a:lnTo>
-                  <a:lnTo>
-                    <a:pt x="3581126" y="2132667"/>
-                  </a:lnTo>
-                  <a:lnTo>
-                    <a:pt x="3652748" y="2040769"/>
-                  </a:lnTo>
-                  <a:lnTo>
-                    <a:pt x="3724371" y="1942620"/>
-                  </a:lnTo>
-                  <a:lnTo>
-                    <a:pt x="3795993" y="1837796"/>
-                  </a:lnTo>
-                  <a:lnTo>
-                    <a:pt x="3867616" y="1725841"/>
-                  </a:lnTo>
-                  <a:lnTo>
-                    <a:pt x="3939238" y="1606271"/>
-                  </a:lnTo>
-                  <a:lnTo>
-                    <a:pt x="4010861" y="1478569"/>
-                  </a:lnTo>
-                  <a:lnTo>
-                    <a:pt x="4082483" y="1342180"/>
-                  </a:lnTo>
-                  <a:lnTo>
-                    <a:pt x="4154106" y="1196514"/>
-                  </a:lnTo>
-                  <a:lnTo>
-                    <a:pt x="4225729" y="1040940"/>
-                  </a:lnTo>
-                  <a:lnTo>
-                    <a:pt x="4297351" y="874785"/>
-                  </a:lnTo>
-                  <a:lnTo>
-                    <a:pt x="4368974" y="697328"/>
-                  </a:lnTo>
-                  <a:lnTo>
-                    <a:pt x="4440596" y="507800"/>
-                  </a:lnTo>
-                  <a:lnTo>
-                    <a:pt x="4512219" y="305382"/>
-                  </a:lnTo>
-                  <a:lnTo>
-                    <a:pt x="4583841" y="89195"/>
-                  </a:lnTo>
-                  <a:lnTo>
-                    <a:pt x="4611509" y="0"/>
+                    <a:pt x="70547" y="2598817"/>
+                  </a:lnTo>
+                  <a:lnTo>
+                    <a:pt x="141094" y="2596100"/>
+                  </a:lnTo>
+                  <a:lnTo>
+                    <a:pt x="211641" y="2593373"/>
+                  </a:lnTo>
+                  <a:lnTo>
+                    <a:pt x="282188" y="2590634"/>
+                  </a:lnTo>
+                  <a:lnTo>
+                    <a:pt x="352735" y="2587883"/>
+                  </a:lnTo>
+                  <a:lnTo>
+                    <a:pt x="423283" y="2585121"/>
+                  </a:lnTo>
+                  <a:lnTo>
+                    <a:pt x="493830" y="2582348"/>
+                  </a:lnTo>
+                  <a:lnTo>
+                    <a:pt x="564377" y="2579563"/>
+                  </a:lnTo>
+                  <a:lnTo>
+                    <a:pt x="634924" y="2576766"/>
+                  </a:lnTo>
+                  <a:lnTo>
+                    <a:pt x="705471" y="2573958"/>
+                  </a:lnTo>
+                  <a:lnTo>
+                    <a:pt x="776018" y="2571138"/>
+                  </a:lnTo>
+                  <a:lnTo>
+                    <a:pt x="846566" y="2568306"/>
+                  </a:lnTo>
+                  <a:lnTo>
+                    <a:pt x="917113" y="2565462"/>
+                  </a:lnTo>
+                  <a:lnTo>
+                    <a:pt x="987660" y="2562607"/>
+                  </a:lnTo>
+                  <a:lnTo>
+                    <a:pt x="1058207" y="2559740"/>
+                  </a:lnTo>
+                  <a:lnTo>
+                    <a:pt x="1128754" y="2556860"/>
+                  </a:lnTo>
+                  <a:lnTo>
+                    <a:pt x="1199301" y="2553969"/>
+                  </a:lnTo>
+                  <a:lnTo>
+                    <a:pt x="1269849" y="2551065"/>
+                  </a:lnTo>
+                  <a:lnTo>
+                    <a:pt x="1340396" y="2548150"/>
+                  </a:lnTo>
+                  <a:lnTo>
+                    <a:pt x="1410943" y="2545222"/>
+                  </a:lnTo>
+                  <a:lnTo>
+                    <a:pt x="1481490" y="2542282"/>
+                  </a:lnTo>
+                  <a:lnTo>
+                    <a:pt x="1552037" y="2539330"/>
+                  </a:lnTo>
+                  <a:lnTo>
+                    <a:pt x="1622584" y="2536365"/>
+                  </a:lnTo>
+                  <a:lnTo>
+                    <a:pt x="1693132" y="2533388"/>
+                  </a:lnTo>
+                  <a:lnTo>
+                    <a:pt x="1763679" y="2530398"/>
+                  </a:lnTo>
+                  <a:lnTo>
+                    <a:pt x="1834226" y="2527397"/>
+                  </a:lnTo>
+                  <a:lnTo>
+                    <a:pt x="1904773" y="2524382"/>
+                  </a:lnTo>
+                  <a:lnTo>
+                    <a:pt x="1975320" y="2521355"/>
+                  </a:lnTo>
+                  <a:lnTo>
+                    <a:pt x="2045868" y="2518315"/>
+                  </a:lnTo>
+                  <a:lnTo>
+                    <a:pt x="2116415" y="2515263"/>
+                  </a:lnTo>
+                  <a:lnTo>
+                    <a:pt x="2186962" y="2512198"/>
+                  </a:lnTo>
+                  <a:lnTo>
+                    <a:pt x="2257509" y="2509120"/>
+                  </a:lnTo>
+                  <a:lnTo>
+                    <a:pt x="2328056" y="2506029"/>
+                  </a:lnTo>
+                  <a:lnTo>
+                    <a:pt x="2398603" y="2502926"/>
+                  </a:lnTo>
+                  <a:lnTo>
+                    <a:pt x="2469151" y="2499809"/>
+                  </a:lnTo>
+                  <a:lnTo>
+                    <a:pt x="2539698" y="2496679"/>
+                  </a:lnTo>
+                  <a:lnTo>
+                    <a:pt x="2610245" y="2493537"/>
+                  </a:lnTo>
+                  <a:lnTo>
+                    <a:pt x="2680792" y="2490381"/>
+                  </a:lnTo>
+                  <a:lnTo>
+                    <a:pt x="2751339" y="2487212"/>
+                  </a:lnTo>
+                  <a:lnTo>
+                    <a:pt x="2821886" y="2484030"/>
+                  </a:lnTo>
+                  <a:lnTo>
+                    <a:pt x="2892434" y="2480834"/>
+                  </a:lnTo>
+                  <a:lnTo>
+                    <a:pt x="2962981" y="2477625"/>
+                  </a:lnTo>
+                  <a:lnTo>
+                    <a:pt x="3033528" y="2454370"/>
+                  </a:lnTo>
+                  <a:lnTo>
+                    <a:pt x="3104075" y="2400293"/>
+                  </a:lnTo>
+                  <a:lnTo>
+                    <a:pt x="3174622" y="2342538"/>
+                  </a:lnTo>
+                  <a:lnTo>
+                    <a:pt x="3245169" y="2280854"/>
+                  </a:lnTo>
+                  <a:lnTo>
+                    <a:pt x="3315717" y="2214975"/>
+                  </a:lnTo>
+                  <a:lnTo>
+                    <a:pt x="3386264" y="2144614"/>
+                  </a:lnTo>
+                  <a:lnTo>
+                    <a:pt x="3456811" y="2069468"/>
+                  </a:lnTo>
+                  <a:lnTo>
+                    <a:pt x="3527358" y="1989211"/>
+                  </a:lnTo>
+                  <a:lnTo>
+                    <a:pt x="3597905" y="1903494"/>
+                  </a:lnTo>
+                  <a:lnTo>
+                    <a:pt x="3668452" y="1811948"/>
+                  </a:lnTo>
+                  <a:lnTo>
+                    <a:pt x="3739000" y="1714174"/>
+                  </a:lnTo>
+                  <a:lnTo>
+                    <a:pt x="3809547" y="1609750"/>
+                  </a:lnTo>
+                  <a:lnTo>
+                    <a:pt x="3880094" y="1498223"/>
+                  </a:lnTo>
+                  <a:lnTo>
+                    <a:pt x="3950641" y="1379111"/>
+                  </a:lnTo>
+                  <a:lnTo>
+                    <a:pt x="4021188" y="1251896"/>
+                  </a:lnTo>
+                  <a:lnTo>
+                    <a:pt x="4091736" y="1116029"/>
+                  </a:lnTo>
+                  <a:lnTo>
+                    <a:pt x="4162283" y="970920"/>
+                  </a:lnTo>
+                  <a:lnTo>
+                    <a:pt x="4232830" y="815941"/>
+                  </a:lnTo>
+                  <a:lnTo>
+                    <a:pt x="4303377" y="650421"/>
+                  </a:lnTo>
+                  <a:lnTo>
+                    <a:pt x="4373924" y="473642"/>
+                  </a:lnTo>
+                  <a:lnTo>
+                    <a:pt x="4444471" y="284840"/>
+                  </a:lnTo>
+                  <a:lnTo>
+                    <a:pt x="4515019" y="83195"/>
+                  </a:lnTo>
+                  <a:lnTo>
+                    <a:pt x="4542271" y="0"/>
                   </a:lnTo>
                 </a:path>
               </a:pathLst>
@@ -3886,312 +3886,312 @@
           </p:nvSpPr>
           <p:spPr>
             <a:xfrm>
-              <a:off x="1172049" y="4508010"/>
-              <a:ext cx="7090630" cy="998918"/>
+              <a:off x="1264853" y="4479916"/>
+              <a:ext cx="6984170" cy="931725"/>
             </a:xfrm>
             <a:custGeom>
               <a:avLst/>
               <a:pathLst>
-                <a:path w="7090630" h="998918">
+                <a:path w="6984170" h="931725">
                   <a:moveTo>
-                    <a:pt x="7090630" y="0"/>
+                    <a:pt x="6984170" y="0"/>
                   </a:moveTo>
                   <a:lnTo>
-                    <a:pt x="7019007" y="4362"/>
-                  </a:lnTo>
-                  <a:lnTo>
-                    <a:pt x="6947385" y="8706"/>
-                  </a:lnTo>
-                  <a:lnTo>
-                    <a:pt x="6875762" y="13032"/>
-                  </a:lnTo>
-                  <a:lnTo>
-                    <a:pt x="6804139" y="17341"/>
-                  </a:lnTo>
-                  <a:lnTo>
-                    <a:pt x="6732517" y="21631"/>
-                  </a:lnTo>
-                  <a:lnTo>
-                    <a:pt x="6660894" y="25903"/>
-                  </a:lnTo>
-                  <a:lnTo>
-                    <a:pt x="6589272" y="30158"/>
-                  </a:lnTo>
-                  <a:lnTo>
-                    <a:pt x="6517649" y="34395"/>
-                  </a:lnTo>
-                  <a:lnTo>
-                    <a:pt x="6446027" y="38615"/>
-                  </a:lnTo>
-                  <a:lnTo>
-                    <a:pt x="6374404" y="42817"/>
-                  </a:lnTo>
-                  <a:lnTo>
-                    <a:pt x="6302782" y="47001"/>
-                  </a:lnTo>
-                  <a:lnTo>
-                    <a:pt x="6231159" y="51168"/>
-                  </a:lnTo>
-                  <a:lnTo>
-                    <a:pt x="6159537" y="55318"/>
-                  </a:lnTo>
-                  <a:lnTo>
-                    <a:pt x="6087914" y="59450"/>
-                  </a:lnTo>
-                  <a:lnTo>
-                    <a:pt x="6016292" y="63565"/>
-                  </a:lnTo>
-                  <a:lnTo>
-                    <a:pt x="5944669" y="67663"/>
-                  </a:lnTo>
-                  <a:lnTo>
-                    <a:pt x="5873047" y="71745"/>
-                  </a:lnTo>
-                  <a:lnTo>
-                    <a:pt x="5801424" y="75809"/>
-                  </a:lnTo>
-                  <a:lnTo>
-                    <a:pt x="5729802" y="79856"/>
-                  </a:lnTo>
-                  <a:lnTo>
-                    <a:pt x="5658179" y="83886"/>
-                  </a:lnTo>
-                  <a:lnTo>
-                    <a:pt x="5586557" y="87900"/>
-                  </a:lnTo>
-                  <a:lnTo>
-                    <a:pt x="5514934" y="91897"/>
-                  </a:lnTo>
-                  <a:lnTo>
-                    <a:pt x="5443311" y="95877"/>
-                  </a:lnTo>
-                  <a:lnTo>
-                    <a:pt x="5371689" y="99841"/>
-                  </a:lnTo>
-                  <a:lnTo>
-                    <a:pt x="5300066" y="103788"/>
-                  </a:lnTo>
-                  <a:lnTo>
-                    <a:pt x="5228444" y="107719"/>
-                  </a:lnTo>
-                  <a:lnTo>
-                    <a:pt x="5156821" y="111634"/>
-                  </a:lnTo>
-                  <a:lnTo>
-                    <a:pt x="5085199" y="115532"/>
-                  </a:lnTo>
-                  <a:lnTo>
-                    <a:pt x="5013576" y="119414"/>
-                  </a:lnTo>
-                  <a:lnTo>
-                    <a:pt x="4941954" y="123280"/>
-                  </a:lnTo>
-                  <a:lnTo>
-                    <a:pt x="4870331" y="127130"/>
-                  </a:lnTo>
-                  <a:lnTo>
-                    <a:pt x="4798709" y="130964"/>
-                  </a:lnTo>
-                  <a:lnTo>
-                    <a:pt x="4727086" y="134782"/>
-                  </a:lnTo>
-                  <a:lnTo>
-                    <a:pt x="4655464" y="138584"/>
-                  </a:lnTo>
-                  <a:lnTo>
-                    <a:pt x="4583841" y="142370"/>
-                  </a:lnTo>
-                  <a:lnTo>
-                    <a:pt x="4512219" y="146140"/>
-                  </a:lnTo>
-                  <a:lnTo>
-                    <a:pt x="4440596" y="149895"/>
-                  </a:lnTo>
-                  <a:lnTo>
-                    <a:pt x="4368974" y="153634"/>
-                  </a:lnTo>
-                  <a:lnTo>
-                    <a:pt x="4297351" y="157358"/>
-                  </a:lnTo>
-                  <a:lnTo>
-                    <a:pt x="4225729" y="161066"/>
-                  </a:lnTo>
-                  <a:lnTo>
-                    <a:pt x="4154106" y="164759"/>
-                  </a:lnTo>
-                  <a:lnTo>
-                    <a:pt x="4082483" y="168436"/>
-                  </a:lnTo>
-                  <a:lnTo>
-                    <a:pt x="4010861" y="172099"/>
-                  </a:lnTo>
-                  <a:lnTo>
-                    <a:pt x="3939238" y="175745"/>
-                  </a:lnTo>
-                  <a:lnTo>
-                    <a:pt x="3867616" y="179377"/>
-                  </a:lnTo>
-                  <a:lnTo>
-                    <a:pt x="3795993" y="182994"/>
-                  </a:lnTo>
-                  <a:lnTo>
-                    <a:pt x="3724371" y="186595"/>
-                  </a:lnTo>
-                  <a:lnTo>
-                    <a:pt x="3652748" y="190182"/>
-                  </a:lnTo>
-                  <a:lnTo>
-                    <a:pt x="3581126" y="193754"/>
-                  </a:lnTo>
-                  <a:lnTo>
-                    <a:pt x="3509503" y="197311"/>
-                  </a:lnTo>
-                  <a:lnTo>
-                    <a:pt x="3437881" y="200853"/>
-                  </a:lnTo>
-                  <a:lnTo>
-                    <a:pt x="3366258" y="204380"/>
-                  </a:lnTo>
-                  <a:lnTo>
-                    <a:pt x="3294636" y="207893"/>
-                  </a:lnTo>
-                  <a:lnTo>
-                    <a:pt x="3223013" y="211391"/>
-                  </a:lnTo>
-                  <a:lnTo>
-                    <a:pt x="3151391" y="214874"/>
-                  </a:lnTo>
-                  <a:lnTo>
-                    <a:pt x="3079768" y="218343"/>
-                  </a:lnTo>
-                  <a:lnTo>
-                    <a:pt x="3008146" y="251150"/>
-                  </a:lnTo>
-                  <a:lnTo>
-                    <a:pt x="2936523" y="301978"/>
-                  </a:lnTo>
-                  <a:lnTo>
-                    <a:pt x="2864901" y="349568"/>
-                  </a:lnTo>
-                  <a:lnTo>
-                    <a:pt x="2793278" y="394128"/>
-                  </a:lnTo>
-                  <a:lnTo>
-                    <a:pt x="2721655" y="435849"/>
-                  </a:lnTo>
-                  <a:lnTo>
-                    <a:pt x="2650033" y="474914"/>
-                  </a:lnTo>
-                  <a:lnTo>
-                    <a:pt x="2578410" y="511491"/>
-                  </a:lnTo>
-                  <a:lnTo>
-                    <a:pt x="2506788" y="545738"/>
-                  </a:lnTo>
-                  <a:lnTo>
-                    <a:pt x="2435165" y="577804"/>
-                  </a:lnTo>
-                  <a:lnTo>
-                    <a:pt x="2363543" y="607828"/>
-                  </a:lnTo>
-                  <a:lnTo>
-                    <a:pt x="2291920" y="635940"/>
-                  </a:lnTo>
-                  <a:lnTo>
-                    <a:pt x="2220298" y="662262"/>
-                  </a:lnTo>
-                  <a:lnTo>
-                    <a:pt x="2148675" y="686907"/>
-                  </a:lnTo>
-                  <a:lnTo>
-                    <a:pt x="2077053" y="709982"/>
-                  </a:lnTo>
-                  <a:lnTo>
-                    <a:pt x="2005430" y="731588"/>
-                  </a:lnTo>
-                  <a:lnTo>
-                    <a:pt x="1933808" y="751818"/>
-                  </a:lnTo>
-                  <a:lnTo>
-                    <a:pt x="1862185" y="770760"/>
-                  </a:lnTo>
-                  <a:lnTo>
-                    <a:pt x="1790563" y="788495"/>
-                  </a:lnTo>
-                  <a:lnTo>
-                    <a:pt x="1718940" y="805101"/>
-                  </a:lnTo>
-                  <a:lnTo>
-                    <a:pt x="1647318" y="820650"/>
-                  </a:lnTo>
-                  <a:lnTo>
-                    <a:pt x="1575695" y="835208"/>
-                  </a:lnTo>
-                  <a:lnTo>
-                    <a:pt x="1504073" y="848838"/>
-                  </a:lnTo>
-                  <a:lnTo>
-                    <a:pt x="1432450" y="861601"/>
-                  </a:lnTo>
-                  <a:lnTo>
-                    <a:pt x="1360827" y="873551"/>
-                  </a:lnTo>
-                  <a:lnTo>
-                    <a:pt x="1289205" y="884740"/>
-                  </a:lnTo>
-                  <a:lnTo>
-                    <a:pt x="1217582" y="895216"/>
-                  </a:lnTo>
-                  <a:lnTo>
-                    <a:pt x="1145960" y="905026"/>
-                  </a:lnTo>
-                  <a:lnTo>
-                    <a:pt x="1074337" y="914210"/>
-                  </a:lnTo>
-                  <a:lnTo>
-                    <a:pt x="1002715" y="922810"/>
-                  </a:lnTo>
-                  <a:lnTo>
-                    <a:pt x="931092" y="930861"/>
-                  </a:lnTo>
-                  <a:lnTo>
-                    <a:pt x="859470" y="938400"/>
-                  </a:lnTo>
-                  <a:lnTo>
-                    <a:pt x="787847" y="945459"/>
-                  </a:lnTo>
-                  <a:lnTo>
-                    <a:pt x="716225" y="952069"/>
-                  </a:lnTo>
-                  <a:lnTo>
-                    <a:pt x="644602" y="958257"/>
-                  </a:lnTo>
-                  <a:lnTo>
-                    <a:pt x="572980" y="964051"/>
-                  </a:lnTo>
-                  <a:lnTo>
-                    <a:pt x="501357" y="969477"/>
-                  </a:lnTo>
-                  <a:lnTo>
-                    <a:pt x="429735" y="974556"/>
-                  </a:lnTo>
-                  <a:lnTo>
-                    <a:pt x="358112" y="979313"/>
-                  </a:lnTo>
-                  <a:lnTo>
-                    <a:pt x="286490" y="983766"/>
-                  </a:lnTo>
-                  <a:lnTo>
-                    <a:pt x="214867" y="987936"/>
-                  </a:lnTo>
-                  <a:lnTo>
-                    <a:pt x="143245" y="991840"/>
-                  </a:lnTo>
-                  <a:lnTo>
-                    <a:pt x="71622" y="995496"/>
-                  </a:lnTo>
-                  <a:lnTo>
-                    <a:pt x="0" y="998918"/>
+                    <a:pt x="6913622" y="4068"/>
+                  </a:lnTo>
+                  <a:lnTo>
+                    <a:pt x="6843075" y="8121"/>
+                  </a:lnTo>
+                  <a:lnTo>
+                    <a:pt x="6772528" y="12156"/>
+                  </a:lnTo>
+                  <a:lnTo>
+                    <a:pt x="6701981" y="16174"/>
+                  </a:lnTo>
+                  <a:lnTo>
+                    <a:pt x="6631434" y="20176"/>
+                  </a:lnTo>
+                  <a:lnTo>
+                    <a:pt x="6560887" y="24161"/>
+                  </a:lnTo>
+                  <a:lnTo>
+                    <a:pt x="6490339" y="28130"/>
+                  </a:lnTo>
+                  <a:lnTo>
+                    <a:pt x="6419792" y="32082"/>
+                  </a:lnTo>
+                  <a:lnTo>
+                    <a:pt x="6349245" y="36017"/>
+                  </a:lnTo>
+                  <a:lnTo>
+                    <a:pt x="6278698" y="39936"/>
+                  </a:lnTo>
+                  <a:lnTo>
+                    <a:pt x="6208151" y="43839"/>
+                  </a:lnTo>
+                  <a:lnTo>
+                    <a:pt x="6137604" y="47726"/>
+                  </a:lnTo>
+                  <a:lnTo>
+                    <a:pt x="6067056" y="51597"/>
+                  </a:lnTo>
+                  <a:lnTo>
+                    <a:pt x="5996509" y="55451"/>
+                  </a:lnTo>
+                  <a:lnTo>
+                    <a:pt x="5925962" y="59289"/>
+                  </a:lnTo>
+                  <a:lnTo>
+                    <a:pt x="5855415" y="63112"/>
+                  </a:lnTo>
+                  <a:lnTo>
+                    <a:pt x="5784868" y="66918"/>
+                  </a:lnTo>
+                  <a:lnTo>
+                    <a:pt x="5714320" y="70709"/>
+                  </a:lnTo>
+                  <a:lnTo>
+                    <a:pt x="5643773" y="74484"/>
+                  </a:lnTo>
+                  <a:lnTo>
+                    <a:pt x="5573226" y="78244"/>
+                  </a:lnTo>
+                  <a:lnTo>
+                    <a:pt x="5502679" y="81987"/>
+                  </a:lnTo>
+                  <a:lnTo>
+                    <a:pt x="5432132" y="85715"/>
+                  </a:lnTo>
+                  <a:lnTo>
+                    <a:pt x="5361585" y="89428"/>
+                  </a:lnTo>
+                  <a:lnTo>
+                    <a:pt x="5291037" y="93125"/>
+                  </a:lnTo>
+                  <a:lnTo>
+                    <a:pt x="5220490" y="96807"/>
+                  </a:lnTo>
+                  <a:lnTo>
+                    <a:pt x="5149943" y="100473"/>
+                  </a:lnTo>
+                  <a:lnTo>
+                    <a:pt x="5079396" y="104125"/>
+                  </a:lnTo>
+                  <a:lnTo>
+                    <a:pt x="5008849" y="107761"/>
+                  </a:lnTo>
+                  <a:lnTo>
+                    <a:pt x="4938302" y="111382"/>
+                  </a:lnTo>
+                  <a:lnTo>
+                    <a:pt x="4867754" y="114987"/>
+                  </a:lnTo>
+                  <a:lnTo>
+                    <a:pt x="4797207" y="118578"/>
+                  </a:lnTo>
+                  <a:lnTo>
+                    <a:pt x="4726660" y="122154"/>
+                  </a:lnTo>
+                  <a:lnTo>
+                    <a:pt x="4656113" y="125715"/>
+                  </a:lnTo>
+                  <a:lnTo>
+                    <a:pt x="4585566" y="129262"/>
+                  </a:lnTo>
+                  <a:lnTo>
+                    <a:pt x="4515019" y="132793"/>
+                  </a:lnTo>
+                  <a:lnTo>
+                    <a:pt x="4444471" y="136310"/>
+                  </a:lnTo>
+                  <a:lnTo>
+                    <a:pt x="4373924" y="139812"/>
+                  </a:lnTo>
+                  <a:lnTo>
+                    <a:pt x="4303377" y="143300"/>
+                  </a:lnTo>
+                  <a:lnTo>
+                    <a:pt x="4232830" y="146773"/>
+                  </a:lnTo>
+                  <a:lnTo>
+                    <a:pt x="4162283" y="150232"/>
+                  </a:lnTo>
+                  <a:lnTo>
+                    <a:pt x="4091736" y="153676"/>
+                  </a:lnTo>
+                  <a:lnTo>
+                    <a:pt x="4021188" y="157106"/>
+                  </a:lnTo>
+                  <a:lnTo>
+                    <a:pt x="3950641" y="160522"/>
+                  </a:lnTo>
+                  <a:lnTo>
+                    <a:pt x="3880094" y="163924"/>
+                  </a:lnTo>
+                  <a:lnTo>
+                    <a:pt x="3809547" y="167311"/>
+                  </a:lnTo>
+                  <a:lnTo>
+                    <a:pt x="3739000" y="170684"/>
+                  </a:lnTo>
+                  <a:lnTo>
+                    <a:pt x="3668452" y="174044"/>
+                  </a:lnTo>
+                  <a:lnTo>
+                    <a:pt x="3597905" y="177389"/>
+                  </a:lnTo>
+                  <a:lnTo>
+                    <a:pt x="3527358" y="180721"/>
+                  </a:lnTo>
+                  <a:lnTo>
+                    <a:pt x="3456811" y="184038"/>
+                  </a:lnTo>
+                  <a:lnTo>
+                    <a:pt x="3386264" y="187342"/>
+                  </a:lnTo>
+                  <a:lnTo>
+                    <a:pt x="3315717" y="190632"/>
+                  </a:lnTo>
+                  <a:lnTo>
+                    <a:pt x="3245169" y="193908"/>
+                  </a:lnTo>
+                  <a:lnTo>
+                    <a:pt x="3174622" y="197171"/>
+                  </a:lnTo>
+                  <a:lnTo>
+                    <a:pt x="3104075" y="200420"/>
+                  </a:lnTo>
+                  <a:lnTo>
+                    <a:pt x="3033528" y="203656"/>
+                  </a:lnTo>
+                  <a:lnTo>
+                    <a:pt x="2962981" y="234256"/>
+                  </a:lnTo>
+                  <a:lnTo>
+                    <a:pt x="2892434" y="281665"/>
+                  </a:lnTo>
+                  <a:lnTo>
+                    <a:pt x="2821886" y="326054"/>
+                  </a:lnTo>
+                  <a:lnTo>
+                    <a:pt x="2751339" y="367616"/>
+                  </a:lnTo>
+                  <a:lnTo>
+                    <a:pt x="2680792" y="406531"/>
+                  </a:lnTo>
+                  <a:lnTo>
+                    <a:pt x="2610245" y="442968"/>
+                  </a:lnTo>
+                  <a:lnTo>
+                    <a:pt x="2539698" y="477084"/>
+                  </a:lnTo>
+                  <a:lnTo>
+                    <a:pt x="2469151" y="509028"/>
+                  </a:lnTo>
+                  <a:lnTo>
+                    <a:pt x="2398603" y="538937"/>
+                  </a:lnTo>
+                  <a:lnTo>
+                    <a:pt x="2328056" y="566942"/>
+                  </a:lnTo>
+                  <a:lnTo>
+                    <a:pt x="2257509" y="593163"/>
+                  </a:lnTo>
+                  <a:lnTo>
+                    <a:pt x="2186962" y="617714"/>
+                  </a:lnTo>
+                  <a:lnTo>
+                    <a:pt x="2116415" y="640701"/>
+                  </a:lnTo>
+                  <a:lnTo>
+                    <a:pt x="2045868" y="662224"/>
+                  </a:lnTo>
+                  <a:lnTo>
+                    <a:pt x="1975320" y="682377"/>
+                  </a:lnTo>
+                  <a:lnTo>
+                    <a:pt x="1904773" y="701246"/>
+                  </a:lnTo>
+                  <a:lnTo>
+                    <a:pt x="1834226" y="718914"/>
+                  </a:lnTo>
+                  <a:lnTo>
+                    <a:pt x="1763679" y="735456"/>
+                  </a:lnTo>
+                  <a:lnTo>
+                    <a:pt x="1693132" y="750945"/>
+                  </a:lnTo>
+                  <a:lnTo>
+                    <a:pt x="1622584" y="765447"/>
+                  </a:lnTo>
+                  <a:lnTo>
+                    <a:pt x="1552037" y="779026"/>
+                  </a:lnTo>
+                  <a:lnTo>
+                    <a:pt x="1481490" y="791740"/>
+                  </a:lnTo>
+                  <a:lnTo>
+                    <a:pt x="1410943" y="803644"/>
+                  </a:lnTo>
+                  <a:lnTo>
+                    <a:pt x="1340396" y="814791"/>
+                  </a:lnTo>
+                  <a:lnTo>
+                    <a:pt x="1269849" y="825227"/>
+                  </a:lnTo>
+                  <a:lnTo>
+                    <a:pt x="1199301" y="834999"/>
+                  </a:lnTo>
+                  <a:lnTo>
+                    <a:pt x="1128754" y="844148"/>
+                  </a:lnTo>
+                  <a:lnTo>
+                    <a:pt x="1058207" y="852714"/>
+                  </a:lnTo>
+                  <a:lnTo>
+                    <a:pt x="987660" y="860736"/>
+                  </a:lnTo>
+                  <a:lnTo>
+                    <a:pt x="917113" y="868246"/>
+                  </a:lnTo>
+                  <a:lnTo>
+                    <a:pt x="846566" y="875278"/>
+                  </a:lnTo>
+                  <a:lnTo>
+                    <a:pt x="776018" y="881862"/>
+                  </a:lnTo>
+                  <a:lnTo>
+                    <a:pt x="705471" y="888026"/>
+                  </a:lnTo>
+                  <a:lnTo>
+                    <a:pt x="634924" y="893799"/>
+                  </a:lnTo>
+                  <a:lnTo>
+                    <a:pt x="564377" y="899203"/>
+                  </a:lnTo>
+                  <a:lnTo>
+                    <a:pt x="493830" y="904264"/>
+                  </a:lnTo>
+                  <a:lnTo>
+                    <a:pt x="423283" y="909002"/>
+                  </a:lnTo>
+                  <a:lnTo>
+                    <a:pt x="352735" y="913438"/>
+                  </a:lnTo>
+                  <a:lnTo>
+                    <a:pt x="282188" y="917592"/>
+                  </a:lnTo>
+                  <a:lnTo>
+                    <a:pt x="211641" y="921481"/>
+                  </a:lnTo>
+                  <a:lnTo>
+                    <a:pt x="141094" y="925123"/>
+                  </a:lnTo>
+                  <a:lnTo>
+                    <a:pt x="70547" y="928532"/>
+                  </a:lnTo>
+                  <a:lnTo>
+                    <a:pt x="0" y="931725"/>
                   </a:lnTo>
                 </a:path>
               </a:pathLst>
@@ -4211,267 +4211,267 @@
           </p:nvSpPr>
           <p:spPr>
             <a:xfrm>
-              <a:off x="1172049" y="2073503"/>
-              <a:ext cx="5987718" cy="3296789"/>
+              <a:off x="1264853" y="2209169"/>
+              <a:ext cx="5897817" cy="3075026"/>
             </a:xfrm>
             <a:custGeom>
               <a:avLst/>
               <a:pathLst>
-                <a:path w="5987718" h="3296789">
+                <a:path w="5897817" h="3075026">
                   <a:moveTo>
-                    <a:pt x="0" y="3296789"/>
+                    <a:pt x="0" y="3075026"/>
                   </a:moveTo>
                   <a:lnTo>
-                    <a:pt x="71622" y="3290132"/>
-                  </a:lnTo>
-                  <a:lnTo>
-                    <a:pt x="143245" y="3283238"/>
-                  </a:lnTo>
-                  <a:lnTo>
-                    <a:pt x="214867" y="3276099"/>
-                  </a:lnTo>
-                  <a:lnTo>
-                    <a:pt x="286490" y="3268706"/>
-                  </a:lnTo>
-                  <a:lnTo>
-                    <a:pt x="358112" y="3261050"/>
-                  </a:lnTo>
-                  <a:lnTo>
-                    <a:pt x="429735" y="3253121"/>
-                  </a:lnTo>
-                  <a:lnTo>
-                    <a:pt x="501357" y="3244909"/>
-                  </a:lnTo>
-                  <a:lnTo>
-                    <a:pt x="572980" y="3236405"/>
-                  </a:lnTo>
-                  <a:lnTo>
-                    <a:pt x="644602" y="3227599"/>
-                  </a:lnTo>
-                  <a:lnTo>
-                    <a:pt x="716225" y="3218479"/>
-                  </a:lnTo>
-                  <a:lnTo>
-                    <a:pt x="787847" y="3209034"/>
-                  </a:lnTo>
-                  <a:lnTo>
-                    <a:pt x="859470" y="3199253"/>
-                  </a:lnTo>
-                  <a:lnTo>
-                    <a:pt x="931092" y="3189124"/>
-                  </a:lnTo>
-                  <a:lnTo>
-                    <a:pt x="1002715" y="3178634"/>
-                  </a:lnTo>
-                  <a:lnTo>
-                    <a:pt x="1074337" y="3167770"/>
-                  </a:lnTo>
-                  <a:lnTo>
-                    <a:pt x="1145960" y="3156520"/>
-                  </a:lnTo>
-                  <a:lnTo>
-                    <a:pt x="1217582" y="3144869"/>
-                  </a:lnTo>
-                  <a:lnTo>
-                    <a:pt x="1289205" y="3132803"/>
-                  </a:lnTo>
-                  <a:lnTo>
-                    <a:pt x="1360827" y="3120308"/>
-                  </a:lnTo>
-                  <a:lnTo>
-                    <a:pt x="1432450" y="3107368"/>
-                  </a:lnTo>
-                  <a:lnTo>
-                    <a:pt x="1504073" y="3093967"/>
-                  </a:lnTo>
-                  <a:lnTo>
-                    <a:pt x="1575695" y="3080089"/>
-                  </a:lnTo>
-                  <a:lnTo>
-                    <a:pt x="1647318" y="3065717"/>
-                  </a:lnTo>
-                  <a:lnTo>
-                    <a:pt x="1718940" y="3050833"/>
-                  </a:lnTo>
-                  <a:lnTo>
-                    <a:pt x="1790563" y="3035419"/>
-                  </a:lnTo>
-                  <a:lnTo>
-                    <a:pt x="1862185" y="3019457"/>
-                  </a:lnTo>
-                  <a:lnTo>
-                    <a:pt x="1933808" y="3002926"/>
-                  </a:lnTo>
-                  <a:lnTo>
-                    <a:pt x="2005430" y="2985806"/>
-                  </a:lnTo>
-                  <a:lnTo>
-                    <a:pt x="2077053" y="2968077"/>
-                  </a:lnTo>
-                  <a:lnTo>
-                    <a:pt x="2148675" y="2949717"/>
-                  </a:lnTo>
-                  <a:lnTo>
-                    <a:pt x="2220298" y="2930703"/>
-                  </a:lnTo>
-                  <a:lnTo>
-                    <a:pt x="2291920" y="2911012"/>
-                  </a:lnTo>
-                  <a:lnTo>
-                    <a:pt x="2363543" y="2890620"/>
-                  </a:lnTo>
-                  <a:lnTo>
-                    <a:pt x="2435165" y="2869501"/>
-                  </a:lnTo>
-                  <a:lnTo>
-                    <a:pt x="2506788" y="2847631"/>
-                  </a:lnTo>
-                  <a:lnTo>
-                    <a:pt x="2578410" y="2824983"/>
-                  </a:lnTo>
-                  <a:lnTo>
-                    <a:pt x="2650033" y="2801527"/>
-                  </a:lnTo>
-                  <a:lnTo>
-                    <a:pt x="2721655" y="2777237"/>
-                  </a:lnTo>
-                  <a:lnTo>
-                    <a:pt x="2793278" y="2752082"/>
-                  </a:lnTo>
-                  <a:lnTo>
-                    <a:pt x="2864901" y="2726031"/>
-                  </a:lnTo>
-                  <a:lnTo>
-                    <a:pt x="2936523" y="2699053"/>
-                  </a:lnTo>
-                  <a:lnTo>
-                    <a:pt x="3008146" y="2671114"/>
-                  </a:lnTo>
-                  <a:lnTo>
-                    <a:pt x="3079768" y="2642180"/>
-                  </a:lnTo>
-                  <a:lnTo>
-                    <a:pt x="3151391" y="2612217"/>
-                  </a:lnTo>
-                  <a:lnTo>
-                    <a:pt x="3223013" y="2581186"/>
-                  </a:lnTo>
-                  <a:lnTo>
-                    <a:pt x="3294636" y="2549050"/>
-                  </a:lnTo>
-                  <a:lnTo>
-                    <a:pt x="3366258" y="2515771"/>
-                  </a:lnTo>
-                  <a:lnTo>
-                    <a:pt x="3437881" y="2481306"/>
-                  </a:lnTo>
-                  <a:lnTo>
-                    <a:pt x="3509503" y="2445614"/>
-                  </a:lnTo>
-                  <a:lnTo>
-                    <a:pt x="3581126" y="2408652"/>
-                  </a:lnTo>
-                  <a:lnTo>
-                    <a:pt x="3652748" y="2370373"/>
-                  </a:lnTo>
-                  <a:lnTo>
-                    <a:pt x="3724371" y="2330732"/>
-                  </a:lnTo>
-                  <a:lnTo>
-                    <a:pt x="3795993" y="2289679"/>
-                  </a:lnTo>
-                  <a:lnTo>
-                    <a:pt x="3867616" y="2247165"/>
-                  </a:lnTo>
-                  <a:lnTo>
-                    <a:pt x="3939238" y="2203136"/>
-                  </a:lnTo>
-                  <a:lnTo>
-                    <a:pt x="4010861" y="2157540"/>
-                  </a:lnTo>
-                  <a:lnTo>
-                    <a:pt x="4082483" y="2110321"/>
-                  </a:lnTo>
-                  <a:lnTo>
-                    <a:pt x="4154106" y="2061421"/>
-                  </a:lnTo>
-                  <a:lnTo>
-                    <a:pt x="4225729" y="2010779"/>
-                  </a:lnTo>
-                  <a:lnTo>
-                    <a:pt x="4297351" y="1958334"/>
-                  </a:lnTo>
-                  <a:lnTo>
-                    <a:pt x="4368974" y="1904022"/>
-                  </a:lnTo>
-                  <a:lnTo>
-                    <a:pt x="4440596" y="1847776"/>
-                  </a:lnTo>
-                  <a:lnTo>
-                    <a:pt x="4512219" y="1789528"/>
-                  </a:lnTo>
-                  <a:lnTo>
-                    <a:pt x="4583841" y="1729206"/>
-                  </a:lnTo>
-                  <a:lnTo>
-                    <a:pt x="4655464" y="1666735"/>
-                  </a:lnTo>
-                  <a:lnTo>
-                    <a:pt x="4727086" y="1602041"/>
-                  </a:lnTo>
-                  <a:lnTo>
-                    <a:pt x="4798709" y="1535043"/>
-                  </a:lnTo>
-                  <a:lnTo>
-                    <a:pt x="4870331" y="1465660"/>
-                  </a:lnTo>
-                  <a:lnTo>
-                    <a:pt x="4941954" y="1393807"/>
-                  </a:lnTo>
-                  <a:lnTo>
-                    <a:pt x="5013576" y="1319395"/>
-                  </a:lnTo>
-                  <a:lnTo>
-                    <a:pt x="5085199" y="1242333"/>
-                  </a:lnTo>
-                  <a:lnTo>
-                    <a:pt x="5156821" y="1162528"/>
-                  </a:lnTo>
-                  <a:lnTo>
-                    <a:pt x="5228444" y="1079882"/>
-                  </a:lnTo>
-                  <a:lnTo>
-                    <a:pt x="5300066" y="994292"/>
-                  </a:lnTo>
-                  <a:lnTo>
-                    <a:pt x="5371689" y="905656"/>
-                  </a:lnTo>
-                  <a:lnTo>
-                    <a:pt x="5443311" y="813863"/>
-                  </a:lnTo>
-                  <a:lnTo>
-                    <a:pt x="5514934" y="718803"/>
-                  </a:lnTo>
-                  <a:lnTo>
-                    <a:pt x="5586557" y="620357"/>
-                  </a:lnTo>
-                  <a:lnTo>
-                    <a:pt x="5658179" y="518407"/>
-                  </a:lnTo>
-                  <a:lnTo>
-                    <a:pt x="5729802" y="412827"/>
-                  </a:lnTo>
-                  <a:lnTo>
-                    <a:pt x="5801424" y="303487"/>
-                  </a:lnTo>
-                  <a:lnTo>
-                    <a:pt x="5873047" y="190255"/>
-                  </a:lnTo>
-                  <a:lnTo>
-                    <a:pt x="5944669" y="72990"/>
-                  </a:lnTo>
-                  <a:lnTo>
-                    <a:pt x="5987718" y="0"/>
+                    <a:pt x="70547" y="3068817"/>
+                  </a:lnTo>
+                  <a:lnTo>
+                    <a:pt x="141094" y="3062387"/>
+                  </a:lnTo>
+                  <a:lnTo>
+                    <a:pt x="211641" y="3055728"/>
+                  </a:lnTo>
+                  <a:lnTo>
+                    <a:pt x="282188" y="3048832"/>
+                  </a:lnTo>
+                  <a:lnTo>
+                    <a:pt x="352735" y="3041691"/>
+                  </a:lnTo>
+                  <a:lnTo>
+                    <a:pt x="423283" y="3034295"/>
+                  </a:lnTo>
+                  <a:lnTo>
+                    <a:pt x="493830" y="3026636"/>
+                  </a:lnTo>
+                  <a:lnTo>
+                    <a:pt x="564377" y="3018704"/>
+                  </a:lnTo>
+                  <a:lnTo>
+                    <a:pt x="634924" y="3010490"/>
+                  </a:lnTo>
+                  <a:lnTo>
+                    <a:pt x="705471" y="3001984"/>
+                  </a:lnTo>
+                  <a:lnTo>
+                    <a:pt x="776018" y="2993174"/>
+                  </a:lnTo>
+                  <a:lnTo>
+                    <a:pt x="846566" y="2984051"/>
+                  </a:lnTo>
+                  <a:lnTo>
+                    <a:pt x="917113" y="2974603"/>
+                  </a:lnTo>
+                  <a:lnTo>
+                    <a:pt x="987660" y="2964819"/>
+                  </a:lnTo>
+                  <a:lnTo>
+                    <a:pt x="1058207" y="2954686"/>
+                  </a:lnTo>
+                  <a:lnTo>
+                    <a:pt x="1128754" y="2944192"/>
+                  </a:lnTo>
+                  <a:lnTo>
+                    <a:pt x="1199301" y="2933325"/>
+                  </a:lnTo>
+                  <a:lnTo>
+                    <a:pt x="1269849" y="2922071"/>
+                  </a:lnTo>
+                  <a:lnTo>
+                    <a:pt x="1340396" y="2910416"/>
+                  </a:lnTo>
+                  <a:lnTo>
+                    <a:pt x="1410943" y="2898347"/>
+                  </a:lnTo>
+                  <a:lnTo>
+                    <a:pt x="1481490" y="2885847"/>
+                  </a:lnTo>
+                  <a:lnTo>
+                    <a:pt x="1552037" y="2872903"/>
+                  </a:lnTo>
+                  <a:lnTo>
+                    <a:pt x="1622584" y="2859497"/>
+                  </a:lnTo>
+                  <a:lnTo>
+                    <a:pt x="1693132" y="2845615"/>
+                  </a:lnTo>
+                  <a:lnTo>
+                    <a:pt x="1763679" y="2831238"/>
+                  </a:lnTo>
+                  <a:lnTo>
+                    <a:pt x="1834226" y="2816349"/>
+                  </a:lnTo>
+                  <a:lnTo>
+                    <a:pt x="1904773" y="2800930"/>
+                  </a:lnTo>
+                  <a:lnTo>
+                    <a:pt x="1975320" y="2784962"/>
+                  </a:lnTo>
+                  <a:lnTo>
+                    <a:pt x="2045868" y="2768425"/>
+                  </a:lnTo>
+                  <a:lnTo>
+                    <a:pt x="2116415" y="2751300"/>
+                  </a:lnTo>
+                  <a:lnTo>
+                    <a:pt x="2186962" y="2733565"/>
+                  </a:lnTo>
+                  <a:lnTo>
+                    <a:pt x="2257509" y="2715199"/>
+                  </a:lnTo>
+                  <a:lnTo>
+                    <a:pt x="2328056" y="2696178"/>
+                  </a:lnTo>
+                  <a:lnTo>
+                    <a:pt x="2398603" y="2676481"/>
+                  </a:lnTo>
+                  <a:lnTo>
+                    <a:pt x="2469151" y="2656082"/>
+                  </a:lnTo>
+                  <a:lnTo>
+                    <a:pt x="2539698" y="2634956"/>
+                  </a:lnTo>
+                  <a:lnTo>
+                    <a:pt x="2610245" y="2613079"/>
+                  </a:lnTo>
+                  <a:lnTo>
+                    <a:pt x="2680792" y="2590423"/>
+                  </a:lnTo>
+                  <a:lnTo>
+                    <a:pt x="2751339" y="2566960"/>
+                  </a:lnTo>
+                  <a:lnTo>
+                    <a:pt x="2821886" y="2542661"/>
+                  </a:lnTo>
+                  <a:lnTo>
+                    <a:pt x="2892434" y="2517498"/>
+                  </a:lnTo>
+                  <a:lnTo>
+                    <a:pt x="2962981" y="2491438"/>
+                  </a:lnTo>
+                  <a:lnTo>
+                    <a:pt x="3033528" y="2464451"/>
+                  </a:lnTo>
+                  <a:lnTo>
+                    <a:pt x="3104075" y="2436502"/>
+                  </a:lnTo>
+                  <a:lnTo>
+                    <a:pt x="3174622" y="2407559"/>
+                  </a:lnTo>
+                  <a:lnTo>
+                    <a:pt x="3245169" y="2377585"/>
+                  </a:lnTo>
+                  <a:lnTo>
+                    <a:pt x="3315717" y="2346544"/>
+                  </a:lnTo>
+                  <a:lnTo>
+                    <a:pt x="3386264" y="2314398"/>
+                  </a:lnTo>
+                  <a:lnTo>
+                    <a:pt x="3456811" y="2281107"/>
+                  </a:lnTo>
+                  <a:lnTo>
+                    <a:pt x="3527358" y="2246631"/>
+                  </a:lnTo>
+                  <a:lnTo>
+                    <a:pt x="3597905" y="2210927"/>
+                  </a:lnTo>
+                  <a:lnTo>
+                    <a:pt x="3668452" y="2173952"/>
+                  </a:lnTo>
+                  <a:lnTo>
+                    <a:pt x="3739000" y="2135661"/>
+                  </a:lnTo>
+                  <a:lnTo>
+                    <a:pt x="3809547" y="2096006"/>
+                  </a:lnTo>
+                  <a:lnTo>
+                    <a:pt x="3880094" y="2054939"/>
+                  </a:lnTo>
+                  <a:lnTo>
+                    <a:pt x="3950641" y="2012411"/>
+                  </a:lnTo>
+                  <a:lnTo>
+                    <a:pt x="4021188" y="1968368"/>
+                  </a:lnTo>
+                  <a:lnTo>
+                    <a:pt x="4091736" y="1922756"/>
+                  </a:lnTo>
+                  <a:lnTo>
+                    <a:pt x="4162283" y="1875521"/>
+                  </a:lnTo>
+                  <a:lnTo>
+                    <a:pt x="4232830" y="1826604"/>
+                  </a:lnTo>
+                  <a:lnTo>
+                    <a:pt x="4303377" y="1775946"/>
+                  </a:lnTo>
+                  <a:lnTo>
+                    <a:pt x="4373924" y="1723483"/>
+                  </a:lnTo>
+                  <a:lnTo>
+                    <a:pt x="4444471" y="1669153"/>
+                  </a:lnTo>
+                  <a:lnTo>
+                    <a:pt x="4515019" y="1612888"/>
+                  </a:lnTo>
+                  <a:lnTo>
+                    <a:pt x="4585566" y="1554620"/>
+                  </a:lnTo>
+                  <a:lnTo>
+                    <a:pt x="4656113" y="1494278"/>
+                  </a:lnTo>
+                  <a:lnTo>
+                    <a:pt x="4726660" y="1431787"/>
+                  </a:lnTo>
+                  <a:lnTo>
+                    <a:pt x="4797207" y="1367071"/>
+                  </a:lnTo>
+                  <a:lnTo>
+                    <a:pt x="4867754" y="1300050"/>
+                  </a:lnTo>
+                  <a:lnTo>
+                    <a:pt x="4938302" y="1230644"/>
+                  </a:lnTo>
+                  <a:lnTo>
+                    <a:pt x="5008849" y="1158766"/>
+                  </a:lnTo>
+                  <a:lnTo>
+                    <a:pt x="5079396" y="1084329"/>
+                  </a:lnTo>
+                  <a:lnTo>
+                    <a:pt x="5149943" y="1007242"/>
+                  </a:lnTo>
+                  <a:lnTo>
+                    <a:pt x="5220490" y="927410"/>
+                  </a:lnTo>
+                  <a:lnTo>
+                    <a:pt x="5291037" y="844736"/>
+                  </a:lnTo>
+                  <a:lnTo>
+                    <a:pt x="5361585" y="759118"/>
+                  </a:lnTo>
+                  <a:lnTo>
+                    <a:pt x="5432132" y="670452"/>
+                  </a:lnTo>
+                  <a:lnTo>
+                    <a:pt x="5502679" y="578628"/>
+                  </a:lnTo>
+                  <a:lnTo>
+                    <a:pt x="5573226" y="483536"/>
+                  </a:lnTo>
+                  <a:lnTo>
+                    <a:pt x="5643773" y="385057"/>
+                  </a:lnTo>
+                  <a:lnTo>
+                    <a:pt x="5714320" y="283073"/>
+                  </a:lnTo>
+                  <a:lnTo>
+                    <a:pt x="5784868" y="177457"/>
+                  </a:lnTo>
+                  <a:lnTo>
+                    <a:pt x="5855415" y="68081"/>
+                  </a:lnTo>
+                  <a:lnTo>
+                    <a:pt x="5897817" y="0"/>
                   </a:lnTo>
                 </a:path>
               </a:pathLst>
@@ -4500,21 +4500,21 @@
           </p:nvSpPr>
           <p:spPr>
             <a:xfrm>
-              <a:off x="817517" y="4727786"/>
-              <a:ext cx="7799693" cy="0"/>
+              <a:off x="915645" y="4684908"/>
+              <a:ext cx="7682587" cy="0"/>
             </a:xfrm>
             <a:custGeom>
               <a:avLst/>
               <a:pathLst>
-                <a:path w="7799693" h="0">
+                <a:path w="7682587" h="0">
                   <a:moveTo>
                     <a:pt x="0" y="0"/>
                   </a:moveTo>
                   <a:lnTo>
-                    <a:pt x="7799693" y="0"/>
-                  </a:lnTo>
-                  <a:lnTo>
-                    <a:pt x="7799693" y="0"/>
+                    <a:pt x="7682587" y="0"/>
+                  </a:lnTo>
+                  <a:lnTo>
+                    <a:pt x="7682587" y="0"/>
                   </a:lnTo>
                 </a:path>
               </a:pathLst>
@@ -4543,15 +4543,15 @@
           </p:nvSpPr>
           <p:spPr>
             <a:xfrm>
-              <a:off x="4222163" y="2073503"/>
-              <a:ext cx="0" cy="3649639"/>
+              <a:off x="4269172" y="2209169"/>
+              <a:ext cx="0" cy="3404141"/>
             </a:xfrm>
             <a:custGeom>
               <a:avLst/>
               <a:pathLst>
-                <a:path w="0" h="3649639">
+                <a:path w="0" h="3404141">
                   <a:moveTo>
-                    <a:pt x="0" y="3649639"/>
+                    <a:pt x="0" y="3404141"/>
                   </a:moveTo>
                   <a:lnTo>
                     <a:pt x="0" y="0"/>
@@ -4586,8 +4586,8 @@
           </p:nvSpPr>
           <p:spPr>
             <a:xfrm>
-              <a:off x="692708" y="5517199"/>
-              <a:ext cx="62179" cy="80101"/>
+              <a:off x="756929" y="5407599"/>
+              <a:ext cx="79004" cy="101955"/>
             </a:xfrm>
             <a:prstGeom prst="rect">
               <a:avLst/>
@@ -4600,7 +4600,7 @@
             <a:p>
               <a:pPr algn="l" marL="0" marR="0" indent="0">
                 <a:lnSpc>
-                  <a:spcPts val="880"/>
+                  <a:spcPts val="1120"/>
                 </a:lnSpc>
                 <a:spcBef>
                   <a:spcPts val="0"/>
@@ -4610,7 +4610,7 @@
                 </a:spcAft>
               </a:pPr>
               <a:r>
-                <a:rPr sz="880">
+                <a:rPr sz="1120">
                   <a:solidFill>
                     <a:srgbClr val="4D4D4D">
                       <a:alpha val="100000"/>
@@ -4632,8 +4632,8 @@
           </p:nvSpPr>
           <p:spPr>
             <a:xfrm>
-              <a:off x="692708" y="4687735"/>
-              <a:ext cx="62179" cy="80101"/>
+              <a:off x="756929" y="4633931"/>
+              <a:ext cx="79004" cy="101955"/>
             </a:xfrm>
             <a:prstGeom prst="rect">
               <a:avLst/>
@@ -4646,7 +4646,7 @@
             <a:p>
               <a:pPr algn="l" marL="0" marR="0" indent="0">
                 <a:lnSpc>
-                  <a:spcPts val="880"/>
+                  <a:spcPts val="1120"/>
                 </a:lnSpc>
                 <a:spcBef>
                   <a:spcPts val="0"/>
@@ -4656,7 +4656,7 @@
                 </a:spcAft>
               </a:pPr>
               <a:r>
-                <a:rPr sz="880">
+                <a:rPr sz="1120">
                   <a:solidFill>
                     <a:srgbClr val="4D4D4D">
                       <a:alpha val="100000"/>
@@ -4678,8 +4678,8 @@
           </p:nvSpPr>
           <p:spPr>
             <a:xfrm>
-              <a:off x="692708" y="3858272"/>
-              <a:ext cx="62179" cy="80101"/>
+              <a:off x="756929" y="3860262"/>
+              <a:ext cx="79004" cy="101955"/>
             </a:xfrm>
             <a:prstGeom prst="rect">
               <a:avLst/>
@@ -4692,7 +4692,7 @@
             <a:p>
               <a:pPr algn="l" marL="0" marR="0" indent="0">
                 <a:lnSpc>
-                  <a:spcPts val="880"/>
+                  <a:spcPts val="1120"/>
                 </a:lnSpc>
                 <a:spcBef>
                   <a:spcPts val="0"/>
@@ -4702,7 +4702,7 @@
                 </a:spcAft>
               </a:pPr>
               <a:r>
-                <a:rPr sz="880">
+                <a:rPr sz="1120">
                   <a:solidFill>
                     <a:srgbClr val="4D4D4D">
                       <a:alpha val="100000"/>
@@ -4724,8 +4724,8 @@
           </p:nvSpPr>
           <p:spPr>
             <a:xfrm>
-              <a:off x="692708" y="3028808"/>
-              <a:ext cx="62179" cy="80101"/>
+              <a:off x="756929" y="3086593"/>
+              <a:ext cx="79004" cy="101955"/>
             </a:xfrm>
             <a:prstGeom prst="rect">
               <a:avLst/>
@@ -4738,7 +4738,7 @@
             <a:p>
               <a:pPr algn="l" marL="0" marR="0" indent="0">
                 <a:lnSpc>
-                  <a:spcPts val="880"/>
+                  <a:spcPts val="1120"/>
                 </a:lnSpc>
                 <a:spcBef>
                   <a:spcPts val="0"/>
@@ -4748,7 +4748,7 @@
                 </a:spcAft>
               </a:pPr>
               <a:r>
-                <a:rPr sz="880">
+                <a:rPr sz="1120">
                   <a:solidFill>
                     <a:srgbClr val="4D4D4D">
                       <a:alpha val="100000"/>
@@ -4770,8 +4770,8 @@
           </p:nvSpPr>
           <p:spPr>
             <a:xfrm>
-              <a:off x="692708" y="2199345"/>
-              <a:ext cx="62179" cy="80101"/>
+              <a:off x="756929" y="2312925"/>
+              <a:ext cx="79004" cy="101955"/>
             </a:xfrm>
             <a:prstGeom prst="rect">
               <a:avLst/>
@@ -4784,7 +4784,7 @@
             <a:p>
               <a:pPr algn="l" marL="0" marR="0" indent="0">
                 <a:lnSpc>
-                  <a:spcPts val="880"/>
+                  <a:spcPts val="1120"/>
                 </a:lnSpc>
                 <a:spcBef>
                   <a:spcPts val="0"/>
@@ -4794,7 +4794,7 @@
                 </a:spcAft>
               </a:pPr>
               <a:r>
-                <a:rPr sz="880">
+                <a:rPr sz="1120">
                   <a:solidFill>
                     <a:srgbClr val="4D4D4D">
                       <a:alpha val="100000"/>
@@ -4816,8 +4816,8 @@
           </p:nvSpPr>
           <p:spPr>
             <a:xfrm>
-              <a:off x="1328653" y="5785772"/>
-              <a:ext cx="223753" cy="80101"/>
+              <a:off x="1387159" y="5693022"/>
+              <a:ext cx="284286" cy="101955"/>
             </a:xfrm>
             <a:prstGeom prst="rect">
               <a:avLst/>
@@ -4830,7 +4830,7 @@
             <a:p>
               <a:pPr algn="l" marL="0" marR="0" indent="0">
                 <a:lnSpc>
-                  <a:spcPts val="880"/>
+                  <a:spcPts val="1120"/>
                 </a:lnSpc>
                 <a:spcBef>
                   <a:spcPts val="0"/>
@@ -4840,7 +4840,7 @@
                 </a:spcAft>
               </a:pPr>
               <a:r>
-                <a:rPr sz="880">
+                <a:rPr sz="1120">
                   <a:solidFill>
                     <a:srgbClr val="4D4D4D">
                       <a:alpha val="100000"/>
@@ -4862,8 +4862,8 @@
           </p:nvSpPr>
           <p:spPr>
             <a:xfrm>
-              <a:off x="2724172" y="5785772"/>
-              <a:ext cx="161574" cy="80101"/>
+              <a:off x="2770605" y="5693022"/>
+              <a:ext cx="205282" cy="101955"/>
             </a:xfrm>
             <a:prstGeom prst="rect">
               <a:avLst/>
@@ -4876,7 +4876,7 @@
             <a:p>
               <a:pPr algn="l" marL="0" marR="0" indent="0">
                 <a:lnSpc>
-                  <a:spcPts val="880"/>
+                  <a:spcPts val="1120"/>
                 </a:lnSpc>
                 <a:spcBef>
                   <a:spcPts val="0"/>
@@ -4886,7 +4886,7 @@
                 </a:spcAft>
               </a:pPr>
               <a:r>
-                <a:rPr sz="880">
+                <a:rPr sz="1120">
                   <a:solidFill>
                     <a:srgbClr val="4D4D4D">
                       <a:alpha val="100000"/>
@@ -4908,8 +4908,8 @@
           </p:nvSpPr>
           <p:spPr>
             <a:xfrm>
-              <a:off x="4138300" y="5785772"/>
-              <a:ext cx="62179" cy="80101"/>
+              <a:off x="4177689" y="5693022"/>
+              <a:ext cx="79004" cy="101955"/>
             </a:xfrm>
             <a:prstGeom prst="rect">
               <a:avLst/>
@@ -4922,7 +4922,7 @@
             <a:p>
               <a:pPr algn="l" marL="0" marR="0" indent="0">
                 <a:lnSpc>
-                  <a:spcPts val="880"/>
+                  <a:spcPts val="1120"/>
                 </a:lnSpc>
                 <a:spcBef>
                   <a:spcPts val="0"/>
@@ -4932,7 +4932,7 @@
                 </a:spcAft>
               </a:pPr>
               <a:r>
-                <a:rPr sz="880">
+                <a:rPr sz="1120">
                   <a:solidFill>
                     <a:srgbClr val="4D4D4D">
                       <a:alpha val="100000"/>
@@ -4954,8 +4954,8 @@
           </p:nvSpPr>
           <p:spPr>
             <a:xfrm>
-              <a:off x="5471640" y="5785772"/>
-              <a:ext cx="124358" cy="80101"/>
+              <a:off x="5482131" y="5693022"/>
+              <a:ext cx="158008" cy="101955"/>
             </a:xfrm>
             <a:prstGeom prst="rect">
               <a:avLst/>
@@ -4968,7 +4968,7 @@
             <a:p>
               <a:pPr algn="l" marL="0" marR="0" indent="0">
                 <a:lnSpc>
-                  <a:spcPts val="880"/>
+                  <a:spcPts val="1120"/>
                 </a:lnSpc>
                 <a:spcBef>
                   <a:spcPts val="0"/>
@@ -4978,7 +4978,7 @@
                 </a:spcAft>
               </a:pPr>
               <a:r>
-                <a:rPr sz="880">
+                <a:rPr sz="1120">
                   <a:solidFill>
                     <a:srgbClr val="4D4D4D">
                       <a:alpha val="100000"/>
@@ -5000,8 +5000,8 @@
           </p:nvSpPr>
           <p:spPr>
             <a:xfrm>
-              <a:off x="6804980" y="5785772"/>
-              <a:ext cx="186537" cy="80101"/>
+              <a:off x="6786573" y="5693022"/>
+              <a:ext cx="237012" cy="101955"/>
             </a:xfrm>
             <a:prstGeom prst="rect">
               <a:avLst/>
@@ -5014,7 +5014,7 @@
             <a:p>
               <a:pPr algn="l" marL="0" marR="0" indent="0">
                 <a:lnSpc>
-                  <a:spcPts val="880"/>
+                  <a:spcPts val="1120"/>
                 </a:lnSpc>
                 <a:spcBef>
                   <a:spcPts val="0"/>
@@ -5024,7 +5024,7 @@
                 </a:spcAft>
               </a:pPr>
               <a:r>
-                <a:rPr sz="880">
+                <a:rPr sz="1120">
                   <a:solidFill>
                     <a:srgbClr val="4D4D4D">
                       <a:alpha val="100000"/>
@@ -5046,8 +5046,8 @@
           </p:nvSpPr>
           <p:spPr>
             <a:xfrm>
-              <a:off x="8169410" y="5785772"/>
-              <a:ext cx="186537" cy="80101"/>
+              <a:off x="8130517" y="5693022"/>
+              <a:ext cx="237012" cy="101955"/>
             </a:xfrm>
             <a:prstGeom prst="rect">
               <a:avLst/>
@@ -5060,7 +5060,7 @@
             <a:p>
               <a:pPr algn="l" marL="0" marR="0" indent="0">
                 <a:lnSpc>
-                  <a:spcPts val="880"/>
+                  <a:spcPts val="1120"/>
                 </a:lnSpc>
                 <a:spcBef>
                   <a:spcPts val="0"/>
@@ -5070,7 +5070,7 @@
                 </a:spcAft>
               </a:pPr>
               <a:r>
-                <a:rPr sz="880">
+                <a:rPr sz="1120">
                   <a:solidFill>
                     <a:srgbClr val="4D4D4D">
                       <a:alpha val="100000"/>
@@ -5092,8 +5092,8 @@
           </p:nvSpPr>
           <p:spPr>
             <a:xfrm>
-              <a:off x="3987536" y="5925448"/>
-              <a:ext cx="1459656" cy="100218"/>
+              <a:off x="3828319" y="5870717"/>
+              <a:ext cx="1857237" cy="127558"/>
             </a:xfrm>
             <a:prstGeom prst="rect">
               <a:avLst/>
@@ -5106,7 +5106,7 @@
             <a:p>
               <a:pPr algn="l" marL="0" marR="0" indent="0">
                 <a:lnSpc>
-                  <a:spcPts val="1100"/>
+                  <a:spcPts val="1400"/>
                 </a:lnSpc>
                 <a:spcBef>
                   <a:spcPts val="0"/>
@@ -5116,7 +5116,7 @@
                 </a:spcAft>
               </a:pPr>
               <a:r>
-                <a:rPr sz="1100">
+                <a:rPr sz="1400">
                   <a:solidFill>
                     <a:srgbClr val="000000">
                       <a:alpha val="100000"/>
@@ -5138,8 +5138,8 @@
           </p:nvSpPr>
           <p:spPr>
             <a:xfrm rot="-5400000">
-              <a:off x="181100" y="3848213"/>
-              <a:ext cx="791596" cy="100218"/>
+              <a:off x="105758" y="3847460"/>
+              <a:ext cx="1007577" cy="127558"/>
             </a:xfrm>
             <a:prstGeom prst="rect">
               <a:avLst/>
@@ -5152,7 +5152,7 @@
             <a:p>
               <a:pPr algn="l" marL="0" marR="0" indent="0">
                 <a:lnSpc>
-                  <a:spcPts val="1100"/>
+                  <a:spcPts val="1400"/>
                 </a:lnSpc>
                 <a:spcBef>
                   <a:spcPts val="0"/>
@@ -5162,7 +5162,7 @@
                 </a:spcAft>
               </a:pPr>
               <a:r>
-                <a:rPr sz="1100">
+                <a:rPr sz="1400">
                   <a:solidFill>
                     <a:srgbClr val="000000">
                       <a:alpha val="100000"/>
@@ -5184,8 +5184,8 @@
           </p:nvSpPr>
           <p:spPr>
             <a:xfrm>
-              <a:off x="817517" y="1896563"/>
-              <a:ext cx="4750765" cy="82021"/>
+              <a:off x="915645" y="1977589"/>
+              <a:ext cx="6336060" cy="109362"/>
             </a:xfrm>
             <a:prstGeom prst="rect">
               <a:avLst/>
@@ -5198,7 +5198,7 @@
             <a:p>
               <a:pPr algn="l" marL="0" marR="0" indent="0">
                 <a:lnSpc>
-                  <a:spcPts val="900"/>
+                  <a:spcPts val="1200"/>
                 </a:lnSpc>
                 <a:spcBef>
                   <a:spcPts val="0"/>
@@ -5208,7 +5208,7 @@
                 </a:spcAft>
               </a:pPr>
               <a:r>
-                <a:rPr sz="900">
+                <a:rPr sz="1200">
                   <a:solidFill>
                     <a:srgbClr val="404040">
                       <a:alpha val="100000"/>
@@ -5230,8 +5230,8 @@
           </p:nvSpPr>
           <p:spPr>
             <a:xfrm>
-              <a:off x="817517" y="1669789"/>
-              <a:ext cx="2783799" cy="120152"/>
+              <a:off x="915645" y="1688767"/>
+              <a:ext cx="3544214" cy="153070"/>
             </a:xfrm>
             <a:prstGeom prst="rect">
               <a:avLst/>
@@ -5244,7 +5244,7 @@
             <a:p>
               <a:pPr algn="l" marL="0" marR="0" indent="0">
                 <a:lnSpc>
-                  <a:spcPts val="1320"/>
+                  <a:spcPts val="1680"/>
                 </a:lnSpc>
                 <a:spcBef>
                   <a:spcPts val="0"/>
@@ -5254,7 +5254,7 @@
                 </a:spcAft>
               </a:pPr>
               <a:r>
-                <a:rPr sz="1320">
+                <a:rPr sz="1680">
                   <a:solidFill>
                     <a:srgbClr val="000000">
                       <a:alpha val="100000"/>
